--- a/day2-deck/decks/MPI & Video Completion - Review.pptx
+++ b/day2-deck/decks/MPI & Video Completion - Review.pptx
@@ -504,7 +504,7 @@
           <a:p>
             <a:r>
               <a:rPr lang="en-US" dirty="0"/>
-              <a:t>Source: Store-reported from each store's MPI tool (MPI_Video_Completion_Jul-Sep_2026.xlsx): CP + warranty ROs closed Jul 1 - Sep 30, 2026, including $0 ROs; % of ROs, not of MPIs. Group = RO-weighted by each store's CP+W ROs (Qlik Closed Repair Orders, 128,726). Tools differ by store; GMC Prescott's report is not filtered to CP+W; Volvo and VW St George did not say. Honda Spokane and Toyota Spokane report the same figure for MPI and video. MPI % = CP+W ROs with a completed technician multi-point inspection / CP+W ROs closed. Benchmark 90% (Roundtable: 90%+ MPI completion). Green at or above the benchmark, red below.Every car, every time: the MPI is where the hours on the opcode slides come from. Cadillac switched to Auto.live during the quarter, so its number may understate the process.</a:t>
+              <a:t>Takeaway (off the slide): 12 of 33 stores at or above the 90.0% benchmark; the group is at 81.3%. LR Reno and VW Henderson lead at 99.0%; Cadillac is lowest at 40.5%.Source: Store-reported from each store's MPI tool (MPI_Video_Completion_Jul-Sep_2026.xlsx): CP + warranty ROs closed Jul 1 - Sep 30, 2026, including $0 ROs; % of ROs, not of MPIs. Group = RO-weighted by each store's CP+W ROs (Qlik Closed Repair Orders, 128,726). Tools differ by store; GMC Prescott's report is not filtered to CP+W; Volvo and VW St George did not say. Honda Spokane and Toyota Spokane report the same figure for MPI and video. MPI % = CP+W ROs with a completed technician multi-point inspection / CP+W ROs closed. Benchmark 90% (Roundtable: 90%+ MPI completion). Green at or above the benchmark, red below.Every car, every time: the MPI is where the hours on the opcode slides come from. Cadillac switched to Auto.live during the quarter, so its number may understate the process.</a:t>
             </a:r>
             <a:endParaRPr lang="en-US" dirty="0"/>
           </a:p>
@@ -592,7 +592,7 @@
           <a:p>
             <a:r>
               <a:rPr lang="en-US" dirty="0"/>
-              <a:t>Source: Store-reported from each store's MPI tool (MPI_Video_Completion_Jul-Sep_2026.xlsx): CP + warranty ROs closed Jul 1 - Sep 30, 2026, including $0 ROs; % of ROs, not of MPIs. Group = RO-weighted by each store's CP+W ROs (Qlik Closed Repair Orders, 128,726). Tools differ by store; GMC Prescott's report is not filtered to CP+W; Volvo and VW St George did not say. Honda Spokane and Toyota Spokane report the same figure for MPI and video. Video % = CP+W ROs with a technician video attached to the MPI / CP+W ROs closed. No benchmark set; scored against the group. Green at or above the group, red below.Video is what turns an inspection into a sale the customer can see. MPI at 80% or more but video under 45%, so the inspection is done and not shown: CDJR Post Falls (81.7% MPI, 16.0% video); Chevy GMC Bullhead (87.6% MPI, 21.8% video); Chevy LV (84.5% MPI, 40.2% video); GMC Prescott (93.2% MPI, 35.1% video); Nissan (97.0% MPI, 41.9% video).</a:t>
+              <a:t>Takeaway (off the slide): 17 of 33 stores at or above the 57.8% group. VW Henderson leads at 96.0%; Kia St George is lowest at 5.2%.Source: Store-reported from each store's MPI tool (MPI_Video_Completion_Jul-Sep_2026.xlsx): CP + warranty ROs closed Jul 1 - Sep 30, 2026, including $0 ROs; % of ROs, not of MPIs. Group = RO-weighted by each store's CP+W ROs (Qlik Closed Repair Orders, 128,726). Tools differ by store; GMC Prescott's report is not filtered to CP+W; Volvo and VW St George did not say. Honda Spokane and Toyota Spokane report the same figure for MPI and video. Video % = CP+W ROs with a technician video attached to the MPI / CP+W ROs closed. No benchmark set; scored against the group. Green at or above the group, red below.Video is what turns an inspection into a sale the customer can see. MPI at 80% or more but video under 45%, so the inspection is done and not shown: CDJR Post Falls (81.7% MPI, 16.0% video); Chevy GMC Bullhead (87.6% MPI, 21.8% video); Chevy LV (84.5% MPI, 40.2% video); GMC Prescott (93.2% MPI, 35.1% video); Nissan (97.0% MPI, 41.9% video).</a:t>
             </a:r>
             <a:endParaRPr lang="en-US" dirty="0"/>
           </a:p>
@@ -680,7 +680,7 @@
           <a:p>
             <a:r>
               <a:rPr lang="en-US" dirty="0"/>
-              <a:t>Source: Store-reported from each store's MPI tool (MPI_Video_Completion_Jul-Sep_2026.xlsx): CP + warranty ROs closed Jul 1 - Sep 30, 2026, including $0 ROs; % of ROs, not of MPIs. Group = RO-weighted by each store's CP+W ROs (Qlik Closed Repair Orders, 128,726). Tools differ by store; GMC Prescott's report is not filtered to CP+W; Volvo and VW St George did not say. Honda Spokane and Toyota Spokane report the same figure for MPI and video. Photo % (optional on the form) = CP+W ROs with at least one technician photo on the MPI / CP+W ROs closed. Scored against the group. Green at or above the group, red below. 5 stores do not report it (N/A or blank).Optional measure: five stores do not report it, so it is a review slide, not a meeting slide.</a:t>
+              <a:t>Takeaway (off the slide): 11 of 28 stores at or above the 45.3% group. Hyundai Prescott leads at 91.2%; Kia St George is lowest at 11.8%.Source: Store-reported from each store's MPI tool (MPI_Video_Completion_Jul-Sep_2026.xlsx): CP + warranty ROs closed Jul 1 - Sep 30, 2026, including $0 ROs; % of ROs, not of MPIs. Group = RO-weighted by each store's CP+W ROs (Qlik Closed Repair Orders, 128,726). Tools differ by store; GMC Prescott's report is not filtered to CP+W; Volvo and VW St George did not say. Honda Spokane and Toyota Spokane report the same figure for MPI and video. Photo % (optional on the form) = CP+W ROs with at least one technician photo on the MPI / CP+W ROs closed. Scored against the group. Green at or above the group, red below. 5 stores do not report it (N/A or blank).Optional measure: five stores do not report it, so it is a review slide, not a meeting slide.</a:t>
             </a:r>
             <a:endParaRPr lang="en-US" dirty="0"/>
           </a:p>
@@ -1160,7 +1160,7 @@
         <p:spPr>
           <a:xfrm>
             <a:off x="457200" y="1207008"/>
-            <a:ext cx="11274552" cy="4782312"/>
+            <a:ext cx="11274552" cy="5148072"/>
           </a:xfrm>
           <a:prstGeom prst="rect">
             <a:avLst/>
@@ -1337,7 +1337,7 @@
         <p:spPr>
           <a:xfrm>
             <a:off x="658368" y="2121408"/>
-            <a:ext cx="310896" cy="223759"/>
+            <a:ext cx="310896" cy="245274"/>
           </a:xfrm>
           <a:prstGeom prst="rect">
             <a:avLst/>
@@ -1376,7 +1376,7 @@
         <p:spPr>
           <a:xfrm>
             <a:off x="1014984" y="2121408"/>
-            <a:ext cx="1920240" cy="223759"/>
+            <a:ext cx="1920240" cy="245274"/>
           </a:xfrm>
           <a:prstGeom prst="rect">
             <a:avLst/>
@@ -1414,8 +1414,8 @@
         </p:nvSpPr>
         <p:spPr>
           <a:xfrm>
-            <a:off x="3008376" y="2177348"/>
-            <a:ext cx="868680" cy="111880"/>
+            <a:off x="3008376" y="2182727"/>
+            <a:ext cx="868680" cy="122637"/>
           </a:xfrm>
           <a:prstGeom prst="rect">
             <a:avLst/>
@@ -1435,7 +1435,7 @@
         <p:spPr>
           <a:xfrm>
             <a:off x="3931920" y="2121408"/>
-            <a:ext cx="676656" cy="223759"/>
+            <a:ext cx="676656" cy="245274"/>
           </a:xfrm>
           <a:prstGeom prst="rect">
             <a:avLst/>
@@ -1474,7 +1474,7 @@
         <p:spPr>
           <a:xfrm>
             <a:off x="4608576" y="2121408"/>
-            <a:ext cx="1188720" cy="223759"/>
+            <a:ext cx="1188720" cy="245274"/>
           </a:xfrm>
           <a:prstGeom prst="rect">
             <a:avLst/>
@@ -1512,8 +1512,8 @@
         </p:nvSpPr>
         <p:spPr>
           <a:xfrm>
-            <a:off x="658368" y="2345167"/>
-            <a:ext cx="310896" cy="223759"/>
+            <a:off x="658368" y="2366682"/>
+            <a:ext cx="310896" cy="245274"/>
           </a:xfrm>
           <a:prstGeom prst="rect">
             <a:avLst/>
@@ -1551,8 +1551,8 @@
         </p:nvSpPr>
         <p:spPr>
           <a:xfrm>
-            <a:off x="1014984" y="2345167"/>
-            <a:ext cx="1920240" cy="223759"/>
+            <a:off x="1014984" y="2366682"/>
+            <a:ext cx="1920240" cy="245274"/>
           </a:xfrm>
           <a:prstGeom prst="rect">
             <a:avLst/>
@@ -1590,8 +1590,8 @@
         </p:nvSpPr>
         <p:spPr>
           <a:xfrm>
-            <a:off x="3008376" y="2401107"/>
-            <a:ext cx="868680" cy="111880"/>
+            <a:off x="3008376" y="2428001"/>
+            <a:ext cx="868680" cy="122637"/>
           </a:xfrm>
           <a:prstGeom prst="rect">
             <a:avLst/>
@@ -1610,8 +1610,8 @@
         </p:nvSpPr>
         <p:spPr>
           <a:xfrm>
-            <a:off x="3931920" y="2345167"/>
-            <a:ext cx="676656" cy="223759"/>
+            <a:off x="3931920" y="2366682"/>
+            <a:ext cx="676656" cy="245274"/>
           </a:xfrm>
           <a:prstGeom prst="rect">
             <a:avLst/>
@@ -1649,8 +1649,8 @@
         </p:nvSpPr>
         <p:spPr>
           <a:xfrm>
-            <a:off x="4608576" y="2345167"/>
-            <a:ext cx="1188720" cy="223759"/>
+            <a:off x="4608576" y="2366682"/>
+            <a:ext cx="1188720" cy="245274"/>
           </a:xfrm>
           <a:prstGeom prst="rect">
             <a:avLst/>
@@ -1688,8 +1688,8 @@
         </p:nvSpPr>
         <p:spPr>
           <a:xfrm>
-            <a:off x="658368" y="2568926"/>
-            <a:ext cx="310896" cy="223759"/>
+            <a:off x="658368" y="2611957"/>
+            <a:ext cx="310896" cy="245274"/>
           </a:xfrm>
           <a:prstGeom prst="rect">
             <a:avLst/>
@@ -1727,8 +1727,8 @@
         </p:nvSpPr>
         <p:spPr>
           <a:xfrm>
-            <a:off x="1014984" y="2568926"/>
-            <a:ext cx="1920240" cy="223759"/>
+            <a:off x="1014984" y="2611957"/>
+            <a:ext cx="1920240" cy="245274"/>
           </a:xfrm>
           <a:prstGeom prst="rect">
             <a:avLst/>
@@ -1766,8 +1766,8 @@
         </p:nvSpPr>
         <p:spPr>
           <a:xfrm>
-            <a:off x="3008376" y="2624866"/>
-            <a:ext cx="861660" cy="111880"/>
+            <a:off x="3008376" y="2673275"/>
+            <a:ext cx="861660" cy="122637"/>
           </a:xfrm>
           <a:prstGeom prst="rect">
             <a:avLst/>
@@ -1786,8 +1786,8 @@
         </p:nvSpPr>
         <p:spPr>
           <a:xfrm>
-            <a:off x="3931920" y="2568926"/>
-            <a:ext cx="676656" cy="223759"/>
+            <a:off x="3931920" y="2611957"/>
+            <a:ext cx="676656" cy="245274"/>
           </a:xfrm>
           <a:prstGeom prst="rect">
             <a:avLst/>
@@ -1825,8 +1825,8 @@
         </p:nvSpPr>
         <p:spPr>
           <a:xfrm>
-            <a:off x="4608576" y="2568926"/>
-            <a:ext cx="1188720" cy="223759"/>
+            <a:off x="4608576" y="2611957"/>
+            <a:ext cx="1188720" cy="245274"/>
           </a:xfrm>
           <a:prstGeom prst="rect">
             <a:avLst/>
@@ -1864,8 +1864,8 @@
         </p:nvSpPr>
         <p:spPr>
           <a:xfrm>
-            <a:off x="658368" y="2792685"/>
-            <a:ext cx="310896" cy="223759"/>
+            <a:off x="658368" y="2857231"/>
+            <a:ext cx="310896" cy="245274"/>
           </a:xfrm>
           <a:prstGeom prst="rect">
             <a:avLst/>
@@ -1903,8 +1903,8 @@
         </p:nvSpPr>
         <p:spPr>
           <a:xfrm>
-            <a:off x="1014984" y="2792685"/>
-            <a:ext cx="1920240" cy="223759"/>
+            <a:off x="1014984" y="2857231"/>
+            <a:ext cx="1920240" cy="245274"/>
           </a:xfrm>
           <a:prstGeom prst="rect">
             <a:avLst/>
@@ -1942,8 +1942,8 @@
         </p:nvSpPr>
         <p:spPr>
           <a:xfrm>
-            <a:off x="3008376" y="2848625"/>
-            <a:ext cx="859905" cy="111880"/>
+            <a:off x="3008376" y="2918550"/>
+            <a:ext cx="859905" cy="122637"/>
           </a:xfrm>
           <a:prstGeom prst="rect">
             <a:avLst/>
@@ -1962,8 +1962,8 @@
         </p:nvSpPr>
         <p:spPr>
           <a:xfrm>
-            <a:off x="3931920" y="2792685"/>
-            <a:ext cx="676656" cy="223759"/>
+            <a:off x="3931920" y="2857231"/>
+            <a:ext cx="676656" cy="245274"/>
           </a:xfrm>
           <a:prstGeom prst="rect">
             <a:avLst/>
@@ -2001,8 +2001,8 @@
         </p:nvSpPr>
         <p:spPr>
           <a:xfrm>
-            <a:off x="4608576" y="2792685"/>
-            <a:ext cx="1188720" cy="223759"/>
+            <a:off x="4608576" y="2857231"/>
+            <a:ext cx="1188720" cy="245274"/>
           </a:xfrm>
           <a:prstGeom prst="rect">
             <a:avLst/>
@@ -2040,8 +2040,8 @@
         </p:nvSpPr>
         <p:spPr>
           <a:xfrm>
-            <a:off x="658368" y="3016444"/>
-            <a:ext cx="310896" cy="223759"/>
+            <a:off x="658368" y="3102505"/>
+            <a:ext cx="310896" cy="245274"/>
           </a:xfrm>
           <a:prstGeom prst="rect">
             <a:avLst/>
@@ -2079,8 +2079,8 @@
         </p:nvSpPr>
         <p:spPr>
           <a:xfrm>
-            <a:off x="1014984" y="3016444"/>
-            <a:ext cx="1920240" cy="223759"/>
+            <a:off x="1014984" y="3102505"/>
+            <a:ext cx="1920240" cy="245274"/>
           </a:xfrm>
           <a:prstGeom prst="rect">
             <a:avLst/>
@@ -2118,8 +2118,8 @@
         </p:nvSpPr>
         <p:spPr>
           <a:xfrm>
-            <a:off x="3008376" y="3072384"/>
-            <a:ext cx="851131" cy="111880"/>
+            <a:off x="3008376" y="3163824"/>
+            <a:ext cx="851131" cy="122637"/>
           </a:xfrm>
           <a:prstGeom prst="rect">
             <a:avLst/>
@@ -2138,8 +2138,8 @@
         </p:nvSpPr>
         <p:spPr>
           <a:xfrm>
-            <a:off x="3931920" y="3016444"/>
-            <a:ext cx="676656" cy="223759"/>
+            <a:off x="3931920" y="3102505"/>
+            <a:ext cx="676656" cy="245274"/>
           </a:xfrm>
           <a:prstGeom prst="rect">
             <a:avLst/>
@@ -2177,8 +2177,8 @@
         </p:nvSpPr>
         <p:spPr>
           <a:xfrm>
-            <a:off x="4608576" y="3016444"/>
-            <a:ext cx="1188720" cy="223759"/>
+            <a:off x="4608576" y="3102505"/>
+            <a:ext cx="1188720" cy="245274"/>
           </a:xfrm>
           <a:prstGeom prst="rect">
             <a:avLst/>
@@ -2216,8 +2216,8 @@
         </p:nvSpPr>
         <p:spPr>
           <a:xfrm>
-            <a:off x="658368" y="3240203"/>
-            <a:ext cx="310896" cy="223759"/>
+            <a:off x="658368" y="3347780"/>
+            <a:ext cx="310896" cy="245274"/>
           </a:xfrm>
           <a:prstGeom prst="rect">
             <a:avLst/>
@@ -2255,8 +2255,8 @@
         </p:nvSpPr>
         <p:spPr>
           <a:xfrm>
-            <a:off x="1014984" y="3240203"/>
-            <a:ext cx="1920240" cy="223759"/>
+            <a:off x="1014984" y="3347780"/>
+            <a:ext cx="1920240" cy="245274"/>
           </a:xfrm>
           <a:prstGeom prst="rect">
             <a:avLst/>
@@ -2294,8 +2294,8 @@
         </p:nvSpPr>
         <p:spPr>
           <a:xfrm>
-            <a:off x="3008376" y="3296143"/>
-            <a:ext cx="851131" cy="111880"/>
+            <a:off x="3008376" y="3409098"/>
+            <a:ext cx="851131" cy="122637"/>
           </a:xfrm>
           <a:prstGeom prst="rect">
             <a:avLst/>
@@ -2314,8 +2314,8 @@
         </p:nvSpPr>
         <p:spPr>
           <a:xfrm>
-            <a:off x="3931920" y="3240203"/>
-            <a:ext cx="676656" cy="223759"/>
+            <a:off x="3931920" y="3347780"/>
+            <a:ext cx="676656" cy="245274"/>
           </a:xfrm>
           <a:prstGeom prst="rect">
             <a:avLst/>
@@ -2353,8 +2353,8 @@
         </p:nvSpPr>
         <p:spPr>
           <a:xfrm>
-            <a:off x="4608576" y="3240203"/>
-            <a:ext cx="1188720" cy="223759"/>
+            <a:off x="4608576" y="3347780"/>
+            <a:ext cx="1188720" cy="245274"/>
           </a:xfrm>
           <a:prstGeom prst="rect">
             <a:avLst/>
@@ -2392,8 +2392,8 @@
         </p:nvSpPr>
         <p:spPr>
           <a:xfrm>
-            <a:off x="658368" y="3463962"/>
-            <a:ext cx="310896" cy="223759"/>
+            <a:off x="658368" y="3593054"/>
+            <a:ext cx="310896" cy="245274"/>
           </a:xfrm>
           <a:prstGeom prst="rect">
             <a:avLst/>
@@ -2431,8 +2431,8 @@
         </p:nvSpPr>
         <p:spPr>
           <a:xfrm>
-            <a:off x="1014984" y="3463962"/>
-            <a:ext cx="1920240" cy="223759"/>
+            <a:off x="1014984" y="3593054"/>
+            <a:ext cx="1920240" cy="245274"/>
           </a:xfrm>
           <a:prstGeom prst="rect">
             <a:avLst/>
@@ -2470,8 +2470,8 @@
         </p:nvSpPr>
         <p:spPr>
           <a:xfrm>
-            <a:off x="3008376" y="3519902"/>
-            <a:ext cx="843234" cy="111880"/>
+            <a:off x="3008376" y="3654373"/>
+            <a:ext cx="843234" cy="122637"/>
           </a:xfrm>
           <a:prstGeom prst="rect">
             <a:avLst/>
@@ -2490,8 +2490,8 @@
         </p:nvSpPr>
         <p:spPr>
           <a:xfrm>
-            <a:off x="3931920" y="3463962"/>
-            <a:ext cx="676656" cy="223759"/>
+            <a:off x="3931920" y="3593054"/>
+            <a:ext cx="676656" cy="245274"/>
           </a:xfrm>
           <a:prstGeom prst="rect">
             <a:avLst/>
@@ -2529,8 +2529,8 @@
         </p:nvSpPr>
         <p:spPr>
           <a:xfrm>
-            <a:off x="4608576" y="3463962"/>
-            <a:ext cx="1188720" cy="223759"/>
+            <a:off x="4608576" y="3593054"/>
+            <a:ext cx="1188720" cy="245274"/>
           </a:xfrm>
           <a:prstGeom prst="rect">
             <a:avLst/>
@@ -2568,8 +2568,8 @@
         </p:nvSpPr>
         <p:spPr>
           <a:xfrm>
-            <a:off x="658368" y="3687721"/>
-            <a:ext cx="310896" cy="223759"/>
+            <a:off x="658368" y="3838328"/>
+            <a:ext cx="310896" cy="245274"/>
           </a:xfrm>
           <a:prstGeom prst="rect">
             <a:avLst/>
@@ -2607,8 +2607,8 @@
         </p:nvSpPr>
         <p:spPr>
           <a:xfrm>
-            <a:off x="1014984" y="3687721"/>
-            <a:ext cx="1920240" cy="223759"/>
+            <a:off x="1014984" y="3838328"/>
+            <a:ext cx="1920240" cy="245274"/>
           </a:xfrm>
           <a:prstGeom prst="rect">
             <a:avLst/>
@@ -2646,8 +2646,8 @@
         </p:nvSpPr>
         <p:spPr>
           <a:xfrm>
-            <a:off x="3008376" y="3743661"/>
-            <a:ext cx="830949" cy="111880"/>
+            <a:off x="3008376" y="3899647"/>
+            <a:ext cx="830949" cy="122637"/>
           </a:xfrm>
           <a:prstGeom prst="rect">
             <a:avLst/>
@@ -2666,8 +2666,8 @@
         </p:nvSpPr>
         <p:spPr>
           <a:xfrm>
-            <a:off x="3931920" y="3687721"/>
-            <a:ext cx="676656" cy="223759"/>
+            <a:off x="3931920" y="3838328"/>
+            <a:ext cx="676656" cy="245274"/>
           </a:xfrm>
           <a:prstGeom prst="rect">
             <a:avLst/>
@@ -2705,8 +2705,8 @@
         </p:nvSpPr>
         <p:spPr>
           <a:xfrm>
-            <a:off x="4608576" y="3687721"/>
-            <a:ext cx="1188720" cy="223759"/>
+            <a:off x="4608576" y="3838328"/>
+            <a:ext cx="1188720" cy="245274"/>
           </a:xfrm>
           <a:prstGeom prst="rect">
             <a:avLst/>
@@ -2744,8 +2744,8 @@
         </p:nvSpPr>
         <p:spPr>
           <a:xfrm>
-            <a:off x="658368" y="3911480"/>
-            <a:ext cx="310896" cy="223759"/>
+            <a:off x="658368" y="4083603"/>
+            <a:ext cx="310896" cy="245274"/>
           </a:xfrm>
           <a:prstGeom prst="rect">
             <a:avLst/>
@@ -2783,8 +2783,8 @@
         </p:nvSpPr>
         <p:spPr>
           <a:xfrm>
-            <a:off x="1014984" y="3911480"/>
-            <a:ext cx="1920240" cy="223759"/>
+            <a:off x="1014984" y="4083603"/>
+            <a:ext cx="1920240" cy="245274"/>
           </a:xfrm>
           <a:prstGeom prst="rect">
             <a:avLst/>
@@ -2822,8 +2822,8 @@
         </p:nvSpPr>
         <p:spPr>
           <a:xfrm>
-            <a:off x="3008376" y="3967420"/>
-            <a:ext cx="822175" cy="111880"/>
+            <a:off x="3008376" y="4144921"/>
+            <a:ext cx="822175" cy="122637"/>
           </a:xfrm>
           <a:prstGeom prst="rect">
             <a:avLst/>
@@ -2842,8 +2842,8 @@
         </p:nvSpPr>
         <p:spPr>
           <a:xfrm>
-            <a:off x="3931920" y="3911480"/>
-            <a:ext cx="676656" cy="223759"/>
+            <a:off x="3931920" y="4083603"/>
+            <a:ext cx="676656" cy="245274"/>
           </a:xfrm>
           <a:prstGeom prst="rect">
             <a:avLst/>
@@ -2881,8 +2881,8 @@
         </p:nvSpPr>
         <p:spPr>
           <a:xfrm>
-            <a:off x="4608576" y="3911480"/>
-            <a:ext cx="1188720" cy="223759"/>
+            <a:off x="4608576" y="4083603"/>
+            <a:ext cx="1188720" cy="245274"/>
           </a:xfrm>
           <a:prstGeom prst="rect">
             <a:avLst/>
@@ -2920,8 +2920,8 @@
         </p:nvSpPr>
         <p:spPr>
           <a:xfrm>
-            <a:off x="658368" y="4135240"/>
-            <a:ext cx="310896" cy="223759"/>
+            <a:off x="658368" y="4328877"/>
+            <a:ext cx="310896" cy="245274"/>
           </a:xfrm>
           <a:prstGeom prst="rect">
             <a:avLst/>
@@ -2959,8 +2959,8 @@
         </p:nvSpPr>
         <p:spPr>
           <a:xfrm>
-            <a:off x="1014984" y="4135240"/>
-            <a:ext cx="1920240" cy="223759"/>
+            <a:off x="1014984" y="4328877"/>
+            <a:ext cx="1920240" cy="245274"/>
           </a:xfrm>
           <a:prstGeom prst="rect">
             <a:avLst/>
@@ -2998,8 +2998,8 @@
         </p:nvSpPr>
         <p:spPr>
           <a:xfrm>
-            <a:off x="3008376" y="4191179"/>
-            <a:ext cx="817788" cy="111880"/>
+            <a:off x="3008376" y="4390196"/>
+            <a:ext cx="817788" cy="122637"/>
           </a:xfrm>
           <a:prstGeom prst="rect">
             <a:avLst/>
@@ -3018,8 +3018,8 @@
         </p:nvSpPr>
         <p:spPr>
           <a:xfrm>
-            <a:off x="3931920" y="4135240"/>
-            <a:ext cx="676656" cy="223759"/>
+            <a:off x="3931920" y="4328877"/>
+            <a:ext cx="676656" cy="245274"/>
           </a:xfrm>
           <a:prstGeom prst="rect">
             <a:avLst/>
@@ -3057,8 +3057,8 @@
         </p:nvSpPr>
         <p:spPr>
           <a:xfrm>
-            <a:off x="4608576" y="4135240"/>
-            <a:ext cx="1188720" cy="223759"/>
+            <a:off x="4608576" y="4328877"/>
+            <a:ext cx="1188720" cy="245274"/>
           </a:xfrm>
           <a:prstGeom prst="rect">
             <a:avLst/>
@@ -3096,8 +3096,8 @@
         </p:nvSpPr>
         <p:spPr>
           <a:xfrm>
-            <a:off x="658368" y="4358999"/>
-            <a:ext cx="310896" cy="223759"/>
+            <a:off x="658368" y="4574152"/>
+            <a:ext cx="310896" cy="245274"/>
           </a:xfrm>
           <a:prstGeom prst="rect">
             <a:avLst/>
@@ -3135,8 +3135,8 @@
         </p:nvSpPr>
         <p:spPr>
           <a:xfrm>
-            <a:off x="1014984" y="4358999"/>
-            <a:ext cx="1920240" cy="223759"/>
+            <a:off x="1014984" y="4574152"/>
+            <a:ext cx="1920240" cy="245274"/>
           </a:xfrm>
           <a:prstGeom prst="rect">
             <a:avLst/>
@@ -3174,8 +3174,8 @@
         </p:nvSpPr>
         <p:spPr>
           <a:xfrm>
-            <a:off x="3008376" y="4414938"/>
-            <a:ext cx="805503" cy="111880"/>
+            <a:off x="3008376" y="4635470"/>
+            <a:ext cx="805503" cy="122637"/>
           </a:xfrm>
           <a:prstGeom prst="rect">
             <a:avLst/>
@@ -3194,8 +3194,8 @@
         </p:nvSpPr>
         <p:spPr>
           <a:xfrm>
-            <a:off x="3931920" y="4358999"/>
-            <a:ext cx="676656" cy="223759"/>
+            <a:off x="3931920" y="4574152"/>
+            <a:ext cx="676656" cy="245274"/>
           </a:xfrm>
           <a:prstGeom prst="rect">
             <a:avLst/>
@@ -3233,8 +3233,8 @@
         </p:nvSpPr>
         <p:spPr>
           <a:xfrm>
-            <a:off x="4608576" y="4358999"/>
-            <a:ext cx="1188720" cy="223759"/>
+            <a:off x="4608576" y="4574152"/>
+            <a:ext cx="1188720" cy="245274"/>
           </a:xfrm>
           <a:prstGeom prst="rect">
             <a:avLst/>
@@ -3272,8 +3272,8 @@
         </p:nvSpPr>
         <p:spPr>
           <a:xfrm>
-            <a:off x="658368" y="4582758"/>
-            <a:ext cx="310896" cy="223759"/>
+            <a:off x="658368" y="4819426"/>
+            <a:ext cx="310896" cy="245274"/>
           </a:xfrm>
           <a:prstGeom prst="rect">
             <a:avLst/>
@@ -3311,8 +3311,8 @@
         </p:nvSpPr>
         <p:spPr>
           <a:xfrm>
-            <a:off x="1014984" y="4582758"/>
-            <a:ext cx="1920240" cy="223759"/>
+            <a:off x="1014984" y="4819426"/>
+            <a:ext cx="1920240" cy="245274"/>
           </a:xfrm>
           <a:prstGeom prst="rect">
             <a:avLst/>
@@ -3350,8 +3350,8 @@
         </p:nvSpPr>
         <p:spPr>
           <a:xfrm>
-            <a:off x="3008376" y="4638697"/>
-            <a:ext cx="804626" cy="111880"/>
+            <a:off x="3008376" y="4880744"/>
+            <a:ext cx="804626" cy="122637"/>
           </a:xfrm>
           <a:prstGeom prst="rect">
             <a:avLst/>
@@ -3370,8 +3370,8 @@
         </p:nvSpPr>
         <p:spPr>
           <a:xfrm>
-            <a:off x="3931920" y="4582758"/>
-            <a:ext cx="676656" cy="223759"/>
+            <a:off x="3931920" y="4819426"/>
+            <a:ext cx="676656" cy="245274"/>
           </a:xfrm>
           <a:prstGeom prst="rect">
             <a:avLst/>
@@ -3409,8 +3409,8 @@
         </p:nvSpPr>
         <p:spPr>
           <a:xfrm>
-            <a:off x="4608576" y="4582758"/>
-            <a:ext cx="1188720" cy="223759"/>
+            <a:off x="4608576" y="4819426"/>
+            <a:ext cx="1188720" cy="245274"/>
           </a:xfrm>
           <a:prstGeom prst="rect">
             <a:avLst/>
@@ -3448,8 +3448,8 @@
         </p:nvSpPr>
         <p:spPr>
           <a:xfrm>
-            <a:off x="658368" y="4806517"/>
-            <a:ext cx="310896" cy="223759"/>
+            <a:off x="658368" y="5064700"/>
+            <a:ext cx="310896" cy="245274"/>
           </a:xfrm>
           <a:prstGeom prst="rect">
             <a:avLst/>
@@ -3487,8 +3487,8 @@
         </p:nvSpPr>
         <p:spPr>
           <a:xfrm>
-            <a:off x="1014984" y="4806517"/>
-            <a:ext cx="1920240" cy="223759"/>
+            <a:off x="1014984" y="5064700"/>
+            <a:ext cx="1920240" cy="245274"/>
           </a:xfrm>
           <a:prstGeom prst="rect">
             <a:avLst/>
@@ -3526,8 +3526,8 @@
         </p:nvSpPr>
         <p:spPr>
           <a:xfrm>
-            <a:off x="3008376" y="4862456"/>
-            <a:ext cx="780935" cy="111880"/>
+            <a:off x="3008376" y="5126019"/>
+            <a:ext cx="780935" cy="122637"/>
           </a:xfrm>
           <a:prstGeom prst="rect">
             <a:avLst/>
@@ -3546,8 +3546,8 @@
         </p:nvSpPr>
         <p:spPr>
           <a:xfrm>
-            <a:off x="3931920" y="4806517"/>
-            <a:ext cx="676656" cy="223759"/>
+            <a:off x="3931920" y="5064700"/>
+            <a:ext cx="676656" cy="245274"/>
           </a:xfrm>
           <a:prstGeom prst="rect">
             <a:avLst/>
@@ -3585,8 +3585,8 @@
         </p:nvSpPr>
         <p:spPr>
           <a:xfrm>
-            <a:off x="4608576" y="4806517"/>
-            <a:ext cx="1188720" cy="223759"/>
+            <a:off x="4608576" y="5064700"/>
+            <a:ext cx="1188720" cy="245274"/>
           </a:xfrm>
           <a:prstGeom prst="rect">
             <a:avLst/>
@@ -3624,8 +3624,8 @@
         </p:nvSpPr>
         <p:spPr>
           <a:xfrm>
-            <a:off x="658368" y="5030276"/>
-            <a:ext cx="310896" cy="223759"/>
+            <a:off x="658368" y="5309975"/>
+            <a:ext cx="310896" cy="245274"/>
           </a:xfrm>
           <a:prstGeom prst="rect">
             <a:avLst/>
@@ -3663,8 +3663,8 @@
         </p:nvSpPr>
         <p:spPr>
           <a:xfrm>
-            <a:off x="1014984" y="5030276"/>
-            <a:ext cx="1920240" cy="223759"/>
+            <a:off x="1014984" y="5309975"/>
+            <a:ext cx="1920240" cy="245274"/>
           </a:xfrm>
           <a:prstGeom prst="rect">
             <a:avLst/>
@@ -3702,8 +3702,8 @@
         </p:nvSpPr>
         <p:spPr>
           <a:xfrm>
-            <a:off x="3008376" y="5086216"/>
-            <a:ext cx="768650" cy="111880"/>
+            <a:off x="3008376" y="5371293"/>
+            <a:ext cx="768650" cy="122637"/>
           </a:xfrm>
           <a:prstGeom prst="rect">
             <a:avLst/>
@@ -3722,8 +3722,8 @@
         </p:nvSpPr>
         <p:spPr>
           <a:xfrm>
-            <a:off x="3931920" y="5030276"/>
-            <a:ext cx="676656" cy="223759"/>
+            <a:off x="3931920" y="5309975"/>
+            <a:ext cx="676656" cy="245274"/>
           </a:xfrm>
           <a:prstGeom prst="rect">
             <a:avLst/>
@@ -3761,8 +3761,8 @@
         </p:nvSpPr>
         <p:spPr>
           <a:xfrm>
-            <a:off x="4608576" y="5030276"/>
-            <a:ext cx="1188720" cy="223759"/>
+            <a:off x="4608576" y="5309975"/>
+            <a:ext cx="1188720" cy="245274"/>
           </a:xfrm>
           <a:prstGeom prst="rect">
             <a:avLst/>
@@ -3800,8 +3800,8 @@
         </p:nvSpPr>
         <p:spPr>
           <a:xfrm>
-            <a:off x="658368" y="5254035"/>
-            <a:ext cx="310896" cy="223759"/>
+            <a:off x="658368" y="5555249"/>
+            <a:ext cx="310896" cy="245274"/>
           </a:xfrm>
           <a:prstGeom prst="rect">
             <a:avLst/>
@@ -3839,8 +3839,8 @@
         </p:nvSpPr>
         <p:spPr>
           <a:xfrm>
-            <a:off x="1014984" y="5254035"/>
-            <a:ext cx="1920240" cy="223759"/>
+            <a:off x="1014984" y="5555249"/>
+            <a:ext cx="1920240" cy="245274"/>
           </a:xfrm>
           <a:prstGeom prst="rect">
             <a:avLst/>
@@ -3878,8 +3878,8 @@
         </p:nvSpPr>
         <p:spPr>
           <a:xfrm>
-            <a:off x="3008376" y="5309975"/>
-            <a:ext cx="757243" cy="111880"/>
+            <a:off x="3008376" y="5616568"/>
+            <a:ext cx="757243" cy="122637"/>
           </a:xfrm>
           <a:prstGeom prst="rect">
             <a:avLst/>
@@ -3898,8 +3898,8 @@
         </p:nvSpPr>
         <p:spPr>
           <a:xfrm>
-            <a:off x="3931920" y="5254035"/>
-            <a:ext cx="676656" cy="223759"/>
+            <a:off x="3931920" y="5555249"/>
+            <a:ext cx="676656" cy="245274"/>
           </a:xfrm>
           <a:prstGeom prst="rect">
             <a:avLst/>
@@ -3937,8 +3937,8 @@
         </p:nvSpPr>
         <p:spPr>
           <a:xfrm>
-            <a:off x="4608576" y="5254035"/>
-            <a:ext cx="1188720" cy="223759"/>
+            <a:off x="4608576" y="5555249"/>
+            <a:ext cx="1188720" cy="245274"/>
           </a:xfrm>
           <a:prstGeom prst="rect">
             <a:avLst/>
@@ -3976,8 +3976,8 @@
         </p:nvSpPr>
         <p:spPr>
           <a:xfrm>
-            <a:off x="658368" y="5477794"/>
-            <a:ext cx="310896" cy="223759"/>
+            <a:off x="658368" y="5800523"/>
+            <a:ext cx="310896" cy="245274"/>
           </a:xfrm>
           <a:prstGeom prst="rect">
             <a:avLst/>
@@ -4015,8 +4015,8 @@
         </p:nvSpPr>
         <p:spPr>
           <a:xfrm>
-            <a:off x="1014984" y="5477794"/>
-            <a:ext cx="1920240" cy="223759"/>
+            <a:off x="1014984" y="5800523"/>
+            <a:ext cx="1920240" cy="245274"/>
           </a:xfrm>
           <a:prstGeom prst="rect">
             <a:avLst/>
@@ -4054,8 +4054,8 @@
         </p:nvSpPr>
         <p:spPr>
           <a:xfrm>
-            <a:off x="3008376" y="5533734"/>
-            <a:ext cx="741449" cy="111880"/>
+            <a:off x="3008376" y="5861842"/>
+            <a:ext cx="741449" cy="122637"/>
           </a:xfrm>
           <a:prstGeom prst="rect">
             <a:avLst/>
@@ -4074,8 +4074,8 @@
         </p:nvSpPr>
         <p:spPr>
           <a:xfrm>
-            <a:off x="3931920" y="5477794"/>
-            <a:ext cx="676656" cy="223759"/>
+            <a:off x="3931920" y="5800523"/>
+            <a:ext cx="676656" cy="245274"/>
           </a:xfrm>
           <a:prstGeom prst="rect">
             <a:avLst/>
@@ -4113,8 +4113,8 @@
         </p:nvSpPr>
         <p:spPr>
           <a:xfrm>
-            <a:off x="4608576" y="5477794"/>
-            <a:ext cx="1188720" cy="223759"/>
+            <a:off x="4608576" y="5800523"/>
+            <a:ext cx="1188720" cy="245274"/>
           </a:xfrm>
           <a:prstGeom prst="rect">
             <a:avLst/>
@@ -4152,8 +4152,8 @@
         </p:nvSpPr>
         <p:spPr>
           <a:xfrm>
-            <a:off x="658368" y="5701553"/>
-            <a:ext cx="310896" cy="223759"/>
+            <a:off x="658368" y="6045798"/>
+            <a:ext cx="310896" cy="245274"/>
           </a:xfrm>
           <a:prstGeom prst="rect">
             <a:avLst/>
@@ -4191,8 +4191,8 @@
         </p:nvSpPr>
         <p:spPr>
           <a:xfrm>
-            <a:off x="1014984" y="5701553"/>
-            <a:ext cx="1920240" cy="223759"/>
+            <a:off x="1014984" y="6045798"/>
+            <a:ext cx="1920240" cy="245274"/>
           </a:xfrm>
           <a:prstGeom prst="rect">
             <a:avLst/>
@@ -4230,8 +4230,8 @@
         </p:nvSpPr>
         <p:spPr>
           <a:xfrm>
-            <a:off x="3008376" y="5757493"/>
-            <a:ext cx="731797" cy="111880"/>
+            <a:off x="3008376" y="6107116"/>
+            <a:ext cx="731797" cy="122637"/>
           </a:xfrm>
           <a:prstGeom prst="rect">
             <a:avLst/>
@@ -4250,8 +4250,8 @@
         </p:nvSpPr>
         <p:spPr>
           <a:xfrm>
-            <a:off x="3931920" y="5701553"/>
-            <a:ext cx="676656" cy="223759"/>
+            <a:off x="3931920" y="6045798"/>
+            <a:ext cx="676656" cy="245274"/>
           </a:xfrm>
           <a:prstGeom prst="rect">
             <a:avLst/>
@@ -4289,8 +4289,8 @@
         </p:nvSpPr>
         <p:spPr>
           <a:xfrm>
-            <a:off x="4608576" y="5701553"/>
-            <a:ext cx="1188720" cy="223759"/>
+            <a:off x="4608576" y="6045798"/>
+            <a:ext cx="1188720" cy="245274"/>
           </a:xfrm>
           <a:prstGeom prst="rect">
             <a:avLst/>
@@ -4329,7 +4329,7 @@
         <p:spPr>
           <a:xfrm>
             <a:off x="6208776" y="2121408"/>
-            <a:ext cx="310896" cy="223759"/>
+            <a:ext cx="310896" cy="245274"/>
           </a:xfrm>
           <a:prstGeom prst="rect">
             <a:avLst/>
@@ -4368,7 +4368,7 @@
         <p:spPr>
           <a:xfrm>
             <a:off x="6565392" y="2121408"/>
-            <a:ext cx="1920240" cy="223759"/>
+            <a:ext cx="1920240" cy="245274"/>
           </a:xfrm>
           <a:prstGeom prst="rect">
             <a:avLst/>
@@ -4406,8 +4406,8 @@
         </p:nvSpPr>
         <p:spPr>
           <a:xfrm>
-            <a:off x="8558784" y="2177348"/>
-            <a:ext cx="723900" cy="111880"/>
+            <a:off x="8558784" y="2182727"/>
+            <a:ext cx="723900" cy="122637"/>
           </a:xfrm>
           <a:prstGeom prst="rect">
             <a:avLst/>
@@ -4427,7 +4427,7 @@
         <p:spPr>
           <a:xfrm>
             <a:off x="9482328" y="2121408"/>
-            <a:ext cx="676656" cy="223759"/>
+            <a:ext cx="676656" cy="245274"/>
           </a:xfrm>
           <a:prstGeom prst="rect">
             <a:avLst/>
@@ -4466,7 +4466,7 @@
         <p:spPr>
           <a:xfrm>
             <a:off x="10158984" y="2121408"/>
-            <a:ext cx="1188720" cy="223759"/>
+            <a:ext cx="1188720" cy="245274"/>
           </a:xfrm>
           <a:prstGeom prst="rect">
             <a:avLst/>
@@ -4504,8 +4504,8 @@
         </p:nvSpPr>
         <p:spPr>
           <a:xfrm>
-            <a:off x="6208776" y="2345167"/>
-            <a:ext cx="310896" cy="223759"/>
+            <a:off x="6208776" y="2366682"/>
+            <a:ext cx="310896" cy="245274"/>
           </a:xfrm>
           <a:prstGeom prst="rect">
             <a:avLst/>
@@ -4543,8 +4543,8 @@
         </p:nvSpPr>
         <p:spPr>
           <a:xfrm>
-            <a:off x="6565392" y="2345167"/>
-            <a:ext cx="1920240" cy="223759"/>
+            <a:off x="6565392" y="2366682"/>
+            <a:ext cx="1920240" cy="245274"/>
           </a:xfrm>
           <a:prstGeom prst="rect">
             <a:avLst/>
@@ -4582,8 +4582,8 @@
         </p:nvSpPr>
         <p:spPr>
           <a:xfrm>
-            <a:off x="8558784" y="2401107"/>
-            <a:ext cx="716880" cy="111880"/>
+            <a:off x="8558784" y="2428001"/>
+            <a:ext cx="716880" cy="122637"/>
           </a:xfrm>
           <a:prstGeom prst="rect">
             <a:avLst/>
@@ -4602,8 +4602,8 @@
         </p:nvSpPr>
         <p:spPr>
           <a:xfrm>
-            <a:off x="9482328" y="2345167"/>
-            <a:ext cx="676656" cy="223759"/>
+            <a:off x="9482328" y="2366682"/>
+            <a:ext cx="676656" cy="245274"/>
           </a:xfrm>
           <a:prstGeom prst="rect">
             <a:avLst/>
@@ -4641,8 +4641,8 @@
         </p:nvSpPr>
         <p:spPr>
           <a:xfrm>
-            <a:off x="10158984" y="2345167"/>
-            <a:ext cx="1188720" cy="223759"/>
+            <a:off x="10158984" y="2366682"/>
+            <a:ext cx="1188720" cy="245274"/>
           </a:xfrm>
           <a:prstGeom prst="rect">
             <a:avLst/>
@@ -4680,8 +4680,8 @@
         </p:nvSpPr>
         <p:spPr>
           <a:xfrm>
-            <a:off x="6208776" y="2568926"/>
-            <a:ext cx="310896" cy="223759"/>
+            <a:off x="6208776" y="2611957"/>
+            <a:ext cx="310896" cy="245274"/>
           </a:xfrm>
           <a:prstGeom prst="rect">
             <a:avLst/>
@@ -4719,8 +4719,8 @@
         </p:nvSpPr>
         <p:spPr>
           <a:xfrm>
-            <a:off x="6565392" y="2568926"/>
-            <a:ext cx="1920240" cy="223759"/>
+            <a:off x="6565392" y="2611957"/>
+            <a:ext cx="1920240" cy="245274"/>
           </a:xfrm>
           <a:prstGeom prst="rect">
             <a:avLst/>
@@ -4758,8 +4758,8 @@
         </p:nvSpPr>
         <p:spPr>
           <a:xfrm>
-            <a:off x="8558784" y="2624866"/>
-            <a:ext cx="715125" cy="111880"/>
+            <a:off x="8558784" y="2673275"/>
+            <a:ext cx="715125" cy="122637"/>
           </a:xfrm>
           <a:prstGeom prst="rect">
             <a:avLst/>
@@ -4778,8 +4778,8 @@
         </p:nvSpPr>
         <p:spPr>
           <a:xfrm>
-            <a:off x="9482328" y="2568926"/>
-            <a:ext cx="676656" cy="223759"/>
+            <a:off x="9482328" y="2611957"/>
+            <a:ext cx="676656" cy="245274"/>
           </a:xfrm>
           <a:prstGeom prst="rect">
             <a:avLst/>
@@ -4817,8 +4817,8 @@
         </p:nvSpPr>
         <p:spPr>
           <a:xfrm>
-            <a:off x="10158984" y="2568926"/>
-            <a:ext cx="1188720" cy="223759"/>
+            <a:off x="10158984" y="2611957"/>
+            <a:ext cx="1188720" cy="245274"/>
           </a:xfrm>
           <a:prstGeom prst="rect">
             <a:avLst/>
@@ -4856,8 +4856,8 @@
         </p:nvSpPr>
         <p:spPr>
           <a:xfrm>
-            <a:off x="6208776" y="2792685"/>
-            <a:ext cx="310896" cy="223759"/>
+            <a:off x="6208776" y="2857231"/>
+            <a:ext cx="310896" cy="245274"/>
           </a:xfrm>
           <a:prstGeom prst="rect">
             <a:avLst/>
@@ -4895,8 +4895,8 @@
         </p:nvSpPr>
         <p:spPr>
           <a:xfrm>
-            <a:off x="6565392" y="2792685"/>
-            <a:ext cx="1920240" cy="223759"/>
+            <a:off x="6565392" y="2857231"/>
+            <a:ext cx="1920240" cy="245274"/>
           </a:xfrm>
           <a:prstGeom prst="rect">
             <a:avLst/>
@@ -4934,8 +4934,8 @@
         </p:nvSpPr>
         <p:spPr>
           <a:xfrm>
-            <a:off x="8558784" y="2848625"/>
-            <a:ext cx="714248" cy="111880"/>
+            <a:off x="8558784" y="2918550"/>
+            <a:ext cx="714248" cy="122637"/>
           </a:xfrm>
           <a:prstGeom prst="rect">
             <a:avLst/>
@@ -4954,8 +4954,8 @@
         </p:nvSpPr>
         <p:spPr>
           <a:xfrm>
-            <a:off x="9482328" y="2792685"/>
-            <a:ext cx="676656" cy="223759"/>
+            <a:off x="9482328" y="2857231"/>
+            <a:ext cx="676656" cy="245274"/>
           </a:xfrm>
           <a:prstGeom prst="rect">
             <a:avLst/>
@@ -4993,8 +4993,8 @@
         </p:nvSpPr>
         <p:spPr>
           <a:xfrm>
-            <a:off x="10158984" y="2792685"/>
-            <a:ext cx="1188720" cy="223759"/>
+            <a:off x="10158984" y="2857231"/>
+            <a:ext cx="1188720" cy="245274"/>
           </a:xfrm>
           <a:prstGeom prst="rect">
             <a:avLst/>
@@ -5032,8 +5032,8 @@
         </p:nvSpPr>
         <p:spPr>
           <a:xfrm>
-            <a:off x="6208776" y="3016444"/>
-            <a:ext cx="310896" cy="223759"/>
+            <a:off x="6208776" y="3102505"/>
+            <a:ext cx="310896" cy="245274"/>
           </a:xfrm>
           <a:prstGeom prst="rect">
             <a:avLst/>
@@ -5071,8 +5071,8 @@
         </p:nvSpPr>
         <p:spPr>
           <a:xfrm>
-            <a:off x="6565392" y="3016444"/>
-            <a:ext cx="1920240" cy="223759"/>
+            <a:off x="6565392" y="3102505"/>
+            <a:ext cx="1920240" cy="245274"/>
           </a:xfrm>
           <a:prstGeom prst="rect">
             <a:avLst/>
@@ -5110,8 +5110,8 @@
         </p:nvSpPr>
         <p:spPr>
           <a:xfrm>
-            <a:off x="8558784" y="3072384"/>
-            <a:ext cx="713371" cy="111880"/>
+            <a:off x="8558784" y="3163824"/>
+            <a:ext cx="713371" cy="122637"/>
           </a:xfrm>
           <a:prstGeom prst="rect">
             <a:avLst/>
@@ -5130,8 +5130,8 @@
         </p:nvSpPr>
         <p:spPr>
           <a:xfrm>
-            <a:off x="9482328" y="3016444"/>
-            <a:ext cx="676656" cy="223759"/>
+            <a:off x="9482328" y="3102505"/>
+            <a:ext cx="676656" cy="245274"/>
           </a:xfrm>
           <a:prstGeom prst="rect">
             <a:avLst/>
@@ -5169,8 +5169,8 @@
         </p:nvSpPr>
         <p:spPr>
           <a:xfrm>
-            <a:off x="10158984" y="3016444"/>
-            <a:ext cx="1188720" cy="223759"/>
+            <a:off x="10158984" y="3102505"/>
+            <a:ext cx="1188720" cy="245274"/>
           </a:xfrm>
           <a:prstGeom prst="rect">
             <a:avLst/>
@@ -5208,8 +5208,8 @@
         </p:nvSpPr>
         <p:spPr>
           <a:xfrm>
-            <a:off x="6208776" y="3240203"/>
-            <a:ext cx="310896" cy="223759"/>
+            <a:off x="6208776" y="3347780"/>
+            <a:ext cx="310896" cy="245274"/>
           </a:xfrm>
           <a:prstGeom prst="rect">
             <a:avLst/>
@@ -5247,8 +5247,8 @@
         </p:nvSpPr>
         <p:spPr>
           <a:xfrm>
-            <a:off x="6565392" y="3240203"/>
-            <a:ext cx="1920240" cy="223759"/>
+            <a:off x="6565392" y="3347780"/>
+            <a:ext cx="1920240" cy="245274"/>
           </a:xfrm>
           <a:prstGeom prst="rect">
             <a:avLst/>
@@ -5286,8 +5286,8 @@
         </p:nvSpPr>
         <p:spPr>
           <a:xfrm>
-            <a:off x="8558784" y="3296143"/>
-            <a:ext cx="693189" cy="111880"/>
+            <a:off x="8558784" y="3409098"/>
+            <a:ext cx="693189" cy="122637"/>
           </a:xfrm>
           <a:prstGeom prst="rect">
             <a:avLst/>
@@ -5306,8 +5306,8 @@
         </p:nvSpPr>
         <p:spPr>
           <a:xfrm>
-            <a:off x="9482328" y="3240203"/>
-            <a:ext cx="676656" cy="223759"/>
+            <a:off x="9482328" y="3347780"/>
+            <a:ext cx="676656" cy="245274"/>
           </a:xfrm>
           <a:prstGeom prst="rect">
             <a:avLst/>
@@ -5345,8 +5345,8 @@
         </p:nvSpPr>
         <p:spPr>
           <a:xfrm>
-            <a:off x="10158984" y="3240203"/>
-            <a:ext cx="1188720" cy="223759"/>
+            <a:off x="10158984" y="3347780"/>
+            <a:ext cx="1188720" cy="245274"/>
           </a:xfrm>
           <a:prstGeom prst="rect">
             <a:avLst/>
@@ -5384,8 +5384,8 @@
         </p:nvSpPr>
         <p:spPr>
           <a:xfrm>
-            <a:off x="6208776" y="3463962"/>
-            <a:ext cx="310896" cy="223759"/>
+            <a:off x="6208776" y="3593054"/>
+            <a:ext cx="310896" cy="245274"/>
           </a:xfrm>
           <a:prstGeom prst="rect">
             <a:avLst/>
@@ -5423,8 +5423,8 @@
         </p:nvSpPr>
         <p:spPr>
           <a:xfrm>
-            <a:off x="6565392" y="3463962"/>
-            <a:ext cx="1920240" cy="223759"/>
+            <a:off x="6565392" y="3593054"/>
+            <a:ext cx="1920240" cy="245274"/>
           </a:xfrm>
           <a:prstGeom prst="rect">
             <a:avLst/>
@@ -5462,8 +5462,8 @@
         </p:nvSpPr>
         <p:spPr>
           <a:xfrm>
-            <a:off x="8558784" y="3519902"/>
-            <a:ext cx="667743" cy="111880"/>
+            <a:off x="8558784" y="3654373"/>
+            <a:ext cx="667743" cy="122637"/>
           </a:xfrm>
           <a:prstGeom prst="rect">
             <a:avLst/>
@@ -5482,8 +5482,8 @@
         </p:nvSpPr>
         <p:spPr>
           <a:xfrm>
-            <a:off x="9482328" y="3463962"/>
-            <a:ext cx="676656" cy="223759"/>
+            <a:off x="9482328" y="3593054"/>
+            <a:ext cx="676656" cy="245274"/>
           </a:xfrm>
           <a:prstGeom prst="rect">
             <a:avLst/>
@@ -5521,8 +5521,8 @@
         </p:nvSpPr>
         <p:spPr>
           <a:xfrm>
-            <a:off x="10158984" y="3463962"/>
-            <a:ext cx="1188720" cy="223759"/>
+            <a:off x="10158984" y="3593054"/>
+            <a:ext cx="1188720" cy="245274"/>
           </a:xfrm>
           <a:prstGeom prst="rect">
             <a:avLst/>
@@ -5560,8 +5560,8 @@
         </p:nvSpPr>
         <p:spPr>
           <a:xfrm>
-            <a:off x="6208776" y="3687721"/>
-            <a:ext cx="310896" cy="223759"/>
+            <a:off x="6208776" y="3838328"/>
+            <a:ext cx="310896" cy="245274"/>
           </a:xfrm>
           <a:prstGeom prst="rect">
             <a:avLst/>
@@ -5599,8 +5599,8 @@
         </p:nvSpPr>
         <p:spPr>
           <a:xfrm>
-            <a:off x="6565392" y="3687721"/>
-            <a:ext cx="1920240" cy="223759"/>
+            <a:off x="6565392" y="3838328"/>
+            <a:ext cx="1920240" cy="245274"/>
           </a:xfrm>
           <a:prstGeom prst="rect">
             <a:avLst/>
@@ -5638,8 +5638,8 @@
         </p:nvSpPr>
         <p:spPr>
           <a:xfrm>
-            <a:off x="8558784" y="3743661"/>
-            <a:ext cx="640542" cy="111880"/>
+            <a:off x="8558784" y="3899647"/>
+            <a:ext cx="640542" cy="122637"/>
           </a:xfrm>
           <a:prstGeom prst="rect">
             <a:avLst/>
@@ -5658,8 +5658,8 @@
         </p:nvSpPr>
         <p:spPr>
           <a:xfrm>
-            <a:off x="9482328" y="3687721"/>
-            <a:ext cx="676656" cy="223759"/>
+            <a:off x="9482328" y="3838328"/>
+            <a:ext cx="676656" cy="245274"/>
           </a:xfrm>
           <a:prstGeom prst="rect">
             <a:avLst/>
@@ -5697,8 +5697,8 @@
         </p:nvSpPr>
         <p:spPr>
           <a:xfrm>
-            <a:off x="10158984" y="3687721"/>
-            <a:ext cx="1188720" cy="223759"/>
+            <a:off x="10158984" y="3838328"/>
+            <a:ext cx="1188720" cy="245274"/>
           </a:xfrm>
           <a:prstGeom prst="rect">
             <a:avLst/>
@@ -5736,8 +5736,8 @@
         </p:nvSpPr>
         <p:spPr>
           <a:xfrm>
-            <a:off x="6208776" y="3911480"/>
-            <a:ext cx="310896" cy="223759"/>
+            <a:off x="6208776" y="4083603"/>
+            <a:ext cx="310896" cy="245274"/>
           </a:xfrm>
           <a:prstGeom prst="rect">
             <a:avLst/>
@@ -5775,8 +5775,8 @@
         </p:nvSpPr>
         <p:spPr>
           <a:xfrm>
-            <a:off x="6565392" y="3911480"/>
-            <a:ext cx="1920240" cy="223759"/>
+            <a:off x="6565392" y="4083603"/>
+            <a:ext cx="1920240" cy="245274"/>
           </a:xfrm>
           <a:prstGeom prst="rect">
             <a:avLst/>
@@ -5814,8 +5814,8 @@
         </p:nvSpPr>
         <p:spPr>
           <a:xfrm>
-            <a:off x="8558784" y="3967420"/>
-            <a:ext cx="624748" cy="111880"/>
+            <a:off x="8558784" y="4144921"/>
+            <a:ext cx="624748" cy="122637"/>
           </a:xfrm>
           <a:prstGeom prst="rect">
             <a:avLst/>
@@ -5834,8 +5834,8 @@
         </p:nvSpPr>
         <p:spPr>
           <a:xfrm>
-            <a:off x="9482328" y="3911480"/>
-            <a:ext cx="676656" cy="223759"/>
+            <a:off x="9482328" y="4083603"/>
+            <a:ext cx="676656" cy="245274"/>
           </a:xfrm>
           <a:prstGeom prst="rect">
             <a:avLst/>
@@ -5873,8 +5873,8 @@
         </p:nvSpPr>
         <p:spPr>
           <a:xfrm>
-            <a:off x="10158984" y="3911480"/>
-            <a:ext cx="1188720" cy="223759"/>
+            <a:off x="10158984" y="4083603"/>
+            <a:ext cx="1188720" cy="245274"/>
           </a:xfrm>
           <a:prstGeom prst="rect">
             <a:avLst/>
@@ -5912,8 +5912,8 @@
         </p:nvSpPr>
         <p:spPr>
           <a:xfrm>
-            <a:off x="6208776" y="4135240"/>
-            <a:ext cx="310896" cy="223759"/>
+            <a:off x="6208776" y="4328877"/>
+            <a:ext cx="310896" cy="245274"/>
           </a:xfrm>
           <a:prstGeom prst="rect">
             <a:avLst/>
@@ -5951,8 +5951,8 @@
         </p:nvSpPr>
         <p:spPr>
           <a:xfrm>
-            <a:off x="6565392" y="4135240"/>
-            <a:ext cx="1920240" cy="223759"/>
+            <a:off x="6565392" y="4328877"/>
+            <a:ext cx="1920240" cy="245274"/>
           </a:xfrm>
           <a:prstGeom prst="rect">
             <a:avLst/>
@@ -5990,8 +5990,8 @@
         </p:nvSpPr>
         <p:spPr>
           <a:xfrm>
-            <a:off x="8558784" y="4191179"/>
-            <a:ext cx="623870" cy="111880"/>
+            <a:off x="8558784" y="4390196"/>
+            <a:ext cx="623870" cy="122637"/>
           </a:xfrm>
           <a:prstGeom prst="rect">
             <a:avLst/>
@@ -6010,8 +6010,8 @@
         </p:nvSpPr>
         <p:spPr>
           <a:xfrm>
-            <a:off x="9482328" y="4135240"/>
-            <a:ext cx="676656" cy="223759"/>
+            <a:off x="9482328" y="4328877"/>
+            <a:ext cx="676656" cy="245274"/>
           </a:xfrm>
           <a:prstGeom prst="rect">
             <a:avLst/>
@@ -6049,8 +6049,8 @@
         </p:nvSpPr>
         <p:spPr>
           <a:xfrm>
-            <a:off x="10158984" y="4135240"/>
-            <a:ext cx="1188720" cy="223759"/>
+            <a:off x="10158984" y="4328877"/>
+            <a:ext cx="1188720" cy="245274"/>
           </a:xfrm>
           <a:prstGeom prst="rect">
             <a:avLst/>
@@ -6088,8 +6088,8 @@
         </p:nvSpPr>
         <p:spPr>
           <a:xfrm>
-            <a:off x="6208776" y="4358999"/>
-            <a:ext cx="310896" cy="223759"/>
+            <a:off x="6208776" y="4574152"/>
+            <a:ext cx="310896" cy="245274"/>
           </a:xfrm>
           <a:prstGeom prst="rect">
             <a:avLst/>
@@ -6127,8 +6127,8 @@
         </p:nvSpPr>
         <p:spPr>
           <a:xfrm>
-            <a:off x="6565392" y="4358999"/>
-            <a:ext cx="1920240" cy="223759"/>
+            <a:off x="6565392" y="4574152"/>
+            <a:ext cx="1920240" cy="245274"/>
           </a:xfrm>
           <a:prstGeom prst="rect">
             <a:avLst/>
@@ -6166,8 +6166,8 @@
         </p:nvSpPr>
         <p:spPr>
           <a:xfrm>
-            <a:off x="8558784" y="4414938"/>
-            <a:ext cx="601056" cy="111880"/>
+            <a:off x="8558784" y="4635470"/>
+            <a:ext cx="601056" cy="122637"/>
           </a:xfrm>
           <a:prstGeom prst="rect">
             <a:avLst/>
@@ -6186,8 +6186,8 @@
         </p:nvSpPr>
         <p:spPr>
           <a:xfrm>
-            <a:off x="9482328" y="4358999"/>
-            <a:ext cx="676656" cy="223759"/>
+            <a:off x="9482328" y="4574152"/>
+            <a:ext cx="676656" cy="245274"/>
           </a:xfrm>
           <a:prstGeom prst="rect">
             <a:avLst/>
@@ -6225,8 +6225,8 @@
         </p:nvSpPr>
         <p:spPr>
           <a:xfrm>
-            <a:off x="10158984" y="4358999"/>
-            <a:ext cx="1188720" cy="223759"/>
+            <a:off x="10158984" y="4574152"/>
+            <a:ext cx="1188720" cy="245274"/>
           </a:xfrm>
           <a:prstGeom prst="rect">
             <a:avLst/>
@@ -6264,8 +6264,8 @@
         </p:nvSpPr>
         <p:spPr>
           <a:xfrm>
-            <a:off x="6208776" y="4582758"/>
-            <a:ext cx="310896" cy="223759"/>
+            <a:off x="6208776" y="4819426"/>
+            <a:ext cx="310896" cy="245274"/>
           </a:xfrm>
           <a:prstGeom prst="rect">
             <a:avLst/>
@@ -6303,8 +6303,8 @@
         </p:nvSpPr>
         <p:spPr>
           <a:xfrm>
-            <a:off x="6565392" y="4582758"/>
-            <a:ext cx="1920240" cy="223759"/>
+            <a:off x="6565392" y="4819426"/>
+            <a:ext cx="1920240" cy="245274"/>
           </a:xfrm>
           <a:prstGeom prst="rect">
             <a:avLst/>
@@ -6342,8 +6342,8 @@
         </p:nvSpPr>
         <p:spPr>
           <a:xfrm>
-            <a:off x="8558784" y="4638697"/>
-            <a:ext cx="550164" cy="111880"/>
+            <a:off x="8558784" y="4880744"/>
+            <a:ext cx="550164" cy="122637"/>
           </a:xfrm>
           <a:prstGeom prst="rect">
             <a:avLst/>
@@ -6362,8 +6362,8 @@
         </p:nvSpPr>
         <p:spPr>
           <a:xfrm>
-            <a:off x="9482328" y="4582758"/>
-            <a:ext cx="676656" cy="223759"/>
+            <a:off x="9482328" y="4819426"/>
+            <a:ext cx="676656" cy="245274"/>
           </a:xfrm>
           <a:prstGeom prst="rect">
             <a:avLst/>
@@ -6401,8 +6401,8 @@
         </p:nvSpPr>
         <p:spPr>
           <a:xfrm>
-            <a:off x="10158984" y="4582758"/>
-            <a:ext cx="1188720" cy="223759"/>
+            <a:off x="10158984" y="4819426"/>
+            <a:ext cx="1188720" cy="245274"/>
           </a:xfrm>
           <a:prstGeom prst="rect">
             <a:avLst/>
@@ -6440,8 +6440,8 @@
         </p:nvSpPr>
         <p:spPr>
           <a:xfrm>
-            <a:off x="6208776" y="4806517"/>
-            <a:ext cx="310896" cy="223759"/>
+            <a:off x="6208776" y="5064700"/>
+            <a:ext cx="310896" cy="245274"/>
           </a:xfrm>
           <a:prstGeom prst="rect">
             <a:avLst/>
@@ -6479,8 +6479,8 @@
         </p:nvSpPr>
         <p:spPr>
           <a:xfrm>
-            <a:off x="6565392" y="4806517"/>
-            <a:ext cx="1920240" cy="223759"/>
+            <a:off x="6565392" y="5064700"/>
+            <a:ext cx="1920240" cy="245274"/>
           </a:xfrm>
           <a:prstGeom prst="rect">
             <a:avLst/>
@@ -6518,8 +6518,8 @@
         </p:nvSpPr>
         <p:spPr>
           <a:xfrm>
-            <a:off x="8558784" y="4862456"/>
-            <a:ext cx="534370" cy="111880"/>
+            <a:off x="8558784" y="5126019"/>
+            <a:ext cx="534370" cy="122637"/>
           </a:xfrm>
           <a:prstGeom prst="rect">
             <a:avLst/>
@@ -6538,8 +6538,8 @@
         </p:nvSpPr>
         <p:spPr>
           <a:xfrm>
-            <a:off x="9482328" y="4806517"/>
-            <a:ext cx="676656" cy="223759"/>
+            <a:off x="9482328" y="5064700"/>
+            <a:ext cx="676656" cy="245274"/>
           </a:xfrm>
           <a:prstGeom prst="rect">
             <a:avLst/>
@@ -6577,8 +6577,8 @@
         </p:nvSpPr>
         <p:spPr>
           <a:xfrm>
-            <a:off x="10158984" y="4806517"/>
-            <a:ext cx="1188720" cy="223759"/>
+            <a:off x="10158984" y="5064700"/>
+            <a:ext cx="1188720" cy="245274"/>
           </a:xfrm>
           <a:prstGeom prst="rect">
             <a:avLst/>
@@ -6616,8 +6616,8 @@
         </p:nvSpPr>
         <p:spPr>
           <a:xfrm>
-            <a:off x="6208776" y="5030276"/>
-            <a:ext cx="310896" cy="223759"/>
+            <a:off x="6208776" y="5309975"/>
+            <a:ext cx="310896" cy="245274"/>
           </a:xfrm>
           <a:prstGeom prst="rect">
             <a:avLst/>
@@ -6655,8 +6655,8 @@
         </p:nvSpPr>
         <p:spPr>
           <a:xfrm>
-            <a:off x="6565392" y="5030276"/>
-            <a:ext cx="1920240" cy="223759"/>
+            <a:off x="6565392" y="5309975"/>
+            <a:ext cx="1920240" cy="245274"/>
           </a:xfrm>
           <a:prstGeom prst="rect">
             <a:avLst/>
@@ -6694,8 +6694,8 @@
         </p:nvSpPr>
         <p:spPr>
           <a:xfrm>
-            <a:off x="8558784" y="5086216"/>
-            <a:ext cx="435217" cy="111880"/>
+            <a:off x="8558784" y="5371293"/>
+            <a:ext cx="435217" cy="122637"/>
           </a:xfrm>
           <a:prstGeom prst="rect">
             <a:avLst/>
@@ -6714,8 +6714,8 @@
         </p:nvSpPr>
         <p:spPr>
           <a:xfrm>
-            <a:off x="9482328" y="5030276"/>
-            <a:ext cx="676656" cy="223759"/>
+            <a:off x="9482328" y="5309975"/>
+            <a:ext cx="676656" cy="245274"/>
           </a:xfrm>
           <a:prstGeom prst="rect">
             <a:avLst/>
@@ -6753,8 +6753,8 @@
         </p:nvSpPr>
         <p:spPr>
           <a:xfrm>
-            <a:off x="10158984" y="5030276"/>
-            <a:ext cx="1188720" cy="223759"/>
+            <a:off x="10158984" y="5309975"/>
+            <a:ext cx="1188720" cy="245274"/>
           </a:xfrm>
           <a:prstGeom prst="rect">
             <a:avLst/>
@@ -6792,8 +6792,8 @@
         </p:nvSpPr>
         <p:spPr>
           <a:xfrm>
-            <a:off x="6208776" y="5254035"/>
-            <a:ext cx="310896" cy="223759"/>
+            <a:off x="6208776" y="5555249"/>
+            <a:ext cx="310896" cy="245274"/>
           </a:xfrm>
           <a:prstGeom prst="rect">
             <a:avLst/>
@@ -6831,8 +6831,8 @@
         </p:nvSpPr>
         <p:spPr>
           <a:xfrm>
-            <a:off x="6565392" y="5254035"/>
-            <a:ext cx="1920240" cy="223759"/>
+            <a:off x="6565392" y="5555249"/>
+            <a:ext cx="1920240" cy="245274"/>
           </a:xfrm>
           <a:prstGeom prst="rect">
             <a:avLst/>
@@ -6870,8 +6870,8 @@
         </p:nvSpPr>
         <p:spPr>
           <a:xfrm>
-            <a:off x="8558784" y="5309975"/>
-            <a:ext cx="400997" cy="111880"/>
+            <a:off x="8558784" y="5616568"/>
+            <a:ext cx="400997" cy="122637"/>
           </a:xfrm>
           <a:prstGeom prst="rect">
             <a:avLst/>
@@ -6890,8 +6890,8 @@
         </p:nvSpPr>
         <p:spPr>
           <a:xfrm>
-            <a:off x="9482328" y="5254035"/>
-            <a:ext cx="676656" cy="223759"/>
+            <a:off x="9482328" y="5555249"/>
+            <a:ext cx="676656" cy="245274"/>
           </a:xfrm>
           <a:prstGeom prst="rect">
             <a:avLst/>
@@ -6929,8 +6929,8 @@
         </p:nvSpPr>
         <p:spPr>
           <a:xfrm>
-            <a:off x="10158984" y="5254035"/>
-            <a:ext cx="1188720" cy="223759"/>
+            <a:off x="10158984" y="5555249"/>
+            <a:ext cx="1188720" cy="245274"/>
           </a:xfrm>
           <a:prstGeom prst="rect">
             <a:avLst/>
@@ -6968,8 +6968,8 @@
         </p:nvSpPr>
         <p:spPr>
           <a:xfrm>
-            <a:off x="6208776" y="5477794"/>
-            <a:ext cx="310896" cy="223759"/>
+            <a:off x="6208776" y="5800523"/>
+            <a:ext cx="310896" cy="245274"/>
           </a:xfrm>
           <a:prstGeom prst="rect">
             <a:avLst/>
@@ -7007,8 +7007,8 @@
         </p:nvSpPr>
         <p:spPr>
           <a:xfrm>
-            <a:off x="6565392" y="5477794"/>
-            <a:ext cx="1920240" cy="223759"/>
+            <a:off x="6565392" y="5800523"/>
+            <a:ext cx="1920240" cy="245274"/>
           </a:xfrm>
           <a:prstGeom prst="rect">
             <a:avLst/>
@@ -7046,8 +7046,8 @@
         </p:nvSpPr>
         <p:spPr>
           <a:xfrm>
-            <a:off x="8558784" y="5533734"/>
-            <a:ext cx="355369" cy="111880"/>
+            <a:off x="8558784" y="5861842"/>
+            <a:ext cx="355369" cy="122637"/>
           </a:xfrm>
           <a:prstGeom prst="rect">
             <a:avLst/>
@@ -7066,8 +7066,8 @@
         </p:nvSpPr>
         <p:spPr>
           <a:xfrm>
-            <a:off x="9482328" y="5477794"/>
-            <a:ext cx="676656" cy="223759"/>
+            <a:off x="9482328" y="5800523"/>
+            <a:ext cx="676656" cy="245274"/>
           </a:xfrm>
           <a:prstGeom prst="rect">
             <a:avLst/>
@@ -7105,8 +7105,8 @@
         </p:nvSpPr>
         <p:spPr>
           <a:xfrm>
-            <a:off x="10158984" y="5477794"/>
-            <a:ext cx="1188720" cy="223759"/>
+            <a:off x="10158984" y="5800523"/>
+            <a:ext cx="1188720" cy="245274"/>
           </a:xfrm>
           <a:prstGeom prst="rect">
             <a:avLst/>
@@ -7301,7 +7301,7 @@
         <p:spPr>
           <a:xfrm>
             <a:off x="3790770" y="2121408"/>
-            <a:ext cx="14630" cy="3803904"/>
+            <a:ext cx="14630" cy="4169664"/>
           </a:xfrm>
           <a:prstGeom prst="rect">
             <a:avLst/>
@@ -7321,7 +7321,7 @@
         <p:spPr>
           <a:xfrm>
             <a:off x="9341178" y="2121408"/>
-            <a:ext cx="14630" cy="3803904"/>
+            <a:ext cx="14630" cy="4169664"/>
           </a:xfrm>
           <a:prstGeom prst="rect">
             <a:avLst/>
@@ -7341,7 +7341,7 @@
         <p:spPr>
           <a:xfrm>
             <a:off x="6085332" y="2121408"/>
-            <a:ext cx="10973" cy="3803904"/>
+            <a:ext cx="10973" cy="4169664"/>
           </a:xfrm>
           <a:prstGeom prst="rect">
             <a:avLst/>
@@ -7351,65 +7351,6 @@
           </a:solidFill>
           <a:ln/>
         </p:spPr>
-      </p:sp>
-      <p:sp>
-        <p:nvSpPr>
-          <p:cNvPr id="183" name="Shape 181"/>
-          <p:cNvSpPr/>
-          <p:nvPr/>
-        </p:nvSpPr>
-        <p:spPr>
-          <a:xfrm>
-            <a:off x="457200" y="6126480"/>
-            <a:ext cx="11274552" cy="615696"/>
-          </a:xfrm>
-          <a:prstGeom prst="rect">
-            <a:avLst/>
-          </a:prstGeom>
-          <a:solidFill>
-            <a:srgbClr val="EDF4FA"/>
-          </a:solidFill>
-          <a:ln/>
-        </p:spPr>
-      </p:sp>
-      <p:sp>
-        <p:nvSpPr>
-          <p:cNvPr id="184" name="Text 182"/>
-          <p:cNvSpPr txBox="1"/>
-          <p:nvPr/>
-        </p:nvSpPr>
-        <p:spPr>
-          <a:xfrm>
-            <a:off x="658368" y="6144768"/>
-            <a:ext cx="10927080" cy="579120"/>
-          </a:xfrm>
-          <a:prstGeom prst="rect">
-            <a:avLst/>
-          </a:prstGeom>
-          <a:noFill/>
-          <a:ln/>
-        </p:spPr>
-        <p:txBody>
-          <a:bodyPr wrap="square" lIns="0" tIns="0" rIns="0" bIns="0" rtlCol="0" anchor="ctr"/>
-          <a:lstStyle/>
-          <a:p>
-            <a:pPr indent="0" marL="0">
-              <a:buNone/>
-            </a:pPr>
-            <a:r>
-              <a:rPr lang="en-US" sz="1600" b="1" dirty="0">
-                <a:solidFill>
-                  <a:srgbClr val="0B2C4A"/>
-                </a:solidFill>
-                <a:latin typeface="Inter" pitchFamily="34" charset="0"/>
-                <a:ea typeface="Inter" pitchFamily="34" charset="-122"/>
-                <a:cs typeface="Inter" pitchFamily="34" charset="-120"/>
-              </a:rPr>
-              <a:t>12 of 33 stores at or above the 90.0% benchmark; the group is at 81.3%. LR Reno and VW Henderson lead at 99.0%; Cadillac is lowest at 40.5%.</a:t>
-            </a:r>
-            <a:endParaRPr lang="en-US" sz="1600" dirty="0"/>
-          </a:p>
-        </p:txBody>
       </p:sp>
     </p:spTree>
   </p:cSld>
@@ -7550,7 +7491,7 @@
         <p:spPr>
           <a:xfrm>
             <a:off x="457200" y="1207008"/>
-            <a:ext cx="11274552" cy="4782312"/>
+            <a:ext cx="11274552" cy="5148072"/>
           </a:xfrm>
           <a:prstGeom prst="rect">
             <a:avLst/>
@@ -7727,7 +7668,7 @@
         <p:spPr>
           <a:xfrm>
             <a:off x="658368" y="2121408"/>
-            <a:ext cx="310896" cy="223759"/>
+            <a:ext cx="310896" cy="245274"/>
           </a:xfrm>
           <a:prstGeom prst="rect">
             <a:avLst/>
@@ -7766,7 +7707,7 @@
         <p:spPr>
           <a:xfrm>
             <a:off x="1014984" y="2121408"/>
-            <a:ext cx="1920240" cy="223759"/>
+            <a:ext cx="1920240" cy="245274"/>
           </a:xfrm>
           <a:prstGeom prst="rect">
             <a:avLst/>
@@ -7804,8 +7745,8 @@
         </p:nvSpPr>
         <p:spPr>
           <a:xfrm>
-            <a:off x="3008376" y="2177348"/>
-            <a:ext cx="868680" cy="111880"/>
+            <a:off x="3008376" y="2182727"/>
+            <a:ext cx="868680" cy="122637"/>
           </a:xfrm>
           <a:prstGeom prst="rect">
             <a:avLst/>
@@ -7825,7 +7766,7 @@
         <p:spPr>
           <a:xfrm>
             <a:off x="3931920" y="2121408"/>
-            <a:ext cx="676656" cy="223759"/>
+            <a:ext cx="676656" cy="245274"/>
           </a:xfrm>
           <a:prstGeom prst="rect">
             <a:avLst/>
@@ -7864,7 +7805,7 @@
         <p:spPr>
           <a:xfrm>
             <a:off x="4608576" y="2121408"/>
-            <a:ext cx="1188720" cy="223759"/>
+            <a:ext cx="1188720" cy="245274"/>
           </a:xfrm>
           <a:prstGeom prst="rect">
             <a:avLst/>
@@ -7902,8 +7843,8 @@
         </p:nvSpPr>
         <p:spPr>
           <a:xfrm>
-            <a:off x="658368" y="2345167"/>
-            <a:ext cx="310896" cy="223759"/>
+            <a:off x="658368" y="2366682"/>
+            <a:ext cx="310896" cy="245274"/>
           </a:xfrm>
           <a:prstGeom prst="rect">
             <a:avLst/>
@@ -7941,8 +7882,8 @@
         </p:nvSpPr>
         <p:spPr>
           <a:xfrm>
-            <a:off x="1014984" y="2345167"/>
-            <a:ext cx="1920240" cy="223759"/>
+            <a:off x="1014984" y="2366682"/>
+            <a:ext cx="1920240" cy="245274"/>
           </a:xfrm>
           <a:prstGeom prst="rect">
             <a:avLst/>
@@ -7980,8 +7921,8 @@
         </p:nvSpPr>
         <p:spPr>
           <a:xfrm>
-            <a:off x="3008376" y="2401107"/>
-            <a:ext cx="832485" cy="111880"/>
+            <a:off x="3008376" y="2428001"/>
+            <a:ext cx="832485" cy="122637"/>
           </a:xfrm>
           <a:prstGeom prst="rect">
             <a:avLst/>
@@ -8000,8 +7941,8 @@
         </p:nvSpPr>
         <p:spPr>
           <a:xfrm>
-            <a:off x="3931920" y="2345167"/>
-            <a:ext cx="676656" cy="223759"/>
+            <a:off x="3931920" y="2366682"/>
+            <a:ext cx="676656" cy="245274"/>
           </a:xfrm>
           <a:prstGeom prst="rect">
             <a:avLst/>
@@ -8039,8 +7980,8 @@
         </p:nvSpPr>
         <p:spPr>
           <a:xfrm>
-            <a:off x="4608576" y="2345167"/>
-            <a:ext cx="1188720" cy="223759"/>
+            <a:off x="4608576" y="2366682"/>
+            <a:ext cx="1188720" cy="245274"/>
           </a:xfrm>
           <a:prstGeom prst="rect">
             <a:avLst/>
@@ -8078,8 +8019,8 @@
         </p:nvSpPr>
         <p:spPr>
           <a:xfrm>
-            <a:off x="658368" y="2568926"/>
-            <a:ext cx="310896" cy="223759"/>
+            <a:off x="658368" y="2611957"/>
+            <a:ext cx="310896" cy="245274"/>
           </a:xfrm>
           <a:prstGeom prst="rect">
             <a:avLst/>
@@ -8117,8 +8058,8 @@
         </p:nvSpPr>
         <p:spPr>
           <a:xfrm>
-            <a:off x="1014984" y="2568926"/>
-            <a:ext cx="1920240" cy="223759"/>
+            <a:off x="1014984" y="2611957"/>
+            <a:ext cx="1920240" cy="245274"/>
           </a:xfrm>
           <a:prstGeom prst="rect">
             <a:avLst/>
@@ -8156,8 +8097,8 @@
         </p:nvSpPr>
         <p:spPr>
           <a:xfrm>
-            <a:off x="3008376" y="2624866"/>
-            <a:ext cx="825246" cy="111880"/>
+            <a:off x="3008376" y="2673275"/>
+            <a:ext cx="825246" cy="122637"/>
           </a:xfrm>
           <a:prstGeom prst="rect">
             <a:avLst/>
@@ -8176,8 +8117,8 @@
         </p:nvSpPr>
         <p:spPr>
           <a:xfrm>
-            <a:off x="3931920" y="2568926"/>
-            <a:ext cx="676656" cy="223759"/>
+            <a:off x="3931920" y="2611957"/>
+            <a:ext cx="676656" cy="245274"/>
           </a:xfrm>
           <a:prstGeom prst="rect">
             <a:avLst/>
@@ -8215,8 +8156,8 @@
         </p:nvSpPr>
         <p:spPr>
           <a:xfrm>
-            <a:off x="4608576" y="2568926"/>
-            <a:ext cx="1188720" cy="223759"/>
+            <a:off x="4608576" y="2611957"/>
+            <a:ext cx="1188720" cy="245274"/>
           </a:xfrm>
           <a:prstGeom prst="rect">
             <a:avLst/>
@@ -8254,8 +8195,8 @@
         </p:nvSpPr>
         <p:spPr>
           <a:xfrm>
-            <a:off x="658368" y="2792685"/>
-            <a:ext cx="310896" cy="223759"/>
+            <a:off x="658368" y="2857231"/>
+            <a:ext cx="310896" cy="245274"/>
           </a:xfrm>
           <a:prstGeom prst="rect">
             <a:avLst/>
@@ -8293,8 +8234,8 @@
         </p:nvSpPr>
         <p:spPr>
           <a:xfrm>
-            <a:off x="1014984" y="2792685"/>
-            <a:ext cx="1920240" cy="223759"/>
+            <a:off x="1014984" y="2857231"/>
+            <a:ext cx="1920240" cy="245274"/>
           </a:xfrm>
           <a:prstGeom prst="rect">
             <a:avLst/>
@@ -8332,8 +8273,8 @@
         </p:nvSpPr>
         <p:spPr>
           <a:xfrm>
-            <a:off x="3008376" y="2848625"/>
-            <a:ext cx="805339" cy="111880"/>
+            <a:off x="3008376" y="2918550"/>
+            <a:ext cx="805339" cy="122637"/>
           </a:xfrm>
           <a:prstGeom prst="rect">
             <a:avLst/>
@@ -8352,8 +8293,8 @@
         </p:nvSpPr>
         <p:spPr>
           <a:xfrm>
-            <a:off x="3931920" y="2792685"/>
-            <a:ext cx="676656" cy="223759"/>
+            <a:off x="3931920" y="2857231"/>
+            <a:ext cx="676656" cy="245274"/>
           </a:xfrm>
           <a:prstGeom prst="rect">
             <a:avLst/>
@@ -8391,8 +8332,8 @@
         </p:nvSpPr>
         <p:spPr>
           <a:xfrm>
-            <a:off x="4608576" y="2792685"/>
-            <a:ext cx="1188720" cy="223759"/>
+            <a:off x="4608576" y="2857231"/>
+            <a:ext cx="1188720" cy="245274"/>
           </a:xfrm>
           <a:prstGeom prst="rect">
             <a:avLst/>
@@ -8430,8 +8371,8 @@
         </p:nvSpPr>
         <p:spPr>
           <a:xfrm>
-            <a:off x="658368" y="3016444"/>
-            <a:ext cx="310896" cy="223759"/>
+            <a:off x="658368" y="3102505"/>
+            <a:ext cx="310896" cy="245274"/>
           </a:xfrm>
           <a:prstGeom prst="rect">
             <a:avLst/>
@@ -8469,8 +8410,8 @@
         </p:nvSpPr>
         <p:spPr>
           <a:xfrm>
-            <a:off x="1014984" y="3016444"/>
-            <a:ext cx="1920240" cy="223759"/>
+            <a:off x="1014984" y="3102505"/>
+            <a:ext cx="1920240" cy="245274"/>
           </a:xfrm>
           <a:prstGeom prst="rect">
             <a:avLst/>
@@ -8508,8 +8449,8 @@
         </p:nvSpPr>
         <p:spPr>
           <a:xfrm>
-            <a:off x="3008376" y="3072384"/>
-            <a:ext cx="805339" cy="111880"/>
+            <a:off x="3008376" y="3163824"/>
+            <a:ext cx="805339" cy="122637"/>
           </a:xfrm>
           <a:prstGeom prst="rect">
             <a:avLst/>
@@ -8528,8 +8469,8 @@
         </p:nvSpPr>
         <p:spPr>
           <a:xfrm>
-            <a:off x="3931920" y="3016444"/>
-            <a:ext cx="676656" cy="223759"/>
+            <a:off x="3931920" y="3102505"/>
+            <a:ext cx="676656" cy="245274"/>
           </a:xfrm>
           <a:prstGeom prst="rect">
             <a:avLst/>
@@ -8567,8 +8508,8 @@
         </p:nvSpPr>
         <p:spPr>
           <a:xfrm>
-            <a:off x="4608576" y="3016444"/>
-            <a:ext cx="1188720" cy="223759"/>
+            <a:off x="4608576" y="3102505"/>
+            <a:ext cx="1188720" cy="245274"/>
           </a:xfrm>
           <a:prstGeom prst="rect">
             <a:avLst/>
@@ -8606,8 +8547,8 @@
         </p:nvSpPr>
         <p:spPr>
           <a:xfrm>
-            <a:off x="658368" y="3240203"/>
-            <a:ext cx="310896" cy="223759"/>
+            <a:off x="658368" y="3347780"/>
+            <a:ext cx="310896" cy="245274"/>
           </a:xfrm>
           <a:prstGeom prst="rect">
             <a:avLst/>
@@ -8645,8 +8586,8 @@
         </p:nvSpPr>
         <p:spPr>
           <a:xfrm>
-            <a:off x="1014984" y="3240203"/>
-            <a:ext cx="1920240" cy="223759"/>
+            <a:off x="1014984" y="3347780"/>
+            <a:ext cx="1920240" cy="245274"/>
           </a:xfrm>
           <a:prstGeom prst="rect">
             <a:avLst/>
@@ -8684,8 +8625,8 @@
         </p:nvSpPr>
         <p:spPr>
           <a:xfrm>
-            <a:off x="3008376" y="3296143"/>
-            <a:ext cx="805339" cy="111880"/>
+            <a:off x="3008376" y="3409098"/>
+            <a:ext cx="805339" cy="122637"/>
           </a:xfrm>
           <a:prstGeom prst="rect">
             <a:avLst/>
@@ -8704,8 +8645,8 @@
         </p:nvSpPr>
         <p:spPr>
           <a:xfrm>
-            <a:off x="3931920" y="3240203"/>
-            <a:ext cx="676656" cy="223759"/>
+            <a:off x="3931920" y="3347780"/>
+            <a:ext cx="676656" cy="245274"/>
           </a:xfrm>
           <a:prstGeom prst="rect">
             <a:avLst/>
@@ -8743,8 +8684,8 @@
         </p:nvSpPr>
         <p:spPr>
           <a:xfrm>
-            <a:off x="4608576" y="3240203"/>
-            <a:ext cx="1188720" cy="223759"/>
+            <a:off x="4608576" y="3347780"/>
+            <a:ext cx="1188720" cy="245274"/>
           </a:xfrm>
           <a:prstGeom prst="rect">
             <a:avLst/>
@@ -8782,8 +8723,8 @@
         </p:nvSpPr>
         <p:spPr>
           <a:xfrm>
-            <a:off x="658368" y="3463962"/>
-            <a:ext cx="310896" cy="223759"/>
+            <a:off x="658368" y="3593054"/>
+            <a:ext cx="310896" cy="245274"/>
           </a:xfrm>
           <a:prstGeom prst="rect">
             <a:avLst/>
@@ -8821,8 +8762,8 @@
         </p:nvSpPr>
         <p:spPr>
           <a:xfrm>
-            <a:off x="1014984" y="3463962"/>
-            <a:ext cx="1920240" cy="223759"/>
+            <a:off x="1014984" y="3593054"/>
+            <a:ext cx="1920240" cy="245274"/>
           </a:xfrm>
           <a:prstGeom prst="rect">
             <a:avLst/>
@@ -8860,8 +8801,8 @@
         </p:nvSpPr>
         <p:spPr>
           <a:xfrm>
-            <a:off x="3008376" y="3519902"/>
-            <a:ext cx="786336" cy="111880"/>
+            <a:off x="3008376" y="3654373"/>
+            <a:ext cx="786336" cy="122637"/>
           </a:xfrm>
           <a:prstGeom prst="rect">
             <a:avLst/>
@@ -8880,8 +8821,8 @@
         </p:nvSpPr>
         <p:spPr>
           <a:xfrm>
-            <a:off x="3931920" y="3463962"/>
-            <a:ext cx="676656" cy="223759"/>
+            <a:off x="3931920" y="3593054"/>
+            <a:ext cx="676656" cy="245274"/>
           </a:xfrm>
           <a:prstGeom prst="rect">
             <a:avLst/>
@@ -8919,8 +8860,8 @@
         </p:nvSpPr>
         <p:spPr>
           <a:xfrm>
-            <a:off x="4608576" y="3463962"/>
-            <a:ext cx="1188720" cy="223759"/>
+            <a:off x="4608576" y="3593054"/>
+            <a:ext cx="1188720" cy="245274"/>
           </a:xfrm>
           <a:prstGeom prst="rect">
             <a:avLst/>
@@ -8958,8 +8899,8 @@
         </p:nvSpPr>
         <p:spPr>
           <a:xfrm>
-            <a:off x="658368" y="3687721"/>
-            <a:ext cx="310896" cy="223759"/>
+            <a:off x="658368" y="3838328"/>
+            <a:ext cx="310896" cy="245274"/>
           </a:xfrm>
           <a:prstGeom prst="rect">
             <a:avLst/>
@@ -8997,8 +8938,8 @@
         </p:nvSpPr>
         <p:spPr>
           <a:xfrm>
-            <a:off x="1014984" y="3687721"/>
-            <a:ext cx="1920240" cy="223759"/>
+            <a:off x="1014984" y="3838328"/>
+            <a:ext cx="1920240" cy="245274"/>
           </a:xfrm>
           <a:prstGeom prst="rect">
             <a:avLst/>
@@ -9036,8 +8977,8 @@
         </p:nvSpPr>
         <p:spPr>
           <a:xfrm>
-            <a:off x="3008376" y="3743661"/>
-            <a:ext cx="773668" cy="111880"/>
+            <a:off x="3008376" y="3899647"/>
+            <a:ext cx="773668" cy="122637"/>
           </a:xfrm>
           <a:prstGeom prst="rect">
             <a:avLst/>
@@ -9056,8 +8997,8 @@
         </p:nvSpPr>
         <p:spPr>
           <a:xfrm>
-            <a:off x="3931920" y="3687721"/>
-            <a:ext cx="676656" cy="223759"/>
+            <a:off x="3931920" y="3838328"/>
+            <a:ext cx="676656" cy="245274"/>
           </a:xfrm>
           <a:prstGeom prst="rect">
             <a:avLst/>
@@ -9095,8 +9036,8 @@
         </p:nvSpPr>
         <p:spPr>
           <a:xfrm>
-            <a:off x="4608576" y="3687721"/>
-            <a:ext cx="1188720" cy="223759"/>
+            <a:off x="4608576" y="3838328"/>
+            <a:ext cx="1188720" cy="245274"/>
           </a:xfrm>
           <a:prstGeom prst="rect">
             <a:avLst/>
@@ -9134,8 +9075,8 @@
         </p:nvSpPr>
         <p:spPr>
           <a:xfrm>
-            <a:off x="658368" y="3911480"/>
-            <a:ext cx="310896" cy="223759"/>
+            <a:off x="658368" y="4083603"/>
+            <a:ext cx="310896" cy="245274"/>
           </a:xfrm>
           <a:prstGeom prst="rect">
             <a:avLst/>
@@ -9173,8 +9114,8 @@
         </p:nvSpPr>
         <p:spPr>
           <a:xfrm>
-            <a:off x="1014984" y="3911480"/>
-            <a:ext cx="1920240" cy="223759"/>
+            <a:off x="1014984" y="4083603"/>
+            <a:ext cx="1920240" cy="245274"/>
           </a:xfrm>
           <a:prstGeom prst="rect">
             <a:avLst/>
@@ -9212,8 +9153,8 @@
         </p:nvSpPr>
         <p:spPr>
           <a:xfrm>
-            <a:off x="3008376" y="3967420"/>
-            <a:ext cx="740188" cy="111880"/>
+            <a:off x="3008376" y="4144921"/>
+            <a:ext cx="740188" cy="122637"/>
           </a:xfrm>
           <a:prstGeom prst="rect">
             <a:avLst/>
@@ -9232,8 +9173,8 @@
         </p:nvSpPr>
         <p:spPr>
           <a:xfrm>
-            <a:off x="3931920" y="3911480"/>
-            <a:ext cx="676656" cy="223759"/>
+            <a:off x="3931920" y="4083603"/>
+            <a:ext cx="676656" cy="245274"/>
           </a:xfrm>
           <a:prstGeom prst="rect">
             <a:avLst/>
@@ -9271,8 +9212,8 @@
         </p:nvSpPr>
         <p:spPr>
           <a:xfrm>
-            <a:off x="4608576" y="3911480"/>
-            <a:ext cx="1188720" cy="223759"/>
+            <a:off x="4608576" y="4083603"/>
+            <a:ext cx="1188720" cy="245274"/>
           </a:xfrm>
           <a:prstGeom prst="rect">
             <a:avLst/>
@@ -9310,8 +9251,8 @@
         </p:nvSpPr>
         <p:spPr>
           <a:xfrm>
-            <a:off x="658368" y="4135240"/>
-            <a:ext cx="310896" cy="223759"/>
+            <a:off x="658368" y="4328877"/>
+            <a:ext cx="310896" cy="245274"/>
           </a:xfrm>
           <a:prstGeom prst="rect">
             <a:avLst/>
@@ -9349,8 +9290,8 @@
         </p:nvSpPr>
         <p:spPr>
           <a:xfrm>
-            <a:off x="1014984" y="4135240"/>
-            <a:ext cx="1920240" cy="223759"/>
+            <a:off x="1014984" y="4328877"/>
+            <a:ext cx="1920240" cy="245274"/>
           </a:xfrm>
           <a:prstGeom prst="rect">
             <a:avLst/>
@@ -9388,8 +9329,8 @@
         </p:nvSpPr>
         <p:spPr>
           <a:xfrm>
-            <a:off x="3008376" y="4191179"/>
-            <a:ext cx="735663" cy="111880"/>
+            <a:off x="3008376" y="4390196"/>
+            <a:ext cx="735663" cy="122637"/>
           </a:xfrm>
           <a:prstGeom prst="rect">
             <a:avLst/>
@@ -9408,8 +9349,8 @@
         </p:nvSpPr>
         <p:spPr>
           <a:xfrm>
-            <a:off x="3931920" y="4135240"/>
-            <a:ext cx="676656" cy="223759"/>
+            <a:off x="3931920" y="4328877"/>
+            <a:ext cx="676656" cy="245274"/>
           </a:xfrm>
           <a:prstGeom prst="rect">
             <a:avLst/>
@@ -9447,8 +9388,8 @@
         </p:nvSpPr>
         <p:spPr>
           <a:xfrm>
-            <a:off x="4608576" y="4135240"/>
-            <a:ext cx="1188720" cy="223759"/>
+            <a:off x="4608576" y="4328877"/>
+            <a:ext cx="1188720" cy="245274"/>
           </a:xfrm>
           <a:prstGeom prst="rect">
             <a:avLst/>
@@ -9486,8 +9427,8 @@
         </p:nvSpPr>
         <p:spPr>
           <a:xfrm>
-            <a:off x="658368" y="4358999"/>
-            <a:ext cx="310896" cy="223759"/>
+            <a:off x="658368" y="4574152"/>
+            <a:ext cx="310896" cy="245274"/>
           </a:xfrm>
           <a:prstGeom prst="rect">
             <a:avLst/>
@@ -9525,8 +9466,8 @@
         </p:nvSpPr>
         <p:spPr>
           <a:xfrm>
-            <a:off x="1014984" y="4358999"/>
-            <a:ext cx="1920240" cy="223759"/>
+            <a:off x="1014984" y="4574152"/>
+            <a:ext cx="1920240" cy="245274"/>
           </a:xfrm>
           <a:prstGeom prst="rect">
             <a:avLst/>
@@ -9564,8 +9505,8 @@
         </p:nvSpPr>
         <p:spPr>
           <a:xfrm>
-            <a:off x="3008376" y="4414938"/>
-            <a:ext cx="718471" cy="111880"/>
+            <a:off x="3008376" y="4635470"/>
+            <a:ext cx="718471" cy="122637"/>
           </a:xfrm>
           <a:prstGeom prst="rect">
             <a:avLst/>
@@ -9584,8 +9525,8 @@
         </p:nvSpPr>
         <p:spPr>
           <a:xfrm>
-            <a:off x="3931920" y="4358999"/>
-            <a:ext cx="676656" cy="223759"/>
+            <a:off x="3931920" y="4574152"/>
+            <a:ext cx="676656" cy="245274"/>
           </a:xfrm>
           <a:prstGeom prst="rect">
             <a:avLst/>
@@ -9623,8 +9564,8 @@
         </p:nvSpPr>
         <p:spPr>
           <a:xfrm>
-            <a:off x="4608576" y="4358999"/>
-            <a:ext cx="1188720" cy="223759"/>
+            <a:off x="4608576" y="4574152"/>
+            <a:ext cx="1188720" cy="245274"/>
           </a:xfrm>
           <a:prstGeom prst="rect">
             <a:avLst/>
@@ -9662,8 +9603,8 @@
         </p:nvSpPr>
         <p:spPr>
           <a:xfrm>
-            <a:off x="658368" y="4582758"/>
-            <a:ext cx="310896" cy="223759"/>
+            <a:off x="658368" y="4819426"/>
+            <a:ext cx="310896" cy="245274"/>
           </a:xfrm>
           <a:prstGeom prst="rect">
             <a:avLst/>
@@ -9701,8 +9642,8 @@
         </p:nvSpPr>
         <p:spPr>
           <a:xfrm>
-            <a:off x="1014984" y="4582758"/>
-            <a:ext cx="1920240" cy="223759"/>
+            <a:off x="1014984" y="4819426"/>
+            <a:ext cx="1920240" cy="245274"/>
           </a:xfrm>
           <a:prstGeom prst="rect">
             <a:avLst/>
@@ -9740,8 +9681,8 @@
         </p:nvSpPr>
         <p:spPr>
           <a:xfrm>
-            <a:off x="3008376" y="4638697"/>
-            <a:ext cx="713946" cy="111880"/>
+            <a:off x="3008376" y="4880744"/>
+            <a:ext cx="713946" cy="122637"/>
           </a:xfrm>
           <a:prstGeom prst="rect">
             <a:avLst/>
@@ -9760,8 +9701,8 @@
         </p:nvSpPr>
         <p:spPr>
           <a:xfrm>
-            <a:off x="3931920" y="4582758"/>
-            <a:ext cx="676656" cy="223759"/>
+            <a:off x="3931920" y="4819426"/>
+            <a:ext cx="676656" cy="245274"/>
           </a:xfrm>
           <a:prstGeom prst="rect">
             <a:avLst/>
@@ -9799,8 +9740,8 @@
         </p:nvSpPr>
         <p:spPr>
           <a:xfrm>
-            <a:off x="4608576" y="4582758"/>
-            <a:ext cx="1188720" cy="223759"/>
+            <a:off x="4608576" y="4819426"/>
+            <a:ext cx="1188720" cy="245274"/>
           </a:xfrm>
           <a:prstGeom prst="rect">
             <a:avLst/>
@@ -9838,8 +9779,8 @@
         </p:nvSpPr>
         <p:spPr>
           <a:xfrm>
-            <a:off x="658368" y="4806517"/>
-            <a:ext cx="310896" cy="223759"/>
+            <a:off x="658368" y="5064700"/>
+            <a:ext cx="310896" cy="245274"/>
           </a:xfrm>
           <a:prstGeom prst="rect">
             <a:avLst/>
@@ -9877,8 +9818,8 @@
         </p:nvSpPr>
         <p:spPr>
           <a:xfrm>
-            <a:off x="1014984" y="4806517"/>
-            <a:ext cx="1920240" cy="223759"/>
+            <a:off x="1014984" y="5064700"/>
+            <a:ext cx="1920240" cy="245274"/>
           </a:xfrm>
           <a:prstGeom prst="rect">
             <a:avLst/>
@@ -9916,8 +9857,8 @@
         </p:nvSpPr>
         <p:spPr>
           <a:xfrm>
-            <a:off x="3008376" y="4862456"/>
-            <a:ext cx="702183" cy="111880"/>
+            <a:off x="3008376" y="5126019"/>
+            <a:ext cx="702183" cy="122637"/>
           </a:xfrm>
           <a:prstGeom prst="rect">
             <a:avLst/>
@@ -9936,8 +9877,8 @@
         </p:nvSpPr>
         <p:spPr>
           <a:xfrm>
-            <a:off x="3931920" y="4806517"/>
-            <a:ext cx="676656" cy="223759"/>
+            <a:off x="3931920" y="5064700"/>
+            <a:ext cx="676656" cy="245274"/>
           </a:xfrm>
           <a:prstGeom prst="rect">
             <a:avLst/>
@@ -9975,8 +9916,8 @@
         </p:nvSpPr>
         <p:spPr>
           <a:xfrm>
-            <a:off x="4608576" y="4806517"/>
-            <a:ext cx="1188720" cy="223759"/>
+            <a:off x="4608576" y="5064700"/>
+            <a:ext cx="1188720" cy="245274"/>
           </a:xfrm>
           <a:prstGeom prst="rect">
             <a:avLst/>
@@ -10014,8 +9955,8 @@
         </p:nvSpPr>
         <p:spPr>
           <a:xfrm>
-            <a:off x="658368" y="5030276"/>
-            <a:ext cx="310896" cy="223759"/>
+            <a:off x="658368" y="5309975"/>
+            <a:ext cx="310896" cy="245274"/>
           </a:xfrm>
           <a:prstGeom prst="rect">
             <a:avLst/>
@@ -10053,8 +9994,8 @@
         </p:nvSpPr>
         <p:spPr>
           <a:xfrm>
-            <a:off x="1014984" y="5030276"/>
-            <a:ext cx="1920240" cy="223759"/>
+            <a:off x="1014984" y="5309975"/>
+            <a:ext cx="1920240" cy="245274"/>
           </a:xfrm>
           <a:prstGeom prst="rect">
             <a:avLst/>
@@ -10092,8 +10033,8 @@
         </p:nvSpPr>
         <p:spPr>
           <a:xfrm>
-            <a:off x="3008376" y="5086216"/>
-            <a:ext cx="668703" cy="111880"/>
+            <a:off x="3008376" y="5371293"/>
+            <a:ext cx="668703" cy="122637"/>
           </a:xfrm>
           <a:prstGeom prst="rect">
             <a:avLst/>
@@ -10112,8 +10053,8 @@
         </p:nvSpPr>
         <p:spPr>
           <a:xfrm>
-            <a:off x="3931920" y="5030276"/>
-            <a:ext cx="676656" cy="223759"/>
+            <a:off x="3931920" y="5309975"/>
+            <a:ext cx="676656" cy="245274"/>
           </a:xfrm>
           <a:prstGeom prst="rect">
             <a:avLst/>
@@ -10151,8 +10092,8 @@
         </p:nvSpPr>
         <p:spPr>
           <a:xfrm>
-            <a:off x="4608576" y="5030276"/>
-            <a:ext cx="1188720" cy="223759"/>
+            <a:off x="4608576" y="5309975"/>
+            <a:ext cx="1188720" cy="245274"/>
           </a:xfrm>
           <a:prstGeom prst="rect">
             <a:avLst/>
@@ -10190,8 +10131,8 @@
         </p:nvSpPr>
         <p:spPr>
           <a:xfrm>
-            <a:off x="658368" y="5254035"/>
-            <a:ext cx="310896" cy="223759"/>
+            <a:off x="658368" y="5555249"/>
+            <a:ext cx="310896" cy="245274"/>
           </a:xfrm>
           <a:prstGeom prst="rect">
             <a:avLst/>
@@ -10229,8 +10170,8 @@
         </p:nvSpPr>
         <p:spPr>
           <a:xfrm>
-            <a:off x="1014984" y="5254035"/>
-            <a:ext cx="1920240" cy="223759"/>
+            <a:off x="1014984" y="5555249"/>
+            <a:ext cx="1920240" cy="245274"/>
           </a:xfrm>
           <a:prstGeom prst="rect">
             <a:avLst/>
@@ -10268,8 +10209,8 @@
         </p:nvSpPr>
         <p:spPr>
           <a:xfrm>
-            <a:off x="3008376" y="5309975"/>
-            <a:ext cx="637937" cy="111880"/>
+            <a:off x="3008376" y="5616568"/>
+            <a:ext cx="637937" cy="122637"/>
           </a:xfrm>
           <a:prstGeom prst="rect">
             <a:avLst/>
@@ -10288,8 +10229,8 @@
         </p:nvSpPr>
         <p:spPr>
           <a:xfrm>
-            <a:off x="3931920" y="5254035"/>
-            <a:ext cx="676656" cy="223759"/>
+            <a:off x="3931920" y="5555249"/>
+            <a:ext cx="676656" cy="245274"/>
           </a:xfrm>
           <a:prstGeom prst="rect">
             <a:avLst/>
@@ -10327,8 +10268,8 @@
         </p:nvSpPr>
         <p:spPr>
           <a:xfrm>
-            <a:off x="4608576" y="5254035"/>
-            <a:ext cx="1188720" cy="223759"/>
+            <a:off x="4608576" y="5555249"/>
+            <a:ext cx="1188720" cy="245274"/>
           </a:xfrm>
           <a:prstGeom prst="rect">
             <a:avLst/>
@@ -10366,8 +10307,8 @@
         </p:nvSpPr>
         <p:spPr>
           <a:xfrm>
-            <a:off x="658368" y="5477794"/>
-            <a:ext cx="310896" cy="223759"/>
+            <a:off x="658368" y="5800523"/>
+            <a:ext cx="310896" cy="245274"/>
           </a:xfrm>
           <a:prstGeom prst="rect">
             <a:avLst/>
@@ -10405,8 +10346,8 @@
         </p:nvSpPr>
         <p:spPr>
           <a:xfrm>
-            <a:off x="1014984" y="5477794"/>
-            <a:ext cx="1920240" cy="223759"/>
+            <a:off x="1014984" y="5800523"/>
+            <a:ext cx="1920240" cy="245274"/>
           </a:xfrm>
           <a:prstGeom prst="rect">
             <a:avLst/>
@@ -10444,8 +10385,8 @@
         </p:nvSpPr>
         <p:spPr>
           <a:xfrm>
-            <a:off x="3008376" y="5533734"/>
-            <a:ext cx="606266" cy="111880"/>
+            <a:off x="3008376" y="5861842"/>
+            <a:ext cx="606266" cy="122637"/>
           </a:xfrm>
           <a:prstGeom prst="rect">
             <a:avLst/>
@@ -10464,8 +10405,8 @@
         </p:nvSpPr>
         <p:spPr>
           <a:xfrm>
-            <a:off x="3931920" y="5477794"/>
-            <a:ext cx="676656" cy="223759"/>
+            <a:off x="3931920" y="5800523"/>
+            <a:ext cx="676656" cy="245274"/>
           </a:xfrm>
           <a:prstGeom prst="rect">
             <a:avLst/>
@@ -10503,8 +10444,8 @@
         </p:nvSpPr>
         <p:spPr>
           <a:xfrm>
-            <a:off x="4608576" y="5477794"/>
-            <a:ext cx="1188720" cy="223759"/>
+            <a:off x="4608576" y="5800523"/>
+            <a:ext cx="1188720" cy="245274"/>
           </a:xfrm>
           <a:prstGeom prst="rect">
             <a:avLst/>
@@ -10542,8 +10483,8 @@
         </p:nvSpPr>
         <p:spPr>
           <a:xfrm>
-            <a:off x="658368" y="5701553"/>
-            <a:ext cx="310896" cy="223759"/>
+            <a:off x="658368" y="6045798"/>
+            <a:ext cx="310896" cy="245274"/>
           </a:xfrm>
           <a:prstGeom prst="rect">
             <a:avLst/>
@@ -10581,8 +10522,8 @@
         </p:nvSpPr>
         <p:spPr>
           <a:xfrm>
-            <a:off x="1014984" y="5701553"/>
-            <a:ext cx="1920240" cy="223759"/>
+            <a:off x="1014984" y="6045798"/>
+            <a:ext cx="1920240" cy="245274"/>
           </a:xfrm>
           <a:prstGeom prst="rect">
             <a:avLst/>
@@ -10620,8 +10561,8 @@
         </p:nvSpPr>
         <p:spPr>
           <a:xfrm>
-            <a:off x="3008376" y="5757493"/>
-            <a:ext cx="602647" cy="111880"/>
+            <a:off x="3008376" y="6107116"/>
+            <a:ext cx="602647" cy="122637"/>
           </a:xfrm>
           <a:prstGeom prst="rect">
             <a:avLst/>
@@ -10640,8 +10581,8 @@
         </p:nvSpPr>
         <p:spPr>
           <a:xfrm>
-            <a:off x="3931920" y="5701553"/>
-            <a:ext cx="676656" cy="223759"/>
+            <a:off x="3931920" y="6045798"/>
+            <a:ext cx="676656" cy="245274"/>
           </a:xfrm>
           <a:prstGeom prst="rect">
             <a:avLst/>
@@ -10679,8 +10620,8 @@
         </p:nvSpPr>
         <p:spPr>
           <a:xfrm>
-            <a:off x="4608576" y="5701553"/>
-            <a:ext cx="1188720" cy="223759"/>
+            <a:off x="4608576" y="6045798"/>
+            <a:ext cx="1188720" cy="245274"/>
           </a:xfrm>
           <a:prstGeom prst="rect">
             <a:avLst/>
@@ -10719,7 +10660,7 @@
         <p:spPr>
           <a:xfrm>
             <a:off x="6208776" y="2121408"/>
-            <a:ext cx="310896" cy="223759"/>
+            <a:ext cx="310896" cy="245274"/>
           </a:xfrm>
           <a:prstGeom prst="rect">
             <a:avLst/>
@@ -10758,7 +10699,7 @@
         <p:spPr>
           <a:xfrm>
             <a:off x="6565392" y="2121408"/>
-            <a:ext cx="1920240" cy="223759"/>
+            <a:ext cx="1920240" cy="245274"/>
           </a:xfrm>
           <a:prstGeom prst="rect">
             <a:avLst/>
@@ -10796,8 +10737,8 @@
         </p:nvSpPr>
         <p:spPr>
           <a:xfrm>
-            <a:off x="8558784" y="2177348"/>
-            <a:ext cx="490442" cy="111880"/>
+            <a:off x="8558784" y="2182727"/>
+            <a:ext cx="490442" cy="122637"/>
           </a:xfrm>
           <a:prstGeom prst="rect">
             <a:avLst/>
@@ -10817,7 +10758,7 @@
         <p:spPr>
           <a:xfrm>
             <a:off x="9482328" y="2121408"/>
-            <a:ext cx="676656" cy="223759"/>
+            <a:ext cx="676656" cy="245274"/>
           </a:xfrm>
           <a:prstGeom prst="rect">
             <a:avLst/>
@@ -10856,7 +10797,7 @@
         <p:spPr>
           <a:xfrm>
             <a:off x="10158984" y="2121408"/>
-            <a:ext cx="1188720" cy="223759"/>
+            <a:ext cx="1188720" cy="245274"/>
           </a:xfrm>
           <a:prstGeom prst="rect">
             <a:avLst/>
@@ -10894,8 +10835,8 @@
         </p:nvSpPr>
         <p:spPr>
           <a:xfrm>
-            <a:off x="6208776" y="2345167"/>
-            <a:ext cx="310896" cy="223759"/>
+            <a:off x="6208776" y="2366682"/>
+            <a:ext cx="310896" cy="245274"/>
           </a:xfrm>
           <a:prstGeom prst="rect">
             <a:avLst/>
@@ -10933,8 +10874,8 @@
         </p:nvSpPr>
         <p:spPr>
           <a:xfrm>
-            <a:off x="6565392" y="2345167"/>
-            <a:ext cx="1920240" cy="223759"/>
+            <a:off x="6565392" y="2366682"/>
+            <a:ext cx="1920240" cy="245274"/>
           </a:xfrm>
           <a:prstGeom prst="rect">
             <a:avLst/>
@@ -10972,8 +10913,8 @@
         </p:nvSpPr>
         <p:spPr>
           <a:xfrm>
-            <a:off x="8558784" y="2401107"/>
-            <a:ext cx="480489" cy="111880"/>
+            <a:off x="8558784" y="2428001"/>
+            <a:ext cx="480489" cy="122637"/>
           </a:xfrm>
           <a:prstGeom prst="rect">
             <a:avLst/>
@@ -10992,8 +10933,8 @@
         </p:nvSpPr>
         <p:spPr>
           <a:xfrm>
-            <a:off x="9482328" y="2345167"/>
-            <a:ext cx="676656" cy="223759"/>
+            <a:off x="9482328" y="2366682"/>
+            <a:ext cx="676656" cy="245274"/>
           </a:xfrm>
           <a:prstGeom prst="rect">
             <a:avLst/>
@@ -11031,8 +10972,8 @@
         </p:nvSpPr>
         <p:spPr>
           <a:xfrm>
-            <a:off x="10158984" y="2345167"/>
-            <a:ext cx="1188720" cy="223759"/>
+            <a:off x="10158984" y="2366682"/>
+            <a:ext cx="1188720" cy="245274"/>
           </a:xfrm>
           <a:prstGeom prst="rect">
             <a:avLst/>
@@ -11070,8 +11011,8 @@
         </p:nvSpPr>
         <p:spPr>
           <a:xfrm>
-            <a:off x="6208776" y="2568926"/>
-            <a:ext cx="310896" cy="223759"/>
+            <a:off x="6208776" y="2611957"/>
+            <a:ext cx="310896" cy="245274"/>
           </a:xfrm>
           <a:prstGeom prst="rect">
             <a:avLst/>
@@ -11109,8 +11050,8 @@
         </p:nvSpPr>
         <p:spPr>
           <a:xfrm>
-            <a:off x="6565392" y="2568926"/>
-            <a:ext cx="1920240" cy="223759"/>
+            <a:off x="6565392" y="2611957"/>
+            <a:ext cx="1920240" cy="245274"/>
           </a:xfrm>
           <a:prstGeom prst="rect">
             <a:avLst/>
@@ -11148,8 +11089,8 @@
         </p:nvSpPr>
         <p:spPr>
           <a:xfrm>
-            <a:off x="8558784" y="2624866"/>
-            <a:ext cx="475059" cy="111880"/>
+            <a:off x="8558784" y="2673275"/>
+            <a:ext cx="475059" cy="122637"/>
           </a:xfrm>
           <a:prstGeom prst="rect">
             <a:avLst/>
@@ -11168,8 +11109,8 @@
         </p:nvSpPr>
         <p:spPr>
           <a:xfrm>
-            <a:off x="9482328" y="2568926"/>
-            <a:ext cx="676656" cy="223759"/>
+            <a:off x="9482328" y="2611957"/>
+            <a:ext cx="676656" cy="245274"/>
           </a:xfrm>
           <a:prstGeom prst="rect">
             <a:avLst/>
@@ -11207,8 +11148,8 @@
         </p:nvSpPr>
         <p:spPr>
           <a:xfrm>
-            <a:off x="10158984" y="2568926"/>
-            <a:ext cx="1188720" cy="223759"/>
+            <a:off x="10158984" y="2611957"/>
+            <a:ext cx="1188720" cy="245274"/>
           </a:xfrm>
           <a:prstGeom prst="rect">
             <a:avLst/>
@@ -11246,8 +11187,8 @@
         </p:nvSpPr>
         <p:spPr>
           <a:xfrm>
-            <a:off x="6208776" y="2792685"/>
-            <a:ext cx="310896" cy="223759"/>
+            <a:off x="6208776" y="2857231"/>
+            <a:ext cx="310896" cy="245274"/>
           </a:xfrm>
           <a:prstGeom prst="rect">
             <a:avLst/>
@@ -11285,8 +11226,8 @@
         </p:nvSpPr>
         <p:spPr>
           <a:xfrm>
-            <a:off x="6565392" y="2792685"/>
-            <a:ext cx="1920240" cy="223759"/>
+            <a:off x="6565392" y="2857231"/>
+            <a:ext cx="1920240" cy="245274"/>
           </a:xfrm>
           <a:prstGeom prst="rect">
             <a:avLst/>
@@ -11324,8 +11265,8 @@
         </p:nvSpPr>
         <p:spPr>
           <a:xfrm>
-            <a:off x="8558784" y="2848625"/>
-            <a:ext cx="452437" cy="111880"/>
+            <a:off x="8558784" y="2918550"/>
+            <a:ext cx="452437" cy="122637"/>
           </a:xfrm>
           <a:prstGeom prst="rect">
             <a:avLst/>
@@ -11344,8 +11285,8 @@
         </p:nvSpPr>
         <p:spPr>
           <a:xfrm>
-            <a:off x="9482328" y="2792685"/>
-            <a:ext cx="676656" cy="223759"/>
+            <a:off x="9482328" y="2857231"/>
+            <a:ext cx="676656" cy="245274"/>
           </a:xfrm>
           <a:prstGeom prst="rect">
             <a:avLst/>
@@ -11383,8 +11324,8 @@
         </p:nvSpPr>
         <p:spPr>
           <a:xfrm>
-            <a:off x="10158984" y="2792685"/>
-            <a:ext cx="1188720" cy="223759"/>
+            <a:off x="10158984" y="2857231"/>
+            <a:ext cx="1188720" cy="245274"/>
           </a:xfrm>
           <a:prstGeom prst="rect">
             <a:avLst/>
@@ -11422,8 +11363,8 @@
         </p:nvSpPr>
         <p:spPr>
           <a:xfrm>
-            <a:off x="6208776" y="3016444"/>
-            <a:ext cx="310896" cy="223759"/>
+            <a:off x="6208776" y="3102505"/>
+            <a:ext cx="310896" cy="245274"/>
           </a:xfrm>
           <a:prstGeom prst="rect">
             <a:avLst/>
@@ -11461,8 +11402,8 @@
         </p:nvSpPr>
         <p:spPr>
           <a:xfrm>
-            <a:off x="6565392" y="3016444"/>
-            <a:ext cx="1920240" cy="223759"/>
+            <a:off x="6565392" y="3102505"/>
+            <a:ext cx="1920240" cy="245274"/>
           </a:xfrm>
           <a:prstGeom prst="rect">
             <a:avLst/>
@@ -11500,8 +11441,8 @@
         </p:nvSpPr>
         <p:spPr>
           <a:xfrm>
-            <a:off x="8558784" y="3072384"/>
-            <a:ext cx="448818" cy="111880"/>
+            <a:off x="8558784" y="3163824"/>
+            <a:ext cx="448818" cy="122637"/>
           </a:xfrm>
           <a:prstGeom prst="rect">
             <a:avLst/>
@@ -11520,8 +11461,8 @@
         </p:nvSpPr>
         <p:spPr>
           <a:xfrm>
-            <a:off x="9482328" y="3016444"/>
-            <a:ext cx="676656" cy="223759"/>
+            <a:off x="9482328" y="3102505"/>
+            <a:ext cx="676656" cy="245274"/>
           </a:xfrm>
           <a:prstGeom prst="rect">
             <a:avLst/>
@@ -11559,8 +11500,8 @@
         </p:nvSpPr>
         <p:spPr>
           <a:xfrm>
-            <a:off x="10158984" y="3016444"/>
-            <a:ext cx="1188720" cy="223759"/>
+            <a:off x="10158984" y="3102505"/>
+            <a:ext cx="1188720" cy="245274"/>
           </a:xfrm>
           <a:prstGeom prst="rect">
             <a:avLst/>
@@ -11598,8 +11539,8 @@
         </p:nvSpPr>
         <p:spPr>
           <a:xfrm>
-            <a:off x="6208776" y="3240203"/>
-            <a:ext cx="310896" cy="223759"/>
+            <a:off x="6208776" y="3347780"/>
+            <a:ext cx="310896" cy="245274"/>
           </a:xfrm>
           <a:prstGeom prst="rect">
             <a:avLst/>
@@ -11637,8 +11578,8 @@
         </p:nvSpPr>
         <p:spPr>
           <a:xfrm>
-            <a:off x="6565392" y="3240203"/>
-            <a:ext cx="1920240" cy="223759"/>
+            <a:off x="6565392" y="3347780"/>
+            <a:ext cx="1920240" cy="245274"/>
           </a:xfrm>
           <a:prstGeom prst="rect">
             <a:avLst/>
@@ -11676,8 +11617,8 @@
         </p:nvSpPr>
         <p:spPr>
           <a:xfrm>
-            <a:off x="8558784" y="3296143"/>
-            <a:ext cx="438864" cy="111880"/>
+            <a:off x="8558784" y="3409098"/>
+            <a:ext cx="438864" cy="122637"/>
           </a:xfrm>
           <a:prstGeom prst="rect">
             <a:avLst/>
@@ -11696,8 +11637,8 @@
         </p:nvSpPr>
         <p:spPr>
           <a:xfrm>
-            <a:off x="9482328" y="3240203"/>
-            <a:ext cx="676656" cy="223759"/>
+            <a:off x="9482328" y="3347780"/>
+            <a:ext cx="676656" cy="245274"/>
           </a:xfrm>
           <a:prstGeom prst="rect">
             <a:avLst/>
@@ -11735,8 +11676,8 @@
         </p:nvSpPr>
         <p:spPr>
           <a:xfrm>
-            <a:off x="10158984" y="3240203"/>
-            <a:ext cx="1188720" cy="223759"/>
+            <a:off x="10158984" y="3347780"/>
+            <a:ext cx="1188720" cy="245274"/>
           </a:xfrm>
           <a:prstGeom prst="rect">
             <a:avLst/>
@@ -11774,8 +11715,8 @@
         </p:nvSpPr>
         <p:spPr>
           <a:xfrm>
-            <a:off x="6208776" y="3463962"/>
-            <a:ext cx="310896" cy="223759"/>
+            <a:off x="6208776" y="3593054"/>
+            <a:ext cx="310896" cy="245274"/>
           </a:xfrm>
           <a:prstGeom prst="rect">
             <a:avLst/>
@@ -11813,8 +11754,8 @@
         </p:nvSpPr>
         <p:spPr>
           <a:xfrm>
-            <a:off x="6565392" y="3463962"/>
-            <a:ext cx="1920240" cy="223759"/>
+            <a:off x="6565392" y="3593054"/>
+            <a:ext cx="1920240" cy="245274"/>
           </a:xfrm>
           <a:prstGeom prst="rect">
             <a:avLst/>
@@ -11852,8 +11793,8 @@
         </p:nvSpPr>
         <p:spPr>
           <a:xfrm>
-            <a:off x="8558784" y="3519902"/>
-            <a:ext cx="386382" cy="111880"/>
+            <a:off x="8558784" y="3654373"/>
+            <a:ext cx="386382" cy="122637"/>
           </a:xfrm>
           <a:prstGeom prst="rect">
             <a:avLst/>
@@ -11872,8 +11813,8 @@
         </p:nvSpPr>
         <p:spPr>
           <a:xfrm>
-            <a:off x="9482328" y="3463962"/>
-            <a:ext cx="676656" cy="223759"/>
+            <a:off x="9482328" y="3593054"/>
+            <a:ext cx="676656" cy="245274"/>
           </a:xfrm>
           <a:prstGeom prst="rect">
             <a:avLst/>
@@ -11911,8 +11852,8 @@
         </p:nvSpPr>
         <p:spPr>
           <a:xfrm>
-            <a:off x="10158984" y="3463962"/>
-            <a:ext cx="1188720" cy="223759"/>
+            <a:off x="10158984" y="3593054"/>
+            <a:ext cx="1188720" cy="245274"/>
           </a:xfrm>
           <a:prstGeom prst="rect">
             <a:avLst/>
@@ -11950,8 +11891,8 @@
         </p:nvSpPr>
         <p:spPr>
           <a:xfrm>
-            <a:off x="6208776" y="3687721"/>
-            <a:ext cx="310896" cy="223759"/>
+            <a:off x="6208776" y="3838328"/>
+            <a:ext cx="310896" cy="245274"/>
           </a:xfrm>
           <a:prstGeom prst="rect">
             <a:avLst/>
@@ -11989,8 +11930,8 @@
         </p:nvSpPr>
         <p:spPr>
           <a:xfrm>
-            <a:off x="6565392" y="3687721"/>
-            <a:ext cx="1920240" cy="223759"/>
+            <a:off x="6565392" y="3838328"/>
+            <a:ext cx="1920240" cy="245274"/>
           </a:xfrm>
           <a:prstGeom prst="rect">
             <a:avLst/>
@@ -12028,8 +11969,8 @@
         </p:nvSpPr>
         <p:spPr>
           <a:xfrm>
-            <a:off x="8558784" y="3743661"/>
-            <a:ext cx="386382" cy="111880"/>
+            <a:off x="8558784" y="3899647"/>
+            <a:ext cx="386382" cy="122637"/>
           </a:xfrm>
           <a:prstGeom prst="rect">
             <a:avLst/>
@@ -12048,8 +11989,8 @@
         </p:nvSpPr>
         <p:spPr>
           <a:xfrm>
-            <a:off x="9482328" y="3687721"/>
-            <a:ext cx="676656" cy="223759"/>
+            <a:off x="9482328" y="3838328"/>
+            <a:ext cx="676656" cy="245274"/>
           </a:xfrm>
           <a:prstGeom prst="rect">
             <a:avLst/>
@@ -12087,8 +12028,8 @@
         </p:nvSpPr>
         <p:spPr>
           <a:xfrm>
-            <a:off x="10158984" y="3687721"/>
-            <a:ext cx="1188720" cy="223759"/>
+            <a:off x="10158984" y="3838328"/>
+            <a:ext cx="1188720" cy="245274"/>
           </a:xfrm>
           <a:prstGeom prst="rect">
             <a:avLst/>
@@ -12126,8 +12067,8 @@
         </p:nvSpPr>
         <p:spPr>
           <a:xfrm>
-            <a:off x="6208776" y="3911480"/>
-            <a:ext cx="310896" cy="223759"/>
+            <a:off x="6208776" y="4083603"/>
+            <a:ext cx="310896" cy="245274"/>
           </a:xfrm>
           <a:prstGeom prst="rect">
             <a:avLst/>
@@ -12165,8 +12106,8 @@
         </p:nvSpPr>
         <p:spPr>
           <a:xfrm>
-            <a:off x="6565392" y="3911480"/>
-            <a:ext cx="1920240" cy="223759"/>
+            <a:off x="6565392" y="4083603"/>
+            <a:ext cx="1920240" cy="245274"/>
           </a:xfrm>
           <a:prstGeom prst="rect">
             <a:avLst/>
@@ -12204,8 +12145,8 @@
         </p:nvSpPr>
         <p:spPr>
           <a:xfrm>
-            <a:off x="8558784" y="3967420"/>
-            <a:ext cx="379143" cy="111880"/>
+            <a:off x="8558784" y="4144921"/>
+            <a:ext cx="379143" cy="122637"/>
           </a:xfrm>
           <a:prstGeom prst="rect">
             <a:avLst/>
@@ -12224,8 +12165,8 @@
         </p:nvSpPr>
         <p:spPr>
           <a:xfrm>
-            <a:off x="9482328" y="3911480"/>
-            <a:ext cx="676656" cy="223759"/>
+            <a:off x="9482328" y="4083603"/>
+            <a:ext cx="676656" cy="245274"/>
           </a:xfrm>
           <a:prstGeom prst="rect">
             <a:avLst/>
@@ -12263,8 +12204,8 @@
         </p:nvSpPr>
         <p:spPr>
           <a:xfrm>
-            <a:off x="10158984" y="3911480"/>
-            <a:ext cx="1188720" cy="223759"/>
+            <a:off x="10158984" y="4083603"/>
+            <a:ext cx="1188720" cy="245274"/>
           </a:xfrm>
           <a:prstGeom prst="rect">
             <a:avLst/>
@@ -12302,8 +12243,8 @@
         </p:nvSpPr>
         <p:spPr>
           <a:xfrm>
-            <a:off x="6208776" y="4135240"/>
-            <a:ext cx="310896" cy="223759"/>
+            <a:off x="6208776" y="4328877"/>
+            <a:ext cx="310896" cy="245274"/>
           </a:xfrm>
           <a:prstGeom prst="rect">
             <a:avLst/>
@@ -12341,8 +12282,8 @@
         </p:nvSpPr>
         <p:spPr>
           <a:xfrm>
-            <a:off x="6565392" y="4135240"/>
-            <a:ext cx="1920240" cy="223759"/>
+            <a:off x="6565392" y="4328877"/>
+            <a:ext cx="1920240" cy="245274"/>
           </a:xfrm>
           <a:prstGeom prst="rect">
             <a:avLst/>
@@ -12380,8 +12321,8 @@
         </p:nvSpPr>
         <p:spPr>
           <a:xfrm>
-            <a:off x="8558784" y="4191179"/>
-            <a:ext cx="363760" cy="111880"/>
+            <a:off x="8558784" y="4390196"/>
+            <a:ext cx="363760" cy="122637"/>
           </a:xfrm>
           <a:prstGeom prst="rect">
             <a:avLst/>
@@ -12400,8 +12341,8 @@
         </p:nvSpPr>
         <p:spPr>
           <a:xfrm>
-            <a:off x="9482328" y="4135240"/>
-            <a:ext cx="676656" cy="223759"/>
+            <a:off x="9482328" y="4328877"/>
+            <a:ext cx="676656" cy="245274"/>
           </a:xfrm>
           <a:prstGeom prst="rect">
             <a:avLst/>
@@ -12439,8 +12380,8 @@
         </p:nvSpPr>
         <p:spPr>
           <a:xfrm>
-            <a:off x="10158984" y="4135240"/>
-            <a:ext cx="1188720" cy="223759"/>
+            <a:off x="10158984" y="4328877"/>
+            <a:ext cx="1188720" cy="245274"/>
           </a:xfrm>
           <a:prstGeom prst="rect">
             <a:avLst/>
@@ -12478,8 +12419,8 @@
         </p:nvSpPr>
         <p:spPr>
           <a:xfrm>
-            <a:off x="6208776" y="4358999"/>
-            <a:ext cx="310896" cy="223759"/>
+            <a:off x="6208776" y="4574152"/>
+            <a:ext cx="310896" cy="245274"/>
           </a:xfrm>
           <a:prstGeom prst="rect">
             <a:avLst/>
@@ -12517,8 +12458,8 @@
         </p:nvSpPr>
         <p:spPr>
           <a:xfrm>
-            <a:off x="6565392" y="4358999"/>
-            <a:ext cx="1920240" cy="223759"/>
+            <a:off x="6565392" y="4574152"/>
+            <a:ext cx="1920240" cy="245274"/>
           </a:xfrm>
           <a:prstGeom prst="rect">
             <a:avLst/>
@@ -12556,8 +12497,8 @@
         </p:nvSpPr>
         <p:spPr>
           <a:xfrm>
-            <a:off x="8558784" y="4414938"/>
-            <a:ext cx="317611" cy="111880"/>
+            <a:off x="8558784" y="4635470"/>
+            <a:ext cx="317611" cy="122637"/>
           </a:xfrm>
           <a:prstGeom prst="rect">
             <a:avLst/>
@@ -12576,8 +12517,8 @@
         </p:nvSpPr>
         <p:spPr>
           <a:xfrm>
-            <a:off x="9482328" y="4358999"/>
-            <a:ext cx="676656" cy="223759"/>
+            <a:off x="9482328" y="4574152"/>
+            <a:ext cx="676656" cy="245274"/>
           </a:xfrm>
           <a:prstGeom prst="rect">
             <a:avLst/>
@@ -12615,8 +12556,8 @@
         </p:nvSpPr>
         <p:spPr>
           <a:xfrm>
-            <a:off x="10158984" y="4358999"/>
-            <a:ext cx="1188720" cy="223759"/>
+            <a:off x="10158984" y="4574152"/>
+            <a:ext cx="1188720" cy="245274"/>
           </a:xfrm>
           <a:prstGeom prst="rect">
             <a:avLst/>
@@ -12654,8 +12595,8 @@
         </p:nvSpPr>
         <p:spPr>
           <a:xfrm>
-            <a:off x="6208776" y="4582758"/>
-            <a:ext cx="310896" cy="223759"/>
+            <a:off x="6208776" y="4819426"/>
+            <a:ext cx="310896" cy="245274"/>
           </a:xfrm>
           <a:prstGeom prst="rect">
             <a:avLst/>
@@ -12693,8 +12634,8 @@
         </p:nvSpPr>
         <p:spPr>
           <a:xfrm>
-            <a:off x="6565392" y="4582758"/>
-            <a:ext cx="1920240" cy="223759"/>
+            <a:off x="6565392" y="4819426"/>
+            <a:ext cx="1920240" cy="245274"/>
           </a:xfrm>
           <a:prstGeom prst="rect">
             <a:avLst/>
@@ -12732,8 +12673,8 @@
         </p:nvSpPr>
         <p:spPr>
           <a:xfrm>
-            <a:off x="8558784" y="4638697"/>
-            <a:ext cx="286845" cy="111880"/>
+            <a:off x="8558784" y="4880744"/>
+            <a:ext cx="286845" cy="122637"/>
           </a:xfrm>
           <a:prstGeom prst="rect">
             <a:avLst/>
@@ -12752,8 +12693,8 @@
         </p:nvSpPr>
         <p:spPr>
           <a:xfrm>
-            <a:off x="9482328" y="4582758"/>
-            <a:ext cx="676656" cy="223759"/>
+            <a:off x="9482328" y="4819426"/>
+            <a:ext cx="676656" cy="245274"/>
           </a:xfrm>
           <a:prstGeom prst="rect">
             <a:avLst/>
@@ -12791,8 +12732,8 @@
         </p:nvSpPr>
         <p:spPr>
           <a:xfrm>
-            <a:off x="10158984" y="4582758"/>
-            <a:ext cx="1188720" cy="223759"/>
+            <a:off x="10158984" y="4819426"/>
+            <a:ext cx="1188720" cy="245274"/>
           </a:xfrm>
           <a:prstGeom prst="rect">
             <a:avLst/>
@@ -12830,8 +12771,8 @@
         </p:nvSpPr>
         <p:spPr>
           <a:xfrm>
-            <a:off x="6208776" y="4806517"/>
-            <a:ext cx="310896" cy="223759"/>
+            <a:off x="6208776" y="5064700"/>
+            <a:ext cx="310896" cy="245274"/>
           </a:xfrm>
           <a:prstGeom prst="rect">
             <a:avLst/>
@@ -12869,8 +12810,8 @@
         </p:nvSpPr>
         <p:spPr>
           <a:xfrm>
-            <a:off x="6565392" y="4806517"/>
-            <a:ext cx="1920240" cy="223759"/>
+            <a:off x="6565392" y="5064700"/>
+            <a:ext cx="1920240" cy="245274"/>
           </a:xfrm>
           <a:prstGeom prst="rect">
             <a:avLst/>
@@ -12908,8 +12849,8 @@
         </p:nvSpPr>
         <p:spPr>
           <a:xfrm>
-            <a:off x="8558784" y="4862456"/>
-            <a:ext cx="285036" cy="111880"/>
+            <a:off x="8558784" y="5126019"/>
+            <a:ext cx="285036" cy="122637"/>
           </a:xfrm>
           <a:prstGeom prst="rect">
             <a:avLst/>
@@ -12928,8 +12869,8 @@
         </p:nvSpPr>
         <p:spPr>
           <a:xfrm>
-            <a:off x="9482328" y="4806517"/>
-            <a:ext cx="676656" cy="223759"/>
+            <a:off x="9482328" y="5064700"/>
+            <a:ext cx="676656" cy="245274"/>
           </a:xfrm>
           <a:prstGeom prst="rect">
             <a:avLst/>
@@ -12967,8 +12908,8 @@
         </p:nvSpPr>
         <p:spPr>
           <a:xfrm>
-            <a:off x="10158984" y="4806517"/>
-            <a:ext cx="1188720" cy="223759"/>
+            <a:off x="10158984" y="5064700"/>
+            <a:ext cx="1188720" cy="245274"/>
           </a:xfrm>
           <a:prstGeom prst="rect">
             <a:avLst/>
@@ -13006,8 +12947,8 @@
         </p:nvSpPr>
         <p:spPr>
           <a:xfrm>
-            <a:off x="6208776" y="5030276"/>
-            <a:ext cx="310896" cy="223759"/>
+            <a:off x="6208776" y="5309975"/>
+            <a:ext cx="310896" cy="245274"/>
           </a:xfrm>
           <a:prstGeom prst="rect">
             <a:avLst/>
@@ -13045,8 +12986,8 @@
         </p:nvSpPr>
         <p:spPr>
           <a:xfrm>
-            <a:off x="6565392" y="5030276"/>
-            <a:ext cx="1920240" cy="223759"/>
+            <a:off x="6565392" y="5309975"/>
+            <a:ext cx="1920240" cy="245274"/>
           </a:xfrm>
           <a:prstGeom prst="rect">
             <a:avLst/>
@@ -13084,8 +13025,8 @@
         </p:nvSpPr>
         <p:spPr>
           <a:xfrm>
-            <a:off x="8558784" y="5086216"/>
-            <a:ext cx="197263" cy="111880"/>
+            <a:off x="8558784" y="5371293"/>
+            <a:ext cx="197263" cy="122637"/>
           </a:xfrm>
           <a:prstGeom prst="rect">
             <a:avLst/>
@@ -13104,8 +13045,8 @@
         </p:nvSpPr>
         <p:spPr>
           <a:xfrm>
-            <a:off x="9482328" y="5030276"/>
-            <a:ext cx="676656" cy="223759"/>
+            <a:off x="9482328" y="5309975"/>
+            <a:ext cx="676656" cy="245274"/>
           </a:xfrm>
           <a:prstGeom prst="rect">
             <a:avLst/>
@@ -13143,8 +13084,8 @@
         </p:nvSpPr>
         <p:spPr>
           <a:xfrm>
-            <a:off x="10158984" y="5030276"/>
-            <a:ext cx="1188720" cy="223759"/>
+            <a:off x="10158984" y="5309975"/>
+            <a:ext cx="1188720" cy="245274"/>
           </a:xfrm>
           <a:prstGeom prst="rect">
             <a:avLst/>
@@ -13182,8 +13123,8 @@
         </p:nvSpPr>
         <p:spPr>
           <a:xfrm>
-            <a:off x="6208776" y="5254035"/>
-            <a:ext cx="310896" cy="223759"/>
+            <a:off x="6208776" y="5555249"/>
+            <a:ext cx="310896" cy="245274"/>
           </a:xfrm>
           <a:prstGeom prst="rect">
             <a:avLst/>
@@ -13221,8 +13162,8 @@
         </p:nvSpPr>
         <p:spPr>
           <a:xfrm>
-            <a:off x="6565392" y="5254035"/>
-            <a:ext cx="1920240" cy="223759"/>
+            <a:off x="6565392" y="5555249"/>
+            <a:ext cx="1920240" cy="245274"/>
           </a:xfrm>
           <a:prstGeom prst="rect">
             <a:avLst/>
@@ -13260,8 +13201,8 @@
         </p:nvSpPr>
         <p:spPr>
           <a:xfrm>
-            <a:off x="8558784" y="5309975"/>
-            <a:ext cx="144780" cy="111880"/>
+            <a:off x="8558784" y="5616568"/>
+            <a:ext cx="144780" cy="122637"/>
           </a:xfrm>
           <a:prstGeom prst="rect">
             <a:avLst/>
@@ -13280,8 +13221,8 @@
         </p:nvSpPr>
         <p:spPr>
           <a:xfrm>
-            <a:off x="9482328" y="5254035"/>
-            <a:ext cx="676656" cy="223759"/>
+            <a:off x="9482328" y="5555249"/>
+            <a:ext cx="676656" cy="245274"/>
           </a:xfrm>
           <a:prstGeom prst="rect">
             <a:avLst/>
@@ -13319,8 +13260,8 @@
         </p:nvSpPr>
         <p:spPr>
           <a:xfrm>
-            <a:off x="10158984" y="5254035"/>
-            <a:ext cx="1188720" cy="223759"/>
+            <a:off x="10158984" y="5555249"/>
+            <a:ext cx="1188720" cy="245274"/>
           </a:xfrm>
           <a:prstGeom prst="rect">
             <a:avLst/>
@@ -13358,8 +13299,8 @@
         </p:nvSpPr>
         <p:spPr>
           <a:xfrm>
-            <a:off x="6208776" y="5477794"/>
-            <a:ext cx="310896" cy="223759"/>
+            <a:off x="6208776" y="5800523"/>
+            <a:ext cx="310896" cy="245274"/>
           </a:xfrm>
           <a:prstGeom prst="rect">
             <a:avLst/>
@@ -13397,8 +13338,8 @@
         </p:nvSpPr>
         <p:spPr>
           <a:xfrm>
-            <a:off x="6565392" y="5477794"/>
-            <a:ext cx="1920240" cy="223759"/>
+            <a:off x="6565392" y="5800523"/>
+            <a:ext cx="1920240" cy="245274"/>
           </a:xfrm>
           <a:prstGeom prst="rect">
             <a:avLst/>
@@ -13436,8 +13377,8 @@
         </p:nvSpPr>
         <p:spPr>
           <a:xfrm>
-            <a:off x="8558784" y="5533734"/>
-            <a:ext cx="47053" cy="111880"/>
+            <a:off x="8558784" y="5861842"/>
+            <a:ext cx="47053" cy="122637"/>
           </a:xfrm>
           <a:prstGeom prst="rect">
             <a:avLst/>
@@ -13456,8 +13397,8 @@
         </p:nvSpPr>
         <p:spPr>
           <a:xfrm>
-            <a:off x="9482328" y="5477794"/>
-            <a:ext cx="676656" cy="223759"/>
+            <a:off x="9482328" y="5800523"/>
+            <a:ext cx="676656" cy="245274"/>
           </a:xfrm>
           <a:prstGeom prst="rect">
             <a:avLst/>
@@ -13495,8 +13436,8 @@
         </p:nvSpPr>
         <p:spPr>
           <a:xfrm>
-            <a:off x="10158984" y="5477794"/>
-            <a:ext cx="1188720" cy="223759"/>
+            <a:off x="10158984" y="5800523"/>
+            <a:ext cx="1188720" cy="245274"/>
           </a:xfrm>
           <a:prstGeom prst="rect">
             <a:avLst/>
@@ -13691,7 +13632,7 @@
         <p:spPr>
           <a:xfrm>
             <a:off x="3524446" y="2121408"/>
-            <a:ext cx="14630" cy="3803904"/>
+            <a:ext cx="14630" cy="4169664"/>
           </a:xfrm>
           <a:prstGeom prst="rect">
             <a:avLst/>
@@ -13711,7 +13652,7 @@
         <p:spPr>
           <a:xfrm>
             <a:off x="9074854" y="2121408"/>
-            <a:ext cx="14630" cy="3803904"/>
+            <a:ext cx="14630" cy="4169664"/>
           </a:xfrm>
           <a:prstGeom prst="rect">
             <a:avLst/>
@@ -13731,7 +13672,7 @@
         <p:spPr>
           <a:xfrm>
             <a:off x="6085332" y="2121408"/>
-            <a:ext cx="10973" cy="3803904"/>
+            <a:ext cx="10973" cy="4169664"/>
           </a:xfrm>
           <a:prstGeom prst="rect">
             <a:avLst/>
@@ -13741,65 +13682,6 @@
           </a:solidFill>
           <a:ln/>
         </p:spPr>
-      </p:sp>
-      <p:sp>
-        <p:nvSpPr>
-          <p:cNvPr id="183" name="Shape 181"/>
-          <p:cNvSpPr/>
-          <p:nvPr/>
-        </p:nvSpPr>
-        <p:spPr>
-          <a:xfrm>
-            <a:off x="457200" y="6126480"/>
-            <a:ext cx="11274552" cy="356616"/>
-          </a:xfrm>
-          <a:prstGeom prst="rect">
-            <a:avLst/>
-          </a:prstGeom>
-          <a:solidFill>
-            <a:srgbClr val="EDF4FA"/>
-          </a:solidFill>
-          <a:ln/>
-        </p:spPr>
-      </p:sp>
-      <p:sp>
-        <p:nvSpPr>
-          <p:cNvPr id="184" name="Text 182"/>
-          <p:cNvSpPr txBox="1"/>
-          <p:nvPr/>
-        </p:nvSpPr>
-        <p:spPr>
-          <a:xfrm>
-            <a:off x="658368" y="6144768"/>
-            <a:ext cx="10927080" cy="320040"/>
-          </a:xfrm>
-          <a:prstGeom prst="rect">
-            <a:avLst/>
-          </a:prstGeom>
-          <a:noFill/>
-          <a:ln/>
-        </p:spPr>
-        <p:txBody>
-          <a:bodyPr wrap="square" lIns="0" tIns="0" rIns="0" bIns="0" rtlCol="0" anchor="ctr"/>
-          <a:lstStyle/>
-          <a:p>
-            <a:pPr indent="0" marL="0">
-              <a:buNone/>
-            </a:pPr>
-            <a:r>
-              <a:rPr lang="en-US" sz="1500" b="1" dirty="0">
-                <a:solidFill>
-                  <a:srgbClr val="0B2C4A"/>
-                </a:solidFill>
-                <a:latin typeface="Inter" pitchFamily="34" charset="0"/>
-                <a:ea typeface="Inter" pitchFamily="34" charset="-122"/>
-                <a:cs typeface="Inter" pitchFamily="34" charset="-120"/>
-              </a:rPr>
-              <a:t>17 of 33 stores at or above the 57.8% group. VW Henderson leads at 96.0%; Kia St George is lowest at 5.2%.</a:t>
-            </a:r>
-            <a:endParaRPr lang="en-US" sz="1500" dirty="0"/>
-          </a:p>
-        </p:txBody>
       </p:sp>
     </p:spTree>
   </p:cSld>
@@ -13940,7 +13822,7 @@
         <p:spPr>
           <a:xfrm>
             <a:off x="457200" y="1207008"/>
-            <a:ext cx="11274552" cy="4782312"/>
+            <a:ext cx="11274552" cy="5148072"/>
           </a:xfrm>
           <a:prstGeom prst="rect">
             <a:avLst/>
@@ -14117,7 +13999,7 @@
         <p:spPr>
           <a:xfrm>
             <a:off x="658368" y="2121408"/>
-            <a:ext cx="310896" cy="271707"/>
+            <a:ext cx="310896" cy="297833"/>
           </a:xfrm>
           <a:prstGeom prst="rect">
             <a:avLst/>
@@ -14156,7 +14038,7 @@
         <p:spPr>
           <a:xfrm>
             <a:off x="1014984" y="2121408"/>
-            <a:ext cx="1920240" cy="271707"/>
+            <a:ext cx="1920240" cy="297833"/>
           </a:xfrm>
           <a:prstGeom prst="rect">
             <a:avLst/>
@@ -14194,8 +14076,8 @@
         </p:nvSpPr>
         <p:spPr>
           <a:xfrm>
-            <a:off x="3008376" y="2189335"/>
-            <a:ext cx="868680" cy="135854"/>
+            <a:off x="3008376" y="2195866"/>
+            <a:ext cx="868680" cy="148917"/>
           </a:xfrm>
           <a:prstGeom prst="rect">
             <a:avLst/>
@@ -14215,7 +14097,7 @@
         <p:spPr>
           <a:xfrm>
             <a:off x="3931920" y="2121408"/>
-            <a:ext cx="676656" cy="271707"/>
+            <a:ext cx="676656" cy="297833"/>
           </a:xfrm>
           <a:prstGeom prst="rect">
             <a:avLst/>
@@ -14254,7 +14136,7 @@
         <p:spPr>
           <a:xfrm>
             <a:off x="4608576" y="2121408"/>
-            <a:ext cx="1188720" cy="271707"/>
+            <a:ext cx="1188720" cy="297833"/>
           </a:xfrm>
           <a:prstGeom prst="rect">
             <a:avLst/>
@@ -14292,8 +14174,8 @@
         </p:nvSpPr>
         <p:spPr>
           <a:xfrm>
-            <a:off x="658368" y="2393115"/>
-            <a:ext cx="310896" cy="271707"/>
+            <a:off x="658368" y="2419241"/>
+            <a:ext cx="310896" cy="297833"/>
           </a:xfrm>
           <a:prstGeom prst="rect">
             <a:avLst/>
@@ -14331,8 +14213,8 @@
         </p:nvSpPr>
         <p:spPr>
           <a:xfrm>
-            <a:off x="1014984" y="2393115"/>
-            <a:ext cx="1920240" cy="271707"/>
+            <a:off x="1014984" y="2419241"/>
+            <a:ext cx="1920240" cy="297833"/>
           </a:xfrm>
           <a:prstGeom prst="rect">
             <a:avLst/>
@@ -14370,8 +14252,8 @@
         </p:nvSpPr>
         <p:spPr>
           <a:xfrm>
-            <a:off x="3008376" y="2461042"/>
-            <a:ext cx="862965" cy="135854"/>
+            <a:off x="3008376" y="2493699"/>
+            <a:ext cx="862965" cy="148917"/>
           </a:xfrm>
           <a:prstGeom prst="rect">
             <a:avLst/>
@@ -14390,8 +14272,8 @@
         </p:nvSpPr>
         <p:spPr>
           <a:xfrm>
-            <a:off x="3931920" y="2393115"/>
-            <a:ext cx="676656" cy="271707"/>
+            <a:off x="3931920" y="2419241"/>
+            <a:ext cx="676656" cy="297833"/>
           </a:xfrm>
           <a:prstGeom prst="rect">
             <a:avLst/>
@@ -14429,8 +14311,8 @@
         </p:nvSpPr>
         <p:spPr>
           <a:xfrm>
-            <a:off x="4608576" y="2393115"/>
-            <a:ext cx="1188720" cy="271707"/>
+            <a:off x="4608576" y="2419241"/>
+            <a:ext cx="1188720" cy="297833"/>
           </a:xfrm>
           <a:prstGeom prst="rect">
             <a:avLst/>
@@ -14468,8 +14350,8 @@
         </p:nvSpPr>
         <p:spPr>
           <a:xfrm>
-            <a:off x="658368" y="2664823"/>
-            <a:ext cx="310896" cy="271707"/>
+            <a:off x="658368" y="2717074"/>
+            <a:ext cx="310896" cy="297833"/>
           </a:xfrm>
           <a:prstGeom prst="rect">
             <a:avLst/>
@@ -14507,8 +14389,8 @@
         </p:nvSpPr>
         <p:spPr>
           <a:xfrm>
-            <a:off x="1014984" y="2664823"/>
-            <a:ext cx="1920240" cy="271707"/>
+            <a:off x="1014984" y="2717074"/>
+            <a:ext cx="1920240" cy="297833"/>
           </a:xfrm>
           <a:prstGeom prst="rect">
             <a:avLst/>
@@ -14546,8 +14428,8 @@
         </p:nvSpPr>
         <p:spPr>
           <a:xfrm>
-            <a:off x="3008376" y="2732750"/>
-            <a:ext cx="847725" cy="135854"/>
+            <a:off x="3008376" y="2791533"/>
+            <a:ext cx="847725" cy="148917"/>
           </a:xfrm>
           <a:prstGeom prst="rect">
             <a:avLst/>
@@ -14566,8 +14448,8 @@
         </p:nvSpPr>
         <p:spPr>
           <a:xfrm>
-            <a:off x="3931920" y="2664823"/>
-            <a:ext cx="676656" cy="271707"/>
+            <a:off x="3931920" y="2717074"/>
+            <a:ext cx="676656" cy="297833"/>
           </a:xfrm>
           <a:prstGeom prst="rect">
             <a:avLst/>
@@ -14605,8 +14487,8 @@
         </p:nvSpPr>
         <p:spPr>
           <a:xfrm>
-            <a:off x="4608576" y="2664823"/>
-            <a:ext cx="1188720" cy="271707"/>
+            <a:off x="4608576" y="2717074"/>
+            <a:ext cx="1188720" cy="297833"/>
           </a:xfrm>
           <a:prstGeom prst="rect">
             <a:avLst/>
@@ -14644,8 +14526,8 @@
         </p:nvSpPr>
         <p:spPr>
           <a:xfrm>
-            <a:off x="658368" y="2936530"/>
-            <a:ext cx="310896" cy="271707"/>
+            <a:off x="658368" y="3014907"/>
+            <a:ext cx="310896" cy="297833"/>
           </a:xfrm>
           <a:prstGeom prst="rect">
             <a:avLst/>
@@ -14683,8 +14565,8 @@
         </p:nvSpPr>
         <p:spPr>
           <a:xfrm>
-            <a:off x="1014984" y="2936530"/>
-            <a:ext cx="1920240" cy="271707"/>
+            <a:off x="1014984" y="3014907"/>
+            <a:ext cx="1920240" cy="297833"/>
           </a:xfrm>
           <a:prstGeom prst="rect">
             <a:avLst/>
@@ -14722,8 +14604,8 @@
         </p:nvSpPr>
         <p:spPr>
           <a:xfrm>
-            <a:off x="3008376" y="3004457"/>
-            <a:ext cx="845820" cy="135854"/>
+            <a:off x="3008376" y="3089366"/>
+            <a:ext cx="845820" cy="148917"/>
           </a:xfrm>
           <a:prstGeom prst="rect">
             <a:avLst/>
@@ -14742,8 +14624,8 @@
         </p:nvSpPr>
         <p:spPr>
           <a:xfrm>
-            <a:off x="3931920" y="2936530"/>
-            <a:ext cx="676656" cy="271707"/>
+            <a:off x="3931920" y="3014907"/>
+            <a:ext cx="676656" cy="297833"/>
           </a:xfrm>
           <a:prstGeom prst="rect">
             <a:avLst/>
@@ -14781,8 +14663,8 @@
         </p:nvSpPr>
         <p:spPr>
           <a:xfrm>
-            <a:off x="4608576" y="2936530"/>
-            <a:ext cx="1188720" cy="271707"/>
+            <a:off x="4608576" y="3014907"/>
+            <a:ext cx="1188720" cy="297833"/>
           </a:xfrm>
           <a:prstGeom prst="rect">
             <a:avLst/>
@@ -14820,8 +14702,8 @@
         </p:nvSpPr>
         <p:spPr>
           <a:xfrm>
-            <a:off x="658368" y="3208238"/>
-            <a:ext cx="310896" cy="271707"/>
+            <a:off x="658368" y="3312741"/>
+            <a:ext cx="310896" cy="297833"/>
           </a:xfrm>
           <a:prstGeom prst="rect">
             <a:avLst/>
@@ -14859,8 +14741,8 @@
         </p:nvSpPr>
         <p:spPr>
           <a:xfrm>
-            <a:off x="1014984" y="3208238"/>
-            <a:ext cx="1920240" cy="271707"/>
+            <a:off x="1014984" y="3312741"/>
+            <a:ext cx="1920240" cy="297833"/>
           </a:xfrm>
           <a:prstGeom prst="rect">
             <a:avLst/>
@@ -14898,8 +14780,8 @@
         </p:nvSpPr>
         <p:spPr>
           <a:xfrm>
-            <a:off x="3008376" y="3276165"/>
-            <a:ext cx="755333" cy="135854"/>
+            <a:off x="3008376" y="3387199"/>
+            <a:ext cx="755333" cy="148917"/>
           </a:xfrm>
           <a:prstGeom prst="rect">
             <a:avLst/>
@@ -14918,8 +14800,8 @@
         </p:nvSpPr>
         <p:spPr>
           <a:xfrm>
-            <a:off x="3931920" y="3208238"/>
-            <a:ext cx="676656" cy="271707"/>
+            <a:off x="3931920" y="3312741"/>
+            <a:ext cx="676656" cy="297833"/>
           </a:xfrm>
           <a:prstGeom prst="rect">
             <a:avLst/>
@@ -14957,8 +14839,8 @@
         </p:nvSpPr>
         <p:spPr>
           <a:xfrm>
-            <a:off x="4608576" y="3208238"/>
-            <a:ext cx="1188720" cy="271707"/>
+            <a:off x="4608576" y="3312741"/>
+            <a:ext cx="1188720" cy="297833"/>
           </a:xfrm>
           <a:prstGeom prst="rect">
             <a:avLst/>
@@ -14996,8 +14878,8 @@
         </p:nvSpPr>
         <p:spPr>
           <a:xfrm>
-            <a:off x="658368" y="3479945"/>
-            <a:ext cx="310896" cy="271707"/>
+            <a:off x="658368" y="3610574"/>
+            <a:ext cx="310896" cy="297833"/>
           </a:xfrm>
           <a:prstGeom prst="rect">
             <a:avLst/>
@@ -15035,8 +14917,8 @@
         </p:nvSpPr>
         <p:spPr>
           <a:xfrm>
-            <a:off x="1014984" y="3479945"/>
-            <a:ext cx="1920240" cy="271707"/>
+            <a:off x="1014984" y="3610574"/>
+            <a:ext cx="1920240" cy="297833"/>
           </a:xfrm>
           <a:prstGeom prst="rect">
             <a:avLst/>
@@ -15074,8 +14956,8 @@
         </p:nvSpPr>
         <p:spPr>
           <a:xfrm>
-            <a:off x="3008376" y="3547872"/>
-            <a:ext cx="687705" cy="135854"/>
+            <a:off x="3008376" y="3685032"/>
+            <a:ext cx="687705" cy="148917"/>
           </a:xfrm>
           <a:prstGeom prst="rect">
             <a:avLst/>
@@ -15094,8 +14976,8 @@
         </p:nvSpPr>
         <p:spPr>
           <a:xfrm>
-            <a:off x="3931920" y="3479945"/>
-            <a:ext cx="676656" cy="271707"/>
+            <a:off x="3931920" y="3610574"/>
+            <a:ext cx="676656" cy="297833"/>
           </a:xfrm>
           <a:prstGeom prst="rect">
             <a:avLst/>
@@ -15133,8 +15015,8 @@
         </p:nvSpPr>
         <p:spPr>
           <a:xfrm>
-            <a:off x="4608576" y="3479945"/>
-            <a:ext cx="1188720" cy="271707"/>
+            <a:off x="4608576" y="3610574"/>
+            <a:ext cx="1188720" cy="297833"/>
           </a:xfrm>
           <a:prstGeom prst="rect">
             <a:avLst/>
@@ -15172,8 +15054,8 @@
         </p:nvSpPr>
         <p:spPr>
           <a:xfrm>
-            <a:off x="658368" y="3751653"/>
-            <a:ext cx="310896" cy="271707"/>
+            <a:off x="658368" y="3908407"/>
+            <a:ext cx="310896" cy="297833"/>
           </a:xfrm>
           <a:prstGeom prst="rect">
             <a:avLst/>
@@ -15211,8 +15093,8 @@
         </p:nvSpPr>
         <p:spPr>
           <a:xfrm>
-            <a:off x="1014984" y="3751653"/>
-            <a:ext cx="1920240" cy="271707"/>
+            <a:off x="1014984" y="3908407"/>
+            <a:ext cx="1920240" cy="297833"/>
           </a:xfrm>
           <a:prstGeom prst="rect">
             <a:avLst/>
@@ -15250,8 +15132,8 @@
         </p:nvSpPr>
         <p:spPr>
           <a:xfrm>
-            <a:off x="3008376" y="3819579"/>
-            <a:ext cx="666750" cy="135854"/>
+            <a:off x="3008376" y="3982865"/>
+            <a:ext cx="666750" cy="148917"/>
           </a:xfrm>
           <a:prstGeom prst="rect">
             <a:avLst/>
@@ -15270,8 +15152,8 @@
         </p:nvSpPr>
         <p:spPr>
           <a:xfrm>
-            <a:off x="3931920" y="3751653"/>
-            <a:ext cx="676656" cy="271707"/>
+            <a:off x="3931920" y="3908407"/>
+            <a:ext cx="676656" cy="297833"/>
           </a:xfrm>
           <a:prstGeom prst="rect">
             <a:avLst/>
@@ -15309,8 +15191,8 @@
         </p:nvSpPr>
         <p:spPr>
           <a:xfrm>
-            <a:off x="4608576" y="3751653"/>
-            <a:ext cx="1188720" cy="271707"/>
+            <a:off x="4608576" y="3908407"/>
+            <a:ext cx="1188720" cy="297833"/>
           </a:xfrm>
           <a:prstGeom prst="rect">
             <a:avLst/>
@@ -15348,8 +15230,8 @@
         </p:nvSpPr>
         <p:spPr>
           <a:xfrm>
-            <a:off x="658368" y="4023360"/>
-            <a:ext cx="310896" cy="271707"/>
+            <a:off x="658368" y="4206240"/>
+            <a:ext cx="310896" cy="297833"/>
           </a:xfrm>
           <a:prstGeom prst="rect">
             <a:avLst/>
@@ -15387,8 +15269,8 @@
         </p:nvSpPr>
         <p:spPr>
           <a:xfrm>
-            <a:off x="1014984" y="4023360"/>
-            <a:ext cx="1920240" cy="271707"/>
+            <a:off x="1014984" y="4206240"/>
+            <a:ext cx="1920240" cy="297833"/>
           </a:xfrm>
           <a:prstGeom prst="rect">
             <a:avLst/>
@@ -15426,8 +15308,8 @@
         </p:nvSpPr>
         <p:spPr>
           <a:xfrm>
-            <a:off x="3008376" y="4091287"/>
-            <a:ext cx="658178" cy="135854"/>
+            <a:off x="3008376" y="4280698"/>
+            <a:ext cx="658178" cy="148917"/>
           </a:xfrm>
           <a:prstGeom prst="rect">
             <a:avLst/>
@@ -15446,8 +15328,8 @@
         </p:nvSpPr>
         <p:spPr>
           <a:xfrm>
-            <a:off x="3931920" y="4023360"/>
-            <a:ext cx="676656" cy="271707"/>
+            <a:off x="3931920" y="4206240"/>
+            <a:ext cx="676656" cy="297833"/>
           </a:xfrm>
           <a:prstGeom prst="rect">
             <a:avLst/>
@@ -15485,8 +15367,8 @@
         </p:nvSpPr>
         <p:spPr>
           <a:xfrm>
-            <a:off x="4608576" y="4023360"/>
-            <a:ext cx="1188720" cy="271707"/>
+            <a:off x="4608576" y="4206240"/>
+            <a:ext cx="1188720" cy="297833"/>
           </a:xfrm>
           <a:prstGeom prst="rect">
             <a:avLst/>
@@ -15524,8 +15406,8 @@
         </p:nvSpPr>
         <p:spPr>
           <a:xfrm>
-            <a:off x="658368" y="4295067"/>
-            <a:ext cx="310896" cy="271707"/>
+            <a:off x="658368" y="4504073"/>
+            <a:ext cx="310896" cy="297833"/>
           </a:xfrm>
           <a:prstGeom prst="rect">
             <a:avLst/>
@@ -15563,8 +15445,8 @@
         </p:nvSpPr>
         <p:spPr>
           <a:xfrm>
-            <a:off x="1014984" y="4295067"/>
-            <a:ext cx="1920240" cy="271707"/>
+            <a:off x="1014984" y="4504073"/>
+            <a:ext cx="1920240" cy="297833"/>
           </a:xfrm>
           <a:prstGeom prst="rect">
             <a:avLst/>
@@ -15602,8 +15484,8 @@
         </p:nvSpPr>
         <p:spPr>
           <a:xfrm>
-            <a:off x="3008376" y="4362994"/>
-            <a:ext cx="578168" cy="135854"/>
+            <a:off x="3008376" y="4578531"/>
+            <a:ext cx="578168" cy="148917"/>
           </a:xfrm>
           <a:prstGeom prst="rect">
             <a:avLst/>
@@ -15622,8 +15504,8 @@
         </p:nvSpPr>
         <p:spPr>
           <a:xfrm>
-            <a:off x="3931920" y="4295067"/>
-            <a:ext cx="676656" cy="271707"/>
+            <a:off x="3931920" y="4504073"/>
+            <a:ext cx="676656" cy="297833"/>
           </a:xfrm>
           <a:prstGeom prst="rect">
             <a:avLst/>
@@ -15661,8 +15543,8 @@
         </p:nvSpPr>
         <p:spPr>
           <a:xfrm>
-            <a:off x="4608576" y="4295067"/>
-            <a:ext cx="1188720" cy="271707"/>
+            <a:off x="4608576" y="4504073"/>
+            <a:ext cx="1188720" cy="297833"/>
           </a:xfrm>
           <a:prstGeom prst="rect">
             <a:avLst/>
@@ -15700,8 +15582,8 @@
         </p:nvSpPr>
         <p:spPr>
           <a:xfrm>
-            <a:off x="658368" y="4566775"/>
-            <a:ext cx="310896" cy="271707"/>
+            <a:off x="658368" y="4801906"/>
+            <a:ext cx="310896" cy="297833"/>
           </a:xfrm>
           <a:prstGeom prst="rect">
             <a:avLst/>
@@ -15739,8 +15621,8 @@
         </p:nvSpPr>
         <p:spPr>
           <a:xfrm>
-            <a:off x="1014984" y="4566775"/>
-            <a:ext cx="1920240" cy="271707"/>
+            <a:off x="1014984" y="4801906"/>
+            <a:ext cx="1920240" cy="297833"/>
           </a:xfrm>
           <a:prstGeom prst="rect">
             <a:avLst/>
@@ -15778,8 +15660,8 @@
         </p:nvSpPr>
         <p:spPr>
           <a:xfrm>
-            <a:off x="3008376" y="4634702"/>
-            <a:ext cx="571500" cy="135854"/>
+            <a:off x="3008376" y="4876365"/>
+            <a:ext cx="571500" cy="148917"/>
           </a:xfrm>
           <a:prstGeom prst="rect">
             <a:avLst/>
@@ -15798,8 +15680,8 @@
         </p:nvSpPr>
         <p:spPr>
           <a:xfrm>
-            <a:off x="3931920" y="4566775"/>
-            <a:ext cx="676656" cy="271707"/>
+            <a:off x="3931920" y="4801906"/>
+            <a:ext cx="676656" cy="297833"/>
           </a:xfrm>
           <a:prstGeom prst="rect">
             <a:avLst/>
@@ -15837,8 +15719,8 @@
         </p:nvSpPr>
         <p:spPr>
           <a:xfrm>
-            <a:off x="4608576" y="4566775"/>
-            <a:ext cx="1188720" cy="271707"/>
+            <a:off x="4608576" y="4801906"/>
+            <a:ext cx="1188720" cy="297833"/>
           </a:xfrm>
           <a:prstGeom prst="rect">
             <a:avLst/>
@@ -15876,8 +15758,8 @@
         </p:nvSpPr>
         <p:spPr>
           <a:xfrm>
-            <a:off x="658368" y="4838482"/>
-            <a:ext cx="310896" cy="271707"/>
+            <a:off x="658368" y="5099739"/>
+            <a:ext cx="310896" cy="297833"/>
           </a:xfrm>
           <a:prstGeom prst="rect">
             <a:avLst/>
@@ -15915,8 +15797,8 @@
         </p:nvSpPr>
         <p:spPr>
           <a:xfrm>
-            <a:off x="1014984" y="4838482"/>
-            <a:ext cx="1920240" cy="271707"/>
+            <a:off x="1014984" y="5099739"/>
+            <a:ext cx="1920240" cy="297833"/>
           </a:xfrm>
           <a:prstGeom prst="rect">
             <a:avLst/>
@@ -15954,8 +15836,8 @@
         </p:nvSpPr>
         <p:spPr>
           <a:xfrm>
-            <a:off x="3008376" y="4906409"/>
-            <a:ext cx="476250" cy="135854"/>
+            <a:off x="3008376" y="5174198"/>
+            <a:ext cx="476250" cy="148917"/>
           </a:xfrm>
           <a:prstGeom prst="rect">
             <a:avLst/>
@@ -15974,8 +15856,8 @@
         </p:nvSpPr>
         <p:spPr>
           <a:xfrm>
-            <a:off x="3931920" y="4838482"/>
-            <a:ext cx="676656" cy="271707"/>
+            <a:off x="3931920" y="5099739"/>
+            <a:ext cx="676656" cy="297833"/>
           </a:xfrm>
           <a:prstGeom prst="rect">
             <a:avLst/>
@@ -16013,8 +15895,8 @@
         </p:nvSpPr>
         <p:spPr>
           <a:xfrm>
-            <a:off x="4608576" y="4838482"/>
-            <a:ext cx="1188720" cy="271707"/>
+            <a:off x="4608576" y="5099739"/>
+            <a:ext cx="1188720" cy="297833"/>
           </a:xfrm>
           <a:prstGeom prst="rect">
             <a:avLst/>
@@ -16052,8 +15934,8 @@
         </p:nvSpPr>
         <p:spPr>
           <a:xfrm>
-            <a:off x="658368" y="5110190"/>
-            <a:ext cx="310896" cy="271707"/>
+            <a:off x="658368" y="5397573"/>
+            <a:ext cx="310896" cy="297833"/>
           </a:xfrm>
           <a:prstGeom prst="rect">
             <a:avLst/>
@@ -16091,8 +15973,8 @@
         </p:nvSpPr>
         <p:spPr>
           <a:xfrm>
-            <a:off x="1014984" y="5110190"/>
-            <a:ext cx="1920240" cy="271707"/>
+            <a:off x="1014984" y="5397573"/>
+            <a:ext cx="1920240" cy="297833"/>
           </a:xfrm>
           <a:prstGeom prst="rect">
             <a:avLst/>
@@ -16130,8 +16012,8 @@
         </p:nvSpPr>
         <p:spPr>
           <a:xfrm>
-            <a:off x="3008376" y="5178117"/>
-            <a:ext cx="419100" cy="135854"/>
+            <a:off x="3008376" y="5472031"/>
+            <a:ext cx="419100" cy="148917"/>
           </a:xfrm>
           <a:prstGeom prst="rect">
             <a:avLst/>
@@ -16150,8 +16032,8 @@
         </p:nvSpPr>
         <p:spPr>
           <a:xfrm>
-            <a:off x="3931920" y="5110190"/>
-            <a:ext cx="676656" cy="271707"/>
+            <a:off x="3931920" y="5397573"/>
+            <a:ext cx="676656" cy="297833"/>
           </a:xfrm>
           <a:prstGeom prst="rect">
             <a:avLst/>
@@ -16189,8 +16071,8 @@
         </p:nvSpPr>
         <p:spPr>
           <a:xfrm>
-            <a:off x="4608576" y="5110190"/>
-            <a:ext cx="1188720" cy="271707"/>
+            <a:off x="4608576" y="5397573"/>
+            <a:ext cx="1188720" cy="297833"/>
           </a:xfrm>
           <a:prstGeom prst="rect">
             <a:avLst/>
@@ -16228,8 +16110,8 @@
         </p:nvSpPr>
         <p:spPr>
           <a:xfrm>
-            <a:off x="658368" y="5381897"/>
-            <a:ext cx="310896" cy="271707"/>
+            <a:off x="658368" y="5695406"/>
+            <a:ext cx="310896" cy="297833"/>
           </a:xfrm>
           <a:prstGeom prst="rect">
             <a:avLst/>
@@ -16267,8 +16149,8 @@
         </p:nvSpPr>
         <p:spPr>
           <a:xfrm>
-            <a:off x="1014984" y="5381897"/>
-            <a:ext cx="1920240" cy="271707"/>
+            <a:off x="1014984" y="5695406"/>
+            <a:ext cx="1920240" cy="297833"/>
           </a:xfrm>
           <a:prstGeom prst="rect">
             <a:avLst/>
@@ -16306,8 +16188,8 @@
         </p:nvSpPr>
         <p:spPr>
           <a:xfrm>
-            <a:off x="3008376" y="5449824"/>
-            <a:ext cx="416338" cy="135854"/>
+            <a:off x="3008376" y="5769864"/>
+            <a:ext cx="416338" cy="148917"/>
           </a:xfrm>
           <a:prstGeom prst="rect">
             <a:avLst/>
@@ -16326,8 +16208,8 @@
         </p:nvSpPr>
         <p:spPr>
           <a:xfrm>
-            <a:off x="3931920" y="5381897"/>
-            <a:ext cx="676656" cy="271707"/>
+            <a:off x="3931920" y="5695406"/>
+            <a:ext cx="676656" cy="297833"/>
           </a:xfrm>
           <a:prstGeom prst="rect">
             <a:avLst/>
@@ -16365,8 +16247,8 @@
         </p:nvSpPr>
         <p:spPr>
           <a:xfrm>
-            <a:off x="4608576" y="5381897"/>
-            <a:ext cx="1188720" cy="271707"/>
+            <a:off x="4608576" y="5695406"/>
+            <a:ext cx="1188720" cy="297833"/>
           </a:xfrm>
           <a:prstGeom prst="rect">
             <a:avLst/>
@@ -16404,8 +16286,8 @@
         </p:nvSpPr>
         <p:spPr>
           <a:xfrm>
-            <a:off x="658368" y="5653605"/>
-            <a:ext cx="310896" cy="271707"/>
+            <a:off x="658368" y="5993239"/>
+            <a:ext cx="310896" cy="297833"/>
           </a:xfrm>
           <a:prstGeom prst="rect">
             <a:avLst/>
@@ -16443,8 +16325,8 @@
         </p:nvSpPr>
         <p:spPr>
           <a:xfrm>
-            <a:off x="1014984" y="5653605"/>
-            <a:ext cx="1920240" cy="271707"/>
+            <a:off x="1014984" y="5993239"/>
+            <a:ext cx="1920240" cy="297833"/>
           </a:xfrm>
           <a:prstGeom prst="rect">
             <a:avLst/>
@@ -16482,8 +16364,8 @@
         </p:nvSpPr>
         <p:spPr>
           <a:xfrm>
-            <a:off x="3008376" y="5721531"/>
-            <a:ext cx="375285" cy="135854"/>
+            <a:off x="3008376" y="6067697"/>
+            <a:ext cx="375285" cy="148917"/>
           </a:xfrm>
           <a:prstGeom prst="rect">
             <a:avLst/>
@@ -16502,8 +16384,8 @@
         </p:nvSpPr>
         <p:spPr>
           <a:xfrm>
-            <a:off x="3931920" y="5653605"/>
-            <a:ext cx="676656" cy="271707"/>
+            <a:off x="3931920" y="5993239"/>
+            <a:ext cx="676656" cy="297833"/>
           </a:xfrm>
           <a:prstGeom prst="rect">
             <a:avLst/>
@@ -16541,8 +16423,8 @@
         </p:nvSpPr>
         <p:spPr>
           <a:xfrm>
-            <a:off x="4608576" y="5653605"/>
-            <a:ext cx="1188720" cy="271707"/>
+            <a:off x="4608576" y="5993239"/>
+            <a:ext cx="1188720" cy="297833"/>
           </a:xfrm>
           <a:prstGeom prst="rect">
             <a:avLst/>
@@ -16581,7 +16463,7 @@
         <p:spPr>
           <a:xfrm>
             <a:off x="6208776" y="2121408"/>
-            <a:ext cx="310896" cy="271707"/>
+            <a:ext cx="310896" cy="297833"/>
           </a:xfrm>
           <a:prstGeom prst="rect">
             <a:avLst/>
@@ -16620,7 +16502,7 @@
         <p:spPr>
           <a:xfrm>
             <a:off x="6565392" y="2121408"/>
-            <a:ext cx="1920240" cy="271707"/>
+            <a:ext cx="1920240" cy="297833"/>
           </a:xfrm>
           <a:prstGeom prst="rect">
             <a:avLst/>
@@ -16658,8 +16540,8 @@
         </p:nvSpPr>
         <p:spPr>
           <a:xfrm>
-            <a:off x="8558784" y="2189335"/>
-            <a:ext cx="348615" cy="135854"/>
+            <a:off x="8558784" y="2195866"/>
+            <a:ext cx="348615" cy="148917"/>
           </a:xfrm>
           <a:prstGeom prst="rect">
             <a:avLst/>
@@ -16679,7 +16561,7 @@
         <p:spPr>
           <a:xfrm>
             <a:off x="9482328" y="2121408"/>
-            <a:ext cx="676656" cy="271707"/>
+            <a:ext cx="676656" cy="297833"/>
           </a:xfrm>
           <a:prstGeom prst="rect">
             <a:avLst/>
@@ -16718,7 +16600,7 @@
         <p:spPr>
           <a:xfrm>
             <a:off x="10158984" y="2121408"/>
-            <a:ext cx="1188720" cy="271707"/>
+            <a:ext cx="1188720" cy="297833"/>
           </a:xfrm>
           <a:prstGeom prst="rect">
             <a:avLst/>
@@ -16756,8 +16638,8 @@
         </p:nvSpPr>
         <p:spPr>
           <a:xfrm>
-            <a:off x="6208776" y="2393115"/>
-            <a:ext cx="310896" cy="271707"/>
+            <a:off x="6208776" y="2419241"/>
+            <a:ext cx="310896" cy="297833"/>
           </a:xfrm>
           <a:prstGeom prst="rect">
             <a:avLst/>
@@ -16795,8 +16677,8 @@
         </p:nvSpPr>
         <p:spPr>
           <a:xfrm>
-            <a:off x="6565392" y="2393115"/>
-            <a:ext cx="1920240" cy="271707"/>
+            <a:off x="6565392" y="2419241"/>
+            <a:ext cx="1920240" cy="297833"/>
           </a:xfrm>
           <a:prstGeom prst="rect">
             <a:avLst/>
@@ -16834,8 +16716,8 @@
         </p:nvSpPr>
         <p:spPr>
           <a:xfrm>
-            <a:off x="8558784" y="2461042"/>
-            <a:ext cx="332422" cy="135854"/>
+            <a:off x="8558784" y="2493699"/>
+            <a:ext cx="332422" cy="148917"/>
           </a:xfrm>
           <a:prstGeom prst="rect">
             <a:avLst/>
@@ -16854,8 +16736,8 @@
         </p:nvSpPr>
         <p:spPr>
           <a:xfrm>
-            <a:off x="9482328" y="2393115"/>
-            <a:ext cx="676656" cy="271707"/>
+            <a:off x="9482328" y="2419241"/>
+            <a:ext cx="676656" cy="297833"/>
           </a:xfrm>
           <a:prstGeom prst="rect">
             <a:avLst/>
@@ -16893,8 +16775,8 @@
         </p:nvSpPr>
         <p:spPr>
           <a:xfrm>
-            <a:off x="10158984" y="2393115"/>
-            <a:ext cx="1188720" cy="271707"/>
+            <a:off x="10158984" y="2419241"/>
+            <a:ext cx="1188720" cy="297833"/>
           </a:xfrm>
           <a:prstGeom prst="rect">
             <a:avLst/>
@@ -16932,8 +16814,8 @@
         </p:nvSpPr>
         <p:spPr>
           <a:xfrm>
-            <a:off x="6208776" y="2664823"/>
-            <a:ext cx="310896" cy="271707"/>
+            <a:off x="6208776" y="2717074"/>
+            <a:ext cx="310896" cy="297833"/>
           </a:xfrm>
           <a:prstGeom prst="rect">
             <a:avLst/>
@@ -16971,8 +16853,8 @@
         </p:nvSpPr>
         <p:spPr>
           <a:xfrm>
-            <a:off x="6565392" y="2664823"/>
-            <a:ext cx="1920240" cy="271707"/>
+            <a:off x="6565392" y="2717074"/>
+            <a:ext cx="1920240" cy="297833"/>
           </a:xfrm>
           <a:prstGeom prst="rect">
             <a:avLst/>
@@ -17010,8 +16892,8 @@
         </p:nvSpPr>
         <p:spPr>
           <a:xfrm>
-            <a:off x="8558784" y="2732750"/>
-            <a:ext cx="329565" cy="135854"/>
+            <a:off x="8558784" y="2791533"/>
+            <a:ext cx="329565" cy="148917"/>
           </a:xfrm>
           <a:prstGeom prst="rect">
             <a:avLst/>
@@ -17030,8 +16912,8 @@
         </p:nvSpPr>
         <p:spPr>
           <a:xfrm>
-            <a:off x="9482328" y="2664823"/>
-            <a:ext cx="676656" cy="271707"/>
+            <a:off x="9482328" y="2717074"/>
+            <a:ext cx="676656" cy="297833"/>
           </a:xfrm>
           <a:prstGeom prst="rect">
             <a:avLst/>
@@ -17069,8 +16951,8 @@
         </p:nvSpPr>
         <p:spPr>
           <a:xfrm>
-            <a:off x="10158984" y="2664823"/>
-            <a:ext cx="1188720" cy="271707"/>
+            <a:off x="10158984" y="2717074"/>
+            <a:ext cx="1188720" cy="297833"/>
           </a:xfrm>
           <a:prstGeom prst="rect">
             <a:avLst/>
@@ -17108,8 +16990,8 @@
         </p:nvSpPr>
         <p:spPr>
           <a:xfrm>
-            <a:off x="6208776" y="2936530"/>
-            <a:ext cx="310896" cy="271707"/>
+            <a:off x="6208776" y="3014907"/>
+            <a:ext cx="310896" cy="297833"/>
           </a:xfrm>
           <a:prstGeom prst="rect">
             <a:avLst/>
@@ -17147,8 +17029,8 @@
         </p:nvSpPr>
         <p:spPr>
           <a:xfrm>
-            <a:off x="6565392" y="2936530"/>
-            <a:ext cx="1920240" cy="271707"/>
+            <a:off x="6565392" y="3014907"/>
+            <a:ext cx="1920240" cy="297833"/>
           </a:xfrm>
           <a:prstGeom prst="rect">
             <a:avLst/>
@@ -17186,8 +17068,8 @@
         </p:nvSpPr>
         <p:spPr>
           <a:xfrm>
-            <a:off x="8558784" y="3004457"/>
-            <a:ext cx="304800" cy="135854"/>
+            <a:off x="8558784" y="3089366"/>
+            <a:ext cx="304800" cy="148917"/>
           </a:xfrm>
           <a:prstGeom prst="rect">
             <a:avLst/>
@@ -17206,8 +17088,8 @@
         </p:nvSpPr>
         <p:spPr>
           <a:xfrm>
-            <a:off x="9482328" y="2936530"/>
-            <a:ext cx="676656" cy="271707"/>
+            <a:off x="9482328" y="3014907"/>
+            <a:ext cx="676656" cy="297833"/>
           </a:xfrm>
           <a:prstGeom prst="rect">
             <a:avLst/>
@@ -17245,8 +17127,8 @@
         </p:nvSpPr>
         <p:spPr>
           <a:xfrm>
-            <a:off x="10158984" y="2936530"/>
-            <a:ext cx="1188720" cy="271707"/>
+            <a:off x="10158984" y="3014907"/>
+            <a:ext cx="1188720" cy="297833"/>
           </a:xfrm>
           <a:prstGeom prst="rect">
             <a:avLst/>
@@ -17284,8 +17166,8 @@
         </p:nvSpPr>
         <p:spPr>
           <a:xfrm>
-            <a:off x="6208776" y="3208238"/>
-            <a:ext cx="310896" cy="271707"/>
+            <a:off x="6208776" y="3312741"/>
+            <a:ext cx="310896" cy="297833"/>
           </a:xfrm>
           <a:prstGeom prst="rect">
             <a:avLst/>
@@ -17323,8 +17205,8 @@
         </p:nvSpPr>
         <p:spPr>
           <a:xfrm>
-            <a:off x="6565392" y="3208238"/>
-            <a:ext cx="1920240" cy="271707"/>
+            <a:off x="6565392" y="3312741"/>
+            <a:ext cx="1920240" cy="297833"/>
           </a:xfrm>
           <a:prstGeom prst="rect">
             <a:avLst/>
@@ -17362,8 +17244,8 @@
         </p:nvSpPr>
         <p:spPr>
           <a:xfrm>
-            <a:off x="8558784" y="3276165"/>
-            <a:ext cx="297180" cy="135854"/>
+            <a:off x="8558784" y="3387199"/>
+            <a:ext cx="297180" cy="148917"/>
           </a:xfrm>
           <a:prstGeom prst="rect">
             <a:avLst/>
@@ -17382,8 +17264,8 @@
         </p:nvSpPr>
         <p:spPr>
           <a:xfrm>
-            <a:off x="9482328" y="3208238"/>
-            <a:ext cx="676656" cy="271707"/>
+            <a:off x="9482328" y="3312741"/>
+            <a:ext cx="676656" cy="297833"/>
           </a:xfrm>
           <a:prstGeom prst="rect">
             <a:avLst/>
@@ -17421,8 +17303,8 @@
         </p:nvSpPr>
         <p:spPr>
           <a:xfrm>
-            <a:off x="10158984" y="3208238"/>
-            <a:ext cx="1188720" cy="271707"/>
+            <a:off x="10158984" y="3312741"/>
+            <a:ext cx="1188720" cy="297833"/>
           </a:xfrm>
           <a:prstGeom prst="rect">
             <a:avLst/>
@@ -17460,8 +17342,8 @@
         </p:nvSpPr>
         <p:spPr>
           <a:xfrm>
-            <a:off x="6208776" y="3479945"/>
-            <a:ext cx="310896" cy="271707"/>
+            <a:off x="6208776" y="3610574"/>
+            <a:ext cx="310896" cy="297833"/>
           </a:xfrm>
           <a:prstGeom prst="rect">
             <a:avLst/>
@@ -17499,8 +17381,8 @@
         </p:nvSpPr>
         <p:spPr>
           <a:xfrm>
-            <a:off x="6565392" y="3479945"/>
-            <a:ext cx="1920240" cy="271707"/>
+            <a:off x="6565392" y="3610574"/>
+            <a:ext cx="1920240" cy="297833"/>
           </a:xfrm>
           <a:prstGeom prst="rect">
             <a:avLst/>
@@ -17538,8 +17420,8 @@
         </p:nvSpPr>
         <p:spPr>
           <a:xfrm>
-            <a:off x="8558784" y="3547872"/>
-            <a:ext cx="240983" cy="135854"/>
+            <a:off x="8558784" y="3685032"/>
+            <a:ext cx="240983" cy="148917"/>
           </a:xfrm>
           <a:prstGeom prst="rect">
             <a:avLst/>
@@ -17558,8 +17440,8 @@
         </p:nvSpPr>
         <p:spPr>
           <a:xfrm>
-            <a:off x="9482328" y="3479945"/>
-            <a:ext cx="676656" cy="271707"/>
+            <a:off x="9482328" y="3610574"/>
+            <a:ext cx="676656" cy="297833"/>
           </a:xfrm>
           <a:prstGeom prst="rect">
             <a:avLst/>
@@ -17597,8 +17479,8 @@
         </p:nvSpPr>
         <p:spPr>
           <a:xfrm>
-            <a:off x="10158984" y="3479945"/>
-            <a:ext cx="1188720" cy="271707"/>
+            <a:off x="10158984" y="3610574"/>
+            <a:ext cx="1188720" cy="297833"/>
           </a:xfrm>
           <a:prstGeom prst="rect">
             <a:avLst/>
@@ -17636,8 +17518,8 @@
         </p:nvSpPr>
         <p:spPr>
           <a:xfrm>
-            <a:off x="6208776" y="3751653"/>
-            <a:ext cx="310896" cy="271707"/>
+            <a:off x="6208776" y="3908407"/>
+            <a:ext cx="310896" cy="297833"/>
           </a:xfrm>
           <a:prstGeom prst="rect">
             <a:avLst/>
@@ -17675,8 +17557,8 @@
         </p:nvSpPr>
         <p:spPr>
           <a:xfrm>
-            <a:off x="6565392" y="3751653"/>
-            <a:ext cx="1920240" cy="271707"/>
+            <a:off x="6565392" y="3908407"/>
+            <a:ext cx="1920240" cy="297833"/>
           </a:xfrm>
           <a:prstGeom prst="rect">
             <a:avLst/>
@@ -17714,8 +17596,8 @@
         </p:nvSpPr>
         <p:spPr>
           <a:xfrm>
-            <a:off x="8558784" y="3819579"/>
-            <a:ext cx="222885" cy="135854"/>
+            <a:off x="8558784" y="3982865"/>
+            <a:ext cx="222885" cy="148917"/>
           </a:xfrm>
           <a:prstGeom prst="rect">
             <a:avLst/>
@@ -17734,8 +17616,8 @@
         </p:nvSpPr>
         <p:spPr>
           <a:xfrm>
-            <a:off x="9482328" y="3751653"/>
-            <a:ext cx="676656" cy="271707"/>
+            <a:off x="9482328" y="3908407"/>
+            <a:ext cx="676656" cy="297833"/>
           </a:xfrm>
           <a:prstGeom prst="rect">
             <a:avLst/>
@@ -17773,8 +17655,8 @@
         </p:nvSpPr>
         <p:spPr>
           <a:xfrm>
-            <a:off x="10158984" y="3751653"/>
-            <a:ext cx="1188720" cy="271707"/>
+            <a:off x="10158984" y="3908407"/>
+            <a:ext cx="1188720" cy="297833"/>
           </a:xfrm>
           <a:prstGeom prst="rect">
             <a:avLst/>
@@ -17812,8 +17694,8 @@
         </p:nvSpPr>
         <p:spPr>
           <a:xfrm>
-            <a:off x="6208776" y="4023360"/>
-            <a:ext cx="310896" cy="271707"/>
+            <a:off x="6208776" y="4206240"/>
+            <a:ext cx="310896" cy="297833"/>
           </a:xfrm>
           <a:prstGeom prst="rect">
             <a:avLst/>
@@ -17851,8 +17733,8 @@
         </p:nvSpPr>
         <p:spPr>
           <a:xfrm>
-            <a:off x="6565392" y="4023360"/>
-            <a:ext cx="1920240" cy="271707"/>
+            <a:off x="6565392" y="4206240"/>
+            <a:ext cx="1920240" cy="297833"/>
           </a:xfrm>
           <a:prstGeom prst="rect">
             <a:avLst/>
@@ -17890,8 +17772,8 @@
         </p:nvSpPr>
         <p:spPr>
           <a:xfrm>
-            <a:off x="8558784" y="4091287"/>
-            <a:ext cx="216217" cy="135854"/>
+            <a:off x="8558784" y="4280698"/>
+            <a:ext cx="216217" cy="148917"/>
           </a:xfrm>
           <a:prstGeom prst="rect">
             <a:avLst/>
@@ -17910,8 +17792,8 @@
         </p:nvSpPr>
         <p:spPr>
           <a:xfrm>
-            <a:off x="9482328" y="4023360"/>
-            <a:ext cx="676656" cy="271707"/>
+            <a:off x="9482328" y="4206240"/>
+            <a:ext cx="676656" cy="297833"/>
           </a:xfrm>
           <a:prstGeom prst="rect">
             <a:avLst/>
@@ -17949,8 +17831,8 @@
         </p:nvSpPr>
         <p:spPr>
           <a:xfrm>
-            <a:off x="10158984" y="4023360"/>
-            <a:ext cx="1188720" cy="271707"/>
+            <a:off x="10158984" y="4206240"/>
+            <a:ext cx="1188720" cy="297833"/>
           </a:xfrm>
           <a:prstGeom prst="rect">
             <a:avLst/>
@@ -17988,8 +17870,8 @@
         </p:nvSpPr>
         <p:spPr>
           <a:xfrm>
-            <a:off x="6208776" y="4295067"/>
-            <a:ext cx="310896" cy="271707"/>
+            <a:off x="6208776" y="4504073"/>
+            <a:ext cx="310896" cy="297833"/>
           </a:xfrm>
           <a:prstGeom prst="rect">
             <a:avLst/>
@@ -18027,8 +17909,8 @@
         </p:nvSpPr>
         <p:spPr>
           <a:xfrm>
-            <a:off x="6565392" y="4295067"/>
-            <a:ext cx="1920240" cy="271707"/>
+            <a:off x="6565392" y="4504073"/>
+            <a:ext cx="1920240" cy="297833"/>
           </a:xfrm>
           <a:prstGeom prst="rect">
             <a:avLst/>
@@ -18066,8 +17948,8 @@
         </p:nvSpPr>
         <p:spPr>
           <a:xfrm>
-            <a:off x="8558784" y="4362994"/>
-            <a:ext cx="216217" cy="135854"/>
+            <a:off x="8558784" y="4578531"/>
+            <a:ext cx="216217" cy="148917"/>
           </a:xfrm>
           <a:prstGeom prst="rect">
             <a:avLst/>
@@ -18086,8 +17968,8 @@
         </p:nvSpPr>
         <p:spPr>
           <a:xfrm>
-            <a:off x="9482328" y="4295067"/>
-            <a:ext cx="676656" cy="271707"/>
+            <a:off x="9482328" y="4504073"/>
+            <a:ext cx="676656" cy="297833"/>
           </a:xfrm>
           <a:prstGeom prst="rect">
             <a:avLst/>
@@ -18125,8 +18007,8 @@
         </p:nvSpPr>
         <p:spPr>
           <a:xfrm>
-            <a:off x="10158984" y="4295067"/>
-            <a:ext cx="1188720" cy="271707"/>
+            <a:off x="10158984" y="4504073"/>
+            <a:ext cx="1188720" cy="297833"/>
           </a:xfrm>
           <a:prstGeom prst="rect">
             <a:avLst/>
@@ -18164,8 +18046,8 @@
         </p:nvSpPr>
         <p:spPr>
           <a:xfrm>
-            <a:off x="6208776" y="4566775"/>
-            <a:ext cx="310896" cy="271707"/>
+            <a:off x="6208776" y="4801906"/>
+            <a:ext cx="310896" cy="297833"/>
           </a:xfrm>
           <a:prstGeom prst="rect">
             <a:avLst/>
@@ -18203,8 +18085,8 @@
         </p:nvSpPr>
         <p:spPr>
           <a:xfrm>
-            <a:off x="6565392" y="4566775"/>
-            <a:ext cx="1920240" cy="271707"/>
+            <a:off x="6565392" y="4801906"/>
+            <a:ext cx="1920240" cy="297833"/>
           </a:xfrm>
           <a:prstGeom prst="rect">
             <a:avLst/>
@@ -18242,8 +18124,8 @@
         </p:nvSpPr>
         <p:spPr>
           <a:xfrm>
-            <a:off x="8558784" y="4634702"/>
-            <a:ext cx="183833" cy="135854"/>
+            <a:off x="8558784" y="4876365"/>
+            <a:ext cx="183833" cy="148917"/>
           </a:xfrm>
           <a:prstGeom prst="rect">
             <a:avLst/>
@@ -18262,8 +18144,8 @@
         </p:nvSpPr>
         <p:spPr>
           <a:xfrm>
-            <a:off x="9482328" y="4566775"/>
-            <a:ext cx="676656" cy="271707"/>
+            <a:off x="9482328" y="4801906"/>
+            <a:ext cx="676656" cy="297833"/>
           </a:xfrm>
           <a:prstGeom prst="rect">
             <a:avLst/>
@@ -18301,8 +18183,8 @@
         </p:nvSpPr>
         <p:spPr>
           <a:xfrm>
-            <a:off x="10158984" y="4566775"/>
-            <a:ext cx="1188720" cy="271707"/>
+            <a:off x="10158984" y="4801906"/>
+            <a:ext cx="1188720" cy="297833"/>
           </a:xfrm>
           <a:prstGeom prst="rect">
             <a:avLst/>
@@ -18340,8 +18222,8 @@
         </p:nvSpPr>
         <p:spPr>
           <a:xfrm>
-            <a:off x="6208776" y="4838482"/>
-            <a:ext cx="310896" cy="271707"/>
+            <a:off x="6208776" y="5099739"/>
+            <a:ext cx="310896" cy="297833"/>
           </a:xfrm>
           <a:prstGeom prst="rect">
             <a:avLst/>
@@ -18379,8 +18261,8 @@
         </p:nvSpPr>
         <p:spPr>
           <a:xfrm>
-            <a:off x="6565392" y="4838482"/>
-            <a:ext cx="1920240" cy="271707"/>
+            <a:off x="6565392" y="5099739"/>
+            <a:ext cx="1920240" cy="297833"/>
           </a:xfrm>
           <a:prstGeom prst="rect">
             <a:avLst/>
@@ -18418,8 +18300,8 @@
         </p:nvSpPr>
         <p:spPr>
           <a:xfrm>
-            <a:off x="8558784" y="4906409"/>
-            <a:ext cx="150495" cy="135854"/>
+            <a:off x="8558784" y="5174198"/>
+            <a:ext cx="150495" cy="148917"/>
           </a:xfrm>
           <a:prstGeom prst="rect">
             <a:avLst/>
@@ -18438,8 +18320,8 @@
         </p:nvSpPr>
         <p:spPr>
           <a:xfrm>
-            <a:off x="9482328" y="4838482"/>
-            <a:ext cx="676656" cy="271707"/>
+            <a:off x="9482328" y="5099739"/>
+            <a:ext cx="676656" cy="297833"/>
           </a:xfrm>
           <a:prstGeom prst="rect">
             <a:avLst/>
@@ -18477,8 +18359,8 @@
         </p:nvSpPr>
         <p:spPr>
           <a:xfrm>
-            <a:off x="10158984" y="4838482"/>
-            <a:ext cx="1188720" cy="271707"/>
+            <a:off x="10158984" y="5099739"/>
+            <a:ext cx="1188720" cy="297833"/>
           </a:xfrm>
           <a:prstGeom prst="rect">
             <a:avLst/>
@@ -18516,8 +18398,8 @@
         </p:nvSpPr>
         <p:spPr>
           <a:xfrm>
-            <a:off x="6208776" y="5110190"/>
-            <a:ext cx="310896" cy="271707"/>
+            <a:off x="6208776" y="5397573"/>
+            <a:ext cx="310896" cy="297833"/>
           </a:xfrm>
           <a:prstGeom prst="rect">
             <a:avLst/>
@@ -18555,8 +18437,8 @@
         </p:nvSpPr>
         <p:spPr>
           <a:xfrm>
-            <a:off x="6565392" y="5110190"/>
-            <a:ext cx="1920240" cy="271707"/>
+            <a:off x="6565392" y="5397573"/>
+            <a:ext cx="1920240" cy="297833"/>
           </a:xfrm>
           <a:prstGeom prst="rect">
             <a:avLst/>
@@ -18594,8 +18476,8 @@
         </p:nvSpPr>
         <p:spPr>
           <a:xfrm>
-            <a:off x="8558784" y="5178117"/>
-            <a:ext cx="137160" cy="135854"/>
+            <a:off x="8558784" y="5472031"/>
+            <a:ext cx="137160" cy="148917"/>
           </a:xfrm>
           <a:prstGeom prst="rect">
             <a:avLst/>
@@ -18614,8 +18496,8 @@
         </p:nvSpPr>
         <p:spPr>
           <a:xfrm>
-            <a:off x="9482328" y="5110190"/>
-            <a:ext cx="676656" cy="271707"/>
+            <a:off x="9482328" y="5397573"/>
+            <a:ext cx="676656" cy="297833"/>
           </a:xfrm>
           <a:prstGeom prst="rect">
             <a:avLst/>
@@ -18653,8 +18535,8 @@
         </p:nvSpPr>
         <p:spPr>
           <a:xfrm>
-            <a:off x="10158984" y="5110190"/>
-            <a:ext cx="1188720" cy="271707"/>
+            <a:off x="10158984" y="5397573"/>
+            <a:ext cx="1188720" cy="297833"/>
           </a:xfrm>
           <a:prstGeom prst="rect">
             <a:avLst/>
@@ -18692,8 +18574,8 @@
         </p:nvSpPr>
         <p:spPr>
           <a:xfrm>
-            <a:off x="6208776" y="5381897"/>
-            <a:ext cx="310896" cy="271707"/>
+            <a:off x="6208776" y="5695406"/>
+            <a:ext cx="310896" cy="297833"/>
           </a:xfrm>
           <a:prstGeom prst="rect">
             <a:avLst/>
@@ -18731,8 +18613,8 @@
         </p:nvSpPr>
         <p:spPr>
           <a:xfrm>
-            <a:off x="6565392" y="5381897"/>
-            <a:ext cx="1920240" cy="271707"/>
+            <a:off x="6565392" y="5695406"/>
+            <a:ext cx="1920240" cy="297833"/>
           </a:xfrm>
           <a:prstGeom prst="rect">
             <a:avLst/>
@@ -18770,8 +18652,8 @@
         </p:nvSpPr>
         <p:spPr>
           <a:xfrm>
-            <a:off x="8558784" y="5449824"/>
-            <a:ext cx="135255" cy="135854"/>
+            <a:off x="8558784" y="5769864"/>
+            <a:ext cx="135255" cy="148917"/>
           </a:xfrm>
           <a:prstGeom prst="rect">
             <a:avLst/>
@@ -18790,8 +18672,8 @@
         </p:nvSpPr>
         <p:spPr>
           <a:xfrm>
-            <a:off x="9482328" y="5381897"/>
-            <a:ext cx="676656" cy="271707"/>
+            <a:off x="9482328" y="5695406"/>
+            <a:ext cx="676656" cy="297833"/>
           </a:xfrm>
           <a:prstGeom prst="rect">
             <a:avLst/>
@@ -18829,8 +18711,8 @@
         </p:nvSpPr>
         <p:spPr>
           <a:xfrm>
-            <a:off x="10158984" y="5381897"/>
-            <a:ext cx="1188720" cy="271707"/>
+            <a:off x="10158984" y="5695406"/>
+            <a:ext cx="1188720" cy="297833"/>
           </a:xfrm>
           <a:prstGeom prst="rect">
             <a:avLst/>
@@ -18868,8 +18750,8 @@
         </p:nvSpPr>
         <p:spPr>
           <a:xfrm>
-            <a:off x="6208776" y="5653605"/>
-            <a:ext cx="310896" cy="271707"/>
+            <a:off x="6208776" y="5993239"/>
+            <a:ext cx="310896" cy="297833"/>
           </a:xfrm>
           <a:prstGeom prst="rect">
             <a:avLst/>
@@ -18907,8 +18789,8 @@
         </p:nvSpPr>
         <p:spPr>
           <a:xfrm>
-            <a:off x="6565392" y="5653605"/>
-            <a:ext cx="1920240" cy="271707"/>
+            <a:off x="6565392" y="5993239"/>
+            <a:ext cx="1920240" cy="297833"/>
           </a:xfrm>
           <a:prstGeom prst="rect">
             <a:avLst/>
@@ -18946,8 +18828,8 @@
         </p:nvSpPr>
         <p:spPr>
           <a:xfrm>
-            <a:off x="8558784" y="5721531"/>
-            <a:ext cx="112395" cy="135854"/>
+            <a:off x="8558784" y="6067697"/>
+            <a:ext cx="112395" cy="148917"/>
           </a:xfrm>
           <a:prstGeom prst="rect">
             <a:avLst/>
@@ -18966,8 +18848,8 @@
         </p:nvSpPr>
         <p:spPr>
           <a:xfrm>
-            <a:off x="9482328" y="5653605"/>
-            <a:ext cx="676656" cy="271707"/>
+            <a:off x="9482328" y="5993239"/>
+            <a:ext cx="676656" cy="297833"/>
           </a:xfrm>
           <a:prstGeom prst="rect">
             <a:avLst/>
@@ -19005,8 +18887,8 @@
         </p:nvSpPr>
         <p:spPr>
           <a:xfrm>
-            <a:off x="10158984" y="5653605"/>
-            <a:ext cx="1188720" cy="271707"/>
+            <a:off x="10158984" y="5993239"/>
+            <a:ext cx="1188720" cy="297833"/>
           </a:xfrm>
           <a:prstGeom prst="rect">
             <a:avLst/>
@@ -19201,7 +19083,7 @@
         <p:spPr>
           <a:xfrm>
             <a:off x="3432502" y="2121408"/>
-            <a:ext cx="14630" cy="3803904"/>
+            <a:ext cx="14630" cy="4169664"/>
           </a:xfrm>
           <a:prstGeom prst="rect">
             <a:avLst/>
@@ -19221,7 +19103,7 @@
         <p:spPr>
           <a:xfrm>
             <a:off x="8982910" y="2121408"/>
-            <a:ext cx="14630" cy="3803904"/>
+            <a:ext cx="14630" cy="4169664"/>
           </a:xfrm>
           <a:prstGeom prst="rect">
             <a:avLst/>
@@ -19241,7 +19123,7 @@
         <p:spPr>
           <a:xfrm>
             <a:off x="6085332" y="2121408"/>
-            <a:ext cx="10973" cy="3803904"/>
+            <a:ext cx="10973" cy="4169664"/>
           </a:xfrm>
           <a:prstGeom prst="rect">
             <a:avLst/>
@@ -19251,65 +19133,6 @@
           </a:solidFill>
           <a:ln/>
         </p:spPr>
-      </p:sp>
-      <p:sp>
-        <p:nvSpPr>
-          <p:cNvPr id="158" name="Shape 156"/>
-          <p:cNvSpPr/>
-          <p:nvPr/>
-        </p:nvSpPr>
-        <p:spPr>
-          <a:xfrm>
-            <a:off x="457200" y="6126480"/>
-            <a:ext cx="11274552" cy="341376"/>
-          </a:xfrm>
-          <a:prstGeom prst="rect">
-            <a:avLst/>
-          </a:prstGeom>
-          <a:solidFill>
-            <a:srgbClr val="EDF4FA"/>
-          </a:solidFill>
-          <a:ln/>
-        </p:spPr>
-      </p:sp>
-      <p:sp>
-        <p:nvSpPr>
-          <p:cNvPr id="159" name="Text 157"/>
-          <p:cNvSpPr txBox="1"/>
-          <p:nvPr/>
-        </p:nvSpPr>
-        <p:spPr>
-          <a:xfrm>
-            <a:off x="658368" y="6144768"/>
-            <a:ext cx="10927080" cy="304800"/>
-          </a:xfrm>
-          <a:prstGeom prst="rect">
-            <a:avLst/>
-          </a:prstGeom>
-          <a:noFill/>
-          <a:ln/>
-        </p:spPr>
-        <p:txBody>
-          <a:bodyPr wrap="square" lIns="0" tIns="0" rIns="0" bIns="0" rtlCol="0" anchor="ctr"/>
-          <a:lstStyle/>
-          <a:p>
-            <a:pPr indent="0" marL="0">
-              <a:buNone/>
-            </a:pPr>
-            <a:r>
-              <a:rPr lang="en-US" sz="1400" b="1" dirty="0">
-                <a:solidFill>
-                  <a:srgbClr val="0B2C4A"/>
-                </a:solidFill>
-                <a:latin typeface="Inter" pitchFamily="34" charset="0"/>
-                <a:ea typeface="Inter" pitchFamily="34" charset="-122"/>
-                <a:cs typeface="Inter" pitchFamily="34" charset="-120"/>
-              </a:rPr>
-              <a:t>11 of 28 stores at or above the 45.3% group. Hyundai Prescott leads at 91.2%; Kia St George is lowest at 11.8%.</a:t>
-            </a:r>
-            <a:endParaRPr lang="en-US" sz="1400" dirty="0"/>
-          </a:p>
-        </p:txBody>
       </p:sp>
     </p:spTree>
   </p:cSld>

--- a/day2-deck/decks/MPI & Video Completion - Review.pptx
+++ b/day2-deck/decks/MPI & Video Completion - Review.pptx
@@ -504,7 +504,7 @@
           <a:p>
             <a:r>
               <a:rPr lang="en-US" dirty="0"/>
-              <a:t>Takeaway (off the slide): 12 of 33 stores at or above the 90.0% benchmark; the group is at 81.3%. LR Reno and VW Henderson lead at 99.0%; Cadillac is lowest at 40.5%.Source: Store-reported from each store's MPI tool (MPI_Video_Completion_Jul-Sep_2026.xlsx): CP + warranty ROs closed Jul 1 - Sep 30, 2026, including $0 ROs; % of ROs, not of MPIs. Group = RO-weighted by each store's CP+W ROs (Qlik Closed Repair Orders, 128,726). Tools differ by store; GMC Prescott's report is not filtered to CP+W; Volvo and VW St George did not say. Honda Spokane and Toyota Spokane report the same figure for MPI and video. MPI % = CP+W ROs with a completed technician multi-point inspection / CP+W ROs closed. Benchmark 90% (Roundtable: 90%+ MPI completion). Green at or above the benchmark, red below.Every car, every time: the MPI is where the hours on the opcode slides come from. Cadillac switched to Auto.live during the quarter, so its number may understate the process.</a:t>
+              <a:t>Takeaway with the store call-outs (off the slide): 12 of 33 stores at or above the 90.0% benchmark; the group is at 81.3%. LR Reno and VW Henderson lead at 99.0%; Cadillac is lowest at 40.5%.Source: Store-reported from each store's MPI tool (MPI_Video_Completion_Jul-Sep_2026.xlsx): CP + warranty ROs closed Jul 1 - Sep 30, 2026, including $0 ROs; % of ROs, not of MPIs. Group = RO-weighted by each store's CP+W ROs (Qlik Closed Repair Orders, 128,726). Tools differ by store; GMC Prescott's report is not filtered to CP+W; Volvo and VW St George did not say. Honda Spokane and Toyota Spokane report the same figure for MPI and video. MPI % = CP+W ROs with a completed technician multi-point inspection / CP+W ROs closed. Benchmark 90% (Roundtable: 90%+ MPI completion). Green at or above the benchmark, red below.Every car, every time: the MPI is where the hours on the opcode slides come from. Cadillac switched to Auto.live during the quarter, so its number may understate the process.</a:t>
             </a:r>
             <a:endParaRPr lang="en-US" dirty="0"/>
           </a:p>
@@ -592,7 +592,7 @@
           <a:p>
             <a:r>
               <a:rPr lang="en-US" dirty="0"/>
-              <a:t>Takeaway (off the slide): 17 of 33 stores at or above the 57.8% group. VW Henderson leads at 96.0%; Kia St George is lowest at 5.2%.Source: Store-reported from each store's MPI tool (MPI_Video_Completion_Jul-Sep_2026.xlsx): CP + warranty ROs closed Jul 1 - Sep 30, 2026, including $0 ROs; % of ROs, not of MPIs. Group = RO-weighted by each store's CP+W ROs (Qlik Closed Repair Orders, 128,726). Tools differ by store; GMC Prescott's report is not filtered to CP+W; Volvo and VW St George did not say. Honda Spokane and Toyota Spokane report the same figure for MPI and video. Video % = CP+W ROs with a technician video attached to the MPI / CP+W ROs closed. No benchmark set; scored against the group. Green at or above the group, red below.Video is what turns an inspection into a sale the customer can see. MPI at 80% or more but video under 45%, so the inspection is done and not shown: CDJR Post Falls (81.7% MPI, 16.0% video); Chevy GMC Bullhead (87.6% MPI, 21.8% video); Chevy LV (84.5% MPI, 40.2% video); GMC Prescott (93.2% MPI, 35.1% video); Nissan (97.0% MPI, 41.9% video).</a:t>
+              <a:t>Takeaway with the store call-outs (off the slide): 17 of 33 stores at or above the 57.8% group. VW Henderson leads at 96.0%; Kia St George is lowest at 5.2%.Source: Store-reported from each store's MPI tool (MPI_Video_Completion_Jul-Sep_2026.xlsx): CP + warranty ROs closed Jul 1 - Sep 30, 2026, including $0 ROs; % of ROs, not of MPIs. Group = RO-weighted by each store's CP+W ROs (Qlik Closed Repair Orders, 128,726). Tools differ by store; GMC Prescott's report is not filtered to CP+W; Volvo and VW St George did not say. Honda Spokane and Toyota Spokane report the same figure for MPI and video. Video % = CP+W ROs with a technician video attached to the MPI / CP+W ROs closed. No benchmark set; scored against the group. Green at or above the group, red below.Video is what turns an inspection into a sale the customer can see. MPI at 80% or more but video under 45%, so the inspection is done and not shown: CDJR Post Falls (81.7% MPI, 16.0% video); Chevy GMC Bullhead (87.6% MPI, 21.8% video); Chevy LV (84.5% MPI, 40.2% video); GMC Prescott (93.2% MPI, 35.1% video); Nissan (97.0% MPI, 41.9% video).</a:t>
             </a:r>
             <a:endParaRPr lang="en-US" dirty="0"/>
           </a:p>
@@ -680,7 +680,7 @@
           <a:p>
             <a:r>
               <a:rPr lang="en-US" dirty="0"/>
-              <a:t>Takeaway (off the slide): 11 of 28 stores at or above the 45.3% group. Hyundai Prescott leads at 91.2%; Kia St George is lowest at 11.8%.Source: Store-reported from each store's MPI tool (MPI_Video_Completion_Jul-Sep_2026.xlsx): CP + warranty ROs closed Jul 1 - Sep 30, 2026, including $0 ROs; % of ROs, not of MPIs. Group = RO-weighted by each store's CP+W ROs (Qlik Closed Repair Orders, 128,726). Tools differ by store; GMC Prescott's report is not filtered to CP+W; Volvo and VW St George did not say. Honda Spokane and Toyota Spokane report the same figure for MPI and video. Photo % (optional on the form) = CP+W ROs with at least one technician photo on the MPI / CP+W ROs closed. Scored against the group. Green at or above the group, red below. 5 stores do not report it (N/A or blank).Optional measure: five stores do not report it, so it is a review slide, not a meeting slide.</a:t>
+              <a:t>Takeaway with the store call-outs (off the slide): 11 of 28 stores at or above the 45.3% group. Hyundai Prescott leads at 91.2%; Kia St George is lowest at 11.8%.Source: Store-reported from each store's MPI tool (MPI_Video_Completion_Jul-Sep_2026.xlsx): CP + warranty ROs closed Jul 1 - Sep 30, 2026, including $0 ROs; % of ROs, not of MPIs. Group = RO-weighted by each store's CP+W ROs (Qlik Closed Repair Orders, 128,726). Tools differ by store; GMC Prescott's report is not filtered to CP+W; Volvo and VW St George did not say. Honda Spokane and Toyota Spokane report the same figure for MPI and video. Photo % (optional on the form) = CP+W ROs with at least one technician photo on the MPI / CP+W ROs closed. Scored against the group. Green at or above the group, red below. 5 stores do not report it (N/A or blank).Optional measure: five stores do not report it, so it is a review slide, not a meeting slide.</a:t>
             </a:r>
             <a:endParaRPr lang="en-US" dirty="0"/>
           </a:p>
@@ -1160,7 +1160,7 @@
         <p:spPr>
           <a:xfrm>
             <a:off x="457200" y="1207008"/>
-            <a:ext cx="11274552" cy="5148072"/>
+            <a:ext cx="11274552" cy="4782312"/>
           </a:xfrm>
           <a:prstGeom prst="rect">
             <a:avLst/>
@@ -1337,7 +1337,7 @@
         <p:spPr>
           <a:xfrm>
             <a:off x="658368" y="2121408"/>
-            <a:ext cx="310896" cy="245274"/>
+            <a:ext cx="310896" cy="223759"/>
           </a:xfrm>
           <a:prstGeom prst="rect">
             <a:avLst/>
@@ -1376,7 +1376,7 @@
         <p:spPr>
           <a:xfrm>
             <a:off x="1014984" y="2121408"/>
-            <a:ext cx="1920240" cy="245274"/>
+            <a:ext cx="1920240" cy="223759"/>
           </a:xfrm>
           <a:prstGeom prst="rect">
             <a:avLst/>
@@ -1414,8 +1414,8 @@
         </p:nvSpPr>
         <p:spPr>
           <a:xfrm>
-            <a:off x="3008376" y="2182727"/>
-            <a:ext cx="868680" cy="122637"/>
+            <a:off x="3008376" y="2177348"/>
+            <a:ext cx="868680" cy="111880"/>
           </a:xfrm>
           <a:prstGeom prst="rect">
             <a:avLst/>
@@ -1435,7 +1435,7 @@
         <p:spPr>
           <a:xfrm>
             <a:off x="3931920" y="2121408"/>
-            <a:ext cx="676656" cy="245274"/>
+            <a:ext cx="676656" cy="223759"/>
           </a:xfrm>
           <a:prstGeom prst="rect">
             <a:avLst/>
@@ -1474,7 +1474,7 @@
         <p:spPr>
           <a:xfrm>
             <a:off x="4608576" y="2121408"/>
-            <a:ext cx="1188720" cy="245274"/>
+            <a:ext cx="1188720" cy="223759"/>
           </a:xfrm>
           <a:prstGeom prst="rect">
             <a:avLst/>
@@ -1512,8 +1512,8 @@
         </p:nvSpPr>
         <p:spPr>
           <a:xfrm>
-            <a:off x="658368" y="2366682"/>
-            <a:ext cx="310896" cy="245274"/>
+            <a:off x="658368" y="2345167"/>
+            <a:ext cx="310896" cy="223759"/>
           </a:xfrm>
           <a:prstGeom prst="rect">
             <a:avLst/>
@@ -1551,8 +1551,8 @@
         </p:nvSpPr>
         <p:spPr>
           <a:xfrm>
-            <a:off x="1014984" y="2366682"/>
-            <a:ext cx="1920240" cy="245274"/>
+            <a:off x="1014984" y="2345167"/>
+            <a:ext cx="1920240" cy="223759"/>
           </a:xfrm>
           <a:prstGeom prst="rect">
             <a:avLst/>
@@ -1590,8 +1590,8 @@
         </p:nvSpPr>
         <p:spPr>
           <a:xfrm>
-            <a:off x="3008376" y="2428001"/>
-            <a:ext cx="868680" cy="122637"/>
+            <a:off x="3008376" y="2401107"/>
+            <a:ext cx="868680" cy="111880"/>
           </a:xfrm>
           <a:prstGeom prst="rect">
             <a:avLst/>
@@ -1610,8 +1610,8 @@
         </p:nvSpPr>
         <p:spPr>
           <a:xfrm>
-            <a:off x="3931920" y="2366682"/>
-            <a:ext cx="676656" cy="245274"/>
+            <a:off x="3931920" y="2345167"/>
+            <a:ext cx="676656" cy="223759"/>
           </a:xfrm>
           <a:prstGeom prst="rect">
             <a:avLst/>
@@ -1649,8 +1649,8 @@
         </p:nvSpPr>
         <p:spPr>
           <a:xfrm>
-            <a:off x="4608576" y="2366682"/>
-            <a:ext cx="1188720" cy="245274"/>
+            <a:off x="4608576" y="2345167"/>
+            <a:ext cx="1188720" cy="223759"/>
           </a:xfrm>
           <a:prstGeom prst="rect">
             <a:avLst/>
@@ -1688,8 +1688,8 @@
         </p:nvSpPr>
         <p:spPr>
           <a:xfrm>
-            <a:off x="658368" y="2611957"/>
-            <a:ext cx="310896" cy="245274"/>
+            <a:off x="658368" y="2568926"/>
+            <a:ext cx="310896" cy="223759"/>
           </a:xfrm>
           <a:prstGeom prst="rect">
             <a:avLst/>
@@ -1727,8 +1727,8 @@
         </p:nvSpPr>
         <p:spPr>
           <a:xfrm>
-            <a:off x="1014984" y="2611957"/>
-            <a:ext cx="1920240" cy="245274"/>
+            <a:off x="1014984" y="2568926"/>
+            <a:ext cx="1920240" cy="223759"/>
           </a:xfrm>
           <a:prstGeom prst="rect">
             <a:avLst/>
@@ -1766,8 +1766,8 @@
         </p:nvSpPr>
         <p:spPr>
           <a:xfrm>
-            <a:off x="3008376" y="2673275"/>
-            <a:ext cx="861660" cy="122637"/>
+            <a:off x="3008376" y="2624866"/>
+            <a:ext cx="861660" cy="111880"/>
           </a:xfrm>
           <a:prstGeom prst="rect">
             <a:avLst/>
@@ -1786,8 +1786,8 @@
         </p:nvSpPr>
         <p:spPr>
           <a:xfrm>
-            <a:off x="3931920" y="2611957"/>
-            <a:ext cx="676656" cy="245274"/>
+            <a:off x="3931920" y="2568926"/>
+            <a:ext cx="676656" cy="223759"/>
           </a:xfrm>
           <a:prstGeom prst="rect">
             <a:avLst/>
@@ -1825,8 +1825,8 @@
         </p:nvSpPr>
         <p:spPr>
           <a:xfrm>
-            <a:off x="4608576" y="2611957"/>
-            <a:ext cx="1188720" cy="245274"/>
+            <a:off x="4608576" y="2568926"/>
+            <a:ext cx="1188720" cy="223759"/>
           </a:xfrm>
           <a:prstGeom prst="rect">
             <a:avLst/>
@@ -1864,8 +1864,8 @@
         </p:nvSpPr>
         <p:spPr>
           <a:xfrm>
-            <a:off x="658368" y="2857231"/>
-            <a:ext cx="310896" cy="245274"/>
+            <a:off x="658368" y="2792685"/>
+            <a:ext cx="310896" cy="223759"/>
           </a:xfrm>
           <a:prstGeom prst="rect">
             <a:avLst/>
@@ -1903,8 +1903,8 @@
         </p:nvSpPr>
         <p:spPr>
           <a:xfrm>
-            <a:off x="1014984" y="2857231"/>
-            <a:ext cx="1920240" cy="245274"/>
+            <a:off x="1014984" y="2792685"/>
+            <a:ext cx="1920240" cy="223759"/>
           </a:xfrm>
           <a:prstGeom prst="rect">
             <a:avLst/>
@@ -1942,8 +1942,8 @@
         </p:nvSpPr>
         <p:spPr>
           <a:xfrm>
-            <a:off x="3008376" y="2918550"/>
-            <a:ext cx="859905" cy="122637"/>
+            <a:off x="3008376" y="2848625"/>
+            <a:ext cx="859905" cy="111880"/>
           </a:xfrm>
           <a:prstGeom prst="rect">
             <a:avLst/>
@@ -1962,8 +1962,8 @@
         </p:nvSpPr>
         <p:spPr>
           <a:xfrm>
-            <a:off x="3931920" y="2857231"/>
-            <a:ext cx="676656" cy="245274"/>
+            <a:off x="3931920" y="2792685"/>
+            <a:ext cx="676656" cy="223759"/>
           </a:xfrm>
           <a:prstGeom prst="rect">
             <a:avLst/>
@@ -2001,8 +2001,8 @@
         </p:nvSpPr>
         <p:spPr>
           <a:xfrm>
-            <a:off x="4608576" y="2857231"/>
-            <a:ext cx="1188720" cy="245274"/>
+            <a:off x="4608576" y="2792685"/>
+            <a:ext cx="1188720" cy="223759"/>
           </a:xfrm>
           <a:prstGeom prst="rect">
             <a:avLst/>
@@ -2040,8 +2040,8 @@
         </p:nvSpPr>
         <p:spPr>
           <a:xfrm>
-            <a:off x="658368" y="3102505"/>
-            <a:ext cx="310896" cy="245274"/>
+            <a:off x="658368" y="3016444"/>
+            <a:ext cx="310896" cy="223759"/>
           </a:xfrm>
           <a:prstGeom prst="rect">
             <a:avLst/>
@@ -2079,8 +2079,8 @@
         </p:nvSpPr>
         <p:spPr>
           <a:xfrm>
-            <a:off x="1014984" y="3102505"/>
-            <a:ext cx="1920240" cy="245274"/>
+            <a:off x="1014984" y="3016444"/>
+            <a:ext cx="1920240" cy="223759"/>
           </a:xfrm>
           <a:prstGeom prst="rect">
             <a:avLst/>
@@ -2118,8 +2118,8 @@
         </p:nvSpPr>
         <p:spPr>
           <a:xfrm>
-            <a:off x="3008376" y="3163824"/>
-            <a:ext cx="851131" cy="122637"/>
+            <a:off x="3008376" y="3072384"/>
+            <a:ext cx="851131" cy="111880"/>
           </a:xfrm>
           <a:prstGeom prst="rect">
             <a:avLst/>
@@ -2138,8 +2138,8 @@
         </p:nvSpPr>
         <p:spPr>
           <a:xfrm>
-            <a:off x="3931920" y="3102505"/>
-            <a:ext cx="676656" cy="245274"/>
+            <a:off x="3931920" y="3016444"/>
+            <a:ext cx="676656" cy="223759"/>
           </a:xfrm>
           <a:prstGeom prst="rect">
             <a:avLst/>
@@ -2177,8 +2177,8 @@
         </p:nvSpPr>
         <p:spPr>
           <a:xfrm>
-            <a:off x="4608576" y="3102505"/>
-            <a:ext cx="1188720" cy="245274"/>
+            <a:off x="4608576" y="3016444"/>
+            <a:ext cx="1188720" cy="223759"/>
           </a:xfrm>
           <a:prstGeom prst="rect">
             <a:avLst/>
@@ -2216,8 +2216,8 @@
         </p:nvSpPr>
         <p:spPr>
           <a:xfrm>
-            <a:off x="658368" y="3347780"/>
-            <a:ext cx="310896" cy="245274"/>
+            <a:off x="658368" y="3240203"/>
+            <a:ext cx="310896" cy="223759"/>
           </a:xfrm>
           <a:prstGeom prst="rect">
             <a:avLst/>
@@ -2255,8 +2255,8 @@
         </p:nvSpPr>
         <p:spPr>
           <a:xfrm>
-            <a:off x="1014984" y="3347780"/>
-            <a:ext cx="1920240" cy="245274"/>
+            <a:off x="1014984" y="3240203"/>
+            <a:ext cx="1920240" cy="223759"/>
           </a:xfrm>
           <a:prstGeom prst="rect">
             <a:avLst/>
@@ -2294,8 +2294,8 @@
         </p:nvSpPr>
         <p:spPr>
           <a:xfrm>
-            <a:off x="3008376" y="3409098"/>
-            <a:ext cx="851131" cy="122637"/>
+            <a:off x="3008376" y="3296143"/>
+            <a:ext cx="851131" cy="111880"/>
           </a:xfrm>
           <a:prstGeom prst="rect">
             <a:avLst/>
@@ -2314,8 +2314,8 @@
         </p:nvSpPr>
         <p:spPr>
           <a:xfrm>
-            <a:off x="3931920" y="3347780"/>
-            <a:ext cx="676656" cy="245274"/>
+            <a:off x="3931920" y="3240203"/>
+            <a:ext cx="676656" cy="223759"/>
           </a:xfrm>
           <a:prstGeom prst="rect">
             <a:avLst/>
@@ -2353,8 +2353,8 @@
         </p:nvSpPr>
         <p:spPr>
           <a:xfrm>
-            <a:off x="4608576" y="3347780"/>
-            <a:ext cx="1188720" cy="245274"/>
+            <a:off x="4608576" y="3240203"/>
+            <a:ext cx="1188720" cy="223759"/>
           </a:xfrm>
           <a:prstGeom prst="rect">
             <a:avLst/>
@@ -2392,8 +2392,8 @@
         </p:nvSpPr>
         <p:spPr>
           <a:xfrm>
-            <a:off x="658368" y="3593054"/>
-            <a:ext cx="310896" cy="245274"/>
+            <a:off x="658368" y="3463962"/>
+            <a:ext cx="310896" cy="223759"/>
           </a:xfrm>
           <a:prstGeom prst="rect">
             <a:avLst/>
@@ -2431,8 +2431,8 @@
         </p:nvSpPr>
         <p:spPr>
           <a:xfrm>
-            <a:off x="1014984" y="3593054"/>
-            <a:ext cx="1920240" cy="245274"/>
+            <a:off x="1014984" y="3463962"/>
+            <a:ext cx="1920240" cy="223759"/>
           </a:xfrm>
           <a:prstGeom prst="rect">
             <a:avLst/>
@@ -2470,8 +2470,8 @@
         </p:nvSpPr>
         <p:spPr>
           <a:xfrm>
-            <a:off x="3008376" y="3654373"/>
-            <a:ext cx="843234" cy="122637"/>
+            <a:off x="3008376" y="3519902"/>
+            <a:ext cx="843234" cy="111880"/>
           </a:xfrm>
           <a:prstGeom prst="rect">
             <a:avLst/>
@@ -2490,8 +2490,8 @@
         </p:nvSpPr>
         <p:spPr>
           <a:xfrm>
-            <a:off x="3931920" y="3593054"/>
-            <a:ext cx="676656" cy="245274"/>
+            <a:off x="3931920" y="3463962"/>
+            <a:ext cx="676656" cy="223759"/>
           </a:xfrm>
           <a:prstGeom prst="rect">
             <a:avLst/>
@@ -2529,8 +2529,8 @@
         </p:nvSpPr>
         <p:spPr>
           <a:xfrm>
-            <a:off x="4608576" y="3593054"/>
-            <a:ext cx="1188720" cy="245274"/>
+            <a:off x="4608576" y="3463962"/>
+            <a:ext cx="1188720" cy="223759"/>
           </a:xfrm>
           <a:prstGeom prst="rect">
             <a:avLst/>
@@ -2568,8 +2568,8 @@
         </p:nvSpPr>
         <p:spPr>
           <a:xfrm>
-            <a:off x="658368" y="3838328"/>
-            <a:ext cx="310896" cy="245274"/>
+            <a:off x="658368" y="3687721"/>
+            <a:ext cx="310896" cy="223759"/>
           </a:xfrm>
           <a:prstGeom prst="rect">
             <a:avLst/>
@@ -2607,8 +2607,8 @@
         </p:nvSpPr>
         <p:spPr>
           <a:xfrm>
-            <a:off x="1014984" y="3838328"/>
-            <a:ext cx="1920240" cy="245274"/>
+            <a:off x="1014984" y="3687721"/>
+            <a:ext cx="1920240" cy="223759"/>
           </a:xfrm>
           <a:prstGeom prst="rect">
             <a:avLst/>
@@ -2646,8 +2646,8 @@
         </p:nvSpPr>
         <p:spPr>
           <a:xfrm>
-            <a:off x="3008376" y="3899647"/>
-            <a:ext cx="830949" cy="122637"/>
+            <a:off x="3008376" y="3743661"/>
+            <a:ext cx="830949" cy="111880"/>
           </a:xfrm>
           <a:prstGeom prst="rect">
             <a:avLst/>
@@ -2666,8 +2666,8 @@
         </p:nvSpPr>
         <p:spPr>
           <a:xfrm>
-            <a:off x="3931920" y="3838328"/>
-            <a:ext cx="676656" cy="245274"/>
+            <a:off x="3931920" y="3687721"/>
+            <a:ext cx="676656" cy="223759"/>
           </a:xfrm>
           <a:prstGeom prst="rect">
             <a:avLst/>
@@ -2705,8 +2705,8 @@
         </p:nvSpPr>
         <p:spPr>
           <a:xfrm>
-            <a:off x="4608576" y="3838328"/>
-            <a:ext cx="1188720" cy="245274"/>
+            <a:off x="4608576" y="3687721"/>
+            <a:ext cx="1188720" cy="223759"/>
           </a:xfrm>
           <a:prstGeom prst="rect">
             <a:avLst/>
@@ -2744,8 +2744,8 @@
         </p:nvSpPr>
         <p:spPr>
           <a:xfrm>
-            <a:off x="658368" y="4083603"/>
-            <a:ext cx="310896" cy="245274"/>
+            <a:off x="658368" y="3911480"/>
+            <a:ext cx="310896" cy="223759"/>
           </a:xfrm>
           <a:prstGeom prst="rect">
             <a:avLst/>
@@ -2783,8 +2783,8 @@
         </p:nvSpPr>
         <p:spPr>
           <a:xfrm>
-            <a:off x="1014984" y="4083603"/>
-            <a:ext cx="1920240" cy="245274"/>
+            <a:off x="1014984" y="3911480"/>
+            <a:ext cx="1920240" cy="223759"/>
           </a:xfrm>
           <a:prstGeom prst="rect">
             <a:avLst/>
@@ -2822,8 +2822,8 @@
         </p:nvSpPr>
         <p:spPr>
           <a:xfrm>
-            <a:off x="3008376" y="4144921"/>
-            <a:ext cx="822175" cy="122637"/>
+            <a:off x="3008376" y="3967420"/>
+            <a:ext cx="822175" cy="111880"/>
           </a:xfrm>
           <a:prstGeom prst="rect">
             <a:avLst/>
@@ -2842,8 +2842,8 @@
         </p:nvSpPr>
         <p:spPr>
           <a:xfrm>
-            <a:off x="3931920" y="4083603"/>
-            <a:ext cx="676656" cy="245274"/>
+            <a:off x="3931920" y="3911480"/>
+            <a:ext cx="676656" cy="223759"/>
           </a:xfrm>
           <a:prstGeom prst="rect">
             <a:avLst/>
@@ -2881,8 +2881,8 @@
         </p:nvSpPr>
         <p:spPr>
           <a:xfrm>
-            <a:off x="4608576" y="4083603"/>
-            <a:ext cx="1188720" cy="245274"/>
+            <a:off x="4608576" y="3911480"/>
+            <a:ext cx="1188720" cy="223759"/>
           </a:xfrm>
           <a:prstGeom prst="rect">
             <a:avLst/>
@@ -2920,8 +2920,8 @@
         </p:nvSpPr>
         <p:spPr>
           <a:xfrm>
-            <a:off x="658368" y="4328877"/>
-            <a:ext cx="310896" cy="245274"/>
+            <a:off x="658368" y="4135240"/>
+            <a:ext cx="310896" cy="223759"/>
           </a:xfrm>
           <a:prstGeom prst="rect">
             <a:avLst/>
@@ -2959,8 +2959,8 @@
         </p:nvSpPr>
         <p:spPr>
           <a:xfrm>
-            <a:off x="1014984" y="4328877"/>
-            <a:ext cx="1920240" cy="245274"/>
+            <a:off x="1014984" y="4135240"/>
+            <a:ext cx="1920240" cy="223759"/>
           </a:xfrm>
           <a:prstGeom prst="rect">
             <a:avLst/>
@@ -2998,8 +2998,8 @@
         </p:nvSpPr>
         <p:spPr>
           <a:xfrm>
-            <a:off x="3008376" y="4390196"/>
-            <a:ext cx="817788" cy="122637"/>
+            <a:off x="3008376" y="4191179"/>
+            <a:ext cx="817788" cy="111880"/>
           </a:xfrm>
           <a:prstGeom prst="rect">
             <a:avLst/>
@@ -3018,8 +3018,8 @@
         </p:nvSpPr>
         <p:spPr>
           <a:xfrm>
-            <a:off x="3931920" y="4328877"/>
-            <a:ext cx="676656" cy="245274"/>
+            <a:off x="3931920" y="4135240"/>
+            <a:ext cx="676656" cy="223759"/>
           </a:xfrm>
           <a:prstGeom prst="rect">
             <a:avLst/>
@@ -3057,8 +3057,8 @@
         </p:nvSpPr>
         <p:spPr>
           <a:xfrm>
-            <a:off x="4608576" y="4328877"/>
-            <a:ext cx="1188720" cy="245274"/>
+            <a:off x="4608576" y="4135240"/>
+            <a:ext cx="1188720" cy="223759"/>
           </a:xfrm>
           <a:prstGeom prst="rect">
             <a:avLst/>
@@ -3096,8 +3096,8 @@
         </p:nvSpPr>
         <p:spPr>
           <a:xfrm>
-            <a:off x="658368" y="4574152"/>
-            <a:ext cx="310896" cy="245274"/>
+            <a:off x="658368" y="4358999"/>
+            <a:ext cx="310896" cy="223759"/>
           </a:xfrm>
           <a:prstGeom prst="rect">
             <a:avLst/>
@@ -3135,8 +3135,8 @@
         </p:nvSpPr>
         <p:spPr>
           <a:xfrm>
-            <a:off x="1014984" y="4574152"/>
-            <a:ext cx="1920240" cy="245274"/>
+            <a:off x="1014984" y="4358999"/>
+            <a:ext cx="1920240" cy="223759"/>
           </a:xfrm>
           <a:prstGeom prst="rect">
             <a:avLst/>
@@ -3174,8 +3174,8 @@
         </p:nvSpPr>
         <p:spPr>
           <a:xfrm>
-            <a:off x="3008376" y="4635470"/>
-            <a:ext cx="805503" cy="122637"/>
+            <a:off x="3008376" y="4414938"/>
+            <a:ext cx="805503" cy="111880"/>
           </a:xfrm>
           <a:prstGeom prst="rect">
             <a:avLst/>
@@ -3194,8 +3194,8 @@
         </p:nvSpPr>
         <p:spPr>
           <a:xfrm>
-            <a:off x="3931920" y="4574152"/>
-            <a:ext cx="676656" cy="245274"/>
+            <a:off x="3931920" y="4358999"/>
+            <a:ext cx="676656" cy="223759"/>
           </a:xfrm>
           <a:prstGeom prst="rect">
             <a:avLst/>
@@ -3233,8 +3233,8 @@
         </p:nvSpPr>
         <p:spPr>
           <a:xfrm>
-            <a:off x="4608576" y="4574152"/>
-            <a:ext cx="1188720" cy="245274"/>
+            <a:off x="4608576" y="4358999"/>
+            <a:ext cx="1188720" cy="223759"/>
           </a:xfrm>
           <a:prstGeom prst="rect">
             <a:avLst/>
@@ -3272,8 +3272,8 @@
         </p:nvSpPr>
         <p:spPr>
           <a:xfrm>
-            <a:off x="658368" y="4819426"/>
-            <a:ext cx="310896" cy="245274"/>
+            <a:off x="658368" y="4582758"/>
+            <a:ext cx="310896" cy="223759"/>
           </a:xfrm>
           <a:prstGeom prst="rect">
             <a:avLst/>
@@ -3311,8 +3311,8 @@
         </p:nvSpPr>
         <p:spPr>
           <a:xfrm>
-            <a:off x="1014984" y="4819426"/>
-            <a:ext cx="1920240" cy="245274"/>
+            <a:off x="1014984" y="4582758"/>
+            <a:ext cx="1920240" cy="223759"/>
           </a:xfrm>
           <a:prstGeom prst="rect">
             <a:avLst/>
@@ -3350,8 +3350,8 @@
         </p:nvSpPr>
         <p:spPr>
           <a:xfrm>
-            <a:off x="3008376" y="4880744"/>
-            <a:ext cx="804626" cy="122637"/>
+            <a:off x="3008376" y="4638697"/>
+            <a:ext cx="804626" cy="111880"/>
           </a:xfrm>
           <a:prstGeom prst="rect">
             <a:avLst/>
@@ -3370,8 +3370,8 @@
         </p:nvSpPr>
         <p:spPr>
           <a:xfrm>
-            <a:off x="3931920" y="4819426"/>
-            <a:ext cx="676656" cy="245274"/>
+            <a:off x="3931920" y="4582758"/>
+            <a:ext cx="676656" cy="223759"/>
           </a:xfrm>
           <a:prstGeom prst="rect">
             <a:avLst/>
@@ -3409,8 +3409,8 @@
         </p:nvSpPr>
         <p:spPr>
           <a:xfrm>
-            <a:off x="4608576" y="4819426"/>
-            <a:ext cx="1188720" cy="245274"/>
+            <a:off x="4608576" y="4582758"/>
+            <a:ext cx="1188720" cy="223759"/>
           </a:xfrm>
           <a:prstGeom prst="rect">
             <a:avLst/>
@@ -3448,8 +3448,8 @@
         </p:nvSpPr>
         <p:spPr>
           <a:xfrm>
-            <a:off x="658368" y="5064700"/>
-            <a:ext cx="310896" cy="245274"/>
+            <a:off x="658368" y="4806517"/>
+            <a:ext cx="310896" cy="223759"/>
           </a:xfrm>
           <a:prstGeom prst="rect">
             <a:avLst/>
@@ -3487,8 +3487,8 @@
         </p:nvSpPr>
         <p:spPr>
           <a:xfrm>
-            <a:off x="1014984" y="5064700"/>
-            <a:ext cx="1920240" cy="245274"/>
+            <a:off x="1014984" y="4806517"/>
+            <a:ext cx="1920240" cy="223759"/>
           </a:xfrm>
           <a:prstGeom prst="rect">
             <a:avLst/>
@@ -3526,8 +3526,8 @@
         </p:nvSpPr>
         <p:spPr>
           <a:xfrm>
-            <a:off x="3008376" y="5126019"/>
-            <a:ext cx="780935" cy="122637"/>
+            <a:off x="3008376" y="4862456"/>
+            <a:ext cx="780935" cy="111880"/>
           </a:xfrm>
           <a:prstGeom prst="rect">
             <a:avLst/>
@@ -3546,8 +3546,8 @@
         </p:nvSpPr>
         <p:spPr>
           <a:xfrm>
-            <a:off x="3931920" y="5064700"/>
-            <a:ext cx="676656" cy="245274"/>
+            <a:off x="3931920" y="4806517"/>
+            <a:ext cx="676656" cy="223759"/>
           </a:xfrm>
           <a:prstGeom prst="rect">
             <a:avLst/>
@@ -3585,8 +3585,8 @@
         </p:nvSpPr>
         <p:spPr>
           <a:xfrm>
-            <a:off x="4608576" y="5064700"/>
-            <a:ext cx="1188720" cy="245274"/>
+            <a:off x="4608576" y="4806517"/>
+            <a:ext cx="1188720" cy="223759"/>
           </a:xfrm>
           <a:prstGeom prst="rect">
             <a:avLst/>
@@ -3624,8 +3624,8 @@
         </p:nvSpPr>
         <p:spPr>
           <a:xfrm>
-            <a:off x="658368" y="5309975"/>
-            <a:ext cx="310896" cy="245274"/>
+            <a:off x="658368" y="5030276"/>
+            <a:ext cx="310896" cy="223759"/>
           </a:xfrm>
           <a:prstGeom prst="rect">
             <a:avLst/>
@@ -3663,8 +3663,8 @@
         </p:nvSpPr>
         <p:spPr>
           <a:xfrm>
-            <a:off x="1014984" y="5309975"/>
-            <a:ext cx="1920240" cy="245274"/>
+            <a:off x="1014984" y="5030276"/>
+            <a:ext cx="1920240" cy="223759"/>
           </a:xfrm>
           <a:prstGeom prst="rect">
             <a:avLst/>
@@ -3702,8 +3702,8 @@
         </p:nvSpPr>
         <p:spPr>
           <a:xfrm>
-            <a:off x="3008376" y="5371293"/>
-            <a:ext cx="768650" cy="122637"/>
+            <a:off x="3008376" y="5086216"/>
+            <a:ext cx="768650" cy="111880"/>
           </a:xfrm>
           <a:prstGeom prst="rect">
             <a:avLst/>
@@ -3722,8 +3722,8 @@
         </p:nvSpPr>
         <p:spPr>
           <a:xfrm>
-            <a:off x="3931920" y="5309975"/>
-            <a:ext cx="676656" cy="245274"/>
+            <a:off x="3931920" y="5030276"/>
+            <a:ext cx="676656" cy="223759"/>
           </a:xfrm>
           <a:prstGeom prst="rect">
             <a:avLst/>
@@ -3761,8 +3761,8 @@
         </p:nvSpPr>
         <p:spPr>
           <a:xfrm>
-            <a:off x="4608576" y="5309975"/>
-            <a:ext cx="1188720" cy="245274"/>
+            <a:off x="4608576" y="5030276"/>
+            <a:ext cx="1188720" cy="223759"/>
           </a:xfrm>
           <a:prstGeom prst="rect">
             <a:avLst/>
@@ -3800,8 +3800,8 @@
         </p:nvSpPr>
         <p:spPr>
           <a:xfrm>
-            <a:off x="658368" y="5555249"/>
-            <a:ext cx="310896" cy="245274"/>
+            <a:off x="658368" y="5254035"/>
+            <a:ext cx="310896" cy="223759"/>
           </a:xfrm>
           <a:prstGeom prst="rect">
             <a:avLst/>
@@ -3839,8 +3839,8 @@
         </p:nvSpPr>
         <p:spPr>
           <a:xfrm>
-            <a:off x="1014984" y="5555249"/>
-            <a:ext cx="1920240" cy="245274"/>
+            <a:off x="1014984" y="5254035"/>
+            <a:ext cx="1920240" cy="223759"/>
           </a:xfrm>
           <a:prstGeom prst="rect">
             <a:avLst/>
@@ -3878,8 +3878,8 @@
         </p:nvSpPr>
         <p:spPr>
           <a:xfrm>
-            <a:off x="3008376" y="5616568"/>
-            <a:ext cx="757243" cy="122637"/>
+            <a:off x="3008376" y="5309975"/>
+            <a:ext cx="757243" cy="111880"/>
           </a:xfrm>
           <a:prstGeom prst="rect">
             <a:avLst/>
@@ -3898,8 +3898,8 @@
         </p:nvSpPr>
         <p:spPr>
           <a:xfrm>
-            <a:off x="3931920" y="5555249"/>
-            <a:ext cx="676656" cy="245274"/>
+            <a:off x="3931920" y="5254035"/>
+            <a:ext cx="676656" cy="223759"/>
           </a:xfrm>
           <a:prstGeom prst="rect">
             <a:avLst/>
@@ -3937,8 +3937,8 @@
         </p:nvSpPr>
         <p:spPr>
           <a:xfrm>
-            <a:off x="4608576" y="5555249"/>
-            <a:ext cx="1188720" cy="245274"/>
+            <a:off x="4608576" y="5254035"/>
+            <a:ext cx="1188720" cy="223759"/>
           </a:xfrm>
           <a:prstGeom prst="rect">
             <a:avLst/>
@@ -3976,8 +3976,8 @@
         </p:nvSpPr>
         <p:spPr>
           <a:xfrm>
-            <a:off x="658368" y="5800523"/>
-            <a:ext cx="310896" cy="245274"/>
+            <a:off x="658368" y="5477794"/>
+            <a:ext cx="310896" cy="223759"/>
           </a:xfrm>
           <a:prstGeom prst="rect">
             <a:avLst/>
@@ -4015,8 +4015,8 @@
         </p:nvSpPr>
         <p:spPr>
           <a:xfrm>
-            <a:off x="1014984" y="5800523"/>
-            <a:ext cx="1920240" cy="245274"/>
+            <a:off x="1014984" y="5477794"/>
+            <a:ext cx="1920240" cy="223759"/>
           </a:xfrm>
           <a:prstGeom prst="rect">
             <a:avLst/>
@@ -4054,8 +4054,8 @@
         </p:nvSpPr>
         <p:spPr>
           <a:xfrm>
-            <a:off x="3008376" y="5861842"/>
-            <a:ext cx="741449" cy="122637"/>
+            <a:off x="3008376" y="5533734"/>
+            <a:ext cx="741449" cy="111880"/>
           </a:xfrm>
           <a:prstGeom prst="rect">
             <a:avLst/>
@@ -4074,8 +4074,8 @@
         </p:nvSpPr>
         <p:spPr>
           <a:xfrm>
-            <a:off x="3931920" y="5800523"/>
-            <a:ext cx="676656" cy="245274"/>
+            <a:off x="3931920" y="5477794"/>
+            <a:ext cx="676656" cy="223759"/>
           </a:xfrm>
           <a:prstGeom prst="rect">
             <a:avLst/>
@@ -4113,8 +4113,8 @@
         </p:nvSpPr>
         <p:spPr>
           <a:xfrm>
-            <a:off x="4608576" y="5800523"/>
-            <a:ext cx="1188720" cy="245274"/>
+            <a:off x="4608576" y="5477794"/>
+            <a:ext cx="1188720" cy="223759"/>
           </a:xfrm>
           <a:prstGeom prst="rect">
             <a:avLst/>
@@ -4152,8 +4152,8 @@
         </p:nvSpPr>
         <p:spPr>
           <a:xfrm>
-            <a:off x="658368" y="6045798"/>
-            <a:ext cx="310896" cy="245274"/>
+            <a:off x="658368" y="5701553"/>
+            <a:ext cx="310896" cy="223759"/>
           </a:xfrm>
           <a:prstGeom prst="rect">
             <a:avLst/>
@@ -4191,8 +4191,8 @@
         </p:nvSpPr>
         <p:spPr>
           <a:xfrm>
-            <a:off x="1014984" y="6045798"/>
-            <a:ext cx="1920240" cy="245274"/>
+            <a:off x="1014984" y="5701553"/>
+            <a:ext cx="1920240" cy="223759"/>
           </a:xfrm>
           <a:prstGeom prst="rect">
             <a:avLst/>
@@ -4230,8 +4230,8 @@
         </p:nvSpPr>
         <p:spPr>
           <a:xfrm>
-            <a:off x="3008376" y="6107116"/>
-            <a:ext cx="731797" cy="122637"/>
+            <a:off x="3008376" y="5757493"/>
+            <a:ext cx="731797" cy="111880"/>
           </a:xfrm>
           <a:prstGeom prst="rect">
             <a:avLst/>
@@ -4250,8 +4250,8 @@
         </p:nvSpPr>
         <p:spPr>
           <a:xfrm>
-            <a:off x="3931920" y="6045798"/>
-            <a:ext cx="676656" cy="245274"/>
+            <a:off x="3931920" y="5701553"/>
+            <a:ext cx="676656" cy="223759"/>
           </a:xfrm>
           <a:prstGeom prst="rect">
             <a:avLst/>
@@ -4289,8 +4289,8 @@
         </p:nvSpPr>
         <p:spPr>
           <a:xfrm>
-            <a:off x="4608576" y="6045798"/>
-            <a:ext cx="1188720" cy="245274"/>
+            <a:off x="4608576" y="5701553"/>
+            <a:ext cx="1188720" cy="223759"/>
           </a:xfrm>
           <a:prstGeom prst="rect">
             <a:avLst/>
@@ -4329,7 +4329,7 @@
         <p:spPr>
           <a:xfrm>
             <a:off x="6208776" y="2121408"/>
-            <a:ext cx="310896" cy="245274"/>
+            <a:ext cx="310896" cy="223759"/>
           </a:xfrm>
           <a:prstGeom prst="rect">
             <a:avLst/>
@@ -4368,7 +4368,7 @@
         <p:spPr>
           <a:xfrm>
             <a:off x="6565392" y="2121408"/>
-            <a:ext cx="1920240" cy="245274"/>
+            <a:ext cx="1920240" cy="223759"/>
           </a:xfrm>
           <a:prstGeom prst="rect">
             <a:avLst/>
@@ -4406,8 +4406,8 @@
         </p:nvSpPr>
         <p:spPr>
           <a:xfrm>
-            <a:off x="8558784" y="2182727"/>
-            <a:ext cx="723900" cy="122637"/>
+            <a:off x="8558784" y="2177348"/>
+            <a:ext cx="723900" cy="111880"/>
           </a:xfrm>
           <a:prstGeom prst="rect">
             <a:avLst/>
@@ -4427,7 +4427,7 @@
         <p:spPr>
           <a:xfrm>
             <a:off x="9482328" y="2121408"/>
-            <a:ext cx="676656" cy="245274"/>
+            <a:ext cx="676656" cy="223759"/>
           </a:xfrm>
           <a:prstGeom prst="rect">
             <a:avLst/>
@@ -4466,7 +4466,7 @@
         <p:spPr>
           <a:xfrm>
             <a:off x="10158984" y="2121408"/>
-            <a:ext cx="1188720" cy="245274"/>
+            <a:ext cx="1188720" cy="223759"/>
           </a:xfrm>
           <a:prstGeom prst="rect">
             <a:avLst/>
@@ -4504,8 +4504,8 @@
         </p:nvSpPr>
         <p:spPr>
           <a:xfrm>
-            <a:off x="6208776" y="2366682"/>
-            <a:ext cx="310896" cy="245274"/>
+            <a:off x="6208776" y="2345167"/>
+            <a:ext cx="310896" cy="223759"/>
           </a:xfrm>
           <a:prstGeom prst="rect">
             <a:avLst/>
@@ -4543,8 +4543,8 @@
         </p:nvSpPr>
         <p:spPr>
           <a:xfrm>
-            <a:off x="6565392" y="2366682"/>
-            <a:ext cx="1920240" cy="245274"/>
+            <a:off x="6565392" y="2345167"/>
+            <a:ext cx="1920240" cy="223759"/>
           </a:xfrm>
           <a:prstGeom prst="rect">
             <a:avLst/>
@@ -4582,8 +4582,8 @@
         </p:nvSpPr>
         <p:spPr>
           <a:xfrm>
-            <a:off x="8558784" y="2428001"/>
-            <a:ext cx="716880" cy="122637"/>
+            <a:off x="8558784" y="2401107"/>
+            <a:ext cx="716880" cy="111880"/>
           </a:xfrm>
           <a:prstGeom prst="rect">
             <a:avLst/>
@@ -4602,8 +4602,8 @@
         </p:nvSpPr>
         <p:spPr>
           <a:xfrm>
-            <a:off x="9482328" y="2366682"/>
-            <a:ext cx="676656" cy="245274"/>
+            <a:off x="9482328" y="2345167"/>
+            <a:ext cx="676656" cy="223759"/>
           </a:xfrm>
           <a:prstGeom prst="rect">
             <a:avLst/>
@@ -4641,8 +4641,8 @@
         </p:nvSpPr>
         <p:spPr>
           <a:xfrm>
-            <a:off x="10158984" y="2366682"/>
-            <a:ext cx="1188720" cy="245274"/>
+            <a:off x="10158984" y="2345167"/>
+            <a:ext cx="1188720" cy="223759"/>
           </a:xfrm>
           <a:prstGeom prst="rect">
             <a:avLst/>
@@ -4680,8 +4680,8 @@
         </p:nvSpPr>
         <p:spPr>
           <a:xfrm>
-            <a:off x="6208776" y="2611957"/>
-            <a:ext cx="310896" cy="245274"/>
+            <a:off x="6208776" y="2568926"/>
+            <a:ext cx="310896" cy="223759"/>
           </a:xfrm>
           <a:prstGeom prst="rect">
             <a:avLst/>
@@ -4719,8 +4719,8 @@
         </p:nvSpPr>
         <p:spPr>
           <a:xfrm>
-            <a:off x="6565392" y="2611957"/>
-            <a:ext cx="1920240" cy="245274"/>
+            <a:off x="6565392" y="2568926"/>
+            <a:ext cx="1920240" cy="223759"/>
           </a:xfrm>
           <a:prstGeom prst="rect">
             <a:avLst/>
@@ -4758,8 +4758,8 @@
         </p:nvSpPr>
         <p:spPr>
           <a:xfrm>
-            <a:off x="8558784" y="2673275"/>
-            <a:ext cx="715125" cy="122637"/>
+            <a:off x="8558784" y="2624866"/>
+            <a:ext cx="715125" cy="111880"/>
           </a:xfrm>
           <a:prstGeom prst="rect">
             <a:avLst/>
@@ -4778,8 +4778,8 @@
         </p:nvSpPr>
         <p:spPr>
           <a:xfrm>
-            <a:off x="9482328" y="2611957"/>
-            <a:ext cx="676656" cy="245274"/>
+            <a:off x="9482328" y="2568926"/>
+            <a:ext cx="676656" cy="223759"/>
           </a:xfrm>
           <a:prstGeom prst="rect">
             <a:avLst/>
@@ -4817,8 +4817,8 @@
         </p:nvSpPr>
         <p:spPr>
           <a:xfrm>
-            <a:off x="10158984" y="2611957"/>
-            <a:ext cx="1188720" cy="245274"/>
+            <a:off x="10158984" y="2568926"/>
+            <a:ext cx="1188720" cy="223759"/>
           </a:xfrm>
           <a:prstGeom prst="rect">
             <a:avLst/>
@@ -4856,8 +4856,8 @@
         </p:nvSpPr>
         <p:spPr>
           <a:xfrm>
-            <a:off x="6208776" y="2857231"/>
-            <a:ext cx="310896" cy="245274"/>
+            <a:off x="6208776" y="2792685"/>
+            <a:ext cx="310896" cy="223759"/>
           </a:xfrm>
           <a:prstGeom prst="rect">
             <a:avLst/>
@@ -4895,8 +4895,8 @@
         </p:nvSpPr>
         <p:spPr>
           <a:xfrm>
-            <a:off x="6565392" y="2857231"/>
-            <a:ext cx="1920240" cy="245274"/>
+            <a:off x="6565392" y="2792685"/>
+            <a:ext cx="1920240" cy="223759"/>
           </a:xfrm>
           <a:prstGeom prst="rect">
             <a:avLst/>
@@ -4934,8 +4934,8 @@
         </p:nvSpPr>
         <p:spPr>
           <a:xfrm>
-            <a:off x="8558784" y="2918550"/>
-            <a:ext cx="714248" cy="122637"/>
+            <a:off x="8558784" y="2848625"/>
+            <a:ext cx="714248" cy="111880"/>
           </a:xfrm>
           <a:prstGeom prst="rect">
             <a:avLst/>
@@ -4954,8 +4954,8 @@
         </p:nvSpPr>
         <p:spPr>
           <a:xfrm>
-            <a:off x="9482328" y="2857231"/>
-            <a:ext cx="676656" cy="245274"/>
+            <a:off x="9482328" y="2792685"/>
+            <a:ext cx="676656" cy="223759"/>
           </a:xfrm>
           <a:prstGeom prst="rect">
             <a:avLst/>
@@ -4993,8 +4993,8 @@
         </p:nvSpPr>
         <p:spPr>
           <a:xfrm>
-            <a:off x="10158984" y="2857231"/>
-            <a:ext cx="1188720" cy="245274"/>
+            <a:off x="10158984" y="2792685"/>
+            <a:ext cx="1188720" cy="223759"/>
           </a:xfrm>
           <a:prstGeom prst="rect">
             <a:avLst/>
@@ -5032,8 +5032,8 @@
         </p:nvSpPr>
         <p:spPr>
           <a:xfrm>
-            <a:off x="6208776" y="3102505"/>
-            <a:ext cx="310896" cy="245274"/>
+            <a:off x="6208776" y="3016444"/>
+            <a:ext cx="310896" cy="223759"/>
           </a:xfrm>
           <a:prstGeom prst="rect">
             <a:avLst/>
@@ -5071,8 +5071,8 @@
         </p:nvSpPr>
         <p:spPr>
           <a:xfrm>
-            <a:off x="6565392" y="3102505"/>
-            <a:ext cx="1920240" cy="245274"/>
+            <a:off x="6565392" y="3016444"/>
+            <a:ext cx="1920240" cy="223759"/>
           </a:xfrm>
           <a:prstGeom prst="rect">
             <a:avLst/>
@@ -5110,8 +5110,8 @@
         </p:nvSpPr>
         <p:spPr>
           <a:xfrm>
-            <a:off x="8558784" y="3163824"/>
-            <a:ext cx="713371" cy="122637"/>
+            <a:off x="8558784" y="3072384"/>
+            <a:ext cx="713371" cy="111880"/>
           </a:xfrm>
           <a:prstGeom prst="rect">
             <a:avLst/>
@@ -5130,8 +5130,8 @@
         </p:nvSpPr>
         <p:spPr>
           <a:xfrm>
-            <a:off x="9482328" y="3102505"/>
-            <a:ext cx="676656" cy="245274"/>
+            <a:off x="9482328" y="3016444"/>
+            <a:ext cx="676656" cy="223759"/>
           </a:xfrm>
           <a:prstGeom prst="rect">
             <a:avLst/>
@@ -5169,8 +5169,8 @@
         </p:nvSpPr>
         <p:spPr>
           <a:xfrm>
-            <a:off x="10158984" y="3102505"/>
-            <a:ext cx="1188720" cy="245274"/>
+            <a:off x="10158984" y="3016444"/>
+            <a:ext cx="1188720" cy="223759"/>
           </a:xfrm>
           <a:prstGeom prst="rect">
             <a:avLst/>
@@ -5208,8 +5208,8 @@
         </p:nvSpPr>
         <p:spPr>
           <a:xfrm>
-            <a:off x="6208776" y="3347780"/>
-            <a:ext cx="310896" cy="245274"/>
+            <a:off x="6208776" y="3240203"/>
+            <a:ext cx="310896" cy="223759"/>
           </a:xfrm>
           <a:prstGeom prst="rect">
             <a:avLst/>
@@ -5247,8 +5247,8 @@
         </p:nvSpPr>
         <p:spPr>
           <a:xfrm>
-            <a:off x="6565392" y="3347780"/>
-            <a:ext cx="1920240" cy="245274"/>
+            <a:off x="6565392" y="3240203"/>
+            <a:ext cx="1920240" cy="223759"/>
           </a:xfrm>
           <a:prstGeom prst="rect">
             <a:avLst/>
@@ -5286,8 +5286,8 @@
         </p:nvSpPr>
         <p:spPr>
           <a:xfrm>
-            <a:off x="8558784" y="3409098"/>
-            <a:ext cx="693189" cy="122637"/>
+            <a:off x="8558784" y="3296143"/>
+            <a:ext cx="693189" cy="111880"/>
           </a:xfrm>
           <a:prstGeom prst="rect">
             <a:avLst/>
@@ -5306,8 +5306,8 @@
         </p:nvSpPr>
         <p:spPr>
           <a:xfrm>
-            <a:off x="9482328" y="3347780"/>
-            <a:ext cx="676656" cy="245274"/>
+            <a:off x="9482328" y="3240203"/>
+            <a:ext cx="676656" cy="223759"/>
           </a:xfrm>
           <a:prstGeom prst="rect">
             <a:avLst/>
@@ -5345,8 +5345,8 @@
         </p:nvSpPr>
         <p:spPr>
           <a:xfrm>
-            <a:off x="10158984" y="3347780"/>
-            <a:ext cx="1188720" cy="245274"/>
+            <a:off x="10158984" y="3240203"/>
+            <a:ext cx="1188720" cy="223759"/>
           </a:xfrm>
           <a:prstGeom prst="rect">
             <a:avLst/>
@@ -5384,8 +5384,8 @@
         </p:nvSpPr>
         <p:spPr>
           <a:xfrm>
-            <a:off x="6208776" y="3593054"/>
-            <a:ext cx="310896" cy="245274"/>
+            <a:off x="6208776" y="3463962"/>
+            <a:ext cx="310896" cy="223759"/>
           </a:xfrm>
           <a:prstGeom prst="rect">
             <a:avLst/>
@@ -5423,8 +5423,8 @@
         </p:nvSpPr>
         <p:spPr>
           <a:xfrm>
-            <a:off x="6565392" y="3593054"/>
-            <a:ext cx="1920240" cy="245274"/>
+            <a:off x="6565392" y="3463962"/>
+            <a:ext cx="1920240" cy="223759"/>
           </a:xfrm>
           <a:prstGeom prst="rect">
             <a:avLst/>
@@ -5462,8 +5462,8 @@
         </p:nvSpPr>
         <p:spPr>
           <a:xfrm>
-            <a:off x="8558784" y="3654373"/>
-            <a:ext cx="667743" cy="122637"/>
+            <a:off x="8558784" y="3519902"/>
+            <a:ext cx="667743" cy="111880"/>
           </a:xfrm>
           <a:prstGeom prst="rect">
             <a:avLst/>
@@ -5482,8 +5482,8 @@
         </p:nvSpPr>
         <p:spPr>
           <a:xfrm>
-            <a:off x="9482328" y="3593054"/>
-            <a:ext cx="676656" cy="245274"/>
+            <a:off x="9482328" y="3463962"/>
+            <a:ext cx="676656" cy="223759"/>
           </a:xfrm>
           <a:prstGeom prst="rect">
             <a:avLst/>
@@ -5521,8 +5521,8 @@
         </p:nvSpPr>
         <p:spPr>
           <a:xfrm>
-            <a:off x="10158984" y="3593054"/>
-            <a:ext cx="1188720" cy="245274"/>
+            <a:off x="10158984" y="3463962"/>
+            <a:ext cx="1188720" cy="223759"/>
           </a:xfrm>
           <a:prstGeom prst="rect">
             <a:avLst/>
@@ -5560,8 +5560,8 @@
         </p:nvSpPr>
         <p:spPr>
           <a:xfrm>
-            <a:off x="6208776" y="3838328"/>
-            <a:ext cx="310896" cy="245274"/>
+            <a:off x="6208776" y="3687721"/>
+            <a:ext cx="310896" cy="223759"/>
           </a:xfrm>
           <a:prstGeom prst="rect">
             <a:avLst/>
@@ -5599,8 +5599,8 @@
         </p:nvSpPr>
         <p:spPr>
           <a:xfrm>
-            <a:off x="6565392" y="3838328"/>
-            <a:ext cx="1920240" cy="245274"/>
+            <a:off x="6565392" y="3687721"/>
+            <a:ext cx="1920240" cy="223759"/>
           </a:xfrm>
           <a:prstGeom prst="rect">
             <a:avLst/>
@@ -5638,8 +5638,8 @@
         </p:nvSpPr>
         <p:spPr>
           <a:xfrm>
-            <a:off x="8558784" y="3899647"/>
-            <a:ext cx="640542" cy="122637"/>
+            <a:off x="8558784" y="3743661"/>
+            <a:ext cx="640542" cy="111880"/>
           </a:xfrm>
           <a:prstGeom prst="rect">
             <a:avLst/>
@@ -5658,8 +5658,8 @@
         </p:nvSpPr>
         <p:spPr>
           <a:xfrm>
-            <a:off x="9482328" y="3838328"/>
-            <a:ext cx="676656" cy="245274"/>
+            <a:off x="9482328" y="3687721"/>
+            <a:ext cx="676656" cy="223759"/>
           </a:xfrm>
           <a:prstGeom prst="rect">
             <a:avLst/>
@@ -5697,8 +5697,8 @@
         </p:nvSpPr>
         <p:spPr>
           <a:xfrm>
-            <a:off x="10158984" y="3838328"/>
-            <a:ext cx="1188720" cy="245274"/>
+            <a:off x="10158984" y="3687721"/>
+            <a:ext cx="1188720" cy="223759"/>
           </a:xfrm>
           <a:prstGeom prst="rect">
             <a:avLst/>
@@ -5736,8 +5736,8 @@
         </p:nvSpPr>
         <p:spPr>
           <a:xfrm>
-            <a:off x="6208776" y="4083603"/>
-            <a:ext cx="310896" cy="245274"/>
+            <a:off x="6208776" y="3911480"/>
+            <a:ext cx="310896" cy="223759"/>
           </a:xfrm>
           <a:prstGeom prst="rect">
             <a:avLst/>
@@ -5775,8 +5775,8 @@
         </p:nvSpPr>
         <p:spPr>
           <a:xfrm>
-            <a:off x="6565392" y="4083603"/>
-            <a:ext cx="1920240" cy="245274"/>
+            <a:off x="6565392" y="3911480"/>
+            <a:ext cx="1920240" cy="223759"/>
           </a:xfrm>
           <a:prstGeom prst="rect">
             <a:avLst/>
@@ -5814,8 +5814,8 @@
         </p:nvSpPr>
         <p:spPr>
           <a:xfrm>
-            <a:off x="8558784" y="4144921"/>
-            <a:ext cx="624748" cy="122637"/>
+            <a:off x="8558784" y="3967420"/>
+            <a:ext cx="624748" cy="111880"/>
           </a:xfrm>
           <a:prstGeom prst="rect">
             <a:avLst/>
@@ -5834,8 +5834,8 @@
         </p:nvSpPr>
         <p:spPr>
           <a:xfrm>
-            <a:off x="9482328" y="4083603"/>
-            <a:ext cx="676656" cy="245274"/>
+            <a:off x="9482328" y="3911480"/>
+            <a:ext cx="676656" cy="223759"/>
           </a:xfrm>
           <a:prstGeom prst="rect">
             <a:avLst/>
@@ -5873,8 +5873,8 @@
         </p:nvSpPr>
         <p:spPr>
           <a:xfrm>
-            <a:off x="10158984" y="4083603"/>
-            <a:ext cx="1188720" cy="245274"/>
+            <a:off x="10158984" y="3911480"/>
+            <a:ext cx="1188720" cy="223759"/>
           </a:xfrm>
           <a:prstGeom prst="rect">
             <a:avLst/>
@@ -5912,8 +5912,8 @@
         </p:nvSpPr>
         <p:spPr>
           <a:xfrm>
-            <a:off x="6208776" y="4328877"/>
-            <a:ext cx="310896" cy="245274"/>
+            <a:off x="6208776" y="4135240"/>
+            <a:ext cx="310896" cy="223759"/>
           </a:xfrm>
           <a:prstGeom prst="rect">
             <a:avLst/>
@@ -5951,8 +5951,8 @@
         </p:nvSpPr>
         <p:spPr>
           <a:xfrm>
-            <a:off x="6565392" y="4328877"/>
-            <a:ext cx="1920240" cy="245274"/>
+            <a:off x="6565392" y="4135240"/>
+            <a:ext cx="1920240" cy="223759"/>
           </a:xfrm>
           <a:prstGeom prst="rect">
             <a:avLst/>
@@ -5990,8 +5990,8 @@
         </p:nvSpPr>
         <p:spPr>
           <a:xfrm>
-            <a:off x="8558784" y="4390196"/>
-            <a:ext cx="623870" cy="122637"/>
+            <a:off x="8558784" y="4191179"/>
+            <a:ext cx="623870" cy="111880"/>
           </a:xfrm>
           <a:prstGeom prst="rect">
             <a:avLst/>
@@ -6010,8 +6010,8 @@
         </p:nvSpPr>
         <p:spPr>
           <a:xfrm>
-            <a:off x="9482328" y="4328877"/>
-            <a:ext cx="676656" cy="245274"/>
+            <a:off x="9482328" y="4135240"/>
+            <a:ext cx="676656" cy="223759"/>
           </a:xfrm>
           <a:prstGeom prst="rect">
             <a:avLst/>
@@ -6049,8 +6049,8 @@
         </p:nvSpPr>
         <p:spPr>
           <a:xfrm>
-            <a:off x="10158984" y="4328877"/>
-            <a:ext cx="1188720" cy="245274"/>
+            <a:off x="10158984" y="4135240"/>
+            <a:ext cx="1188720" cy="223759"/>
           </a:xfrm>
           <a:prstGeom prst="rect">
             <a:avLst/>
@@ -6088,8 +6088,8 @@
         </p:nvSpPr>
         <p:spPr>
           <a:xfrm>
-            <a:off x="6208776" y="4574152"/>
-            <a:ext cx="310896" cy="245274"/>
+            <a:off x="6208776" y="4358999"/>
+            <a:ext cx="310896" cy="223759"/>
           </a:xfrm>
           <a:prstGeom prst="rect">
             <a:avLst/>
@@ -6127,8 +6127,8 @@
         </p:nvSpPr>
         <p:spPr>
           <a:xfrm>
-            <a:off x="6565392" y="4574152"/>
-            <a:ext cx="1920240" cy="245274"/>
+            <a:off x="6565392" y="4358999"/>
+            <a:ext cx="1920240" cy="223759"/>
           </a:xfrm>
           <a:prstGeom prst="rect">
             <a:avLst/>
@@ -6166,8 +6166,8 @@
         </p:nvSpPr>
         <p:spPr>
           <a:xfrm>
-            <a:off x="8558784" y="4635470"/>
-            <a:ext cx="601056" cy="122637"/>
+            <a:off x="8558784" y="4414938"/>
+            <a:ext cx="601056" cy="111880"/>
           </a:xfrm>
           <a:prstGeom prst="rect">
             <a:avLst/>
@@ -6186,8 +6186,8 @@
         </p:nvSpPr>
         <p:spPr>
           <a:xfrm>
-            <a:off x="9482328" y="4574152"/>
-            <a:ext cx="676656" cy="245274"/>
+            <a:off x="9482328" y="4358999"/>
+            <a:ext cx="676656" cy="223759"/>
           </a:xfrm>
           <a:prstGeom prst="rect">
             <a:avLst/>
@@ -6225,8 +6225,8 @@
         </p:nvSpPr>
         <p:spPr>
           <a:xfrm>
-            <a:off x="10158984" y="4574152"/>
-            <a:ext cx="1188720" cy="245274"/>
+            <a:off x="10158984" y="4358999"/>
+            <a:ext cx="1188720" cy="223759"/>
           </a:xfrm>
           <a:prstGeom prst="rect">
             <a:avLst/>
@@ -6264,8 +6264,8 @@
         </p:nvSpPr>
         <p:spPr>
           <a:xfrm>
-            <a:off x="6208776" y="4819426"/>
-            <a:ext cx="310896" cy="245274"/>
+            <a:off x="6208776" y="4582758"/>
+            <a:ext cx="310896" cy="223759"/>
           </a:xfrm>
           <a:prstGeom prst="rect">
             <a:avLst/>
@@ -6303,8 +6303,8 @@
         </p:nvSpPr>
         <p:spPr>
           <a:xfrm>
-            <a:off x="6565392" y="4819426"/>
-            <a:ext cx="1920240" cy="245274"/>
+            <a:off x="6565392" y="4582758"/>
+            <a:ext cx="1920240" cy="223759"/>
           </a:xfrm>
           <a:prstGeom prst="rect">
             <a:avLst/>
@@ -6342,8 +6342,8 @@
         </p:nvSpPr>
         <p:spPr>
           <a:xfrm>
-            <a:off x="8558784" y="4880744"/>
-            <a:ext cx="550164" cy="122637"/>
+            <a:off x="8558784" y="4638697"/>
+            <a:ext cx="550164" cy="111880"/>
           </a:xfrm>
           <a:prstGeom prst="rect">
             <a:avLst/>
@@ -6362,8 +6362,8 @@
         </p:nvSpPr>
         <p:spPr>
           <a:xfrm>
-            <a:off x="9482328" y="4819426"/>
-            <a:ext cx="676656" cy="245274"/>
+            <a:off x="9482328" y="4582758"/>
+            <a:ext cx="676656" cy="223759"/>
           </a:xfrm>
           <a:prstGeom prst="rect">
             <a:avLst/>
@@ -6401,8 +6401,8 @@
         </p:nvSpPr>
         <p:spPr>
           <a:xfrm>
-            <a:off x="10158984" y="4819426"/>
-            <a:ext cx="1188720" cy="245274"/>
+            <a:off x="10158984" y="4582758"/>
+            <a:ext cx="1188720" cy="223759"/>
           </a:xfrm>
           <a:prstGeom prst="rect">
             <a:avLst/>
@@ -6440,8 +6440,8 @@
         </p:nvSpPr>
         <p:spPr>
           <a:xfrm>
-            <a:off x="6208776" y="5064700"/>
-            <a:ext cx="310896" cy="245274"/>
+            <a:off x="6208776" y="4806517"/>
+            <a:ext cx="310896" cy="223759"/>
           </a:xfrm>
           <a:prstGeom prst="rect">
             <a:avLst/>
@@ -6479,8 +6479,8 @@
         </p:nvSpPr>
         <p:spPr>
           <a:xfrm>
-            <a:off x="6565392" y="5064700"/>
-            <a:ext cx="1920240" cy="245274"/>
+            <a:off x="6565392" y="4806517"/>
+            <a:ext cx="1920240" cy="223759"/>
           </a:xfrm>
           <a:prstGeom prst="rect">
             <a:avLst/>
@@ -6518,8 +6518,8 @@
         </p:nvSpPr>
         <p:spPr>
           <a:xfrm>
-            <a:off x="8558784" y="5126019"/>
-            <a:ext cx="534370" cy="122637"/>
+            <a:off x="8558784" y="4862456"/>
+            <a:ext cx="534370" cy="111880"/>
           </a:xfrm>
           <a:prstGeom prst="rect">
             <a:avLst/>
@@ -6538,8 +6538,8 @@
         </p:nvSpPr>
         <p:spPr>
           <a:xfrm>
-            <a:off x="9482328" y="5064700"/>
-            <a:ext cx="676656" cy="245274"/>
+            <a:off x="9482328" y="4806517"/>
+            <a:ext cx="676656" cy="223759"/>
           </a:xfrm>
           <a:prstGeom prst="rect">
             <a:avLst/>
@@ -6577,8 +6577,8 @@
         </p:nvSpPr>
         <p:spPr>
           <a:xfrm>
-            <a:off x="10158984" y="5064700"/>
-            <a:ext cx="1188720" cy="245274"/>
+            <a:off x="10158984" y="4806517"/>
+            <a:ext cx="1188720" cy="223759"/>
           </a:xfrm>
           <a:prstGeom prst="rect">
             <a:avLst/>
@@ -6616,8 +6616,8 @@
         </p:nvSpPr>
         <p:spPr>
           <a:xfrm>
-            <a:off x="6208776" y="5309975"/>
-            <a:ext cx="310896" cy="245274"/>
+            <a:off x="6208776" y="5030276"/>
+            <a:ext cx="310896" cy="223759"/>
           </a:xfrm>
           <a:prstGeom prst="rect">
             <a:avLst/>
@@ -6655,8 +6655,8 @@
         </p:nvSpPr>
         <p:spPr>
           <a:xfrm>
-            <a:off x="6565392" y="5309975"/>
-            <a:ext cx="1920240" cy="245274"/>
+            <a:off x="6565392" y="5030276"/>
+            <a:ext cx="1920240" cy="223759"/>
           </a:xfrm>
           <a:prstGeom prst="rect">
             <a:avLst/>
@@ -6694,8 +6694,8 @@
         </p:nvSpPr>
         <p:spPr>
           <a:xfrm>
-            <a:off x="8558784" y="5371293"/>
-            <a:ext cx="435217" cy="122637"/>
+            <a:off x="8558784" y="5086216"/>
+            <a:ext cx="435217" cy="111880"/>
           </a:xfrm>
           <a:prstGeom prst="rect">
             <a:avLst/>
@@ -6714,8 +6714,8 @@
         </p:nvSpPr>
         <p:spPr>
           <a:xfrm>
-            <a:off x="9482328" y="5309975"/>
-            <a:ext cx="676656" cy="245274"/>
+            <a:off x="9482328" y="5030276"/>
+            <a:ext cx="676656" cy="223759"/>
           </a:xfrm>
           <a:prstGeom prst="rect">
             <a:avLst/>
@@ -6753,8 +6753,8 @@
         </p:nvSpPr>
         <p:spPr>
           <a:xfrm>
-            <a:off x="10158984" y="5309975"/>
-            <a:ext cx="1188720" cy="245274"/>
+            <a:off x="10158984" y="5030276"/>
+            <a:ext cx="1188720" cy="223759"/>
           </a:xfrm>
           <a:prstGeom prst="rect">
             <a:avLst/>
@@ -6792,8 +6792,8 @@
         </p:nvSpPr>
         <p:spPr>
           <a:xfrm>
-            <a:off x="6208776" y="5555249"/>
-            <a:ext cx="310896" cy="245274"/>
+            <a:off x="6208776" y="5254035"/>
+            <a:ext cx="310896" cy="223759"/>
           </a:xfrm>
           <a:prstGeom prst="rect">
             <a:avLst/>
@@ -6831,8 +6831,8 @@
         </p:nvSpPr>
         <p:spPr>
           <a:xfrm>
-            <a:off x="6565392" y="5555249"/>
-            <a:ext cx="1920240" cy="245274"/>
+            <a:off x="6565392" y="5254035"/>
+            <a:ext cx="1920240" cy="223759"/>
           </a:xfrm>
           <a:prstGeom prst="rect">
             <a:avLst/>
@@ -6870,8 +6870,8 @@
         </p:nvSpPr>
         <p:spPr>
           <a:xfrm>
-            <a:off x="8558784" y="5616568"/>
-            <a:ext cx="400997" cy="122637"/>
+            <a:off x="8558784" y="5309975"/>
+            <a:ext cx="400997" cy="111880"/>
           </a:xfrm>
           <a:prstGeom prst="rect">
             <a:avLst/>
@@ -6890,8 +6890,8 @@
         </p:nvSpPr>
         <p:spPr>
           <a:xfrm>
-            <a:off x="9482328" y="5555249"/>
-            <a:ext cx="676656" cy="245274"/>
+            <a:off x="9482328" y="5254035"/>
+            <a:ext cx="676656" cy="223759"/>
           </a:xfrm>
           <a:prstGeom prst="rect">
             <a:avLst/>
@@ -6929,8 +6929,8 @@
         </p:nvSpPr>
         <p:spPr>
           <a:xfrm>
-            <a:off x="10158984" y="5555249"/>
-            <a:ext cx="1188720" cy="245274"/>
+            <a:off x="10158984" y="5254035"/>
+            <a:ext cx="1188720" cy="223759"/>
           </a:xfrm>
           <a:prstGeom prst="rect">
             <a:avLst/>
@@ -6968,8 +6968,8 @@
         </p:nvSpPr>
         <p:spPr>
           <a:xfrm>
-            <a:off x="6208776" y="5800523"/>
-            <a:ext cx="310896" cy="245274"/>
+            <a:off x="6208776" y="5477794"/>
+            <a:ext cx="310896" cy="223759"/>
           </a:xfrm>
           <a:prstGeom prst="rect">
             <a:avLst/>
@@ -7007,8 +7007,8 @@
         </p:nvSpPr>
         <p:spPr>
           <a:xfrm>
-            <a:off x="6565392" y="5800523"/>
-            <a:ext cx="1920240" cy="245274"/>
+            <a:off x="6565392" y="5477794"/>
+            <a:ext cx="1920240" cy="223759"/>
           </a:xfrm>
           <a:prstGeom prst="rect">
             <a:avLst/>
@@ -7046,8 +7046,8 @@
         </p:nvSpPr>
         <p:spPr>
           <a:xfrm>
-            <a:off x="8558784" y="5861842"/>
-            <a:ext cx="355369" cy="122637"/>
+            <a:off x="8558784" y="5533734"/>
+            <a:ext cx="355369" cy="111880"/>
           </a:xfrm>
           <a:prstGeom prst="rect">
             <a:avLst/>
@@ -7066,8 +7066,8 @@
         </p:nvSpPr>
         <p:spPr>
           <a:xfrm>
-            <a:off x="9482328" y="5800523"/>
-            <a:ext cx="676656" cy="245274"/>
+            <a:off x="9482328" y="5477794"/>
+            <a:ext cx="676656" cy="223759"/>
           </a:xfrm>
           <a:prstGeom prst="rect">
             <a:avLst/>
@@ -7105,8 +7105,8 @@
         </p:nvSpPr>
         <p:spPr>
           <a:xfrm>
-            <a:off x="10158984" y="5800523"/>
-            <a:ext cx="1188720" cy="245274"/>
+            <a:off x="10158984" y="5477794"/>
+            <a:ext cx="1188720" cy="223759"/>
           </a:xfrm>
           <a:prstGeom prst="rect">
             <a:avLst/>
@@ -7301,7 +7301,7 @@
         <p:spPr>
           <a:xfrm>
             <a:off x="3790770" y="2121408"/>
-            <a:ext cx="14630" cy="4169664"/>
+            <a:ext cx="14630" cy="3803904"/>
           </a:xfrm>
           <a:prstGeom prst="rect">
             <a:avLst/>
@@ -7321,7 +7321,7 @@
         <p:spPr>
           <a:xfrm>
             <a:off x="9341178" y="2121408"/>
-            <a:ext cx="14630" cy="4169664"/>
+            <a:ext cx="14630" cy="3803904"/>
           </a:xfrm>
           <a:prstGeom prst="rect">
             <a:avLst/>
@@ -7341,7 +7341,7 @@
         <p:spPr>
           <a:xfrm>
             <a:off x="6085332" y="2121408"/>
-            <a:ext cx="10973" cy="4169664"/>
+            <a:ext cx="10973" cy="3803904"/>
           </a:xfrm>
           <a:prstGeom prst="rect">
             <a:avLst/>
@@ -7351,6 +7351,65 @@
           </a:solidFill>
           <a:ln/>
         </p:spPr>
+      </p:sp>
+      <p:sp>
+        <p:nvSpPr>
+          <p:cNvPr id="184" name="Shape 181"/>
+          <p:cNvSpPr/>
+          <p:nvPr/>
+        </p:nvSpPr>
+        <p:spPr>
+          <a:xfrm>
+            <a:off x="457200" y="6126480"/>
+            <a:ext cx="11274552" cy="371856"/>
+          </a:xfrm>
+          <a:prstGeom prst="rect">
+            <a:avLst/>
+          </a:prstGeom>
+          <a:solidFill>
+            <a:srgbClr val="EDF4FA"/>
+          </a:solidFill>
+          <a:ln/>
+        </p:spPr>
+      </p:sp>
+      <p:sp>
+        <p:nvSpPr>
+          <p:cNvPr id="185" name="Text 182"/>
+          <p:cNvSpPr txBox="1"/>
+          <p:nvPr/>
+        </p:nvSpPr>
+        <p:spPr>
+          <a:xfrm>
+            <a:off x="658368" y="6144768"/>
+            <a:ext cx="10927080" cy="335280"/>
+          </a:xfrm>
+          <a:prstGeom prst="rect">
+            <a:avLst/>
+          </a:prstGeom>
+          <a:noFill/>
+          <a:ln/>
+        </p:spPr>
+        <p:txBody>
+          <a:bodyPr wrap="square" lIns="0" tIns="0" rIns="0" bIns="0" rtlCol="0" anchor="ctr"/>
+          <a:lstStyle/>
+          <a:p>
+            <a:pPr indent="0" marL="0">
+              <a:buNone/>
+            </a:pPr>
+            <a:r>
+              <a:rPr lang="en-US" sz="1600" b="1" dirty="0">
+                <a:solidFill>
+                  <a:srgbClr val="0B2C4A"/>
+                </a:solidFill>
+                <a:latin typeface="Inter" pitchFamily="34" charset="0"/>
+                <a:ea typeface="Inter" pitchFamily="34" charset="-122"/>
+                <a:cs typeface="Inter" pitchFamily="34" charset="-120"/>
+              </a:rPr>
+              <a:t>12 of 33 stores at or above the 90.0% benchmark; the group is at 81.3%.</a:t>
+            </a:r>
+            <a:endParaRPr lang="en-US" sz="1600" dirty="0"/>
+          </a:p>
+        </p:txBody>
       </p:sp>
     </p:spTree>
   </p:cSld>
@@ -7491,7 +7550,7 @@
         <p:spPr>
           <a:xfrm>
             <a:off x="457200" y="1207008"/>
-            <a:ext cx="11274552" cy="5148072"/>
+            <a:ext cx="11274552" cy="4782312"/>
           </a:xfrm>
           <a:prstGeom prst="rect">
             <a:avLst/>
@@ -7668,7 +7727,7 @@
         <p:spPr>
           <a:xfrm>
             <a:off x="658368" y="2121408"/>
-            <a:ext cx="310896" cy="245274"/>
+            <a:ext cx="310896" cy="223759"/>
           </a:xfrm>
           <a:prstGeom prst="rect">
             <a:avLst/>
@@ -7707,7 +7766,7 @@
         <p:spPr>
           <a:xfrm>
             <a:off x="1014984" y="2121408"/>
-            <a:ext cx="1920240" cy="245274"/>
+            <a:ext cx="1920240" cy="223759"/>
           </a:xfrm>
           <a:prstGeom prst="rect">
             <a:avLst/>
@@ -7745,8 +7804,8 @@
         </p:nvSpPr>
         <p:spPr>
           <a:xfrm>
-            <a:off x="3008376" y="2182727"/>
-            <a:ext cx="868680" cy="122637"/>
+            <a:off x="3008376" y="2177348"/>
+            <a:ext cx="868680" cy="111880"/>
           </a:xfrm>
           <a:prstGeom prst="rect">
             <a:avLst/>
@@ -7766,7 +7825,7 @@
         <p:spPr>
           <a:xfrm>
             <a:off x="3931920" y="2121408"/>
-            <a:ext cx="676656" cy="245274"/>
+            <a:ext cx="676656" cy="223759"/>
           </a:xfrm>
           <a:prstGeom prst="rect">
             <a:avLst/>
@@ -7805,7 +7864,7 @@
         <p:spPr>
           <a:xfrm>
             <a:off x="4608576" y="2121408"/>
-            <a:ext cx="1188720" cy="245274"/>
+            <a:ext cx="1188720" cy="223759"/>
           </a:xfrm>
           <a:prstGeom prst="rect">
             <a:avLst/>
@@ -7843,8 +7902,8 @@
         </p:nvSpPr>
         <p:spPr>
           <a:xfrm>
-            <a:off x="658368" y="2366682"/>
-            <a:ext cx="310896" cy="245274"/>
+            <a:off x="658368" y="2345167"/>
+            <a:ext cx="310896" cy="223759"/>
           </a:xfrm>
           <a:prstGeom prst="rect">
             <a:avLst/>
@@ -7882,8 +7941,8 @@
         </p:nvSpPr>
         <p:spPr>
           <a:xfrm>
-            <a:off x="1014984" y="2366682"/>
-            <a:ext cx="1920240" cy="245274"/>
+            <a:off x="1014984" y="2345167"/>
+            <a:ext cx="1920240" cy="223759"/>
           </a:xfrm>
           <a:prstGeom prst="rect">
             <a:avLst/>
@@ -7921,8 +7980,8 @@
         </p:nvSpPr>
         <p:spPr>
           <a:xfrm>
-            <a:off x="3008376" y="2428001"/>
-            <a:ext cx="832485" cy="122637"/>
+            <a:off x="3008376" y="2401107"/>
+            <a:ext cx="832485" cy="111880"/>
           </a:xfrm>
           <a:prstGeom prst="rect">
             <a:avLst/>
@@ -7941,8 +8000,8 @@
         </p:nvSpPr>
         <p:spPr>
           <a:xfrm>
-            <a:off x="3931920" y="2366682"/>
-            <a:ext cx="676656" cy="245274"/>
+            <a:off x="3931920" y="2345167"/>
+            <a:ext cx="676656" cy="223759"/>
           </a:xfrm>
           <a:prstGeom prst="rect">
             <a:avLst/>
@@ -7980,8 +8039,8 @@
         </p:nvSpPr>
         <p:spPr>
           <a:xfrm>
-            <a:off x="4608576" y="2366682"/>
-            <a:ext cx="1188720" cy="245274"/>
+            <a:off x="4608576" y="2345167"/>
+            <a:ext cx="1188720" cy="223759"/>
           </a:xfrm>
           <a:prstGeom prst="rect">
             <a:avLst/>
@@ -8019,8 +8078,8 @@
         </p:nvSpPr>
         <p:spPr>
           <a:xfrm>
-            <a:off x="658368" y="2611957"/>
-            <a:ext cx="310896" cy="245274"/>
+            <a:off x="658368" y="2568926"/>
+            <a:ext cx="310896" cy="223759"/>
           </a:xfrm>
           <a:prstGeom prst="rect">
             <a:avLst/>
@@ -8058,8 +8117,8 @@
         </p:nvSpPr>
         <p:spPr>
           <a:xfrm>
-            <a:off x="1014984" y="2611957"/>
-            <a:ext cx="1920240" cy="245274"/>
+            <a:off x="1014984" y="2568926"/>
+            <a:ext cx="1920240" cy="223759"/>
           </a:xfrm>
           <a:prstGeom prst="rect">
             <a:avLst/>
@@ -8097,8 +8156,8 @@
         </p:nvSpPr>
         <p:spPr>
           <a:xfrm>
-            <a:off x="3008376" y="2673275"/>
-            <a:ext cx="825246" cy="122637"/>
+            <a:off x="3008376" y="2624866"/>
+            <a:ext cx="825246" cy="111880"/>
           </a:xfrm>
           <a:prstGeom prst="rect">
             <a:avLst/>
@@ -8117,8 +8176,8 @@
         </p:nvSpPr>
         <p:spPr>
           <a:xfrm>
-            <a:off x="3931920" y="2611957"/>
-            <a:ext cx="676656" cy="245274"/>
+            <a:off x="3931920" y="2568926"/>
+            <a:ext cx="676656" cy="223759"/>
           </a:xfrm>
           <a:prstGeom prst="rect">
             <a:avLst/>
@@ -8156,8 +8215,8 @@
         </p:nvSpPr>
         <p:spPr>
           <a:xfrm>
-            <a:off x="4608576" y="2611957"/>
-            <a:ext cx="1188720" cy="245274"/>
+            <a:off x="4608576" y="2568926"/>
+            <a:ext cx="1188720" cy="223759"/>
           </a:xfrm>
           <a:prstGeom prst="rect">
             <a:avLst/>
@@ -8195,8 +8254,8 @@
         </p:nvSpPr>
         <p:spPr>
           <a:xfrm>
-            <a:off x="658368" y="2857231"/>
-            <a:ext cx="310896" cy="245274"/>
+            <a:off x="658368" y="2792685"/>
+            <a:ext cx="310896" cy="223759"/>
           </a:xfrm>
           <a:prstGeom prst="rect">
             <a:avLst/>
@@ -8234,8 +8293,8 @@
         </p:nvSpPr>
         <p:spPr>
           <a:xfrm>
-            <a:off x="1014984" y="2857231"/>
-            <a:ext cx="1920240" cy="245274"/>
+            <a:off x="1014984" y="2792685"/>
+            <a:ext cx="1920240" cy="223759"/>
           </a:xfrm>
           <a:prstGeom prst="rect">
             <a:avLst/>
@@ -8273,8 +8332,8 @@
         </p:nvSpPr>
         <p:spPr>
           <a:xfrm>
-            <a:off x="3008376" y="2918550"/>
-            <a:ext cx="805339" cy="122637"/>
+            <a:off x="3008376" y="2848625"/>
+            <a:ext cx="805339" cy="111880"/>
           </a:xfrm>
           <a:prstGeom prst="rect">
             <a:avLst/>
@@ -8293,8 +8352,8 @@
         </p:nvSpPr>
         <p:spPr>
           <a:xfrm>
-            <a:off x="3931920" y="2857231"/>
-            <a:ext cx="676656" cy="245274"/>
+            <a:off x="3931920" y="2792685"/>
+            <a:ext cx="676656" cy="223759"/>
           </a:xfrm>
           <a:prstGeom prst="rect">
             <a:avLst/>
@@ -8332,8 +8391,8 @@
         </p:nvSpPr>
         <p:spPr>
           <a:xfrm>
-            <a:off x="4608576" y="2857231"/>
-            <a:ext cx="1188720" cy="245274"/>
+            <a:off x="4608576" y="2792685"/>
+            <a:ext cx="1188720" cy="223759"/>
           </a:xfrm>
           <a:prstGeom prst="rect">
             <a:avLst/>
@@ -8371,8 +8430,8 @@
         </p:nvSpPr>
         <p:spPr>
           <a:xfrm>
-            <a:off x="658368" y="3102505"/>
-            <a:ext cx="310896" cy="245274"/>
+            <a:off x="658368" y="3016444"/>
+            <a:ext cx="310896" cy="223759"/>
           </a:xfrm>
           <a:prstGeom prst="rect">
             <a:avLst/>
@@ -8410,8 +8469,8 @@
         </p:nvSpPr>
         <p:spPr>
           <a:xfrm>
-            <a:off x="1014984" y="3102505"/>
-            <a:ext cx="1920240" cy="245274"/>
+            <a:off x="1014984" y="3016444"/>
+            <a:ext cx="1920240" cy="223759"/>
           </a:xfrm>
           <a:prstGeom prst="rect">
             <a:avLst/>
@@ -8449,8 +8508,8 @@
         </p:nvSpPr>
         <p:spPr>
           <a:xfrm>
-            <a:off x="3008376" y="3163824"/>
-            <a:ext cx="805339" cy="122637"/>
+            <a:off x="3008376" y="3072384"/>
+            <a:ext cx="805339" cy="111880"/>
           </a:xfrm>
           <a:prstGeom prst="rect">
             <a:avLst/>
@@ -8469,8 +8528,8 @@
         </p:nvSpPr>
         <p:spPr>
           <a:xfrm>
-            <a:off x="3931920" y="3102505"/>
-            <a:ext cx="676656" cy="245274"/>
+            <a:off x="3931920" y="3016444"/>
+            <a:ext cx="676656" cy="223759"/>
           </a:xfrm>
           <a:prstGeom prst="rect">
             <a:avLst/>
@@ -8508,8 +8567,8 @@
         </p:nvSpPr>
         <p:spPr>
           <a:xfrm>
-            <a:off x="4608576" y="3102505"/>
-            <a:ext cx="1188720" cy="245274"/>
+            <a:off x="4608576" y="3016444"/>
+            <a:ext cx="1188720" cy="223759"/>
           </a:xfrm>
           <a:prstGeom prst="rect">
             <a:avLst/>
@@ -8547,8 +8606,8 @@
         </p:nvSpPr>
         <p:spPr>
           <a:xfrm>
-            <a:off x="658368" y="3347780"/>
-            <a:ext cx="310896" cy="245274"/>
+            <a:off x="658368" y="3240203"/>
+            <a:ext cx="310896" cy="223759"/>
           </a:xfrm>
           <a:prstGeom prst="rect">
             <a:avLst/>
@@ -8586,8 +8645,8 @@
         </p:nvSpPr>
         <p:spPr>
           <a:xfrm>
-            <a:off x="1014984" y="3347780"/>
-            <a:ext cx="1920240" cy="245274"/>
+            <a:off x="1014984" y="3240203"/>
+            <a:ext cx="1920240" cy="223759"/>
           </a:xfrm>
           <a:prstGeom prst="rect">
             <a:avLst/>
@@ -8625,8 +8684,8 @@
         </p:nvSpPr>
         <p:spPr>
           <a:xfrm>
-            <a:off x="3008376" y="3409098"/>
-            <a:ext cx="805339" cy="122637"/>
+            <a:off x="3008376" y="3296143"/>
+            <a:ext cx="805339" cy="111880"/>
           </a:xfrm>
           <a:prstGeom prst="rect">
             <a:avLst/>
@@ -8645,8 +8704,8 @@
         </p:nvSpPr>
         <p:spPr>
           <a:xfrm>
-            <a:off x="3931920" y="3347780"/>
-            <a:ext cx="676656" cy="245274"/>
+            <a:off x="3931920" y="3240203"/>
+            <a:ext cx="676656" cy="223759"/>
           </a:xfrm>
           <a:prstGeom prst="rect">
             <a:avLst/>
@@ -8684,8 +8743,8 @@
         </p:nvSpPr>
         <p:spPr>
           <a:xfrm>
-            <a:off x="4608576" y="3347780"/>
-            <a:ext cx="1188720" cy="245274"/>
+            <a:off x="4608576" y="3240203"/>
+            <a:ext cx="1188720" cy="223759"/>
           </a:xfrm>
           <a:prstGeom prst="rect">
             <a:avLst/>
@@ -8723,8 +8782,8 @@
         </p:nvSpPr>
         <p:spPr>
           <a:xfrm>
-            <a:off x="658368" y="3593054"/>
-            <a:ext cx="310896" cy="245274"/>
+            <a:off x="658368" y="3463962"/>
+            <a:ext cx="310896" cy="223759"/>
           </a:xfrm>
           <a:prstGeom prst="rect">
             <a:avLst/>
@@ -8762,8 +8821,8 @@
         </p:nvSpPr>
         <p:spPr>
           <a:xfrm>
-            <a:off x="1014984" y="3593054"/>
-            <a:ext cx="1920240" cy="245274"/>
+            <a:off x="1014984" y="3463962"/>
+            <a:ext cx="1920240" cy="223759"/>
           </a:xfrm>
           <a:prstGeom prst="rect">
             <a:avLst/>
@@ -8801,8 +8860,8 @@
         </p:nvSpPr>
         <p:spPr>
           <a:xfrm>
-            <a:off x="3008376" y="3654373"/>
-            <a:ext cx="786336" cy="122637"/>
+            <a:off x="3008376" y="3519902"/>
+            <a:ext cx="786336" cy="111880"/>
           </a:xfrm>
           <a:prstGeom prst="rect">
             <a:avLst/>
@@ -8821,8 +8880,8 @@
         </p:nvSpPr>
         <p:spPr>
           <a:xfrm>
-            <a:off x="3931920" y="3593054"/>
-            <a:ext cx="676656" cy="245274"/>
+            <a:off x="3931920" y="3463962"/>
+            <a:ext cx="676656" cy="223759"/>
           </a:xfrm>
           <a:prstGeom prst="rect">
             <a:avLst/>
@@ -8860,8 +8919,8 @@
         </p:nvSpPr>
         <p:spPr>
           <a:xfrm>
-            <a:off x="4608576" y="3593054"/>
-            <a:ext cx="1188720" cy="245274"/>
+            <a:off x="4608576" y="3463962"/>
+            <a:ext cx="1188720" cy="223759"/>
           </a:xfrm>
           <a:prstGeom prst="rect">
             <a:avLst/>
@@ -8899,8 +8958,8 @@
         </p:nvSpPr>
         <p:spPr>
           <a:xfrm>
-            <a:off x="658368" y="3838328"/>
-            <a:ext cx="310896" cy="245274"/>
+            <a:off x="658368" y="3687721"/>
+            <a:ext cx="310896" cy="223759"/>
           </a:xfrm>
           <a:prstGeom prst="rect">
             <a:avLst/>
@@ -8938,8 +8997,8 @@
         </p:nvSpPr>
         <p:spPr>
           <a:xfrm>
-            <a:off x="1014984" y="3838328"/>
-            <a:ext cx="1920240" cy="245274"/>
+            <a:off x="1014984" y="3687721"/>
+            <a:ext cx="1920240" cy="223759"/>
           </a:xfrm>
           <a:prstGeom prst="rect">
             <a:avLst/>
@@ -8977,8 +9036,8 @@
         </p:nvSpPr>
         <p:spPr>
           <a:xfrm>
-            <a:off x="3008376" y="3899647"/>
-            <a:ext cx="773668" cy="122637"/>
+            <a:off x="3008376" y="3743661"/>
+            <a:ext cx="773668" cy="111880"/>
           </a:xfrm>
           <a:prstGeom prst="rect">
             <a:avLst/>
@@ -8997,8 +9056,8 @@
         </p:nvSpPr>
         <p:spPr>
           <a:xfrm>
-            <a:off x="3931920" y="3838328"/>
-            <a:ext cx="676656" cy="245274"/>
+            <a:off x="3931920" y="3687721"/>
+            <a:ext cx="676656" cy="223759"/>
           </a:xfrm>
           <a:prstGeom prst="rect">
             <a:avLst/>
@@ -9036,8 +9095,8 @@
         </p:nvSpPr>
         <p:spPr>
           <a:xfrm>
-            <a:off x="4608576" y="3838328"/>
-            <a:ext cx="1188720" cy="245274"/>
+            <a:off x="4608576" y="3687721"/>
+            <a:ext cx="1188720" cy="223759"/>
           </a:xfrm>
           <a:prstGeom prst="rect">
             <a:avLst/>
@@ -9075,8 +9134,8 @@
         </p:nvSpPr>
         <p:spPr>
           <a:xfrm>
-            <a:off x="658368" y="4083603"/>
-            <a:ext cx="310896" cy="245274"/>
+            <a:off x="658368" y="3911480"/>
+            <a:ext cx="310896" cy="223759"/>
           </a:xfrm>
           <a:prstGeom prst="rect">
             <a:avLst/>
@@ -9114,8 +9173,8 @@
         </p:nvSpPr>
         <p:spPr>
           <a:xfrm>
-            <a:off x="1014984" y="4083603"/>
-            <a:ext cx="1920240" cy="245274"/>
+            <a:off x="1014984" y="3911480"/>
+            <a:ext cx="1920240" cy="223759"/>
           </a:xfrm>
           <a:prstGeom prst="rect">
             <a:avLst/>
@@ -9153,8 +9212,8 @@
         </p:nvSpPr>
         <p:spPr>
           <a:xfrm>
-            <a:off x="3008376" y="4144921"/>
-            <a:ext cx="740188" cy="122637"/>
+            <a:off x="3008376" y="3967420"/>
+            <a:ext cx="740188" cy="111880"/>
           </a:xfrm>
           <a:prstGeom prst="rect">
             <a:avLst/>
@@ -9173,8 +9232,8 @@
         </p:nvSpPr>
         <p:spPr>
           <a:xfrm>
-            <a:off x="3931920" y="4083603"/>
-            <a:ext cx="676656" cy="245274"/>
+            <a:off x="3931920" y="3911480"/>
+            <a:ext cx="676656" cy="223759"/>
           </a:xfrm>
           <a:prstGeom prst="rect">
             <a:avLst/>
@@ -9212,8 +9271,8 @@
         </p:nvSpPr>
         <p:spPr>
           <a:xfrm>
-            <a:off x="4608576" y="4083603"/>
-            <a:ext cx="1188720" cy="245274"/>
+            <a:off x="4608576" y="3911480"/>
+            <a:ext cx="1188720" cy="223759"/>
           </a:xfrm>
           <a:prstGeom prst="rect">
             <a:avLst/>
@@ -9251,8 +9310,8 @@
         </p:nvSpPr>
         <p:spPr>
           <a:xfrm>
-            <a:off x="658368" y="4328877"/>
-            <a:ext cx="310896" cy="245274"/>
+            <a:off x="658368" y="4135240"/>
+            <a:ext cx="310896" cy="223759"/>
           </a:xfrm>
           <a:prstGeom prst="rect">
             <a:avLst/>
@@ -9290,8 +9349,8 @@
         </p:nvSpPr>
         <p:spPr>
           <a:xfrm>
-            <a:off x="1014984" y="4328877"/>
-            <a:ext cx="1920240" cy="245274"/>
+            <a:off x="1014984" y="4135240"/>
+            <a:ext cx="1920240" cy="223759"/>
           </a:xfrm>
           <a:prstGeom prst="rect">
             <a:avLst/>
@@ -9329,8 +9388,8 @@
         </p:nvSpPr>
         <p:spPr>
           <a:xfrm>
-            <a:off x="3008376" y="4390196"/>
-            <a:ext cx="735663" cy="122637"/>
+            <a:off x="3008376" y="4191179"/>
+            <a:ext cx="735663" cy="111880"/>
           </a:xfrm>
           <a:prstGeom prst="rect">
             <a:avLst/>
@@ -9349,8 +9408,8 @@
         </p:nvSpPr>
         <p:spPr>
           <a:xfrm>
-            <a:off x="3931920" y="4328877"/>
-            <a:ext cx="676656" cy="245274"/>
+            <a:off x="3931920" y="4135240"/>
+            <a:ext cx="676656" cy="223759"/>
           </a:xfrm>
           <a:prstGeom prst="rect">
             <a:avLst/>
@@ -9388,8 +9447,8 @@
         </p:nvSpPr>
         <p:spPr>
           <a:xfrm>
-            <a:off x="4608576" y="4328877"/>
-            <a:ext cx="1188720" cy="245274"/>
+            <a:off x="4608576" y="4135240"/>
+            <a:ext cx="1188720" cy="223759"/>
           </a:xfrm>
           <a:prstGeom prst="rect">
             <a:avLst/>
@@ -9427,8 +9486,8 @@
         </p:nvSpPr>
         <p:spPr>
           <a:xfrm>
-            <a:off x="658368" y="4574152"/>
-            <a:ext cx="310896" cy="245274"/>
+            <a:off x="658368" y="4358999"/>
+            <a:ext cx="310896" cy="223759"/>
           </a:xfrm>
           <a:prstGeom prst="rect">
             <a:avLst/>
@@ -9466,8 +9525,8 @@
         </p:nvSpPr>
         <p:spPr>
           <a:xfrm>
-            <a:off x="1014984" y="4574152"/>
-            <a:ext cx="1920240" cy="245274"/>
+            <a:off x="1014984" y="4358999"/>
+            <a:ext cx="1920240" cy="223759"/>
           </a:xfrm>
           <a:prstGeom prst="rect">
             <a:avLst/>
@@ -9505,8 +9564,8 @@
         </p:nvSpPr>
         <p:spPr>
           <a:xfrm>
-            <a:off x="3008376" y="4635470"/>
-            <a:ext cx="718471" cy="122637"/>
+            <a:off x="3008376" y="4414938"/>
+            <a:ext cx="718471" cy="111880"/>
           </a:xfrm>
           <a:prstGeom prst="rect">
             <a:avLst/>
@@ -9525,8 +9584,8 @@
         </p:nvSpPr>
         <p:spPr>
           <a:xfrm>
-            <a:off x="3931920" y="4574152"/>
-            <a:ext cx="676656" cy="245274"/>
+            <a:off x="3931920" y="4358999"/>
+            <a:ext cx="676656" cy="223759"/>
           </a:xfrm>
           <a:prstGeom prst="rect">
             <a:avLst/>
@@ -9564,8 +9623,8 @@
         </p:nvSpPr>
         <p:spPr>
           <a:xfrm>
-            <a:off x="4608576" y="4574152"/>
-            <a:ext cx="1188720" cy="245274"/>
+            <a:off x="4608576" y="4358999"/>
+            <a:ext cx="1188720" cy="223759"/>
           </a:xfrm>
           <a:prstGeom prst="rect">
             <a:avLst/>
@@ -9603,8 +9662,8 @@
         </p:nvSpPr>
         <p:spPr>
           <a:xfrm>
-            <a:off x="658368" y="4819426"/>
-            <a:ext cx="310896" cy="245274"/>
+            <a:off x="658368" y="4582758"/>
+            <a:ext cx="310896" cy="223759"/>
           </a:xfrm>
           <a:prstGeom prst="rect">
             <a:avLst/>
@@ -9642,8 +9701,8 @@
         </p:nvSpPr>
         <p:spPr>
           <a:xfrm>
-            <a:off x="1014984" y="4819426"/>
-            <a:ext cx="1920240" cy="245274"/>
+            <a:off x="1014984" y="4582758"/>
+            <a:ext cx="1920240" cy="223759"/>
           </a:xfrm>
           <a:prstGeom prst="rect">
             <a:avLst/>
@@ -9681,8 +9740,8 @@
         </p:nvSpPr>
         <p:spPr>
           <a:xfrm>
-            <a:off x="3008376" y="4880744"/>
-            <a:ext cx="713946" cy="122637"/>
+            <a:off x="3008376" y="4638697"/>
+            <a:ext cx="713946" cy="111880"/>
           </a:xfrm>
           <a:prstGeom prst="rect">
             <a:avLst/>
@@ -9701,8 +9760,8 @@
         </p:nvSpPr>
         <p:spPr>
           <a:xfrm>
-            <a:off x="3931920" y="4819426"/>
-            <a:ext cx="676656" cy="245274"/>
+            <a:off x="3931920" y="4582758"/>
+            <a:ext cx="676656" cy="223759"/>
           </a:xfrm>
           <a:prstGeom prst="rect">
             <a:avLst/>
@@ -9740,8 +9799,8 @@
         </p:nvSpPr>
         <p:spPr>
           <a:xfrm>
-            <a:off x="4608576" y="4819426"/>
-            <a:ext cx="1188720" cy="245274"/>
+            <a:off x="4608576" y="4582758"/>
+            <a:ext cx="1188720" cy="223759"/>
           </a:xfrm>
           <a:prstGeom prst="rect">
             <a:avLst/>
@@ -9779,8 +9838,8 @@
         </p:nvSpPr>
         <p:spPr>
           <a:xfrm>
-            <a:off x="658368" y="5064700"/>
-            <a:ext cx="310896" cy="245274"/>
+            <a:off x="658368" y="4806517"/>
+            <a:ext cx="310896" cy="223759"/>
           </a:xfrm>
           <a:prstGeom prst="rect">
             <a:avLst/>
@@ -9818,8 +9877,8 @@
         </p:nvSpPr>
         <p:spPr>
           <a:xfrm>
-            <a:off x="1014984" y="5064700"/>
-            <a:ext cx="1920240" cy="245274"/>
+            <a:off x="1014984" y="4806517"/>
+            <a:ext cx="1920240" cy="223759"/>
           </a:xfrm>
           <a:prstGeom prst="rect">
             <a:avLst/>
@@ -9857,8 +9916,8 @@
         </p:nvSpPr>
         <p:spPr>
           <a:xfrm>
-            <a:off x="3008376" y="5126019"/>
-            <a:ext cx="702183" cy="122637"/>
+            <a:off x="3008376" y="4862456"/>
+            <a:ext cx="702183" cy="111880"/>
           </a:xfrm>
           <a:prstGeom prst="rect">
             <a:avLst/>
@@ -9877,8 +9936,8 @@
         </p:nvSpPr>
         <p:spPr>
           <a:xfrm>
-            <a:off x="3931920" y="5064700"/>
-            <a:ext cx="676656" cy="245274"/>
+            <a:off x="3931920" y="4806517"/>
+            <a:ext cx="676656" cy="223759"/>
           </a:xfrm>
           <a:prstGeom prst="rect">
             <a:avLst/>
@@ -9916,8 +9975,8 @@
         </p:nvSpPr>
         <p:spPr>
           <a:xfrm>
-            <a:off x="4608576" y="5064700"/>
-            <a:ext cx="1188720" cy="245274"/>
+            <a:off x="4608576" y="4806517"/>
+            <a:ext cx="1188720" cy="223759"/>
           </a:xfrm>
           <a:prstGeom prst="rect">
             <a:avLst/>
@@ -9955,8 +10014,8 @@
         </p:nvSpPr>
         <p:spPr>
           <a:xfrm>
-            <a:off x="658368" y="5309975"/>
-            <a:ext cx="310896" cy="245274"/>
+            <a:off x="658368" y="5030276"/>
+            <a:ext cx="310896" cy="223759"/>
           </a:xfrm>
           <a:prstGeom prst="rect">
             <a:avLst/>
@@ -9994,8 +10053,8 @@
         </p:nvSpPr>
         <p:spPr>
           <a:xfrm>
-            <a:off x="1014984" y="5309975"/>
-            <a:ext cx="1920240" cy="245274"/>
+            <a:off x="1014984" y="5030276"/>
+            <a:ext cx="1920240" cy="223759"/>
           </a:xfrm>
           <a:prstGeom prst="rect">
             <a:avLst/>
@@ -10033,8 +10092,8 @@
         </p:nvSpPr>
         <p:spPr>
           <a:xfrm>
-            <a:off x="3008376" y="5371293"/>
-            <a:ext cx="668703" cy="122637"/>
+            <a:off x="3008376" y="5086216"/>
+            <a:ext cx="668703" cy="111880"/>
           </a:xfrm>
           <a:prstGeom prst="rect">
             <a:avLst/>
@@ -10053,8 +10112,8 @@
         </p:nvSpPr>
         <p:spPr>
           <a:xfrm>
-            <a:off x="3931920" y="5309975"/>
-            <a:ext cx="676656" cy="245274"/>
+            <a:off x="3931920" y="5030276"/>
+            <a:ext cx="676656" cy="223759"/>
           </a:xfrm>
           <a:prstGeom prst="rect">
             <a:avLst/>
@@ -10092,8 +10151,8 @@
         </p:nvSpPr>
         <p:spPr>
           <a:xfrm>
-            <a:off x="4608576" y="5309975"/>
-            <a:ext cx="1188720" cy="245274"/>
+            <a:off x="4608576" y="5030276"/>
+            <a:ext cx="1188720" cy="223759"/>
           </a:xfrm>
           <a:prstGeom prst="rect">
             <a:avLst/>
@@ -10131,8 +10190,8 @@
         </p:nvSpPr>
         <p:spPr>
           <a:xfrm>
-            <a:off x="658368" y="5555249"/>
-            <a:ext cx="310896" cy="245274"/>
+            <a:off x="658368" y="5254035"/>
+            <a:ext cx="310896" cy="223759"/>
           </a:xfrm>
           <a:prstGeom prst="rect">
             <a:avLst/>
@@ -10170,8 +10229,8 @@
         </p:nvSpPr>
         <p:spPr>
           <a:xfrm>
-            <a:off x="1014984" y="5555249"/>
-            <a:ext cx="1920240" cy="245274"/>
+            <a:off x="1014984" y="5254035"/>
+            <a:ext cx="1920240" cy="223759"/>
           </a:xfrm>
           <a:prstGeom prst="rect">
             <a:avLst/>
@@ -10209,8 +10268,8 @@
         </p:nvSpPr>
         <p:spPr>
           <a:xfrm>
-            <a:off x="3008376" y="5616568"/>
-            <a:ext cx="637937" cy="122637"/>
+            <a:off x="3008376" y="5309975"/>
+            <a:ext cx="637937" cy="111880"/>
           </a:xfrm>
           <a:prstGeom prst="rect">
             <a:avLst/>
@@ -10229,8 +10288,8 @@
         </p:nvSpPr>
         <p:spPr>
           <a:xfrm>
-            <a:off x="3931920" y="5555249"/>
-            <a:ext cx="676656" cy="245274"/>
+            <a:off x="3931920" y="5254035"/>
+            <a:ext cx="676656" cy="223759"/>
           </a:xfrm>
           <a:prstGeom prst="rect">
             <a:avLst/>
@@ -10268,8 +10327,8 @@
         </p:nvSpPr>
         <p:spPr>
           <a:xfrm>
-            <a:off x="4608576" y="5555249"/>
-            <a:ext cx="1188720" cy="245274"/>
+            <a:off x="4608576" y="5254035"/>
+            <a:ext cx="1188720" cy="223759"/>
           </a:xfrm>
           <a:prstGeom prst="rect">
             <a:avLst/>
@@ -10307,8 +10366,8 @@
         </p:nvSpPr>
         <p:spPr>
           <a:xfrm>
-            <a:off x="658368" y="5800523"/>
-            <a:ext cx="310896" cy="245274"/>
+            <a:off x="658368" y="5477794"/>
+            <a:ext cx="310896" cy="223759"/>
           </a:xfrm>
           <a:prstGeom prst="rect">
             <a:avLst/>
@@ -10346,8 +10405,8 @@
         </p:nvSpPr>
         <p:spPr>
           <a:xfrm>
-            <a:off x="1014984" y="5800523"/>
-            <a:ext cx="1920240" cy="245274"/>
+            <a:off x="1014984" y="5477794"/>
+            <a:ext cx="1920240" cy="223759"/>
           </a:xfrm>
           <a:prstGeom prst="rect">
             <a:avLst/>
@@ -10385,8 +10444,8 @@
         </p:nvSpPr>
         <p:spPr>
           <a:xfrm>
-            <a:off x="3008376" y="5861842"/>
-            <a:ext cx="606266" cy="122637"/>
+            <a:off x="3008376" y="5533734"/>
+            <a:ext cx="606266" cy="111880"/>
           </a:xfrm>
           <a:prstGeom prst="rect">
             <a:avLst/>
@@ -10405,8 +10464,8 @@
         </p:nvSpPr>
         <p:spPr>
           <a:xfrm>
-            <a:off x="3931920" y="5800523"/>
-            <a:ext cx="676656" cy="245274"/>
+            <a:off x="3931920" y="5477794"/>
+            <a:ext cx="676656" cy="223759"/>
           </a:xfrm>
           <a:prstGeom prst="rect">
             <a:avLst/>
@@ -10444,8 +10503,8 @@
         </p:nvSpPr>
         <p:spPr>
           <a:xfrm>
-            <a:off x="4608576" y="5800523"/>
-            <a:ext cx="1188720" cy="245274"/>
+            <a:off x="4608576" y="5477794"/>
+            <a:ext cx="1188720" cy="223759"/>
           </a:xfrm>
           <a:prstGeom prst="rect">
             <a:avLst/>
@@ -10483,8 +10542,8 @@
         </p:nvSpPr>
         <p:spPr>
           <a:xfrm>
-            <a:off x="658368" y="6045798"/>
-            <a:ext cx="310896" cy="245274"/>
+            <a:off x="658368" y="5701553"/>
+            <a:ext cx="310896" cy="223759"/>
           </a:xfrm>
           <a:prstGeom prst="rect">
             <a:avLst/>
@@ -10522,8 +10581,8 @@
         </p:nvSpPr>
         <p:spPr>
           <a:xfrm>
-            <a:off x="1014984" y="6045798"/>
-            <a:ext cx="1920240" cy="245274"/>
+            <a:off x="1014984" y="5701553"/>
+            <a:ext cx="1920240" cy="223759"/>
           </a:xfrm>
           <a:prstGeom prst="rect">
             <a:avLst/>
@@ -10561,8 +10620,8 @@
         </p:nvSpPr>
         <p:spPr>
           <a:xfrm>
-            <a:off x="3008376" y="6107116"/>
-            <a:ext cx="602647" cy="122637"/>
+            <a:off x="3008376" y="5757493"/>
+            <a:ext cx="602647" cy="111880"/>
           </a:xfrm>
           <a:prstGeom prst="rect">
             <a:avLst/>
@@ -10581,8 +10640,8 @@
         </p:nvSpPr>
         <p:spPr>
           <a:xfrm>
-            <a:off x="3931920" y="6045798"/>
-            <a:ext cx="676656" cy="245274"/>
+            <a:off x="3931920" y="5701553"/>
+            <a:ext cx="676656" cy="223759"/>
           </a:xfrm>
           <a:prstGeom prst="rect">
             <a:avLst/>
@@ -10620,8 +10679,8 @@
         </p:nvSpPr>
         <p:spPr>
           <a:xfrm>
-            <a:off x="4608576" y="6045798"/>
-            <a:ext cx="1188720" cy="245274"/>
+            <a:off x="4608576" y="5701553"/>
+            <a:ext cx="1188720" cy="223759"/>
           </a:xfrm>
           <a:prstGeom prst="rect">
             <a:avLst/>
@@ -10660,7 +10719,7 @@
         <p:spPr>
           <a:xfrm>
             <a:off x="6208776" y="2121408"/>
-            <a:ext cx="310896" cy="245274"/>
+            <a:ext cx="310896" cy="223759"/>
           </a:xfrm>
           <a:prstGeom prst="rect">
             <a:avLst/>
@@ -10699,7 +10758,7 @@
         <p:spPr>
           <a:xfrm>
             <a:off x="6565392" y="2121408"/>
-            <a:ext cx="1920240" cy="245274"/>
+            <a:ext cx="1920240" cy="223759"/>
           </a:xfrm>
           <a:prstGeom prst="rect">
             <a:avLst/>
@@ -10737,8 +10796,8 @@
         </p:nvSpPr>
         <p:spPr>
           <a:xfrm>
-            <a:off x="8558784" y="2182727"/>
-            <a:ext cx="490442" cy="122637"/>
+            <a:off x="8558784" y="2177348"/>
+            <a:ext cx="490442" cy="111880"/>
           </a:xfrm>
           <a:prstGeom prst="rect">
             <a:avLst/>
@@ -10758,7 +10817,7 @@
         <p:spPr>
           <a:xfrm>
             <a:off x="9482328" y="2121408"/>
-            <a:ext cx="676656" cy="245274"/>
+            <a:ext cx="676656" cy="223759"/>
           </a:xfrm>
           <a:prstGeom prst="rect">
             <a:avLst/>
@@ -10797,7 +10856,7 @@
         <p:spPr>
           <a:xfrm>
             <a:off x="10158984" y="2121408"/>
-            <a:ext cx="1188720" cy="245274"/>
+            <a:ext cx="1188720" cy="223759"/>
           </a:xfrm>
           <a:prstGeom prst="rect">
             <a:avLst/>
@@ -10835,8 +10894,8 @@
         </p:nvSpPr>
         <p:spPr>
           <a:xfrm>
-            <a:off x="6208776" y="2366682"/>
-            <a:ext cx="310896" cy="245274"/>
+            <a:off x="6208776" y="2345167"/>
+            <a:ext cx="310896" cy="223759"/>
           </a:xfrm>
           <a:prstGeom prst="rect">
             <a:avLst/>
@@ -10874,8 +10933,8 @@
         </p:nvSpPr>
         <p:spPr>
           <a:xfrm>
-            <a:off x="6565392" y="2366682"/>
-            <a:ext cx="1920240" cy="245274"/>
+            <a:off x="6565392" y="2345167"/>
+            <a:ext cx="1920240" cy="223759"/>
           </a:xfrm>
           <a:prstGeom prst="rect">
             <a:avLst/>
@@ -10913,8 +10972,8 @@
         </p:nvSpPr>
         <p:spPr>
           <a:xfrm>
-            <a:off x="8558784" y="2428001"/>
-            <a:ext cx="480489" cy="122637"/>
+            <a:off x="8558784" y="2401107"/>
+            <a:ext cx="480489" cy="111880"/>
           </a:xfrm>
           <a:prstGeom prst="rect">
             <a:avLst/>
@@ -10933,8 +10992,8 @@
         </p:nvSpPr>
         <p:spPr>
           <a:xfrm>
-            <a:off x="9482328" y="2366682"/>
-            <a:ext cx="676656" cy="245274"/>
+            <a:off x="9482328" y="2345167"/>
+            <a:ext cx="676656" cy="223759"/>
           </a:xfrm>
           <a:prstGeom prst="rect">
             <a:avLst/>
@@ -10972,8 +11031,8 @@
         </p:nvSpPr>
         <p:spPr>
           <a:xfrm>
-            <a:off x="10158984" y="2366682"/>
-            <a:ext cx="1188720" cy="245274"/>
+            <a:off x="10158984" y="2345167"/>
+            <a:ext cx="1188720" cy="223759"/>
           </a:xfrm>
           <a:prstGeom prst="rect">
             <a:avLst/>
@@ -11011,8 +11070,8 @@
         </p:nvSpPr>
         <p:spPr>
           <a:xfrm>
-            <a:off x="6208776" y="2611957"/>
-            <a:ext cx="310896" cy="245274"/>
+            <a:off x="6208776" y="2568926"/>
+            <a:ext cx="310896" cy="223759"/>
           </a:xfrm>
           <a:prstGeom prst="rect">
             <a:avLst/>
@@ -11050,8 +11109,8 @@
         </p:nvSpPr>
         <p:spPr>
           <a:xfrm>
-            <a:off x="6565392" y="2611957"/>
-            <a:ext cx="1920240" cy="245274"/>
+            <a:off x="6565392" y="2568926"/>
+            <a:ext cx="1920240" cy="223759"/>
           </a:xfrm>
           <a:prstGeom prst="rect">
             <a:avLst/>
@@ -11089,8 +11148,8 @@
         </p:nvSpPr>
         <p:spPr>
           <a:xfrm>
-            <a:off x="8558784" y="2673275"/>
-            <a:ext cx="475059" cy="122637"/>
+            <a:off x="8558784" y="2624866"/>
+            <a:ext cx="475059" cy="111880"/>
           </a:xfrm>
           <a:prstGeom prst="rect">
             <a:avLst/>
@@ -11109,8 +11168,8 @@
         </p:nvSpPr>
         <p:spPr>
           <a:xfrm>
-            <a:off x="9482328" y="2611957"/>
-            <a:ext cx="676656" cy="245274"/>
+            <a:off x="9482328" y="2568926"/>
+            <a:ext cx="676656" cy="223759"/>
           </a:xfrm>
           <a:prstGeom prst="rect">
             <a:avLst/>
@@ -11148,8 +11207,8 @@
         </p:nvSpPr>
         <p:spPr>
           <a:xfrm>
-            <a:off x="10158984" y="2611957"/>
-            <a:ext cx="1188720" cy="245274"/>
+            <a:off x="10158984" y="2568926"/>
+            <a:ext cx="1188720" cy="223759"/>
           </a:xfrm>
           <a:prstGeom prst="rect">
             <a:avLst/>
@@ -11187,8 +11246,8 @@
         </p:nvSpPr>
         <p:spPr>
           <a:xfrm>
-            <a:off x="6208776" y="2857231"/>
-            <a:ext cx="310896" cy="245274"/>
+            <a:off x="6208776" y="2792685"/>
+            <a:ext cx="310896" cy="223759"/>
           </a:xfrm>
           <a:prstGeom prst="rect">
             <a:avLst/>
@@ -11226,8 +11285,8 @@
         </p:nvSpPr>
         <p:spPr>
           <a:xfrm>
-            <a:off x="6565392" y="2857231"/>
-            <a:ext cx="1920240" cy="245274"/>
+            <a:off x="6565392" y="2792685"/>
+            <a:ext cx="1920240" cy="223759"/>
           </a:xfrm>
           <a:prstGeom prst="rect">
             <a:avLst/>
@@ -11265,8 +11324,8 @@
         </p:nvSpPr>
         <p:spPr>
           <a:xfrm>
-            <a:off x="8558784" y="2918550"/>
-            <a:ext cx="452437" cy="122637"/>
+            <a:off x="8558784" y="2848625"/>
+            <a:ext cx="452437" cy="111880"/>
           </a:xfrm>
           <a:prstGeom prst="rect">
             <a:avLst/>
@@ -11285,8 +11344,8 @@
         </p:nvSpPr>
         <p:spPr>
           <a:xfrm>
-            <a:off x="9482328" y="2857231"/>
-            <a:ext cx="676656" cy="245274"/>
+            <a:off x="9482328" y="2792685"/>
+            <a:ext cx="676656" cy="223759"/>
           </a:xfrm>
           <a:prstGeom prst="rect">
             <a:avLst/>
@@ -11324,8 +11383,8 @@
         </p:nvSpPr>
         <p:spPr>
           <a:xfrm>
-            <a:off x="10158984" y="2857231"/>
-            <a:ext cx="1188720" cy="245274"/>
+            <a:off x="10158984" y="2792685"/>
+            <a:ext cx="1188720" cy="223759"/>
           </a:xfrm>
           <a:prstGeom prst="rect">
             <a:avLst/>
@@ -11363,8 +11422,8 @@
         </p:nvSpPr>
         <p:spPr>
           <a:xfrm>
-            <a:off x="6208776" y="3102505"/>
-            <a:ext cx="310896" cy="245274"/>
+            <a:off x="6208776" y="3016444"/>
+            <a:ext cx="310896" cy="223759"/>
           </a:xfrm>
           <a:prstGeom prst="rect">
             <a:avLst/>
@@ -11402,8 +11461,8 @@
         </p:nvSpPr>
         <p:spPr>
           <a:xfrm>
-            <a:off x="6565392" y="3102505"/>
-            <a:ext cx="1920240" cy="245274"/>
+            <a:off x="6565392" y="3016444"/>
+            <a:ext cx="1920240" cy="223759"/>
           </a:xfrm>
           <a:prstGeom prst="rect">
             <a:avLst/>
@@ -11441,8 +11500,8 @@
         </p:nvSpPr>
         <p:spPr>
           <a:xfrm>
-            <a:off x="8558784" y="3163824"/>
-            <a:ext cx="448818" cy="122637"/>
+            <a:off x="8558784" y="3072384"/>
+            <a:ext cx="448818" cy="111880"/>
           </a:xfrm>
           <a:prstGeom prst="rect">
             <a:avLst/>
@@ -11461,8 +11520,8 @@
         </p:nvSpPr>
         <p:spPr>
           <a:xfrm>
-            <a:off x="9482328" y="3102505"/>
-            <a:ext cx="676656" cy="245274"/>
+            <a:off x="9482328" y="3016444"/>
+            <a:ext cx="676656" cy="223759"/>
           </a:xfrm>
           <a:prstGeom prst="rect">
             <a:avLst/>
@@ -11500,8 +11559,8 @@
         </p:nvSpPr>
         <p:spPr>
           <a:xfrm>
-            <a:off x="10158984" y="3102505"/>
-            <a:ext cx="1188720" cy="245274"/>
+            <a:off x="10158984" y="3016444"/>
+            <a:ext cx="1188720" cy="223759"/>
           </a:xfrm>
           <a:prstGeom prst="rect">
             <a:avLst/>
@@ -11539,8 +11598,8 @@
         </p:nvSpPr>
         <p:spPr>
           <a:xfrm>
-            <a:off x="6208776" y="3347780"/>
-            <a:ext cx="310896" cy="245274"/>
+            <a:off x="6208776" y="3240203"/>
+            <a:ext cx="310896" cy="223759"/>
           </a:xfrm>
           <a:prstGeom prst="rect">
             <a:avLst/>
@@ -11578,8 +11637,8 @@
         </p:nvSpPr>
         <p:spPr>
           <a:xfrm>
-            <a:off x="6565392" y="3347780"/>
-            <a:ext cx="1920240" cy="245274"/>
+            <a:off x="6565392" y="3240203"/>
+            <a:ext cx="1920240" cy="223759"/>
           </a:xfrm>
           <a:prstGeom prst="rect">
             <a:avLst/>
@@ -11617,8 +11676,8 @@
         </p:nvSpPr>
         <p:spPr>
           <a:xfrm>
-            <a:off x="8558784" y="3409098"/>
-            <a:ext cx="438864" cy="122637"/>
+            <a:off x="8558784" y="3296143"/>
+            <a:ext cx="438864" cy="111880"/>
           </a:xfrm>
           <a:prstGeom prst="rect">
             <a:avLst/>
@@ -11637,8 +11696,8 @@
         </p:nvSpPr>
         <p:spPr>
           <a:xfrm>
-            <a:off x="9482328" y="3347780"/>
-            <a:ext cx="676656" cy="245274"/>
+            <a:off x="9482328" y="3240203"/>
+            <a:ext cx="676656" cy="223759"/>
           </a:xfrm>
           <a:prstGeom prst="rect">
             <a:avLst/>
@@ -11676,8 +11735,8 @@
         </p:nvSpPr>
         <p:spPr>
           <a:xfrm>
-            <a:off x="10158984" y="3347780"/>
-            <a:ext cx="1188720" cy="245274"/>
+            <a:off x="10158984" y="3240203"/>
+            <a:ext cx="1188720" cy="223759"/>
           </a:xfrm>
           <a:prstGeom prst="rect">
             <a:avLst/>
@@ -11715,8 +11774,8 @@
         </p:nvSpPr>
         <p:spPr>
           <a:xfrm>
-            <a:off x="6208776" y="3593054"/>
-            <a:ext cx="310896" cy="245274"/>
+            <a:off x="6208776" y="3463962"/>
+            <a:ext cx="310896" cy="223759"/>
           </a:xfrm>
           <a:prstGeom prst="rect">
             <a:avLst/>
@@ -11754,8 +11813,8 @@
         </p:nvSpPr>
         <p:spPr>
           <a:xfrm>
-            <a:off x="6565392" y="3593054"/>
-            <a:ext cx="1920240" cy="245274"/>
+            <a:off x="6565392" y="3463962"/>
+            <a:ext cx="1920240" cy="223759"/>
           </a:xfrm>
           <a:prstGeom prst="rect">
             <a:avLst/>
@@ -11793,8 +11852,8 @@
         </p:nvSpPr>
         <p:spPr>
           <a:xfrm>
-            <a:off x="8558784" y="3654373"/>
-            <a:ext cx="386382" cy="122637"/>
+            <a:off x="8558784" y="3519902"/>
+            <a:ext cx="386382" cy="111880"/>
           </a:xfrm>
           <a:prstGeom prst="rect">
             <a:avLst/>
@@ -11813,8 +11872,8 @@
         </p:nvSpPr>
         <p:spPr>
           <a:xfrm>
-            <a:off x="9482328" y="3593054"/>
-            <a:ext cx="676656" cy="245274"/>
+            <a:off x="9482328" y="3463962"/>
+            <a:ext cx="676656" cy="223759"/>
           </a:xfrm>
           <a:prstGeom prst="rect">
             <a:avLst/>
@@ -11852,8 +11911,8 @@
         </p:nvSpPr>
         <p:spPr>
           <a:xfrm>
-            <a:off x="10158984" y="3593054"/>
-            <a:ext cx="1188720" cy="245274"/>
+            <a:off x="10158984" y="3463962"/>
+            <a:ext cx="1188720" cy="223759"/>
           </a:xfrm>
           <a:prstGeom prst="rect">
             <a:avLst/>
@@ -11891,8 +11950,8 @@
         </p:nvSpPr>
         <p:spPr>
           <a:xfrm>
-            <a:off x="6208776" y="3838328"/>
-            <a:ext cx="310896" cy="245274"/>
+            <a:off x="6208776" y="3687721"/>
+            <a:ext cx="310896" cy="223759"/>
           </a:xfrm>
           <a:prstGeom prst="rect">
             <a:avLst/>
@@ -11930,8 +11989,8 @@
         </p:nvSpPr>
         <p:spPr>
           <a:xfrm>
-            <a:off x="6565392" y="3838328"/>
-            <a:ext cx="1920240" cy="245274"/>
+            <a:off x="6565392" y="3687721"/>
+            <a:ext cx="1920240" cy="223759"/>
           </a:xfrm>
           <a:prstGeom prst="rect">
             <a:avLst/>
@@ -11969,8 +12028,8 @@
         </p:nvSpPr>
         <p:spPr>
           <a:xfrm>
-            <a:off x="8558784" y="3899647"/>
-            <a:ext cx="386382" cy="122637"/>
+            <a:off x="8558784" y="3743661"/>
+            <a:ext cx="386382" cy="111880"/>
           </a:xfrm>
           <a:prstGeom prst="rect">
             <a:avLst/>
@@ -11989,8 +12048,8 @@
         </p:nvSpPr>
         <p:spPr>
           <a:xfrm>
-            <a:off x="9482328" y="3838328"/>
-            <a:ext cx="676656" cy="245274"/>
+            <a:off x="9482328" y="3687721"/>
+            <a:ext cx="676656" cy="223759"/>
           </a:xfrm>
           <a:prstGeom prst="rect">
             <a:avLst/>
@@ -12028,8 +12087,8 @@
         </p:nvSpPr>
         <p:spPr>
           <a:xfrm>
-            <a:off x="10158984" y="3838328"/>
-            <a:ext cx="1188720" cy="245274"/>
+            <a:off x="10158984" y="3687721"/>
+            <a:ext cx="1188720" cy="223759"/>
           </a:xfrm>
           <a:prstGeom prst="rect">
             <a:avLst/>
@@ -12067,8 +12126,8 @@
         </p:nvSpPr>
         <p:spPr>
           <a:xfrm>
-            <a:off x="6208776" y="4083603"/>
-            <a:ext cx="310896" cy="245274"/>
+            <a:off x="6208776" y="3911480"/>
+            <a:ext cx="310896" cy="223759"/>
           </a:xfrm>
           <a:prstGeom prst="rect">
             <a:avLst/>
@@ -12106,8 +12165,8 @@
         </p:nvSpPr>
         <p:spPr>
           <a:xfrm>
-            <a:off x="6565392" y="4083603"/>
-            <a:ext cx="1920240" cy="245274"/>
+            <a:off x="6565392" y="3911480"/>
+            <a:ext cx="1920240" cy="223759"/>
           </a:xfrm>
           <a:prstGeom prst="rect">
             <a:avLst/>
@@ -12145,8 +12204,8 @@
         </p:nvSpPr>
         <p:spPr>
           <a:xfrm>
-            <a:off x="8558784" y="4144921"/>
-            <a:ext cx="379143" cy="122637"/>
+            <a:off x="8558784" y="3967420"/>
+            <a:ext cx="379143" cy="111880"/>
           </a:xfrm>
           <a:prstGeom prst="rect">
             <a:avLst/>
@@ -12165,8 +12224,8 @@
         </p:nvSpPr>
         <p:spPr>
           <a:xfrm>
-            <a:off x="9482328" y="4083603"/>
-            <a:ext cx="676656" cy="245274"/>
+            <a:off x="9482328" y="3911480"/>
+            <a:ext cx="676656" cy="223759"/>
           </a:xfrm>
           <a:prstGeom prst="rect">
             <a:avLst/>
@@ -12204,8 +12263,8 @@
         </p:nvSpPr>
         <p:spPr>
           <a:xfrm>
-            <a:off x="10158984" y="4083603"/>
-            <a:ext cx="1188720" cy="245274"/>
+            <a:off x="10158984" y="3911480"/>
+            <a:ext cx="1188720" cy="223759"/>
           </a:xfrm>
           <a:prstGeom prst="rect">
             <a:avLst/>
@@ -12243,8 +12302,8 @@
         </p:nvSpPr>
         <p:spPr>
           <a:xfrm>
-            <a:off x="6208776" y="4328877"/>
-            <a:ext cx="310896" cy="245274"/>
+            <a:off x="6208776" y="4135240"/>
+            <a:ext cx="310896" cy="223759"/>
           </a:xfrm>
           <a:prstGeom prst="rect">
             <a:avLst/>
@@ -12282,8 +12341,8 @@
         </p:nvSpPr>
         <p:spPr>
           <a:xfrm>
-            <a:off x="6565392" y="4328877"/>
-            <a:ext cx="1920240" cy="245274"/>
+            <a:off x="6565392" y="4135240"/>
+            <a:ext cx="1920240" cy="223759"/>
           </a:xfrm>
           <a:prstGeom prst="rect">
             <a:avLst/>
@@ -12321,8 +12380,8 @@
         </p:nvSpPr>
         <p:spPr>
           <a:xfrm>
-            <a:off x="8558784" y="4390196"/>
-            <a:ext cx="363760" cy="122637"/>
+            <a:off x="8558784" y="4191179"/>
+            <a:ext cx="363760" cy="111880"/>
           </a:xfrm>
           <a:prstGeom prst="rect">
             <a:avLst/>
@@ -12341,8 +12400,8 @@
         </p:nvSpPr>
         <p:spPr>
           <a:xfrm>
-            <a:off x="9482328" y="4328877"/>
-            <a:ext cx="676656" cy="245274"/>
+            <a:off x="9482328" y="4135240"/>
+            <a:ext cx="676656" cy="223759"/>
           </a:xfrm>
           <a:prstGeom prst="rect">
             <a:avLst/>
@@ -12380,8 +12439,8 @@
         </p:nvSpPr>
         <p:spPr>
           <a:xfrm>
-            <a:off x="10158984" y="4328877"/>
-            <a:ext cx="1188720" cy="245274"/>
+            <a:off x="10158984" y="4135240"/>
+            <a:ext cx="1188720" cy="223759"/>
           </a:xfrm>
           <a:prstGeom prst="rect">
             <a:avLst/>
@@ -12419,8 +12478,8 @@
         </p:nvSpPr>
         <p:spPr>
           <a:xfrm>
-            <a:off x="6208776" y="4574152"/>
-            <a:ext cx="310896" cy="245274"/>
+            <a:off x="6208776" y="4358999"/>
+            <a:ext cx="310896" cy="223759"/>
           </a:xfrm>
           <a:prstGeom prst="rect">
             <a:avLst/>
@@ -12458,8 +12517,8 @@
         </p:nvSpPr>
         <p:spPr>
           <a:xfrm>
-            <a:off x="6565392" y="4574152"/>
-            <a:ext cx="1920240" cy="245274"/>
+            <a:off x="6565392" y="4358999"/>
+            <a:ext cx="1920240" cy="223759"/>
           </a:xfrm>
           <a:prstGeom prst="rect">
             <a:avLst/>
@@ -12497,8 +12556,8 @@
         </p:nvSpPr>
         <p:spPr>
           <a:xfrm>
-            <a:off x="8558784" y="4635470"/>
-            <a:ext cx="317611" cy="122637"/>
+            <a:off x="8558784" y="4414938"/>
+            <a:ext cx="317611" cy="111880"/>
           </a:xfrm>
           <a:prstGeom prst="rect">
             <a:avLst/>
@@ -12517,8 +12576,8 @@
         </p:nvSpPr>
         <p:spPr>
           <a:xfrm>
-            <a:off x="9482328" y="4574152"/>
-            <a:ext cx="676656" cy="245274"/>
+            <a:off x="9482328" y="4358999"/>
+            <a:ext cx="676656" cy="223759"/>
           </a:xfrm>
           <a:prstGeom prst="rect">
             <a:avLst/>
@@ -12556,8 +12615,8 @@
         </p:nvSpPr>
         <p:spPr>
           <a:xfrm>
-            <a:off x="10158984" y="4574152"/>
-            <a:ext cx="1188720" cy="245274"/>
+            <a:off x="10158984" y="4358999"/>
+            <a:ext cx="1188720" cy="223759"/>
           </a:xfrm>
           <a:prstGeom prst="rect">
             <a:avLst/>
@@ -12595,8 +12654,8 @@
         </p:nvSpPr>
         <p:spPr>
           <a:xfrm>
-            <a:off x="6208776" y="4819426"/>
-            <a:ext cx="310896" cy="245274"/>
+            <a:off x="6208776" y="4582758"/>
+            <a:ext cx="310896" cy="223759"/>
           </a:xfrm>
           <a:prstGeom prst="rect">
             <a:avLst/>
@@ -12634,8 +12693,8 @@
         </p:nvSpPr>
         <p:spPr>
           <a:xfrm>
-            <a:off x="6565392" y="4819426"/>
-            <a:ext cx="1920240" cy="245274"/>
+            <a:off x="6565392" y="4582758"/>
+            <a:ext cx="1920240" cy="223759"/>
           </a:xfrm>
           <a:prstGeom prst="rect">
             <a:avLst/>
@@ -12673,8 +12732,8 @@
         </p:nvSpPr>
         <p:spPr>
           <a:xfrm>
-            <a:off x="8558784" y="4880744"/>
-            <a:ext cx="286845" cy="122637"/>
+            <a:off x="8558784" y="4638697"/>
+            <a:ext cx="286845" cy="111880"/>
           </a:xfrm>
           <a:prstGeom prst="rect">
             <a:avLst/>
@@ -12693,8 +12752,8 @@
         </p:nvSpPr>
         <p:spPr>
           <a:xfrm>
-            <a:off x="9482328" y="4819426"/>
-            <a:ext cx="676656" cy="245274"/>
+            <a:off x="9482328" y="4582758"/>
+            <a:ext cx="676656" cy="223759"/>
           </a:xfrm>
           <a:prstGeom prst="rect">
             <a:avLst/>
@@ -12732,8 +12791,8 @@
         </p:nvSpPr>
         <p:spPr>
           <a:xfrm>
-            <a:off x="10158984" y="4819426"/>
-            <a:ext cx="1188720" cy="245274"/>
+            <a:off x="10158984" y="4582758"/>
+            <a:ext cx="1188720" cy="223759"/>
           </a:xfrm>
           <a:prstGeom prst="rect">
             <a:avLst/>
@@ -12771,8 +12830,8 @@
         </p:nvSpPr>
         <p:spPr>
           <a:xfrm>
-            <a:off x="6208776" y="5064700"/>
-            <a:ext cx="310896" cy="245274"/>
+            <a:off x="6208776" y="4806517"/>
+            <a:ext cx="310896" cy="223759"/>
           </a:xfrm>
           <a:prstGeom prst="rect">
             <a:avLst/>
@@ -12810,8 +12869,8 @@
         </p:nvSpPr>
         <p:spPr>
           <a:xfrm>
-            <a:off x="6565392" y="5064700"/>
-            <a:ext cx="1920240" cy="245274"/>
+            <a:off x="6565392" y="4806517"/>
+            <a:ext cx="1920240" cy="223759"/>
           </a:xfrm>
           <a:prstGeom prst="rect">
             <a:avLst/>
@@ -12849,8 +12908,8 @@
         </p:nvSpPr>
         <p:spPr>
           <a:xfrm>
-            <a:off x="8558784" y="5126019"/>
-            <a:ext cx="285036" cy="122637"/>
+            <a:off x="8558784" y="4862456"/>
+            <a:ext cx="285036" cy="111880"/>
           </a:xfrm>
           <a:prstGeom prst="rect">
             <a:avLst/>
@@ -12869,8 +12928,8 @@
         </p:nvSpPr>
         <p:spPr>
           <a:xfrm>
-            <a:off x="9482328" y="5064700"/>
-            <a:ext cx="676656" cy="245274"/>
+            <a:off x="9482328" y="4806517"/>
+            <a:ext cx="676656" cy="223759"/>
           </a:xfrm>
           <a:prstGeom prst="rect">
             <a:avLst/>
@@ -12908,8 +12967,8 @@
         </p:nvSpPr>
         <p:spPr>
           <a:xfrm>
-            <a:off x="10158984" y="5064700"/>
-            <a:ext cx="1188720" cy="245274"/>
+            <a:off x="10158984" y="4806517"/>
+            <a:ext cx="1188720" cy="223759"/>
           </a:xfrm>
           <a:prstGeom prst="rect">
             <a:avLst/>
@@ -12947,8 +13006,8 @@
         </p:nvSpPr>
         <p:spPr>
           <a:xfrm>
-            <a:off x="6208776" y="5309975"/>
-            <a:ext cx="310896" cy="245274"/>
+            <a:off x="6208776" y="5030276"/>
+            <a:ext cx="310896" cy="223759"/>
           </a:xfrm>
           <a:prstGeom prst="rect">
             <a:avLst/>
@@ -12986,8 +13045,8 @@
         </p:nvSpPr>
         <p:spPr>
           <a:xfrm>
-            <a:off x="6565392" y="5309975"/>
-            <a:ext cx="1920240" cy="245274"/>
+            <a:off x="6565392" y="5030276"/>
+            <a:ext cx="1920240" cy="223759"/>
           </a:xfrm>
           <a:prstGeom prst="rect">
             <a:avLst/>
@@ -13025,8 +13084,8 @@
         </p:nvSpPr>
         <p:spPr>
           <a:xfrm>
-            <a:off x="8558784" y="5371293"/>
-            <a:ext cx="197263" cy="122637"/>
+            <a:off x="8558784" y="5086216"/>
+            <a:ext cx="197263" cy="111880"/>
           </a:xfrm>
           <a:prstGeom prst="rect">
             <a:avLst/>
@@ -13045,8 +13104,8 @@
         </p:nvSpPr>
         <p:spPr>
           <a:xfrm>
-            <a:off x="9482328" y="5309975"/>
-            <a:ext cx="676656" cy="245274"/>
+            <a:off x="9482328" y="5030276"/>
+            <a:ext cx="676656" cy="223759"/>
           </a:xfrm>
           <a:prstGeom prst="rect">
             <a:avLst/>
@@ -13084,8 +13143,8 @@
         </p:nvSpPr>
         <p:spPr>
           <a:xfrm>
-            <a:off x="10158984" y="5309975"/>
-            <a:ext cx="1188720" cy="245274"/>
+            <a:off x="10158984" y="5030276"/>
+            <a:ext cx="1188720" cy="223759"/>
           </a:xfrm>
           <a:prstGeom prst="rect">
             <a:avLst/>
@@ -13123,8 +13182,8 @@
         </p:nvSpPr>
         <p:spPr>
           <a:xfrm>
-            <a:off x="6208776" y="5555249"/>
-            <a:ext cx="310896" cy="245274"/>
+            <a:off x="6208776" y="5254035"/>
+            <a:ext cx="310896" cy="223759"/>
           </a:xfrm>
           <a:prstGeom prst="rect">
             <a:avLst/>
@@ -13162,8 +13221,8 @@
         </p:nvSpPr>
         <p:spPr>
           <a:xfrm>
-            <a:off x="6565392" y="5555249"/>
-            <a:ext cx="1920240" cy="245274"/>
+            <a:off x="6565392" y="5254035"/>
+            <a:ext cx="1920240" cy="223759"/>
           </a:xfrm>
           <a:prstGeom prst="rect">
             <a:avLst/>
@@ -13201,8 +13260,8 @@
         </p:nvSpPr>
         <p:spPr>
           <a:xfrm>
-            <a:off x="8558784" y="5616568"/>
-            <a:ext cx="144780" cy="122637"/>
+            <a:off x="8558784" y="5309975"/>
+            <a:ext cx="144780" cy="111880"/>
           </a:xfrm>
           <a:prstGeom prst="rect">
             <a:avLst/>
@@ -13221,8 +13280,8 @@
         </p:nvSpPr>
         <p:spPr>
           <a:xfrm>
-            <a:off x="9482328" y="5555249"/>
-            <a:ext cx="676656" cy="245274"/>
+            <a:off x="9482328" y="5254035"/>
+            <a:ext cx="676656" cy="223759"/>
           </a:xfrm>
           <a:prstGeom prst="rect">
             <a:avLst/>
@@ -13260,8 +13319,8 @@
         </p:nvSpPr>
         <p:spPr>
           <a:xfrm>
-            <a:off x="10158984" y="5555249"/>
-            <a:ext cx="1188720" cy="245274"/>
+            <a:off x="10158984" y="5254035"/>
+            <a:ext cx="1188720" cy="223759"/>
           </a:xfrm>
           <a:prstGeom prst="rect">
             <a:avLst/>
@@ -13299,8 +13358,8 @@
         </p:nvSpPr>
         <p:spPr>
           <a:xfrm>
-            <a:off x="6208776" y="5800523"/>
-            <a:ext cx="310896" cy="245274"/>
+            <a:off x="6208776" y="5477794"/>
+            <a:ext cx="310896" cy="223759"/>
           </a:xfrm>
           <a:prstGeom prst="rect">
             <a:avLst/>
@@ -13338,8 +13397,8 @@
         </p:nvSpPr>
         <p:spPr>
           <a:xfrm>
-            <a:off x="6565392" y="5800523"/>
-            <a:ext cx="1920240" cy="245274"/>
+            <a:off x="6565392" y="5477794"/>
+            <a:ext cx="1920240" cy="223759"/>
           </a:xfrm>
           <a:prstGeom prst="rect">
             <a:avLst/>
@@ -13377,8 +13436,8 @@
         </p:nvSpPr>
         <p:spPr>
           <a:xfrm>
-            <a:off x="8558784" y="5861842"/>
-            <a:ext cx="47053" cy="122637"/>
+            <a:off x="8558784" y="5533734"/>
+            <a:ext cx="47053" cy="111880"/>
           </a:xfrm>
           <a:prstGeom prst="rect">
             <a:avLst/>
@@ -13397,8 +13456,8 @@
         </p:nvSpPr>
         <p:spPr>
           <a:xfrm>
-            <a:off x="9482328" y="5800523"/>
-            <a:ext cx="676656" cy="245274"/>
+            <a:off x="9482328" y="5477794"/>
+            <a:ext cx="676656" cy="223759"/>
           </a:xfrm>
           <a:prstGeom prst="rect">
             <a:avLst/>
@@ -13436,8 +13495,8 @@
         </p:nvSpPr>
         <p:spPr>
           <a:xfrm>
-            <a:off x="10158984" y="5800523"/>
-            <a:ext cx="1188720" cy="245274"/>
+            <a:off x="10158984" y="5477794"/>
+            <a:ext cx="1188720" cy="223759"/>
           </a:xfrm>
           <a:prstGeom prst="rect">
             <a:avLst/>
@@ -13632,7 +13691,7 @@
         <p:spPr>
           <a:xfrm>
             <a:off x="3524446" y="2121408"/>
-            <a:ext cx="14630" cy="4169664"/>
+            <a:ext cx="14630" cy="3803904"/>
           </a:xfrm>
           <a:prstGeom prst="rect">
             <a:avLst/>
@@ -13652,7 +13711,7 @@
         <p:spPr>
           <a:xfrm>
             <a:off x="9074854" y="2121408"/>
-            <a:ext cx="14630" cy="4169664"/>
+            <a:ext cx="14630" cy="3803904"/>
           </a:xfrm>
           <a:prstGeom prst="rect">
             <a:avLst/>
@@ -13672,7 +13731,7 @@
         <p:spPr>
           <a:xfrm>
             <a:off x="6085332" y="2121408"/>
-            <a:ext cx="10973" cy="4169664"/>
+            <a:ext cx="10973" cy="3803904"/>
           </a:xfrm>
           <a:prstGeom prst="rect">
             <a:avLst/>
@@ -13682,6 +13741,65 @@
           </a:solidFill>
           <a:ln/>
         </p:spPr>
+      </p:sp>
+      <p:sp>
+        <p:nvSpPr>
+          <p:cNvPr id="184" name="Shape 181"/>
+          <p:cNvSpPr/>
+          <p:nvPr/>
+        </p:nvSpPr>
+        <p:spPr>
+          <a:xfrm>
+            <a:off x="457200" y="6126480"/>
+            <a:ext cx="11274552" cy="371856"/>
+          </a:xfrm>
+          <a:prstGeom prst="rect">
+            <a:avLst/>
+          </a:prstGeom>
+          <a:solidFill>
+            <a:srgbClr val="EDF4FA"/>
+          </a:solidFill>
+          <a:ln/>
+        </p:spPr>
+      </p:sp>
+      <p:sp>
+        <p:nvSpPr>
+          <p:cNvPr id="185" name="Text 182"/>
+          <p:cNvSpPr txBox="1"/>
+          <p:nvPr/>
+        </p:nvSpPr>
+        <p:spPr>
+          <a:xfrm>
+            <a:off x="658368" y="6144768"/>
+            <a:ext cx="10927080" cy="335280"/>
+          </a:xfrm>
+          <a:prstGeom prst="rect">
+            <a:avLst/>
+          </a:prstGeom>
+          <a:noFill/>
+          <a:ln/>
+        </p:spPr>
+        <p:txBody>
+          <a:bodyPr wrap="square" lIns="0" tIns="0" rIns="0" bIns="0" rtlCol="0" anchor="ctr"/>
+          <a:lstStyle/>
+          <a:p>
+            <a:pPr indent="0" marL="0">
+              <a:buNone/>
+            </a:pPr>
+            <a:r>
+              <a:rPr lang="en-US" sz="1600" b="1" dirty="0">
+                <a:solidFill>
+                  <a:srgbClr val="0B2C4A"/>
+                </a:solidFill>
+                <a:latin typeface="Inter" pitchFamily="34" charset="0"/>
+                <a:ea typeface="Inter" pitchFamily="34" charset="-122"/>
+                <a:cs typeface="Inter" pitchFamily="34" charset="-120"/>
+              </a:rPr>
+              <a:t>17 of 33 stores at or above the 57.8% group.</a:t>
+            </a:r>
+            <a:endParaRPr lang="en-US" sz="1600" dirty="0"/>
+          </a:p>
+        </p:txBody>
       </p:sp>
     </p:spTree>
   </p:cSld>
@@ -13822,7 +13940,7 @@
         <p:spPr>
           <a:xfrm>
             <a:off x="457200" y="1207008"/>
-            <a:ext cx="11274552" cy="5148072"/>
+            <a:ext cx="11274552" cy="4782312"/>
           </a:xfrm>
           <a:prstGeom prst="rect">
             <a:avLst/>
@@ -13999,7 +14117,7 @@
         <p:spPr>
           <a:xfrm>
             <a:off x="658368" y="2121408"/>
-            <a:ext cx="310896" cy="297833"/>
+            <a:ext cx="310896" cy="271707"/>
           </a:xfrm>
           <a:prstGeom prst="rect">
             <a:avLst/>
@@ -14038,7 +14156,7 @@
         <p:spPr>
           <a:xfrm>
             <a:off x="1014984" y="2121408"/>
-            <a:ext cx="1920240" cy="297833"/>
+            <a:ext cx="1920240" cy="271707"/>
           </a:xfrm>
           <a:prstGeom prst="rect">
             <a:avLst/>
@@ -14076,8 +14194,8 @@
         </p:nvSpPr>
         <p:spPr>
           <a:xfrm>
-            <a:off x="3008376" y="2195866"/>
-            <a:ext cx="868680" cy="148917"/>
+            <a:off x="3008376" y="2189335"/>
+            <a:ext cx="868680" cy="135854"/>
           </a:xfrm>
           <a:prstGeom prst="rect">
             <a:avLst/>
@@ -14097,7 +14215,7 @@
         <p:spPr>
           <a:xfrm>
             <a:off x="3931920" y="2121408"/>
-            <a:ext cx="676656" cy="297833"/>
+            <a:ext cx="676656" cy="271707"/>
           </a:xfrm>
           <a:prstGeom prst="rect">
             <a:avLst/>
@@ -14136,7 +14254,7 @@
         <p:spPr>
           <a:xfrm>
             <a:off x="4608576" y="2121408"/>
-            <a:ext cx="1188720" cy="297833"/>
+            <a:ext cx="1188720" cy="271707"/>
           </a:xfrm>
           <a:prstGeom prst="rect">
             <a:avLst/>
@@ -14174,8 +14292,8 @@
         </p:nvSpPr>
         <p:spPr>
           <a:xfrm>
-            <a:off x="658368" y="2419241"/>
-            <a:ext cx="310896" cy="297833"/>
+            <a:off x="658368" y="2393115"/>
+            <a:ext cx="310896" cy="271707"/>
           </a:xfrm>
           <a:prstGeom prst="rect">
             <a:avLst/>
@@ -14213,8 +14331,8 @@
         </p:nvSpPr>
         <p:spPr>
           <a:xfrm>
-            <a:off x="1014984" y="2419241"/>
-            <a:ext cx="1920240" cy="297833"/>
+            <a:off x="1014984" y="2393115"/>
+            <a:ext cx="1920240" cy="271707"/>
           </a:xfrm>
           <a:prstGeom prst="rect">
             <a:avLst/>
@@ -14252,8 +14370,8 @@
         </p:nvSpPr>
         <p:spPr>
           <a:xfrm>
-            <a:off x="3008376" y="2493699"/>
-            <a:ext cx="862965" cy="148917"/>
+            <a:off x="3008376" y="2461042"/>
+            <a:ext cx="862965" cy="135854"/>
           </a:xfrm>
           <a:prstGeom prst="rect">
             <a:avLst/>
@@ -14272,8 +14390,8 @@
         </p:nvSpPr>
         <p:spPr>
           <a:xfrm>
-            <a:off x="3931920" y="2419241"/>
-            <a:ext cx="676656" cy="297833"/>
+            <a:off x="3931920" y="2393115"/>
+            <a:ext cx="676656" cy="271707"/>
           </a:xfrm>
           <a:prstGeom prst="rect">
             <a:avLst/>
@@ -14311,8 +14429,8 @@
         </p:nvSpPr>
         <p:spPr>
           <a:xfrm>
-            <a:off x="4608576" y="2419241"/>
-            <a:ext cx="1188720" cy="297833"/>
+            <a:off x="4608576" y="2393115"/>
+            <a:ext cx="1188720" cy="271707"/>
           </a:xfrm>
           <a:prstGeom prst="rect">
             <a:avLst/>
@@ -14350,8 +14468,8 @@
         </p:nvSpPr>
         <p:spPr>
           <a:xfrm>
-            <a:off x="658368" y="2717074"/>
-            <a:ext cx="310896" cy="297833"/>
+            <a:off x="658368" y="2664823"/>
+            <a:ext cx="310896" cy="271707"/>
           </a:xfrm>
           <a:prstGeom prst="rect">
             <a:avLst/>
@@ -14389,8 +14507,8 @@
         </p:nvSpPr>
         <p:spPr>
           <a:xfrm>
-            <a:off x="1014984" y="2717074"/>
-            <a:ext cx="1920240" cy="297833"/>
+            <a:off x="1014984" y="2664823"/>
+            <a:ext cx="1920240" cy="271707"/>
           </a:xfrm>
           <a:prstGeom prst="rect">
             <a:avLst/>
@@ -14428,8 +14546,8 @@
         </p:nvSpPr>
         <p:spPr>
           <a:xfrm>
-            <a:off x="3008376" y="2791533"/>
-            <a:ext cx="847725" cy="148917"/>
+            <a:off x="3008376" y="2732750"/>
+            <a:ext cx="847725" cy="135854"/>
           </a:xfrm>
           <a:prstGeom prst="rect">
             <a:avLst/>
@@ -14448,8 +14566,8 @@
         </p:nvSpPr>
         <p:spPr>
           <a:xfrm>
-            <a:off x="3931920" y="2717074"/>
-            <a:ext cx="676656" cy="297833"/>
+            <a:off x="3931920" y="2664823"/>
+            <a:ext cx="676656" cy="271707"/>
           </a:xfrm>
           <a:prstGeom prst="rect">
             <a:avLst/>
@@ -14487,8 +14605,8 @@
         </p:nvSpPr>
         <p:spPr>
           <a:xfrm>
-            <a:off x="4608576" y="2717074"/>
-            <a:ext cx="1188720" cy="297833"/>
+            <a:off x="4608576" y="2664823"/>
+            <a:ext cx="1188720" cy="271707"/>
           </a:xfrm>
           <a:prstGeom prst="rect">
             <a:avLst/>
@@ -14526,8 +14644,8 @@
         </p:nvSpPr>
         <p:spPr>
           <a:xfrm>
-            <a:off x="658368" y="3014907"/>
-            <a:ext cx="310896" cy="297833"/>
+            <a:off x="658368" y="2936530"/>
+            <a:ext cx="310896" cy="271707"/>
           </a:xfrm>
           <a:prstGeom prst="rect">
             <a:avLst/>
@@ -14565,8 +14683,8 @@
         </p:nvSpPr>
         <p:spPr>
           <a:xfrm>
-            <a:off x="1014984" y="3014907"/>
-            <a:ext cx="1920240" cy="297833"/>
+            <a:off x="1014984" y="2936530"/>
+            <a:ext cx="1920240" cy="271707"/>
           </a:xfrm>
           <a:prstGeom prst="rect">
             <a:avLst/>
@@ -14604,8 +14722,8 @@
         </p:nvSpPr>
         <p:spPr>
           <a:xfrm>
-            <a:off x="3008376" y="3089366"/>
-            <a:ext cx="845820" cy="148917"/>
+            <a:off x="3008376" y="3004457"/>
+            <a:ext cx="845820" cy="135854"/>
           </a:xfrm>
           <a:prstGeom prst="rect">
             <a:avLst/>
@@ -14624,8 +14742,8 @@
         </p:nvSpPr>
         <p:spPr>
           <a:xfrm>
-            <a:off x="3931920" y="3014907"/>
-            <a:ext cx="676656" cy="297833"/>
+            <a:off x="3931920" y="2936530"/>
+            <a:ext cx="676656" cy="271707"/>
           </a:xfrm>
           <a:prstGeom prst="rect">
             <a:avLst/>
@@ -14663,8 +14781,8 @@
         </p:nvSpPr>
         <p:spPr>
           <a:xfrm>
-            <a:off x="4608576" y="3014907"/>
-            <a:ext cx="1188720" cy="297833"/>
+            <a:off x="4608576" y="2936530"/>
+            <a:ext cx="1188720" cy="271707"/>
           </a:xfrm>
           <a:prstGeom prst="rect">
             <a:avLst/>
@@ -14702,8 +14820,8 @@
         </p:nvSpPr>
         <p:spPr>
           <a:xfrm>
-            <a:off x="658368" y="3312741"/>
-            <a:ext cx="310896" cy="297833"/>
+            <a:off x="658368" y="3208238"/>
+            <a:ext cx="310896" cy="271707"/>
           </a:xfrm>
           <a:prstGeom prst="rect">
             <a:avLst/>
@@ -14741,8 +14859,8 @@
         </p:nvSpPr>
         <p:spPr>
           <a:xfrm>
-            <a:off x="1014984" y="3312741"/>
-            <a:ext cx="1920240" cy="297833"/>
+            <a:off x="1014984" y="3208238"/>
+            <a:ext cx="1920240" cy="271707"/>
           </a:xfrm>
           <a:prstGeom prst="rect">
             <a:avLst/>
@@ -14780,8 +14898,8 @@
         </p:nvSpPr>
         <p:spPr>
           <a:xfrm>
-            <a:off x="3008376" y="3387199"/>
-            <a:ext cx="755333" cy="148917"/>
+            <a:off x="3008376" y="3276165"/>
+            <a:ext cx="755333" cy="135854"/>
           </a:xfrm>
           <a:prstGeom prst="rect">
             <a:avLst/>
@@ -14800,8 +14918,8 @@
         </p:nvSpPr>
         <p:spPr>
           <a:xfrm>
-            <a:off x="3931920" y="3312741"/>
-            <a:ext cx="676656" cy="297833"/>
+            <a:off x="3931920" y="3208238"/>
+            <a:ext cx="676656" cy="271707"/>
           </a:xfrm>
           <a:prstGeom prst="rect">
             <a:avLst/>
@@ -14839,8 +14957,8 @@
         </p:nvSpPr>
         <p:spPr>
           <a:xfrm>
-            <a:off x="4608576" y="3312741"/>
-            <a:ext cx="1188720" cy="297833"/>
+            <a:off x="4608576" y="3208238"/>
+            <a:ext cx="1188720" cy="271707"/>
           </a:xfrm>
           <a:prstGeom prst="rect">
             <a:avLst/>
@@ -14878,8 +14996,8 @@
         </p:nvSpPr>
         <p:spPr>
           <a:xfrm>
-            <a:off x="658368" y="3610574"/>
-            <a:ext cx="310896" cy="297833"/>
+            <a:off x="658368" y="3479945"/>
+            <a:ext cx="310896" cy="271707"/>
           </a:xfrm>
           <a:prstGeom prst="rect">
             <a:avLst/>
@@ -14917,8 +15035,8 @@
         </p:nvSpPr>
         <p:spPr>
           <a:xfrm>
-            <a:off x="1014984" y="3610574"/>
-            <a:ext cx="1920240" cy="297833"/>
+            <a:off x="1014984" y="3479945"/>
+            <a:ext cx="1920240" cy="271707"/>
           </a:xfrm>
           <a:prstGeom prst="rect">
             <a:avLst/>
@@ -14956,8 +15074,8 @@
         </p:nvSpPr>
         <p:spPr>
           <a:xfrm>
-            <a:off x="3008376" y="3685032"/>
-            <a:ext cx="687705" cy="148917"/>
+            <a:off x="3008376" y="3547872"/>
+            <a:ext cx="687705" cy="135854"/>
           </a:xfrm>
           <a:prstGeom prst="rect">
             <a:avLst/>
@@ -14976,8 +15094,8 @@
         </p:nvSpPr>
         <p:spPr>
           <a:xfrm>
-            <a:off x="3931920" y="3610574"/>
-            <a:ext cx="676656" cy="297833"/>
+            <a:off x="3931920" y="3479945"/>
+            <a:ext cx="676656" cy="271707"/>
           </a:xfrm>
           <a:prstGeom prst="rect">
             <a:avLst/>
@@ -15015,8 +15133,8 @@
         </p:nvSpPr>
         <p:spPr>
           <a:xfrm>
-            <a:off x="4608576" y="3610574"/>
-            <a:ext cx="1188720" cy="297833"/>
+            <a:off x="4608576" y="3479945"/>
+            <a:ext cx="1188720" cy="271707"/>
           </a:xfrm>
           <a:prstGeom prst="rect">
             <a:avLst/>
@@ -15054,8 +15172,8 @@
         </p:nvSpPr>
         <p:spPr>
           <a:xfrm>
-            <a:off x="658368" y="3908407"/>
-            <a:ext cx="310896" cy="297833"/>
+            <a:off x="658368" y="3751653"/>
+            <a:ext cx="310896" cy="271707"/>
           </a:xfrm>
           <a:prstGeom prst="rect">
             <a:avLst/>
@@ -15093,8 +15211,8 @@
         </p:nvSpPr>
         <p:spPr>
           <a:xfrm>
-            <a:off x="1014984" y="3908407"/>
-            <a:ext cx="1920240" cy="297833"/>
+            <a:off x="1014984" y="3751653"/>
+            <a:ext cx="1920240" cy="271707"/>
           </a:xfrm>
           <a:prstGeom prst="rect">
             <a:avLst/>
@@ -15132,8 +15250,8 @@
         </p:nvSpPr>
         <p:spPr>
           <a:xfrm>
-            <a:off x="3008376" y="3982865"/>
-            <a:ext cx="666750" cy="148917"/>
+            <a:off x="3008376" y="3819579"/>
+            <a:ext cx="666750" cy="135854"/>
           </a:xfrm>
           <a:prstGeom prst="rect">
             <a:avLst/>
@@ -15152,8 +15270,8 @@
         </p:nvSpPr>
         <p:spPr>
           <a:xfrm>
-            <a:off x="3931920" y="3908407"/>
-            <a:ext cx="676656" cy="297833"/>
+            <a:off x="3931920" y="3751653"/>
+            <a:ext cx="676656" cy="271707"/>
           </a:xfrm>
           <a:prstGeom prst="rect">
             <a:avLst/>
@@ -15191,8 +15309,8 @@
         </p:nvSpPr>
         <p:spPr>
           <a:xfrm>
-            <a:off x="4608576" y="3908407"/>
-            <a:ext cx="1188720" cy="297833"/>
+            <a:off x="4608576" y="3751653"/>
+            <a:ext cx="1188720" cy="271707"/>
           </a:xfrm>
           <a:prstGeom prst="rect">
             <a:avLst/>
@@ -15230,8 +15348,8 @@
         </p:nvSpPr>
         <p:spPr>
           <a:xfrm>
-            <a:off x="658368" y="4206240"/>
-            <a:ext cx="310896" cy="297833"/>
+            <a:off x="658368" y="4023360"/>
+            <a:ext cx="310896" cy="271707"/>
           </a:xfrm>
           <a:prstGeom prst="rect">
             <a:avLst/>
@@ -15269,8 +15387,8 @@
         </p:nvSpPr>
         <p:spPr>
           <a:xfrm>
-            <a:off x="1014984" y="4206240"/>
-            <a:ext cx="1920240" cy="297833"/>
+            <a:off x="1014984" y="4023360"/>
+            <a:ext cx="1920240" cy="271707"/>
           </a:xfrm>
           <a:prstGeom prst="rect">
             <a:avLst/>
@@ -15308,8 +15426,8 @@
         </p:nvSpPr>
         <p:spPr>
           <a:xfrm>
-            <a:off x="3008376" y="4280698"/>
-            <a:ext cx="658178" cy="148917"/>
+            <a:off x="3008376" y="4091287"/>
+            <a:ext cx="658178" cy="135854"/>
           </a:xfrm>
           <a:prstGeom prst="rect">
             <a:avLst/>
@@ -15328,8 +15446,8 @@
         </p:nvSpPr>
         <p:spPr>
           <a:xfrm>
-            <a:off x="3931920" y="4206240"/>
-            <a:ext cx="676656" cy="297833"/>
+            <a:off x="3931920" y="4023360"/>
+            <a:ext cx="676656" cy="271707"/>
           </a:xfrm>
           <a:prstGeom prst="rect">
             <a:avLst/>
@@ -15367,8 +15485,8 @@
         </p:nvSpPr>
         <p:spPr>
           <a:xfrm>
-            <a:off x="4608576" y="4206240"/>
-            <a:ext cx="1188720" cy="297833"/>
+            <a:off x="4608576" y="4023360"/>
+            <a:ext cx="1188720" cy="271707"/>
           </a:xfrm>
           <a:prstGeom prst="rect">
             <a:avLst/>
@@ -15406,8 +15524,8 @@
         </p:nvSpPr>
         <p:spPr>
           <a:xfrm>
-            <a:off x="658368" y="4504073"/>
-            <a:ext cx="310896" cy="297833"/>
+            <a:off x="658368" y="4295067"/>
+            <a:ext cx="310896" cy="271707"/>
           </a:xfrm>
           <a:prstGeom prst="rect">
             <a:avLst/>
@@ -15445,8 +15563,8 @@
         </p:nvSpPr>
         <p:spPr>
           <a:xfrm>
-            <a:off x="1014984" y="4504073"/>
-            <a:ext cx="1920240" cy="297833"/>
+            <a:off x="1014984" y="4295067"/>
+            <a:ext cx="1920240" cy="271707"/>
           </a:xfrm>
           <a:prstGeom prst="rect">
             <a:avLst/>
@@ -15484,8 +15602,8 @@
         </p:nvSpPr>
         <p:spPr>
           <a:xfrm>
-            <a:off x="3008376" y="4578531"/>
-            <a:ext cx="578168" cy="148917"/>
+            <a:off x="3008376" y="4362994"/>
+            <a:ext cx="578168" cy="135854"/>
           </a:xfrm>
           <a:prstGeom prst="rect">
             <a:avLst/>
@@ -15504,8 +15622,8 @@
         </p:nvSpPr>
         <p:spPr>
           <a:xfrm>
-            <a:off x="3931920" y="4504073"/>
-            <a:ext cx="676656" cy="297833"/>
+            <a:off x="3931920" y="4295067"/>
+            <a:ext cx="676656" cy="271707"/>
           </a:xfrm>
           <a:prstGeom prst="rect">
             <a:avLst/>
@@ -15543,8 +15661,8 @@
         </p:nvSpPr>
         <p:spPr>
           <a:xfrm>
-            <a:off x="4608576" y="4504073"/>
-            <a:ext cx="1188720" cy="297833"/>
+            <a:off x="4608576" y="4295067"/>
+            <a:ext cx="1188720" cy="271707"/>
           </a:xfrm>
           <a:prstGeom prst="rect">
             <a:avLst/>
@@ -15582,8 +15700,8 @@
         </p:nvSpPr>
         <p:spPr>
           <a:xfrm>
-            <a:off x="658368" y="4801906"/>
-            <a:ext cx="310896" cy="297833"/>
+            <a:off x="658368" y="4566775"/>
+            <a:ext cx="310896" cy="271707"/>
           </a:xfrm>
           <a:prstGeom prst="rect">
             <a:avLst/>
@@ -15621,8 +15739,8 @@
         </p:nvSpPr>
         <p:spPr>
           <a:xfrm>
-            <a:off x="1014984" y="4801906"/>
-            <a:ext cx="1920240" cy="297833"/>
+            <a:off x="1014984" y="4566775"/>
+            <a:ext cx="1920240" cy="271707"/>
           </a:xfrm>
           <a:prstGeom prst="rect">
             <a:avLst/>
@@ -15660,8 +15778,8 @@
         </p:nvSpPr>
         <p:spPr>
           <a:xfrm>
-            <a:off x="3008376" y="4876365"/>
-            <a:ext cx="571500" cy="148917"/>
+            <a:off x="3008376" y="4634702"/>
+            <a:ext cx="571500" cy="135854"/>
           </a:xfrm>
           <a:prstGeom prst="rect">
             <a:avLst/>
@@ -15680,8 +15798,8 @@
         </p:nvSpPr>
         <p:spPr>
           <a:xfrm>
-            <a:off x="3931920" y="4801906"/>
-            <a:ext cx="676656" cy="297833"/>
+            <a:off x="3931920" y="4566775"/>
+            <a:ext cx="676656" cy="271707"/>
           </a:xfrm>
           <a:prstGeom prst="rect">
             <a:avLst/>
@@ -15719,8 +15837,8 @@
         </p:nvSpPr>
         <p:spPr>
           <a:xfrm>
-            <a:off x="4608576" y="4801906"/>
-            <a:ext cx="1188720" cy="297833"/>
+            <a:off x="4608576" y="4566775"/>
+            <a:ext cx="1188720" cy="271707"/>
           </a:xfrm>
           <a:prstGeom prst="rect">
             <a:avLst/>
@@ -15758,8 +15876,8 @@
         </p:nvSpPr>
         <p:spPr>
           <a:xfrm>
-            <a:off x="658368" y="5099739"/>
-            <a:ext cx="310896" cy="297833"/>
+            <a:off x="658368" y="4838482"/>
+            <a:ext cx="310896" cy="271707"/>
           </a:xfrm>
           <a:prstGeom prst="rect">
             <a:avLst/>
@@ -15797,8 +15915,8 @@
         </p:nvSpPr>
         <p:spPr>
           <a:xfrm>
-            <a:off x="1014984" y="5099739"/>
-            <a:ext cx="1920240" cy="297833"/>
+            <a:off x="1014984" y="4838482"/>
+            <a:ext cx="1920240" cy="271707"/>
           </a:xfrm>
           <a:prstGeom prst="rect">
             <a:avLst/>
@@ -15836,8 +15954,8 @@
         </p:nvSpPr>
         <p:spPr>
           <a:xfrm>
-            <a:off x="3008376" y="5174198"/>
-            <a:ext cx="476250" cy="148917"/>
+            <a:off x="3008376" y="4906409"/>
+            <a:ext cx="476250" cy="135854"/>
           </a:xfrm>
           <a:prstGeom prst="rect">
             <a:avLst/>
@@ -15856,8 +15974,8 @@
         </p:nvSpPr>
         <p:spPr>
           <a:xfrm>
-            <a:off x="3931920" y="5099739"/>
-            <a:ext cx="676656" cy="297833"/>
+            <a:off x="3931920" y="4838482"/>
+            <a:ext cx="676656" cy="271707"/>
           </a:xfrm>
           <a:prstGeom prst="rect">
             <a:avLst/>
@@ -15895,8 +16013,8 @@
         </p:nvSpPr>
         <p:spPr>
           <a:xfrm>
-            <a:off x="4608576" y="5099739"/>
-            <a:ext cx="1188720" cy="297833"/>
+            <a:off x="4608576" y="4838482"/>
+            <a:ext cx="1188720" cy="271707"/>
           </a:xfrm>
           <a:prstGeom prst="rect">
             <a:avLst/>
@@ -15934,8 +16052,8 @@
         </p:nvSpPr>
         <p:spPr>
           <a:xfrm>
-            <a:off x="658368" y="5397573"/>
-            <a:ext cx="310896" cy="297833"/>
+            <a:off x="658368" y="5110190"/>
+            <a:ext cx="310896" cy="271707"/>
           </a:xfrm>
           <a:prstGeom prst="rect">
             <a:avLst/>
@@ -15973,8 +16091,8 @@
         </p:nvSpPr>
         <p:spPr>
           <a:xfrm>
-            <a:off x="1014984" y="5397573"/>
-            <a:ext cx="1920240" cy="297833"/>
+            <a:off x="1014984" y="5110190"/>
+            <a:ext cx="1920240" cy="271707"/>
           </a:xfrm>
           <a:prstGeom prst="rect">
             <a:avLst/>
@@ -16012,8 +16130,8 @@
         </p:nvSpPr>
         <p:spPr>
           <a:xfrm>
-            <a:off x="3008376" y="5472031"/>
-            <a:ext cx="419100" cy="148917"/>
+            <a:off x="3008376" y="5178117"/>
+            <a:ext cx="419100" cy="135854"/>
           </a:xfrm>
           <a:prstGeom prst="rect">
             <a:avLst/>
@@ -16032,8 +16150,8 @@
         </p:nvSpPr>
         <p:spPr>
           <a:xfrm>
-            <a:off x="3931920" y="5397573"/>
-            <a:ext cx="676656" cy="297833"/>
+            <a:off x="3931920" y="5110190"/>
+            <a:ext cx="676656" cy="271707"/>
           </a:xfrm>
           <a:prstGeom prst="rect">
             <a:avLst/>
@@ -16071,8 +16189,8 @@
         </p:nvSpPr>
         <p:spPr>
           <a:xfrm>
-            <a:off x="4608576" y="5397573"/>
-            <a:ext cx="1188720" cy="297833"/>
+            <a:off x="4608576" y="5110190"/>
+            <a:ext cx="1188720" cy="271707"/>
           </a:xfrm>
           <a:prstGeom prst="rect">
             <a:avLst/>
@@ -16110,8 +16228,8 @@
         </p:nvSpPr>
         <p:spPr>
           <a:xfrm>
-            <a:off x="658368" y="5695406"/>
-            <a:ext cx="310896" cy="297833"/>
+            <a:off x="658368" y="5381897"/>
+            <a:ext cx="310896" cy="271707"/>
           </a:xfrm>
           <a:prstGeom prst="rect">
             <a:avLst/>
@@ -16149,8 +16267,8 @@
         </p:nvSpPr>
         <p:spPr>
           <a:xfrm>
-            <a:off x="1014984" y="5695406"/>
-            <a:ext cx="1920240" cy="297833"/>
+            <a:off x="1014984" y="5381897"/>
+            <a:ext cx="1920240" cy="271707"/>
           </a:xfrm>
           <a:prstGeom prst="rect">
             <a:avLst/>
@@ -16188,8 +16306,8 @@
         </p:nvSpPr>
         <p:spPr>
           <a:xfrm>
-            <a:off x="3008376" y="5769864"/>
-            <a:ext cx="416338" cy="148917"/>
+            <a:off x="3008376" y="5449824"/>
+            <a:ext cx="416338" cy="135854"/>
           </a:xfrm>
           <a:prstGeom prst="rect">
             <a:avLst/>
@@ -16208,8 +16326,8 @@
         </p:nvSpPr>
         <p:spPr>
           <a:xfrm>
-            <a:off x="3931920" y="5695406"/>
-            <a:ext cx="676656" cy="297833"/>
+            <a:off x="3931920" y="5381897"/>
+            <a:ext cx="676656" cy="271707"/>
           </a:xfrm>
           <a:prstGeom prst="rect">
             <a:avLst/>
@@ -16247,8 +16365,8 @@
         </p:nvSpPr>
         <p:spPr>
           <a:xfrm>
-            <a:off x="4608576" y="5695406"/>
-            <a:ext cx="1188720" cy="297833"/>
+            <a:off x="4608576" y="5381897"/>
+            <a:ext cx="1188720" cy="271707"/>
           </a:xfrm>
           <a:prstGeom prst="rect">
             <a:avLst/>
@@ -16286,8 +16404,8 @@
         </p:nvSpPr>
         <p:spPr>
           <a:xfrm>
-            <a:off x="658368" y="5993239"/>
-            <a:ext cx="310896" cy="297833"/>
+            <a:off x="658368" y="5653605"/>
+            <a:ext cx="310896" cy="271707"/>
           </a:xfrm>
           <a:prstGeom prst="rect">
             <a:avLst/>
@@ -16325,8 +16443,8 @@
         </p:nvSpPr>
         <p:spPr>
           <a:xfrm>
-            <a:off x="1014984" y="5993239"/>
-            <a:ext cx="1920240" cy="297833"/>
+            <a:off x="1014984" y="5653605"/>
+            <a:ext cx="1920240" cy="271707"/>
           </a:xfrm>
           <a:prstGeom prst="rect">
             <a:avLst/>
@@ -16364,8 +16482,8 @@
         </p:nvSpPr>
         <p:spPr>
           <a:xfrm>
-            <a:off x="3008376" y="6067697"/>
-            <a:ext cx="375285" cy="148917"/>
+            <a:off x="3008376" y="5721531"/>
+            <a:ext cx="375285" cy="135854"/>
           </a:xfrm>
           <a:prstGeom prst="rect">
             <a:avLst/>
@@ -16384,8 +16502,8 @@
         </p:nvSpPr>
         <p:spPr>
           <a:xfrm>
-            <a:off x="3931920" y="5993239"/>
-            <a:ext cx="676656" cy="297833"/>
+            <a:off x="3931920" y="5653605"/>
+            <a:ext cx="676656" cy="271707"/>
           </a:xfrm>
           <a:prstGeom prst="rect">
             <a:avLst/>
@@ -16423,8 +16541,8 @@
         </p:nvSpPr>
         <p:spPr>
           <a:xfrm>
-            <a:off x="4608576" y="5993239"/>
-            <a:ext cx="1188720" cy="297833"/>
+            <a:off x="4608576" y="5653605"/>
+            <a:ext cx="1188720" cy="271707"/>
           </a:xfrm>
           <a:prstGeom prst="rect">
             <a:avLst/>
@@ -16463,7 +16581,7 @@
         <p:spPr>
           <a:xfrm>
             <a:off x="6208776" y="2121408"/>
-            <a:ext cx="310896" cy="297833"/>
+            <a:ext cx="310896" cy="271707"/>
           </a:xfrm>
           <a:prstGeom prst="rect">
             <a:avLst/>
@@ -16502,7 +16620,7 @@
         <p:spPr>
           <a:xfrm>
             <a:off x="6565392" y="2121408"/>
-            <a:ext cx="1920240" cy="297833"/>
+            <a:ext cx="1920240" cy="271707"/>
           </a:xfrm>
           <a:prstGeom prst="rect">
             <a:avLst/>
@@ -16540,8 +16658,8 @@
         </p:nvSpPr>
         <p:spPr>
           <a:xfrm>
-            <a:off x="8558784" y="2195866"/>
-            <a:ext cx="348615" cy="148917"/>
+            <a:off x="8558784" y="2189335"/>
+            <a:ext cx="348615" cy="135854"/>
           </a:xfrm>
           <a:prstGeom prst="rect">
             <a:avLst/>
@@ -16561,7 +16679,7 @@
         <p:spPr>
           <a:xfrm>
             <a:off x="9482328" y="2121408"/>
-            <a:ext cx="676656" cy="297833"/>
+            <a:ext cx="676656" cy="271707"/>
           </a:xfrm>
           <a:prstGeom prst="rect">
             <a:avLst/>
@@ -16600,7 +16718,7 @@
         <p:spPr>
           <a:xfrm>
             <a:off x="10158984" y="2121408"/>
-            <a:ext cx="1188720" cy="297833"/>
+            <a:ext cx="1188720" cy="271707"/>
           </a:xfrm>
           <a:prstGeom prst="rect">
             <a:avLst/>
@@ -16638,8 +16756,8 @@
         </p:nvSpPr>
         <p:spPr>
           <a:xfrm>
-            <a:off x="6208776" y="2419241"/>
-            <a:ext cx="310896" cy="297833"/>
+            <a:off x="6208776" y="2393115"/>
+            <a:ext cx="310896" cy="271707"/>
           </a:xfrm>
           <a:prstGeom prst="rect">
             <a:avLst/>
@@ -16677,8 +16795,8 @@
         </p:nvSpPr>
         <p:spPr>
           <a:xfrm>
-            <a:off x="6565392" y="2419241"/>
-            <a:ext cx="1920240" cy="297833"/>
+            <a:off x="6565392" y="2393115"/>
+            <a:ext cx="1920240" cy="271707"/>
           </a:xfrm>
           <a:prstGeom prst="rect">
             <a:avLst/>
@@ -16716,8 +16834,8 @@
         </p:nvSpPr>
         <p:spPr>
           <a:xfrm>
-            <a:off x="8558784" y="2493699"/>
-            <a:ext cx="332422" cy="148917"/>
+            <a:off x="8558784" y="2461042"/>
+            <a:ext cx="332422" cy="135854"/>
           </a:xfrm>
           <a:prstGeom prst="rect">
             <a:avLst/>
@@ -16736,8 +16854,8 @@
         </p:nvSpPr>
         <p:spPr>
           <a:xfrm>
-            <a:off x="9482328" y="2419241"/>
-            <a:ext cx="676656" cy="297833"/>
+            <a:off x="9482328" y="2393115"/>
+            <a:ext cx="676656" cy="271707"/>
           </a:xfrm>
           <a:prstGeom prst="rect">
             <a:avLst/>
@@ -16775,8 +16893,8 @@
         </p:nvSpPr>
         <p:spPr>
           <a:xfrm>
-            <a:off x="10158984" y="2419241"/>
-            <a:ext cx="1188720" cy="297833"/>
+            <a:off x="10158984" y="2393115"/>
+            <a:ext cx="1188720" cy="271707"/>
           </a:xfrm>
           <a:prstGeom prst="rect">
             <a:avLst/>
@@ -16814,8 +16932,8 @@
         </p:nvSpPr>
         <p:spPr>
           <a:xfrm>
-            <a:off x="6208776" y="2717074"/>
-            <a:ext cx="310896" cy="297833"/>
+            <a:off x="6208776" y="2664823"/>
+            <a:ext cx="310896" cy="271707"/>
           </a:xfrm>
           <a:prstGeom prst="rect">
             <a:avLst/>
@@ -16853,8 +16971,8 @@
         </p:nvSpPr>
         <p:spPr>
           <a:xfrm>
-            <a:off x="6565392" y="2717074"/>
-            <a:ext cx="1920240" cy="297833"/>
+            <a:off x="6565392" y="2664823"/>
+            <a:ext cx="1920240" cy="271707"/>
           </a:xfrm>
           <a:prstGeom prst="rect">
             <a:avLst/>
@@ -16892,8 +17010,8 @@
         </p:nvSpPr>
         <p:spPr>
           <a:xfrm>
-            <a:off x="8558784" y="2791533"/>
-            <a:ext cx="329565" cy="148917"/>
+            <a:off x="8558784" y="2732750"/>
+            <a:ext cx="329565" cy="135854"/>
           </a:xfrm>
           <a:prstGeom prst="rect">
             <a:avLst/>
@@ -16912,8 +17030,8 @@
         </p:nvSpPr>
         <p:spPr>
           <a:xfrm>
-            <a:off x="9482328" y="2717074"/>
-            <a:ext cx="676656" cy="297833"/>
+            <a:off x="9482328" y="2664823"/>
+            <a:ext cx="676656" cy="271707"/>
           </a:xfrm>
           <a:prstGeom prst="rect">
             <a:avLst/>
@@ -16951,8 +17069,8 @@
         </p:nvSpPr>
         <p:spPr>
           <a:xfrm>
-            <a:off x="10158984" y="2717074"/>
-            <a:ext cx="1188720" cy="297833"/>
+            <a:off x="10158984" y="2664823"/>
+            <a:ext cx="1188720" cy="271707"/>
           </a:xfrm>
           <a:prstGeom prst="rect">
             <a:avLst/>
@@ -16990,8 +17108,8 @@
         </p:nvSpPr>
         <p:spPr>
           <a:xfrm>
-            <a:off x="6208776" y="3014907"/>
-            <a:ext cx="310896" cy="297833"/>
+            <a:off x="6208776" y="2936530"/>
+            <a:ext cx="310896" cy="271707"/>
           </a:xfrm>
           <a:prstGeom prst="rect">
             <a:avLst/>
@@ -17029,8 +17147,8 @@
         </p:nvSpPr>
         <p:spPr>
           <a:xfrm>
-            <a:off x="6565392" y="3014907"/>
-            <a:ext cx="1920240" cy="297833"/>
+            <a:off x="6565392" y="2936530"/>
+            <a:ext cx="1920240" cy="271707"/>
           </a:xfrm>
           <a:prstGeom prst="rect">
             <a:avLst/>
@@ -17068,8 +17186,8 @@
         </p:nvSpPr>
         <p:spPr>
           <a:xfrm>
-            <a:off x="8558784" y="3089366"/>
-            <a:ext cx="304800" cy="148917"/>
+            <a:off x="8558784" y="3004457"/>
+            <a:ext cx="304800" cy="135854"/>
           </a:xfrm>
           <a:prstGeom prst="rect">
             <a:avLst/>
@@ -17088,8 +17206,8 @@
         </p:nvSpPr>
         <p:spPr>
           <a:xfrm>
-            <a:off x="9482328" y="3014907"/>
-            <a:ext cx="676656" cy="297833"/>
+            <a:off x="9482328" y="2936530"/>
+            <a:ext cx="676656" cy="271707"/>
           </a:xfrm>
           <a:prstGeom prst="rect">
             <a:avLst/>
@@ -17127,8 +17245,8 @@
         </p:nvSpPr>
         <p:spPr>
           <a:xfrm>
-            <a:off x="10158984" y="3014907"/>
-            <a:ext cx="1188720" cy="297833"/>
+            <a:off x="10158984" y="2936530"/>
+            <a:ext cx="1188720" cy="271707"/>
           </a:xfrm>
           <a:prstGeom prst="rect">
             <a:avLst/>
@@ -17166,8 +17284,8 @@
         </p:nvSpPr>
         <p:spPr>
           <a:xfrm>
-            <a:off x="6208776" y="3312741"/>
-            <a:ext cx="310896" cy="297833"/>
+            <a:off x="6208776" y="3208238"/>
+            <a:ext cx="310896" cy="271707"/>
           </a:xfrm>
           <a:prstGeom prst="rect">
             <a:avLst/>
@@ -17205,8 +17323,8 @@
         </p:nvSpPr>
         <p:spPr>
           <a:xfrm>
-            <a:off x="6565392" y="3312741"/>
-            <a:ext cx="1920240" cy="297833"/>
+            <a:off x="6565392" y="3208238"/>
+            <a:ext cx="1920240" cy="271707"/>
           </a:xfrm>
           <a:prstGeom prst="rect">
             <a:avLst/>
@@ -17244,8 +17362,8 @@
         </p:nvSpPr>
         <p:spPr>
           <a:xfrm>
-            <a:off x="8558784" y="3387199"/>
-            <a:ext cx="297180" cy="148917"/>
+            <a:off x="8558784" y="3276165"/>
+            <a:ext cx="297180" cy="135854"/>
           </a:xfrm>
           <a:prstGeom prst="rect">
             <a:avLst/>
@@ -17264,8 +17382,8 @@
         </p:nvSpPr>
         <p:spPr>
           <a:xfrm>
-            <a:off x="9482328" y="3312741"/>
-            <a:ext cx="676656" cy="297833"/>
+            <a:off x="9482328" y="3208238"/>
+            <a:ext cx="676656" cy="271707"/>
           </a:xfrm>
           <a:prstGeom prst="rect">
             <a:avLst/>
@@ -17303,8 +17421,8 @@
         </p:nvSpPr>
         <p:spPr>
           <a:xfrm>
-            <a:off x="10158984" y="3312741"/>
-            <a:ext cx="1188720" cy="297833"/>
+            <a:off x="10158984" y="3208238"/>
+            <a:ext cx="1188720" cy="271707"/>
           </a:xfrm>
           <a:prstGeom prst="rect">
             <a:avLst/>
@@ -17342,8 +17460,8 @@
         </p:nvSpPr>
         <p:spPr>
           <a:xfrm>
-            <a:off x="6208776" y="3610574"/>
-            <a:ext cx="310896" cy="297833"/>
+            <a:off x="6208776" y="3479945"/>
+            <a:ext cx="310896" cy="271707"/>
           </a:xfrm>
           <a:prstGeom prst="rect">
             <a:avLst/>
@@ -17381,8 +17499,8 @@
         </p:nvSpPr>
         <p:spPr>
           <a:xfrm>
-            <a:off x="6565392" y="3610574"/>
-            <a:ext cx="1920240" cy="297833"/>
+            <a:off x="6565392" y="3479945"/>
+            <a:ext cx="1920240" cy="271707"/>
           </a:xfrm>
           <a:prstGeom prst="rect">
             <a:avLst/>
@@ -17420,8 +17538,8 @@
         </p:nvSpPr>
         <p:spPr>
           <a:xfrm>
-            <a:off x="8558784" y="3685032"/>
-            <a:ext cx="240983" cy="148917"/>
+            <a:off x="8558784" y="3547872"/>
+            <a:ext cx="240983" cy="135854"/>
           </a:xfrm>
           <a:prstGeom prst="rect">
             <a:avLst/>
@@ -17440,8 +17558,8 @@
         </p:nvSpPr>
         <p:spPr>
           <a:xfrm>
-            <a:off x="9482328" y="3610574"/>
-            <a:ext cx="676656" cy="297833"/>
+            <a:off x="9482328" y="3479945"/>
+            <a:ext cx="676656" cy="271707"/>
           </a:xfrm>
           <a:prstGeom prst="rect">
             <a:avLst/>
@@ -17479,8 +17597,8 @@
         </p:nvSpPr>
         <p:spPr>
           <a:xfrm>
-            <a:off x="10158984" y="3610574"/>
-            <a:ext cx="1188720" cy="297833"/>
+            <a:off x="10158984" y="3479945"/>
+            <a:ext cx="1188720" cy="271707"/>
           </a:xfrm>
           <a:prstGeom prst="rect">
             <a:avLst/>
@@ -17518,8 +17636,8 @@
         </p:nvSpPr>
         <p:spPr>
           <a:xfrm>
-            <a:off x="6208776" y="3908407"/>
-            <a:ext cx="310896" cy="297833"/>
+            <a:off x="6208776" y="3751653"/>
+            <a:ext cx="310896" cy="271707"/>
           </a:xfrm>
           <a:prstGeom prst="rect">
             <a:avLst/>
@@ -17557,8 +17675,8 @@
         </p:nvSpPr>
         <p:spPr>
           <a:xfrm>
-            <a:off x="6565392" y="3908407"/>
-            <a:ext cx="1920240" cy="297833"/>
+            <a:off x="6565392" y="3751653"/>
+            <a:ext cx="1920240" cy="271707"/>
           </a:xfrm>
           <a:prstGeom prst="rect">
             <a:avLst/>
@@ -17596,8 +17714,8 @@
         </p:nvSpPr>
         <p:spPr>
           <a:xfrm>
-            <a:off x="8558784" y="3982865"/>
-            <a:ext cx="222885" cy="148917"/>
+            <a:off x="8558784" y="3819579"/>
+            <a:ext cx="222885" cy="135854"/>
           </a:xfrm>
           <a:prstGeom prst="rect">
             <a:avLst/>
@@ -17616,8 +17734,8 @@
         </p:nvSpPr>
         <p:spPr>
           <a:xfrm>
-            <a:off x="9482328" y="3908407"/>
-            <a:ext cx="676656" cy="297833"/>
+            <a:off x="9482328" y="3751653"/>
+            <a:ext cx="676656" cy="271707"/>
           </a:xfrm>
           <a:prstGeom prst="rect">
             <a:avLst/>
@@ -17655,8 +17773,8 @@
         </p:nvSpPr>
         <p:spPr>
           <a:xfrm>
-            <a:off x="10158984" y="3908407"/>
-            <a:ext cx="1188720" cy="297833"/>
+            <a:off x="10158984" y="3751653"/>
+            <a:ext cx="1188720" cy="271707"/>
           </a:xfrm>
           <a:prstGeom prst="rect">
             <a:avLst/>
@@ -17694,8 +17812,8 @@
         </p:nvSpPr>
         <p:spPr>
           <a:xfrm>
-            <a:off x="6208776" y="4206240"/>
-            <a:ext cx="310896" cy="297833"/>
+            <a:off x="6208776" y="4023360"/>
+            <a:ext cx="310896" cy="271707"/>
           </a:xfrm>
           <a:prstGeom prst="rect">
             <a:avLst/>
@@ -17733,8 +17851,8 @@
         </p:nvSpPr>
         <p:spPr>
           <a:xfrm>
-            <a:off x="6565392" y="4206240"/>
-            <a:ext cx="1920240" cy="297833"/>
+            <a:off x="6565392" y="4023360"/>
+            <a:ext cx="1920240" cy="271707"/>
           </a:xfrm>
           <a:prstGeom prst="rect">
             <a:avLst/>
@@ -17772,8 +17890,8 @@
         </p:nvSpPr>
         <p:spPr>
           <a:xfrm>
-            <a:off x="8558784" y="4280698"/>
-            <a:ext cx="216217" cy="148917"/>
+            <a:off x="8558784" y="4091287"/>
+            <a:ext cx="216217" cy="135854"/>
           </a:xfrm>
           <a:prstGeom prst="rect">
             <a:avLst/>
@@ -17792,8 +17910,8 @@
         </p:nvSpPr>
         <p:spPr>
           <a:xfrm>
-            <a:off x="9482328" y="4206240"/>
-            <a:ext cx="676656" cy="297833"/>
+            <a:off x="9482328" y="4023360"/>
+            <a:ext cx="676656" cy="271707"/>
           </a:xfrm>
           <a:prstGeom prst="rect">
             <a:avLst/>
@@ -17831,8 +17949,8 @@
         </p:nvSpPr>
         <p:spPr>
           <a:xfrm>
-            <a:off x="10158984" y="4206240"/>
-            <a:ext cx="1188720" cy="297833"/>
+            <a:off x="10158984" y="4023360"/>
+            <a:ext cx="1188720" cy="271707"/>
           </a:xfrm>
           <a:prstGeom prst="rect">
             <a:avLst/>
@@ -17870,8 +17988,8 @@
         </p:nvSpPr>
         <p:spPr>
           <a:xfrm>
-            <a:off x="6208776" y="4504073"/>
-            <a:ext cx="310896" cy="297833"/>
+            <a:off x="6208776" y="4295067"/>
+            <a:ext cx="310896" cy="271707"/>
           </a:xfrm>
           <a:prstGeom prst="rect">
             <a:avLst/>
@@ -17909,8 +18027,8 @@
         </p:nvSpPr>
         <p:spPr>
           <a:xfrm>
-            <a:off x="6565392" y="4504073"/>
-            <a:ext cx="1920240" cy="297833"/>
+            <a:off x="6565392" y="4295067"/>
+            <a:ext cx="1920240" cy="271707"/>
           </a:xfrm>
           <a:prstGeom prst="rect">
             <a:avLst/>
@@ -17948,8 +18066,8 @@
         </p:nvSpPr>
         <p:spPr>
           <a:xfrm>
-            <a:off x="8558784" y="4578531"/>
-            <a:ext cx="216217" cy="148917"/>
+            <a:off x="8558784" y="4362994"/>
+            <a:ext cx="216217" cy="135854"/>
           </a:xfrm>
           <a:prstGeom prst="rect">
             <a:avLst/>
@@ -17968,8 +18086,8 @@
         </p:nvSpPr>
         <p:spPr>
           <a:xfrm>
-            <a:off x="9482328" y="4504073"/>
-            <a:ext cx="676656" cy="297833"/>
+            <a:off x="9482328" y="4295067"/>
+            <a:ext cx="676656" cy="271707"/>
           </a:xfrm>
           <a:prstGeom prst="rect">
             <a:avLst/>
@@ -18007,8 +18125,8 @@
         </p:nvSpPr>
         <p:spPr>
           <a:xfrm>
-            <a:off x="10158984" y="4504073"/>
-            <a:ext cx="1188720" cy="297833"/>
+            <a:off x="10158984" y="4295067"/>
+            <a:ext cx="1188720" cy="271707"/>
           </a:xfrm>
           <a:prstGeom prst="rect">
             <a:avLst/>
@@ -18046,8 +18164,8 @@
         </p:nvSpPr>
         <p:spPr>
           <a:xfrm>
-            <a:off x="6208776" y="4801906"/>
-            <a:ext cx="310896" cy="297833"/>
+            <a:off x="6208776" y="4566775"/>
+            <a:ext cx="310896" cy="271707"/>
           </a:xfrm>
           <a:prstGeom prst="rect">
             <a:avLst/>
@@ -18085,8 +18203,8 @@
         </p:nvSpPr>
         <p:spPr>
           <a:xfrm>
-            <a:off x="6565392" y="4801906"/>
-            <a:ext cx="1920240" cy="297833"/>
+            <a:off x="6565392" y="4566775"/>
+            <a:ext cx="1920240" cy="271707"/>
           </a:xfrm>
           <a:prstGeom prst="rect">
             <a:avLst/>
@@ -18124,8 +18242,8 @@
         </p:nvSpPr>
         <p:spPr>
           <a:xfrm>
-            <a:off x="8558784" y="4876365"/>
-            <a:ext cx="183833" cy="148917"/>
+            <a:off x="8558784" y="4634702"/>
+            <a:ext cx="183833" cy="135854"/>
           </a:xfrm>
           <a:prstGeom prst="rect">
             <a:avLst/>
@@ -18144,8 +18262,8 @@
         </p:nvSpPr>
         <p:spPr>
           <a:xfrm>
-            <a:off x="9482328" y="4801906"/>
-            <a:ext cx="676656" cy="297833"/>
+            <a:off x="9482328" y="4566775"/>
+            <a:ext cx="676656" cy="271707"/>
           </a:xfrm>
           <a:prstGeom prst="rect">
             <a:avLst/>
@@ -18183,8 +18301,8 @@
         </p:nvSpPr>
         <p:spPr>
           <a:xfrm>
-            <a:off x="10158984" y="4801906"/>
-            <a:ext cx="1188720" cy="297833"/>
+            <a:off x="10158984" y="4566775"/>
+            <a:ext cx="1188720" cy="271707"/>
           </a:xfrm>
           <a:prstGeom prst="rect">
             <a:avLst/>
@@ -18222,8 +18340,8 @@
         </p:nvSpPr>
         <p:spPr>
           <a:xfrm>
-            <a:off x="6208776" y="5099739"/>
-            <a:ext cx="310896" cy="297833"/>
+            <a:off x="6208776" y="4838482"/>
+            <a:ext cx="310896" cy="271707"/>
           </a:xfrm>
           <a:prstGeom prst="rect">
             <a:avLst/>
@@ -18261,8 +18379,8 @@
         </p:nvSpPr>
         <p:spPr>
           <a:xfrm>
-            <a:off x="6565392" y="5099739"/>
-            <a:ext cx="1920240" cy="297833"/>
+            <a:off x="6565392" y="4838482"/>
+            <a:ext cx="1920240" cy="271707"/>
           </a:xfrm>
           <a:prstGeom prst="rect">
             <a:avLst/>
@@ -18300,8 +18418,8 @@
         </p:nvSpPr>
         <p:spPr>
           <a:xfrm>
-            <a:off x="8558784" y="5174198"/>
-            <a:ext cx="150495" cy="148917"/>
+            <a:off x="8558784" y="4906409"/>
+            <a:ext cx="150495" cy="135854"/>
           </a:xfrm>
           <a:prstGeom prst="rect">
             <a:avLst/>
@@ -18320,8 +18438,8 @@
         </p:nvSpPr>
         <p:spPr>
           <a:xfrm>
-            <a:off x="9482328" y="5099739"/>
-            <a:ext cx="676656" cy="297833"/>
+            <a:off x="9482328" y="4838482"/>
+            <a:ext cx="676656" cy="271707"/>
           </a:xfrm>
           <a:prstGeom prst="rect">
             <a:avLst/>
@@ -18359,8 +18477,8 @@
         </p:nvSpPr>
         <p:spPr>
           <a:xfrm>
-            <a:off x="10158984" y="5099739"/>
-            <a:ext cx="1188720" cy="297833"/>
+            <a:off x="10158984" y="4838482"/>
+            <a:ext cx="1188720" cy="271707"/>
           </a:xfrm>
           <a:prstGeom prst="rect">
             <a:avLst/>
@@ -18398,8 +18516,8 @@
         </p:nvSpPr>
         <p:spPr>
           <a:xfrm>
-            <a:off x="6208776" y="5397573"/>
-            <a:ext cx="310896" cy="297833"/>
+            <a:off x="6208776" y="5110190"/>
+            <a:ext cx="310896" cy="271707"/>
           </a:xfrm>
           <a:prstGeom prst="rect">
             <a:avLst/>
@@ -18437,8 +18555,8 @@
         </p:nvSpPr>
         <p:spPr>
           <a:xfrm>
-            <a:off x="6565392" y="5397573"/>
-            <a:ext cx="1920240" cy="297833"/>
+            <a:off x="6565392" y="5110190"/>
+            <a:ext cx="1920240" cy="271707"/>
           </a:xfrm>
           <a:prstGeom prst="rect">
             <a:avLst/>
@@ -18476,8 +18594,8 @@
         </p:nvSpPr>
         <p:spPr>
           <a:xfrm>
-            <a:off x="8558784" y="5472031"/>
-            <a:ext cx="137160" cy="148917"/>
+            <a:off x="8558784" y="5178117"/>
+            <a:ext cx="137160" cy="135854"/>
           </a:xfrm>
           <a:prstGeom prst="rect">
             <a:avLst/>
@@ -18496,8 +18614,8 @@
         </p:nvSpPr>
         <p:spPr>
           <a:xfrm>
-            <a:off x="9482328" y="5397573"/>
-            <a:ext cx="676656" cy="297833"/>
+            <a:off x="9482328" y="5110190"/>
+            <a:ext cx="676656" cy="271707"/>
           </a:xfrm>
           <a:prstGeom prst="rect">
             <a:avLst/>
@@ -18535,8 +18653,8 @@
         </p:nvSpPr>
         <p:spPr>
           <a:xfrm>
-            <a:off x="10158984" y="5397573"/>
-            <a:ext cx="1188720" cy="297833"/>
+            <a:off x="10158984" y="5110190"/>
+            <a:ext cx="1188720" cy="271707"/>
           </a:xfrm>
           <a:prstGeom prst="rect">
             <a:avLst/>
@@ -18574,8 +18692,8 @@
         </p:nvSpPr>
         <p:spPr>
           <a:xfrm>
-            <a:off x="6208776" y="5695406"/>
-            <a:ext cx="310896" cy="297833"/>
+            <a:off x="6208776" y="5381897"/>
+            <a:ext cx="310896" cy="271707"/>
           </a:xfrm>
           <a:prstGeom prst="rect">
             <a:avLst/>
@@ -18613,8 +18731,8 @@
         </p:nvSpPr>
         <p:spPr>
           <a:xfrm>
-            <a:off x="6565392" y="5695406"/>
-            <a:ext cx="1920240" cy="297833"/>
+            <a:off x="6565392" y="5381897"/>
+            <a:ext cx="1920240" cy="271707"/>
           </a:xfrm>
           <a:prstGeom prst="rect">
             <a:avLst/>
@@ -18652,8 +18770,8 @@
         </p:nvSpPr>
         <p:spPr>
           <a:xfrm>
-            <a:off x="8558784" y="5769864"/>
-            <a:ext cx="135255" cy="148917"/>
+            <a:off x="8558784" y="5449824"/>
+            <a:ext cx="135255" cy="135854"/>
           </a:xfrm>
           <a:prstGeom prst="rect">
             <a:avLst/>
@@ -18672,8 +18790,8 @@
         </p:nvSpPr>
         <p:spPr>
           <a:xfrm>
-            <a:off x="9482328" y="5695406"/>
-            <a:ext cx="676656" cy="297833"/>
+            <a:off x="9482328" y="5381897"/>
+            <a:ext cx="676656" cy="271707"/>
           </a:xfrm>
           <a:prstGeom prst="rect">
             <a:avLst/>
@@ -18711,8 +18829,8 @@
         </p:nvSpPr>
         <p:spPr>
           <a:xfrm>
-            <a:off x="10158984" y="5695406"/>
-            <a:ext cx="1188720" cy="297833"/>
+            <a:off x="10158984" y="5381897"/>
+            <a:ext cx="1188720" cy="271707"/>
           </a:xfrm>
           <a:prstGeom prst="rect">
             <a:avLst/>
@@ -18750,8 +18868,8 @@
         </p:nvSpPr>
         <p:spPr>
           <a:xfrm>
-            <a:off x="6208776" y="5993239"/>
-            <a:ext cx="310896" cy="297833"/>
+            <a:off x="6208776" y="5653605"/>
+            <a:ext cx="310896" cy="271707"/>
           </a:xfrm>
           <a:prstGeom prst="rect">
             <a:avLst/>
@@ -18789,8 +18907,8 @@
         </p:nvSpPr>
         <p:spPr>
           <a:xfrm>
-            <a:off x="6565392" y="5993239"/>
-            <a:ext cx="1920240" cy="297833"/>
+            <a:off x="6565392" y="5653605"/>
+            <a:ext cx="1920240" cy="271707"/>
           </a:xfrm>
           <a:prstGeom prst="rect">
             <a:avLst/>
@@ -18828,8 +18946,8 @@
         </p:nvSpPr>
         <p:spPr>
           <a:xfrm>
-            <a:off x="8558784" y="6067697"/>
-            <a:ext cx="112395" cy="148917"/>
+            <a:off x="8558784" y="5721531"/>
+            <a:ext cx="112395" cy="135854"/>
           </a:xfrm>
           <a:prstGeom prst="rect">
             <a:avLst/>
@@ -18848,8 +18966,8 @@
         </p:nvSpPr>
         <p:spPr>
           <a:xfrm>
-            <a:off x="9482328" y="5993239"/>
-            <a:ext cx="676656" cy="297833"/>
+            <a:off x="9482328" y="5653605"/>
+            <a:ext cx="676656" cy="271707"/>
           </a:xfrm>
           <a:prstGeom prst="rect">
             <a:avLst/>
@@ -18887,8 +19005,8 @@
         </p:nvSpPr>
         <p:spPr>
           <a:xfrm>
-            <a:off x="10158984" y="5993239"/>
-            <a:ext cx="1188720" cy="297833"/>
+            <a:off x="10158984" y="5653605"/>
+            <a:ext cx="1188720" cy="271707"/>
           </a:xfrm>
           <a:prstGeom prst="rect">
             <a:avLst/>
@@ -19083,7 +19201,7 @@
         <p:spPr>
           <a:xfrm>
             <a:off x="3432502" y="2121408"/>
-            <a:ext cx="14630" cy="4169664"/>
+            <a:ext cx="14630" cy="3803904"/>
           </a:xfrm>
           <a:prstGeom prst="rect">
             <a:avLst/>
@@ -19103,7 +19221,7 @@
         <p:spPr>
           <a:xfrm>
             <a:off x="8982910" y="2121408"/>
-            <a:ext cx="14630" cy="4169664"/>
+            <a:ext cx="14630" cy="3803904"/>
           </a:xfrm>
           <a:prstGeom prst="rect">
             <a:avLst/>
@@ -19123,7 +19241,7 @@
         <p:spPr>
           <a:xfrm>
             <a:off x="6085332" y="2121408"/>
-            <a:ext cx="10973" cy="4169664"/>
+            <a:ext cx="10973" cy="3803904"/>
           </a:xfrm>
           <a:prstGeom prst="rect">
             <a:avLst/>
@@ -19133,6 +19251,65 @@
           </a:solidFill>
           <a:ln/>
         </p:spPr>
+      </p:sp>
+      <p:sp>
+        <p:nvSpPr>
+          <p:cNvPr id="159" name="Shape 156"/>
+          <p:cNvSpPr/>
+          <p:nvPr/>
+        </p:nvSpPr>
+        <p:spPr>
+          <a:xfrm>
+            <a:off x="457200" y="6126480"/>
+            <a:ext cx="11274552" cy="371856"/>
+          </a:xfrm>
+          <a:prstGeom prst="rect">
+            <a:avLst/>
+          </a:prstGeom>
+          <a:solidFill>
+            <a:srgbClr val="EDF4FA"/>
+          </a:solidFill>
+          <a:ln/>
+        </p:spPr>
+      </p:sp>
+      <p:sp>
+        <p:nvSpPr>
+          <p:cNvPr id="160" name="Text 157"/>
+          <p:cNvSpPr txBox="1"/>
+          <p:nvPr/>
+        </p:nvSpPr>
+        <p:spPr>
+          <a:xfrm>
+            <a:off x="658368" y="6144768"/>
+            <a:ext cx="10927080" cy="335280"/>
+          </a:xfrm>
+          <a:prstGeom prst="rect">
+            <a:avLst/>
+          </a:prstGeom>
+          <a:noFill/>
+          <a:ln/>
+        </p:spPr>
+        <p:txBody>
+          <a:bodyPr wrap="square" lIns="0" tIns="0" rIns="0" bIns="0" rtlCol="0" anchor="ctr"/>
+          <a:lstStyle/>
+          <a:p>
+            <a:pPr indent="0" marL="0">
+              <a:buNone/>
+            </a:pPr>
+            <a:r>
+              <a:rPr lang="en-US" sz="1600" b="1" dirty="0">
+                <a:solidFill>
+                  <a:srgbClr val="0B2C4A"/>
+                </a:solidFill>
+                <a:latin typeface="Inter" pitchFamily="34" charset="0"/>
+                <a:ea typeface="Inter" pitchFamily="34" charset="-122"/>
+                <a:cs typeface="Inter" pitchFamily="34" charset="-120"/>
+              </a:rPr>
+              <a:t>11 of 28 stores at or above the 45.3% group.</a:t>
+            </a:r>
+            <a:endParaRPr lang="en-US" sz="1600" dirty="0"/>
+          </a:p>
+        </p:txBody>
       </p:sp>
     </p:spTree>
   </p:cSld>

--- a/day2-deck/decks/MPI & Video Completion - Review.pptx
+++ b/day2-deck/decks/MPI & Video Completion - Review.pptx
@@ -680,7 +680,7 @@
           <a:p>
             <a:r>
               <a:rPr lang="en-US" dirty="0"/>
-              <a:t>Takeaway with the store call-outs (off the slide): 11 of 28 stores at or above the 45.3% group. Hyundai Prescott leads at 91.2%; Kia St George is lowest at 11.8%.Source: Store-reported from each store's MPI tool (MPI_Video_Completion_Jul-Sep_2026.xlsx): CP + warranty ROs closed Jul 1 - Sep 30, 2026, including $0 ROs; % of ROs, not of MPIs. Group = RO-weighted by each store's CP+W ROs (Qlik Closed Repair Orders, 128,726). Tools differ by store; GMC Prescott's report is not filtered to CP+W; Volvo and VW St George did not say. Honda Spokane and Toyota Spokane report the same figure for MPI and video. Photo % (optional on the form) = CP+W ROs with at least one technician photo on the MPI / CP+W ROs closed. Scored against the group. Green at or above the group, red below. 5 stores do not report it (N/A or blank).Optional measure: five stores do not report it, so it is a review slide, not a meeting slide.</a:t>
+              <a:t>Takeaway with the store call-outs (off the slide): 11 of 28 stores at or above the 45.3% group. Hyundai Prescott leads at 91.2%; Kia St George is lowest at 11.8%.Source: Store-reported from each store's MPI tool (MPI_Video_Completion_Jul-Sep_2026.xlsx): CP + warranty ROs closed Jul 1 - Sep 30, 2026, including $0 ROs; % of ROs, not of MPIs. Group = RO-weighted by each store's CP+W ROs (Qlik Closed Repair Orders, 128,726). Tools differ by store; GMC Prescott's report is not filtered to CP+W; Volvo and VW St George did not say. Honda Spokane and Toyota Spokane report the same figure for MPI and video. Photo % (optional on the form) = CP+W ROs with at least one technician photo on the MPI / CP+W ROs closed. Scored against the group. Green at or above the group, red below. 5 stores do not report it (N/A or blank).Five stores do not report photo completion, so the group here is weighted on the 28 stores that do (109,881 CP + warranty ROs, not the 128,726 used for MPI and video).</a:t>
             </a:r>
             <a:endParaRPr lang="en-US" dirty="0"/>
           </a:p>
